--- a/docs/VeilPay_Night_Sky_Pitch_Deck.pptx
+++ b/docs/VeilPay_Night_Sky_Pitch_Deck.pptx
@@ -1,34 +1,34 @@
 
 <file path=ppt/presentation.xml><?xml version="1.0" encoding="utf-8"?>
-<p:presentation xmlns:p="http://schemas.openxmlformats.org/presentationml/2006/main">
+<p:presentation xmlns:a="http://schemas.openxmlformats.org/drawingml/2006/main" xmlns:r="http://schemas.openxmlformats.org/officeDocument/2006/relationships" xmlns:p="http://schemas.openxmlformats.org/presentationml/2006/main">
   <p:sldMasterIdLst>
-    <p:sldMasterId xmlns:r="http://schemas.openxmlformats.org/officeDocument/2006/relationships" id="2147483648" r:id="Rc8653b64c87f4b5c"/>
+    <p:sldMasterId id="2147483648" r:id="rId1"/>
   </p:sldMasterIdLst>
   <p:notesMasterIdLst>
-    <p:notesMasterId xmlns:r="http://schemas.openxmlformats.org/officeDocument/2006/relationships" r:id="Rda811132862b446e"/>
+    <p:notesMasterId r:id="rId15"/>
   </p:notesMasterIdLst>
   <p:sldIdLst>
-    <p:sldId xmlns:r="http://schemas.openxmlformats.org/officeDocument/2006/relationships" id="256" r:id="Rdc6245a40c704b28"/>
-    <p:sldId xmlns:r="http://schemas.openxmlformats.org/officeDocument/2006/relationships" id="257" r:id="R68ae020126b44794"/>
-    <p:sldId xmlns:r="http://schemas.openxmlformats.org/officeDocument/2006/relationships" id="258" r:id="R19c0e63db8674acd"/>
-    <p:sldId xmlns:r="http://schemas.openxmlformats.org/officeDocument/2006/relationships" id="259" r:id="Rbd6bfcbced0c4f20"/>
-    <p:sldId xmlns:r="http://schemas.openxmlformats.org/officeDocument/2006/relationships" id="260" r:id="Rc8c568aea8cb4fbf"/>
-    <p:sldId xmlns:r="http://schemas.openxmlformats.org/officeDocument/2006/relationships" id="261" r:id="R544190b546f54645"/>
-    <p:sldId xmlns:r="http://schemas.openxmlformats.org/officeDocument/2006/relationships" id="262" r:id="Red4061b421964cda"/>
-    <p:sldId xmlns:r="http://schemas.openxmlformats.org/officeDocument/2006/relationships" id="263" r:id="Rd861072b4e2048cc"/>
-    <p:sldId xmlns:r="http://schemas.openxmlformats.org/officeDocument/2006/relationships" id="264" r:id="R8240ce05b4c744cb"/>
-    <p:sldId xmlns:r="http://schemas.openxmlformats.org/officeDocument/2006/relationships" id="265" r:id="Re00f01ea0e774f7e"/>
-    <p:sldId xmlns:r="http://schemas.openxmlformats.org/officeDocument/2006/relationships" id="266" r:id="R6a2fe59efb9c49d8"/>
-    <p:sldId xmlns:r="http://schemas.openxmlformats.org/officeDocument/2006/relationships" id="267" r:id="R851c845ad78e44ac"/>
-    <p:sldId xmlns:r="http://schemas.openxmlformats.org/officeDocument/2006/relationships" id="268" r:id="R54c692b5113f4d1a"/>
+    <p:sldId id="256" r:id="rId2"/>
+    <p:sldId id="257" r:id="rId3"/>
+    <p:sldId id="258" r:id="rId4"/>
+    <p:sldId id="259" r:id="rId5"/>
+    <p:sldId id="260" r:id="rId6"/>
+    <p:sldId id="261" r:id="rId7"/>
+    <p:sldId id="262" r:id="rId8"/>
+    <p:sldId id="263" r:id="rId9"/>
+    <p:sldId id="264" r:id="rId10"/>
+    <p:sldId id="265" r:id="rId11"/>
+    <p:sldId id="266" r:id="rId12"/>
+    <p:sldId id="267" r:id="rId13"/>
+    <p:sldId id="268" r:id="rId14"/>
   </p:sldIdLst>
   <p:sldSz cx="12192000" cy="6858000"/>
   <p:notesSz cx="6858000" cy="9144000"/>
   <p:defaultTextStyle>
-    <a:defPPr xmlns:a="http://schemas.openxmlformats.org/drawingml/2006/main">
+    <a:defPPr>
       <a:defRPr lang="en-US"/>
     </a:defPPr>
-    <a:lvl1pPr xmlns:a="http://schemas.openxmlformats.org/drawingml/2006/main" marL="0" indent="0" algn="l" defTabSz="914400">
+    <a:lvl1pPr marL="0" indent="0" algn="l" defTabSz="914400">
       <a:defRPr sz="1800" kern="1200">
         <a:solidFill>
           <a:schemeClr val="tx1"/>
@@ -38,7 +38,7 @@
         <a:cs typeface="+mn-cs"/>
       </a:defRPr>
     </a:lvl1pPr>
-    <a:lvl2pPr xmlns:a="http://schemas.openxmlformats.org/drawingml/2006/main" marL="457200" indent="0" algn="l" defTabSz="914400">
+    <a:lvl2pPr marL="457200" indent="0" algn="l" defTabSz="914400">
       <a:defRPr sz="1800" kern="1200">
         <a:solidFill>
           <a:schemeClr val="tx1"/>
@@ -48,7 +48,7 @@
         <a:cs typeface="+mn-cs"/>
       </a:defRPr>
     </a:lvl2pPr>
-    <a:lvl3pPr xmlns:a="http://schemas.openxmlformats.org/drawingml/2006/main" marL="914400" indent="0" algn="l" defTabSz="914400">
+    <a:lvl3pPr marL="914400" indent="0" algn="l" defTabSz="914400">
       <a:defRPr sz="1800" kern="1200">
         <a:solidFill>
           <a:schemeClr val="tx1"/>
@@ -58,7 +58,7 @@
         <a:cs typeface="+mn-cs"/>
       </a:defRPr>
     </a:lvl3pPr>
-    <a:lvl4pPr xmlns:a="http://schemas.openxmlformats.org/drawingml/2006/main" marL="1371600" indent="0" algn="l" defTabSz="914400">
+    <a:lvl4pPr marL="1371600" indent="0" algn="l" defTabSz="914400">
       <a:defRPr sz="1800" kern="1200">
         <a:solidFill>
           <a:schemeClr val="tx1"/>
@@ -68,7 +68,7 @@
         <a:cs typeface="+mn-cs"/>
       </a:defRPr>
     </a:lvl4pPr>
-    <a:lvl5pPr xmlns:a="http://schemas.openxmlformats.org/drawingml/2006/main" marL="1828800" indent="0" algn="l" defTabSz="914400">
+    <a:lvl5pPr marL="1828800" indent="0" algn="l" defTabSz="914400">
       <a:defRPr sz="1800" kern="1200">
         <a:solidFill>
           <a:schemeClr val="tx1"/>
@@ -78,7 +78,7 @@
         <a:cs typeface="+mn-cs"/>
       </a:defRPr>
     </a:lvl5pPr>
-    <a:lvl6pPr xmlns:a="http://schemas.openxmlformats.org/drawingml/2006/main" marL="2286000" indent="0" algn="l" defTabSz="914400">
+    <a:lvl6pPr marL="2286000" indent="0" algn="l" defTabSz="914400">
       <a:defRPr sz="1800" kern="1200">
         <a:solidFill>
           <a:schemeClr val="tx1"/>
@@ -88,7 +88,7 @@
         <a:cs typeface="+mn-cs"/>
       </a:defRPr>
     </a:lvl6pPr>
-    <a:lvl7pPr xmlns:a="http://schemas.openxmlformats.org/drawingml/2006/main" marL="2743200" indent="0" algn="l" defTabSz="914400">
+    <a:lvl7pPr marL="2743200" indent="0" algn="l" defTabSz="914400">
       <a:defRPr sz="1800" kern="1200">
         <a:solidFill>
           <a:schemeClr val="tx1"/>
@@ -98,7 +98,7 @@
         <a:cs typeface="+mn-cs"/>
       </a:defRPr>
     </a:lvl7pPr>
-    <a:lvl8pPr xmlns:a="http://schemas.openxmlformats.org/drawingml/2006/main" marL="3200400" indent="0" algn="l" defTabSz="914400">
+    <a:lvl8pPr marL="3200400" indent="0" algn="l" defTabSz="914400">
       <a:defRPr sz="1800" kern="1200">
         <a:solidFill>
           <a:schemeClr val="tx1"/>
@@ -108,7 +108,7 @@
         <a:cs typeface="+mn-cs"/>
       </a:defRPr>
     </a:lvl8pPr>
-    <a:lvl9pPr xmlns:a="http://schemas.openxmlformats.org/drawingml/2006/main" marL="3657600" indent="0" algn="l" defTabSz="914400">
+    <a:lvl9pPr marL="3657600" indent="0" algn="l" defTabSz="914400">
       <a:defRPr sz="1800" kern="1200">
         <a:solidFill>
           <a:schemeClr val="tx1"/>
@@ -123,11 +123,11 @@
 </file>
 
 <file path=ppt/notesMasters/notesMaster1.xml><?xml version="1.0" encoding="utf-8"?>
-<p:notesMaster xmlns:p="http://schemas.openxmlformats.org/presentationml/2006/main">
+<p:notesMaster xmlns:a="http://schemas.openxmlformats.org/drawingml/2006/main" xmlns:r="http://schemas.openxmlformats.org/officeDocument/2006/relationships" xmlns:p="http://schemas.openxmlformats.org/presentationml/2006/main">
   <p:cSld>
     <p:bg>
       <p:bgRef idx="1001">
-        <a:schemeClr xmlns:a="http://schemas.openxmlformats.org/drawingml/2006/main" val="bg1"/>
+        <a:schemeClr val="bg1"/>
       </p:bgRef>
     </p:bg>
     <p:spTree>
@@ -137,380 +137,164 @@
         <p:nvPr/>
       </p:nvGrpSpPr>
       <p:grpSpPr>
-        <a:xfrm xmlns:a="http://schemas.openxmlformats.org/drawingml/2006/main"/>
+        <a:xfrm>
+          <a:off x="0" y="0"/>
+          <a:ext cx="0" cy="0"/>
+          <a:chOff x="0" y="0"/>
+          <a:chExt cx="0" cy="0"/>
+        </a:xfrm>
       </p:grpSpPr>
       <p:sp>
         <p:nvSpPr>
           <p:cNvPr id="2" name="Header Placeholder"/>
-          <p:cNvSpPr/>
+          <p:cNvSpPr>
+            <a:spLocks noGrp="1"/>
+          </p:cNvSpPr>
           <p:nvPr>
             <p:ph type="hdr" sz="quarter"/>
           </p:nvPr>
         </p:nvSpPr>
         <p:spPr>
-          <a:prstGeom xmlns:a="http://schemas.openxmlformats.org/drawingml/2006/main" prst="rect">
-            <a:avLst/>
-          </a:prstGeom>
-        </p:spPr>
-        <p:txBody>
-          <a:bodyPr xmlns:a="http://schemas.openxmlformats.org/drawingml/2006/main"/>
-          <a:lstStyle xmlns:a="http://schemas.openxmlformats.org/drawingml/2006/main"/>
-          <a:p xmlns:a="http://schemas.openxmlformats.org/drawingml/2006/main"/>
+          <a:prstGeom prst="rect">
+            <a:avLst/>
+          </a:prstGeom>
+        </p:spPr>
+        <p:txBody>
+          <a:bodyPr/>
+          <a:lstStyle/>
+          <a:p>
+            <a:endParaRPr/>
+          </a:p>
         </p:txBody>
       </p:sp>
       <p:sp>
         <p:nvSpPr>
           <p:cNvPr id="3" name="Date Placeholder"/>
-          <p:cNvSpPr/>
+          <p:cNvSpPr>
+            <a:spLocks noGrp="1"/>
+          </p:cNvSpPr>
           <p:nvPr>
             <p:ph type="dt" sz="quarter" idx="1"/>
           </p:nvPr>
         </p:nvSpPr>
         <p:spPr>
-          <a:prstGeom xmlns:a="http://schemas.openxmlformats.org/drawingml/2006/main" prst="rect">
-            <a:avLst/>
-          </a:prstGeom>
-        </p:spPr>
-        <p:txBody>
-          <a:bodyPr xmlns:a="http://schemas.openxmlformats.org/drawingml/2006/main"/>
-          <a:lstStyle xmlns:a="http://schemas.openxmlformats.org/drawingml/2006/main"/>
-          <a:p xmlns:a="http://schemas.openxmlformats.org/drawingml/2006/main"/>
+          <a:prstGeom prst="rect">
+            <a:avLst/>
+          </a:prstGeom>
+        </p:spPr>
+        <p:txBody>
+          <a:bodyPr/>
+          <a:lstStyle/>
+          <a:p>
+            <a:endParaRPr/>
+          </a:p>
         </p:txBody>
       </p:sp>
       <p:sp>
         <p:nvSpPr>
           <p:cNvPr id="4" name="Slide Image Placeholder"/>
-          <p:cNvSpPr/>
+          <p:cNvSpPr>
+            <a:spLocks noGrp="1" noRot="1" noChangeAspect="1"/>
+          </p:cNvSpPr>
           <p:nvPr>
             <p:ph type="sldImg" idx="2"/>
           </p:nvPr>
         </p:nvSpPr>
         <p:spPr>
-          <a:prstGeom xmlns:a="http://schemas.openxmlformats.org/drawingml/2006/main" prst="rect">
-            <a:avLst/>
-          </a:prstGeom>
-        </p:spPr>
-        <p:txBody>
-          <a:bodyPr xmlns:a="http://schemas.openxmlformats.org/drawingml/2006/main"/>
-          <a:lstStyle xmlns:a="http://schemas.openxmlformats.org/drawingml/2006/main"/>
-          <a:p xmlns:a="http://schemas.openxmlformats.org/drawingml/2006/main"/>
+          <a:prstGeom prst="rect">
+            <a:avLst/>
+          </a:prstGeom>
+        </p:spPr>
+        <p:txBody>
+          <a:bodyPr/>
+          <a:lstStyle/>
+          <a:p>
+            <a:endParaRPr/>
+          </a:p>
         </p:txBody>
       </p:sp>
       <p:sp>
         <p:nvSpPr>
           <p:cNvPr id="5" name="Notes Placeholder"/>
-          <p:cNvSpPr/>
+          <p:cNvSpPr>
+            <a:spLocks noGrp="1"/>
+          </p:cNvSpPr>
           <p:nvPr>
             <p:ph type="body" sz="quarter" idx="3"/>
           </p:nvPr>
         </p:nvSpPr>
         <p:spPr>
-          <a:prstGeom xmlns:a="http://schemas.openxmlformats.org/drawingml/2006/main" prst="rect">
-            <a:avLst/>
-          </a:prstGeom>
-        </p:spPr>
-        <p:txBody>
-          <a:bodyPr xmlns:a="http://schemas.openxmlformats.org/drawingml/2006/main"/>
-          <a:lstStyle xmlns:a="http://schemas.openxmlformats.org/drawingml/2006/main"/>
-          <a:p xmlns:a="http://schemas.openxmlformats.org/drawingml/2006/main"/>
+          <a:prstGeom prst="rect">
+            <a:avLst/>
+          </a:prstGeom>
+        </p:spPr>
+        <p:txBody>
+          <a:bodyPr/>
+          <a:lstStyle/>
+          <a:p>
+            <a:endParaRPr/>
+          </a:p>
         </p:txBody>
       </p:sp>
       <p:sp>
         <p:nvSpPr>
           <p:cNvPr id="6" name="Footer Placeholder"/>
-          <p:cNvSpPr/>
+          <p:cNvSpPr>
+            <a:spLocks noGrp="1"/>
+          </p:cNvSpPr>
           <p:nvPr>
             <p:ph type="ftr" sz="quarter" idx="4"/>
           </p:nvPr>
         </p:nvSpPr>
         <p:spPr>
-          <a:prstGeom xmlns:a="http://schemas.openxmlformats.org/drawingml/2006/main" prst="rect">
-            <a:avLst/>
-          </a:prstGeom>
-        </p:spPr>
-        <p:txBody>
-          <a:bodyPr xmlns:a="http://schemas.openxmlformats.org/drawingml/2006/main"/>
-          <a:lstStyle xmlns:a="http://schemas.openxmlformats.org/drawingml/2006/main"/>
-          <a:p xmlns:a="http://schemas.openxmlformats.org/drawingml/2006/main"/>
+          <a:prstGeom prst="rect">
+            <a:avLst/>
+          </a:prstGeom>
+        </p:spPr>
+        <p:txBody>
+          <a:bodyPr/>
+          <a:lstStyle/>
+          <a:p>
+            <a:endParaRPr/>
+          </a:p>
         </p:txBody>
       </p:sp>
       <p:sp>
         <p:nvSpPr>
           <p:cNvPr id="7" name="Slide Number Placeholder"/>
-          <p:cNvSpPr/>
+          <p:cNvSpPr>
+            <a:spLocks noGrp="1"/>
+          </p:cNvSpPr>
           <p:nvPr>
             <p:ph type="sldNum" sz="quarter" idx="5"/>
           </p:nvPr>
         </p:nvSpPr>
         <p:spPr>
-          <a:prstGeom xmlns:a="http://schemas.openxmlformats.org/drawingml/2006/main" prst="rect">
-            <a:avLst/>
-          </a:prstGeom>
-        </p:spPr>
-        <p:txBody>
-          <a:bodyPr xmlns:a="http://schemas.openxmlformats.org/drawingml/2006/main"/>
-          <a:lstStyle xmlns:a="http://schemas.openxmlformats.org/drawingml/2006/main"/>
-          <a:p xmlns:a="http://schemas.openxmlformats.org/drawingml/2006/main"/>
+          <a:prstGeom prst="rect">
+            <a:avLst/>
+          </a:prstGeom>
+        </p:spPr>
+        <p:txBody>
+          <a:bodyPr/>
+          <a:lstStyle/>
+          <a:p>
+            <a:endParaRPr/>
+          </a:p>
         </p:txBody>
       </p:sp>
     </p:spTree>
   </p:cSld>
   <p:clrMap bg1="lt1" tx1="dk1" bg2="lt2" tx2="dk2" accent1="accent1" accent2="accent2" accent3="accent3" accent4="accent4" accent5="accent5" accent6="accent6" hlink="hlink" folHlink="folHlink"/>
   <p:notesStyle>
-    <a:lvl1pPr xmlns:a="http://schemas.openxmlformats.org/drawingml/2006/main" marL="0" algn="l" defTabSz="914400" rtl="0" eaLnBrk="1" latinLnBrk="0" hangingPunct="1">
+    <a:lvl1pPr marL="0" algn="l" defTabSz="914400" rtl="0" eaLnBrk="1" latinLnBrk="0" hangingPunct="1">
       <a:defRPr sz="1200" kern="1200"/>
     </a:lvl1pPr>
   </p:notesStyle>
 </p:notesMaster>
 </file>
 
-<file path=ppt/notesMasters/theme/theme3.xml><?xml version="1.0" encoding="utf-8"?>
-<a:theme xmlns:a="http://schemas.openxmlformats.org/drawingml/2006/main" name="ChatGPT">
-  <a:themeElements>
-    <a:clrScheme name="ChatGPT">
-      <a:dk1>
-        <a:srgbClr val="000000"/>
-      </a:dk1>
-      <a:lt1>
-        <a:srgbClr val="FFFFFF"/>
-      </a:lt1>
-      <a:dk2>
-        <a:srgbClr val="0E2841"/>
-      </a:dk2>
-      <a:lt2>
-        <a:srgbClr val="E8E8E8"/>
-      </a:lt2>
-      <a:accent1>
-        <a:srgbClr val="156082"/>
-      </a:accent1>
-      <a:accent2>
-        <a:srgbClr val="E97132"/>
-      </a:accent2>
-      <a:accent3>
-        <a:srgbClr val="196B24"/>
-      </a:accent3>
-      <a:accent4>
-        <a:srgbClr val="0F9ED5"/>
-      </a:accent4>
-      <a:accent5>
-        <a:srgbClr val="A02B93"/>
-      </a:accent5>
-      <a:accent6>
-        <a:srgbClr val="4EA72E"/>
-      </a:accent6>
-      <a:hlink>
-        <a:srgbClr val="467886"/>
-      </a:hlink>
-      <a:folHlink>
-        <a:srgbClr val="96607D"/>
-      </a:folHlink>
-    </a:clrScheme>
-    <a:fontScheme name="Office">
-      <a:majorFont>
-        <a:latin typeface="Calibri Light"/>
-        <a:ea typeface="Calibri Light"/>
-        <a:cs typeface="Calibri Light"/>
-      </a:majorFont>
-      <a:minorFont>
-        <a:latin typeface="Calibri"/>
-        <a:ea typeface="Calibri"/>
-        <a:cs typeface="Calibri"/>
-      </a:minorFont>
-    </a:fontScheme>
-    <a:fmtScheme name="ChatGPT">
-      <a:fillStyleLst>
-        <a:solidFill>
-          <a:schemeClr val="phClr"/>
-        </a:solidFill>
-        <a:gradFill>
-          <a:gsLst>
-            <a:gs pos="0">
-              <a:schemeClr val="phClr">
-                <a:tint val="67000"/>
-                <a:lumMod val="110000"/>
-                <a:satMod val="105000"/>
-              </a:schemeClr>
-            </a:gs>
-            <a:gs pos="50000">
-              <a:schemeClr val="phClr">
-                <a:tint val="73000"/>
-                <a:lumMod val="105000"/>
-                <a:satMod val="103000"/>
-              </a:schemeClr>
-            </a:gs>
-            <a:gs pos="100000">
-              <a:schemeClr val="phClr">
-                <a:tint val="81000"/>
-                <a:lumMod val="105000"/>
-                <a:satMod val="109000"/>
-              </a:schemeClr>
-            </a:gs>
-          </a:gsLst>
-          <a:lin ang="5400000" scaled="0"/>
-        </a:gradFill>
-        <a:gradFill>
-          <a:gsLst>
-            <a:gs pos="0">
-              <a:schemeClr val="phClr">
-                <a:tint val="94000"/>
-                <a:lumMod val="102000"/>
-                <a:satMod val="103000"/>
-              </a:schemeClr>
-            </a:gs>
-            <a:gs pos="50000">
-              <a:schemeClr val="phClr">
-                <a:shade val="100000"/>
-                <a:lumMod val="100000"/>
-                <a:satMod val="110000"/>
-              </a:schemeClr>
-            </a:gs>
-            <a:gs pos="100000">
-              <a:schemeClr val="phClr">
-                <a:shade val="78000"/>
-                <a:lumMod val="99000"/>
-                <a:satMod val="120000"/>
-              </a:schemeClr>
-            </a:gs>
-          </a:gsLst>
-          <a:lin ang="5400000" scaled="0"/>
-        </a:gradFill>
-      </a:fillStyleLst>
-      <a:lnStyleLst>
-        <a:ln w="12700">
-          <a:solidFill>
-            <a:schemeClr val="phClr"/>
-          </a:solidFill>
-          <a:prstDash val="solid"/>
-        </a:ln>
-        <a:ln w="19050">
-          <a:solidFill>
-            <a:schemeClr val="phClr"/>
-          </a:solidFill>
-          <a:prstDash val="solid"/>
-        </a:ln>
-        <a:ln w="25400">
-          <a:solidFill>
-            <a:schemeClr val="phClr"/>
-          </a:solidFill>
-          <a:prstDash val="solid"/>
-        </a:ln>
-      </a:lnStyleLst>
-      <a:effectStyleLst>
-        <a:effectStyle>
-          <a:effectLst/>
-        </a:effectStyle>
-        <a:effectStyle>
-          <a:effectLst/>
-        </a:effectStyle>
-        <a:effectStyle>
-          <a:effectLst>
-            <a:outerShdw blurRad="57150" dist="19050" dir="5400000">
-              <a:srgbClr val="000000">
-                <a:alpha val="16000"/>
-              </a:srgbClr>
-            </a:outerShdw>
-          </a:effectLst>
-        </a:effectStyle>
-        <a:effectStyle>
-          <a:effectLst>
-            <a:outerShdw blurRad="19050" dist="9525" dir="5400000">
-              <a:srgbClr val="000000">
-                <a:alpha val="6000"/>
-              </a:srgbClr>
-            </a:outerShdw>
-          </a:effectLst>
-        </a:effectStyle>
-        <a:effectStyle>
-          <a:effectLst>
-            <a:outerShdw blurRad="28575" dist="9525" dir="5400000">
-              <a:srgbClr val="000000">
-                <a:alpha val="8000"/>
-              </a:srgbClr>
-            </a:outerShdw>
-          </a:effectLst>
-        </a:effectStyle>
-        <a:effectStyle>
-          <a:effectLst>
-            <a:outerShdw blurRad="57150" dist="19050" dir="5400000">
-              <a:srgbClr val="000000">
-                <a:alpha val="10000"/>
-              </a:srgbClr>
-            </a:outerShdw>
-          </a:effectLst>
-        </a:effectStyle>
-        <a:effectStyle>
-          <a:effectLst>
-            <a:outerShdw blurRad="114300" dist="38100" dir="5400000">
-              <a:srgbClr val="000000">
-                <a:alpha val="12000"/>
-              </a:srgbClr>
-            </a:outerShdw>
-          </a:effectLst>
-        </a:effectStyle>
-        <a:effectStyle>
-          <a:effectLst>
-            <a:outerShdw blurRad="171450" dist="57150" dir="5400000">
-              <a:srgbClr val="000000">
-                <a:alpha val="16000"/>
-              </a:srgbClr>
-            </a:outerShdw>
-          </a:effectLst>
-        </a:effectStyle>
-        <a:effectStyle>
-          <a:effectLst>
-            <a:outerShdw blurRad="266700" dist="95250" dir="5400000">
-              <a:srgbClr val="000000">
-                <a:alpha val="24000"/>
-              </a:srgbClr>
-            </a:outerShdw>
-          </a:effectLst>
-        </a:effectStyle>
-      </a:effectStyleLst>
-      <a:bgFillStyleLst>
-        <a:solidFill>
-          <a:schemeClr val="phClr"/>
-        </a:solidFill>
-        <a:solidFill>
-          <a:schemeClr val="phClr">
-            <a:tint val="95000"/>
-            <a:satMod val="170000"/>
-          </a:schemeClr>
-        </a:solidFill>
-        <a:gradFill>
-          <a:gsLst>
-            <a:gs pos="0">
-              <a:schemeClr val="phClr">
-                <a:tint val="93000"/>
-                <a:shade val="98000"/>
-                <a:lumMod val="102000"/>
-                <a:satMod val="150000"/>
-              </a:schemeClr>
-            </a:gs>
-            <a:gs pos="50000">
-              <a:schemeClr val="phClr">
-                <a:tint val="98000"/>
-                <a:shade val="90000"/>
-                <a:lumMod val="103000"/>
-                <a:satMod val="130000"/>
-              </a:schemeClr>
-            </a:gs>
-            <a:gs pos="100000">
-              <a:schemeClr val="phClr">
-                <a:shade val="63000"/>
-                <a:satMod val="120000"/>
-              </a:schemeClr>
-            </a:gs>
-          </a:gsLst>
-          <a:lin ang="5400000" scaled="0"/>
-        </a:gradFill>
-      </a:bgFillStyleLst>
-    </a:fmtScheme>
-  </a:themeElements>
-</a:theme>
-</file>
-
 <file path=ppt/notesSlides/notesSlide1.xml><?xml version="1.0" encoding="utf-8"?>
-<p:notes xmlns:p="http://schemas.openxmlformats.org/presentationml/2006/main">
+<p:notes xmlns:a="http://schemas.openxmlformats.org/drawingml/2006/main" xmlns:r="http://schemas.openxmlformats.org/officeDocument/2006/relationships" xmlns:p="http://schemas.openxmlformats.org/presentationml/2006/main">
   <p:cSld>
     <p:spTree>
       <p:nvGrpSpPr>
@@ -519,16 +303,21 @@
         <p:nvPr/>
       </p:nvGrpSpPr>
       <p:grpSpPr>
-        <a:xfrm xmlns:a="http://schemas.openxmlformats.org/drawingml/2006/main"/>
+        <a:xfrm>
+          <a:off x="0" y="0"/>
+          <a:ext cx="0" cy="0"/>
+          <a:chOff x="0" y="0"/>
+          <a:chExt cx="0" cy="0"/>
+        </a:xfrm>
       </p:grpSpPr>
       <p:sp>
         <p:nvSpPr>
           <p:cNvPr id="2" name="Slide Image Placeholder 1"/>
           <p:cNvSpPr>
-            <a:spLocks xmlns:a="http://schemas.openxmlformats.org/drawingml/2006/main" noGrp="1"/>
+            <a:spLocks noGrp="1" noRot="1" noChangeAspect="1"/>
           </p:cNvSpPr>
           <p:nvPr>
-            <p:ph type="sldImg" idx="0"/>
+            <p:ph type="sldImg"/>
           </p:nvPr>
         </p:nvSpPr>
         <p:spPr/>
@@ -537,7 +326,7 @@
         <p:nvSpPr>
           <p:cNvPr id="3" name="Notes Placeholder 2"/>
           <p:cNvSpPr>
-            <a:spLocks xmlns:a="http://schemas.openxmlformats.org/drawingml/2006/main" noGrp="1"/>
+            <a:spLocks noGrp="1"/>
           </p:cNvSpPr>
           <p:nvPr>
             <p:ph type="body" idx="1"/>
@@ -545,16 +334,18 @@
         </p:nvSpPr>
         <p:spPr/>
         <p:txBody>
-          <a:bodyPr xmlns:a="http://schemas.openxmlformats.org/drawingml/2006/main"/>
-          <a:lstStyle xmlns:a="http://schemas.openxmlformats.org/drawingml/2006/main"/>
-          <a:p xmlns:a="http://schemas.openxmlformats.org/drawingml/2006/main"/>
+          <a:bodyPr/>
+          <a:lstStyle/>
+          <a:p>
+            <a:endParaRPr/>
+          </a:p>
         </p:txBody>
       </p:sp>
       <p:sp>
         <p:nvSpPr>
           <p:cNvPr id="4" name="Slide Number Placeholder 3"/>
           <p:cNvSpPr>
-            <a:spLocks xmlns:a="http://schemas.openxmlformats.org/drawingml/2006/main" noGrp="1"/>
+            <a:spLocks noGrp="1"/>
           </p:cNvSpPr>
           <p:nvPr>
             <p:ph type="sldNum" idx="5"/>
@@ -562,21 +353,23 @@
         </p:nvSpPr>
         <p:spPr/>
         <p:txBody>
-          <a:bodyPr xmlns:a="http://schemas.openxmlformats.org/drawingml/2006/main"/>
-          <a:lstStyle xmlns:a="http://schemas.openxmlformats.org/drawingml/2006/main"/>
-          <a:p xmlns:a="http://schemas.openxmlformats.org/drawingml/2006/main"/>
+          <a:bodyPr/>
+          <a:lstStyle/>
+          <a:p>
+            <a:endParaRPr/>
+          </a:p>
         </p:txBody>
       </p:sp>
     </p:spTree>
   </p:cSld>
   <p:clrMapOvr>
-    <a:masterClrMapping xmlns:a="http://schemas.openxmlformats.org/drawingml/2006/main"/>
+    <a:masterClrMapping/>
   </p:clrMapOvr>
 </p:notes>
 </file>
 
 <file path=ppt/notesSlides/notesSlide10.xml><?xml version="1.0" encoding="utf-8"?>
-<p:notes xmlns:p="http://schemas.openxmlformats.org/presentationml/2006/main">
+<p:notes xmlns:a="http://schemas.openxmlformats.org/drawingml/2006/main" xmlns:r="http://schemas.openxmlformats.org/officeDocument/2006/relationships" xmlns:p="http://schemas.openxmlformats.org/presentationml/2006/main">
   <p:cSld>
     <p:spTree>
       <p:nvGrpSpPr>
@@ -585,16 +378,21 @@
         <p:nvPr/>
       </p:nvGrpSpPr>
       <p:grpSpPr>
-        <a:xfrm xmlns:a="http://schemas.openxmlformats.org/drawingml/2006/main"/>
+        <a:xfrm>
+          <a:off x="0" y="0"/>
+          <a:ext cx="0" cy="0"/>
+          <a:chOff x="0" y="0"/>
+          <a:chExt cx="0" cy="0"/>
+        </a:xfrm>
       </p:grpSpPr>
       <p:sp>
         <p:nvSpPr>
           <p:cNvPr id="2" name="Slide Image Placeholder 1"/>
           <p:cNvSpPr>
-            <a:spLocks xmlns:a="http://schemas.openxmlformats.org/drawingml/2006/main" noGrp="1"/>
+            <a:spLocks noGrp="1" noRot="1" noChangeAspect="1"/>
           </p:cNvSpPr>
           <p:nvPr>
-            <p:ph type="sldImg" idx="0"/>
+            <p:ph type="sldImg"/>
           </p:nvPr>
         </p:nvSpPr>
         <p:spPr/>
@@ -603,7 +401,7 @@
         <p:nvSpPr>
           <p:cNvPr id="3" name="Notes Placeholder 2"/>
           <p:cNvSpPr>
-            <a:spLocks xmlns:a="http://schemas.openxmlformats.org/drawingml/2006/main" noGrp="1"/>
+            <a:spLocks noGrp="1"/>
           </p:cNvSpPr>
           <p:nvPr>
             <p:ph type="body" idx="1"/>
@@ -611,16 +409,18 @@
         </p:nvSpPr>
         <p:spPr/>
         <p:txBody>
-          <a:bodyPr xmlns:a="http://schemas.openxmlformats.org/drawingml/2006/main"/>
-          <a:lstStyle xmlns:a="http://schemas.openxmlformats.org/drawingml/2006/main"/>
-          <a:p xmlns:a="http://schemas.openxmlformats.org/drawingml/2006/main"/>
+          <a:bodyPr/>
+          <a:lstStyle/>
+          <a:p>
+            <a:endParaRPr/>
+          </a:p>
         </p:txBody>
       </p:sp>
       <p:sp>
         <p:nvSpPr>
           <p:cNvPr id="4" name="Slide Number Placeholder 3"/>
           <p:cNvSpPr>
-            <a:spLocks xmlns:a="http://schemas.openxmlformats.org/drawingml/2006/main" noGrp="1"/>
+            <a:spLocks noGrp="1"/>
           </p:cNvSpPr>
           <p:nvPr>
             <p:ph type="sldNum" idx="5"/>
@@ -628,21 +428,23 @@
         </p:nvSpPr>
         <p:spPr/>
         <p:txBody>
-          <a:bodyPr xmlns:a="http://schemas.openxmlformats.org/drawingml/2006/main"/>
-          <a:lstStyle xmlns:a="http://schemas.openxmlformats.org/drawingml/2006/main"/>
-          <a:p xmlns:a="http://schemas.openxmlformats.org/drawingml/2006/main"/>
+          <a:bodyPr/>
+          <a:lstStyle/>
+          <a:p>
+            <a:endParaRPr/>
+          </a:p>
         </p:txBody>
       </p:sp>
     </p:spTree>
   </p:cSld>
   <p:clrMapOvr>
-    <a:masterClrMapping xmlns:a="http://schemas.openxmlformats.org/drawingml/2006/main"/>
+    <a:masterClrMapping/>
   </p:clrMapOvr>
 </p:notes>
 </file>
 
 <file path=ppt/notesSlides/notesSlide11.xml><?xml version="1.0" encoding="utf-8"?>
-<p:notes xmlns:p="http://schemas.openxmlformats.org/presentationml/2006/main">
+<p:notes xmlns:a="http://schemas.openxmlformats.org/drawingml/2006/main" xmlns:r="http://schemas.openxmlformats.org/officeDocument/2006/relationships" xmlns:p="http://schemas.openxmlformats.org/presentationml/2006/main">
   <p:cSld>
     <p:spTree>
       <p:nvGrpSpPr>
@@ -651,16 +453,21 @@
         <p:nvPr/>
       </p:nvGrpSpPr>
       <p:grpSpPr>
-        <a:xfrm xmlns:a="http://schemas.openxmlformats.org/drawingml/2006/main"/>
+        <a:xfrm>
+          <a:off x="0" y="0"/>
+          <a:ext cx="0" cy="0"/>
+          <a:chOff x="0" y="0"/>
+          <a:chExt cx="0" cy="0"/>
+        </a:xfrm>
       </p:grpSpPr>
       <p:sp>
         <p:nvSpPr>
           <p:cNvPr id="2" name="Slide Image Placeholder 1"/>
           <p:cNvSpPr>
-            <a:spLocks xmlns:a="http://schemas.openxmlformats.org/drawingml/2006/main" noGrp="1"/>
+            <a:spLocks noGrp="1" noRot="1" noChangeAspect="1"/>
           </p:cNvSpPr>
           <p:nvPr>
-            <p:ph type="sldImg" idx="0"/>
+            <p:ph type="sldImg"/>
           </p:nvPr>
         </p:nvSpPr>
         <p:spPr/>
@@ -669,7 +476,7 @@
         <p:nvSpPr>
           <p:cNvPr id="3" name="Notes Placeholder 2"/>
           <p:cNvSpPr>
-            <a:spLocks xmlns:a="http://schemas.openxmlformats.org/drawingml/2006/main" noGrp="1"/>
+            <a:spLocks noGrp="1"/>
           </p:cNvSpPr>
           <p:nvPr>
             <p:ph type="body" idx="1"/>
@@ -677,16 +484,18 @@
         </p:nvSpPr>
         <p:spPr/>
         <p:txBody>
-          <a:bodyPr xmlns:a="http://schemas.openxmlformats.org/drawingml/2006/main"/>
-          <a:lstStyle xmlns:a="http://schemas.openxmlformats.org/drawingml/2006/main"/>
-          <a:p xmlns:a="http://schemas.openxmlformats.org/drawingml/2006/main"/>
+          <a:bodyPr/>
+          <a:lstStyle/>
+          <a:p>
+            <a:endParaRPr/>
+          </a:p>
         </p:txBody>
       </p:sp>
       <p:sp>
         <p:nvSpPr>
           <p:cNvPr id="4" name="Slide Number Placeholder 3"/>
           <p:cNvSpPr>
-            <a:spLocks xmlns:a="http://schemas.openxmlformats.org/drawingml/2006/main" noGrp="1"/>
+            <a:spLocks noGrp="1"/>
           </p:cNvSpPr>
           <p:nvPr>
             <p:ph type="sldNum" idx="5"/>
@@ -694,21 +503,23 @@
         </p:nvSpPr>
         <p:spPr/>
         <p:txBody>
-          <a:bodyPr xmlns:a="http://schemas.openxmlformats.org/drawingml/2006/main"/>
-          <a:lstStyle xmlns:a="http://schemas.openxmlformats.org/drawingml/2006/main"/>
-          <a:p xmlns:a="http://schemas.openxmlformats.org/drawingml/2006/main"/>
+          <a:bodyPr/>
+          <a:lstStyle/>
+          <a:p>
+            <a:endParaRPr/>
+          </a:p>
         </p:txBody>
       </p:sp>
     </p:spTree>
   </p:cSld>
   <p:clrMapOvr>
-    <a:masterClrMapping xmlns:a="http://schemas.openxmlformats.org/drawingml/2006/main"/>
+    <a:masterClrMapping/>
   </p:clrMapOvr>
 </p:notes>
 </file>
 
 <file path=ppt/notesSlides/notesSlide12.xml><?xml version="1.0" encoding="utf-8"?>
-<p:notes xmlns:p="http://schemas.openxmlformats.org/presentationml/2006/main">
+<p:notes xmlns:a="http://schemas.openxmlformats.org/drawingml/2006/main" xmlns:r="http://schemas.openxmlformats.org/officeDocument/2006/relationships" xmlns:p="http://schemas.openxmlformats.org/presentationml/2006/main">
   <p:cSld>
     <p:spTree>
       <p:nvGrpSpPr>
@@ -717,16 +528,21 @@
         <p:nvPr/>
       </p:nvGrpSpPr>
       <p:grpSpPr>
-        <a:xfrm xmlns:a="http://schemas.openxmlformats.org/drawingml/2006/main"/>
+        <a:xfrm>
+          <a:off x="0" y="0"/>
+          <a:ext cx="0" cy="0"/>
+          <a:chOff x="0" y="0"/>
+          <a:chExt cx="0" cy="0"/>
+        </a:xfrm>
       </p:grpSpPr>
       <p:sp>
         <p:nvSpPr>
           <p:cNvPr id="2" name="Slide Image Placeholder 1"/>
           <p:cNvSpPr>
-            <a:spLocks xmlns:a="http://schemas.openxmlformats.org/drawingml/2006/main" noGrp="1"/>
+            <a:spLocks noGrp="1" noRot="1" noChangeAspect="1"/>
           </p:cNvSpPr>
           <p:nvPr>
-            <p:ph type="sldImg" idx="0"/>
+            <p:ph type="sldImg"/>
           </p:nvPr>
         </p:nvSpPr>
         <p:spPr/>
@@ -735,7 +551,7 @@
         <p:nvSpPr>
           <p:cNvPr id="3" name="Notes Placeholder 2"/>
           <p:cNvSpPr>
-            <a:spLocks xmlns:a="http://schemas.openxmlformats.org/drawingml/2006/main" noGrp="1"/>
+            <a:spLocks noGrp="1"/>
           </p:cNvSpPr>
           <p:nvPr>
             <p:ph type="body" idx="1"/>
@@ -743,16 +559,18 @@
         </p:nvSpPr>
         <p:spPr/>
         <p:txBody>
-          <a:bodyPr xmlns:a="http://schemas.openxmlformats.org/drawingml/2006/main"/>
-          <a:lstStyle xmlns:a="http://schemas.openxmlformats.org/drawingml/2006/main"/>
-          <a:p xmlns:a="http://schemas.openxmlformats.org/drawingml/2006/main"/>
+          <a:bodyPr/>
+          <a:lstStyle/>
+          <a:p>
+            <a:endParaRPr/>
+          </a:p>
         </p:txBody>
       </p:sp>
       <p:sp>
         <p:nvSpPr>
           <p:cNvPr id="4" name="Slide Number Placeholder 3"/>
           <p:cNvSpPr>
-            <a:spLocks xmlns:a="http://schemas.openxmlformats.org/drawingml/2006/main" noGrp="1"/>
+            <a:spLocks noGrp="1"/>
           </p:cNvSpPr>
           <p:nvPr>
             <p:ph type="sldNum" idx="5"/>
@@ -760,21 +578,23 @@
         </p:nvSpPr>
         <p:spPr/>
         <p:txBody>
-          <a:bodyPr xmlns:a="http://schemas.openxmlformats.org/drawingml/2006/main"/>
-          <a:lstStyle xmlns:a="http://schemas.openxmlformats.org/drawingml/2006/main"/>
-          <a:p xmlns:a="http://schemas.openxmlformats.org/drawingml/2006/main"/>
+          <a:bodyPr/>
+          <a:lstStyle/>
+          <a:p>
+            <a:endParaRPr/>
+          </a:p>
         </p:txBody>
       </p:sp>
     </p:spTree>
   </p:cSld>
   <p:clrMapOvr>
-    <a:masterClrMapping xmlns:a="http://schemas.openxmlformats.org/drawingml/2006/main"/>
+    <a:masterClrMapping/>
   </p:clrMapOvr>
 </p:notes>
 </file>
 
 <file path=ppt/notesSlides/notesSlide13.xml><?xml version="1.0" encoding="utf-8"?>
-<p:notes xmlns:p="http://schemas.openxmlformats.org/presentationml/2006/main">
+<p:notes xmlns:a="http://schemas.openxmlformats.org/drawingml/2006/main" xmlns:r="http://schemas.openxmlformats.org/officeDocument/2006/relationships" xmlns:p="http://schemas.openxmlformats.org/presentationml/2006/main">
   <p:cSld>
     <p:spTree>
       <p:nvGrpSpPr>
@@ -783,16 +603,21 @@
         <p:nvPr/>
       </p:nvGrpSpPr>
       <p:grpSpPr>
-        <a:xfrm xmlns:a="http://schemas.openxmlformats.org/drawingml/2006/main"/>
+        <a:xfrm>
+          <a:off x="0" y="0"/>
+          <a:ext cx="0" cy="0"/>
+          <a:chOff x="0" y="0"/>
+          <a:chExt cx="0" cy="0"/>
+        </a:xfrm>
       </p:grpSpPr>
       <p:sp>
         <p:nvSpPr>
           <p:cNvPr id="2" name="Slide Image Placeholder 1"/>
           <p:cNvSpPr>
-            <a:spLocks xmlns:a="http://schemas.openxmlformats.org/drawingml/2006/main" noGrp="1"/>
+            <a:spLocks noGrp="1" noRot="1" noChangeAspect="1"/>
           </p:cNvSpPr>
           <p:nvPr>
-            <p:ph type="sldImg" idx="0"/>
+            <p:ph type="sldImg"/>
           </p:nvPr>
         </p:nvSpPr>
         <p:spPr/>
@@ -801,7 +626,7 @@
         <p:nvSpPr>
           <p:cNvPr id="3" name="Notes Placeholder 2"/>
           <p:cNvSpPr>
-            <a:spLocks xmlns:a="http://schemas.openxmlformats.org/drawingml/2006/main" noGrp="1"/>
+            <a:spLocks noGrp="1"/>
           </p:cNvSpPr>
           <p:nvPr>
             <p:ph type="body" idx="1"/>
@@ -809,16 +634,18 @@
         </p:nvSpPr>
         <p:spPr/>
         <p:txBody>
-          <a:bodyPr xmlns:a="http://schemas.openxmlformats.org/drawingml/2006/main"/>
-          <a:lstStyle xmlns:a="http://schemas.openxmlformats.org/drawingml/2006/main"/>
-          <a:p xmlns:a="http://schemas.openxmlformats.org/drawingml/2006/main"/>
+          <a:bodyPr/>
+          <a:lstStyle/>
+          <a:p>
+            <a:endParaRPr/>
+          </a:p>
         </p:txBody>
       </p:sp>
       <p:sp>
         <p:nvSpPr>
           <p:cNvPr id="4" name="Slide Number Placeholder 3"/>
           <p:cNvSpPr>
-            <a:spLocks xmlns:a="http://schemas.openxmlformats.org/drawingml/2006/main" noGrp="1"/>
+            <a:spLocks noGrp="1"/>
           </p:cNvSpPr>
           <p:nvPr>
             <p:ph type="sldNum" idx="5"/>
@@ -826,21 +653,23 @@
         </p:nvSpPr>
         <p:spPr/>
         <p:txBody>
-          <a:bodyPr xmlns:a="http://schemas.openxmlformats.org/drawingml/2006/main"/>
-          <a:lstStyle xmlns:a="http://schemas.openxmlformats.org/drawingml/2006/main"/>
-          <a:p xmlns:a="http://schemas.openxmlformats.org/drawingml/2006/main"/>
+          <a:bodyPr/>
+          <a:lstStyle/>
+          <a:p>
+            <a:endParaRPr/>
+          </a:p>
         </p:txBody>
       </p:sp>
     </p:spTree>
   </p:cSld>
   <p:clrMapOvr>
-    <a:masterClrMapping xmlns:a="http://schemas.openxmlformats.org/drawingml/2006/main"/>
+    <a:masterClrMapping/>
   </p:clrMapOvr>
 </p:notes>
 </file>
 
 <file path=ppt/notesSlides/notesSlide2.xml><?xml version="1.0" encoding="utf-8"?>
-<p:notes xmlns:p="http://schemas.openxmlformats.org/presentationml/2006/main">
+<p:notes xmlns:a="http://schemas.openxmlformats.org/drawingml/2006/main" xmlns:r="http://schemas.openxmlformats.org/officeDocument/2006/relationships" xmlns:p="http://schemas.openxmlformats.org/presentationml/2006/main">
   <p:cSld>
     <p:spTree>
       <p:nvGrpSpPr>
@@ -849,16 +678,21 @@
         <p:nvPr/>
       </p:nvGrpSpPr>
       <p:grpSpPr>
-        <a:xfrm xmlns:a="http://schemas.openxmlformats.org/drawingml/2006/main"/>
+        <a:xfrm>
+          <a:off x="0" y="0"/>
+          <a:ext cx="0" cy="0"/>
+          <a:chOff x="0" y="0"/>
+          <a:chExt cx="0" cy="0"/>
+        </a:xfrm>
       </p:grpSpPr>
       <p:sp>
         <p:nvSpPr>
           <p:cNvPr id="2" name="Slide Image Placeholder 1"/>
           <p:cNvSpPr>
-            <a:spLocks xmlns:a="http://schemas.openxmlformats.org/drawingml/2006/main" noGrp="1"/>
+            <a:spLocks noGrp="1" noRot="1" noChangeAspect="1"/>
           </p:cNvSpPr>
           <p:nvPr>
-            <p:ph type="sldImg" idx="0"/>
+            <p:ph type="sldImg"/>
           </p:nvPr>
         </p:nvSpPr>
         <p:spPr/>
@@ -867,7 +701,7 @@
         <p:nvSpPr>
           <p:cNvPr id="3" name="Notes Placeholder 2"/>
           <p:cNvSpPr>
-            <a:spLocks xmlns:a="http://schemas.openxmlformats.org/drawingml/2006/main" noGrp="1"/>
+            <a:spLocks noGrp="1"/>
           </p:cNvSpPr>
           <p:nvPr>
             <p:ph type="body" idx="1"/>
@@ -875,16 +709,18 @@
         </p:nvSpPr>
         <p:spPr/>
         <p:txBody>
-          <a:bodyPr xmlns:a="http://schemas.openxmlformats.org/drawingml/2006/main"/>
-          <a:lstStyle xmlns:a="http://schemas.openxmlformats.org/drawingml/2006/main"/>
-          <a:p xmlns:a="http://schemas.openxmlformats.org/drawingml/2006/main"/>
+          <a:bodyPr/>
+          <a:lstStyle/>
+          <a:p>
+            <a:endParaRPr/>
+          </a:p>
         </p:txBody>
       </p:sp>
       <p:sp>
         <p:nvSpPr>
           <p:cNvPr id="4" name="Slide Number Placeholder 3"/>
           <p:cNvSpPr>
-            <a:spLocks xmlns:a="http://schemas.openxmlformats.org/drawingml/2006/main" noGrp="1"/>
+            <a:spLocks noGrp="1"/>
           </p:cNvSpPr>
           <p:nvPr>
             <p:ph type="sldNum" idx="5"/>
@@ -892,21 +728,23 @@
         </p:nvSpPr>
         <p:spPr/>
         <p:txBody>
-          <a:bodyPr xmlns:a="http://schemas.openxmlformats.org/drawingml/2006/main"/>
-          <a:lstStyle xmlns:a="http://schemas.openxmlformats.org/drawingml/2006/main"/>
-          <a:p xmlns:a="http://schemas.openxmlformats.org/drawingml/2006/main"/>
+          <a:bodyPr/>
+          <a:lstStyle/>
+          <a:p>
+            <a:endParaRPr/>
+          </a:p>
         </p:txBody>
       </p:sp>
     </p:spTree>
   </p:cSld>
   <p:clrMapOvr>
-    <a:masterClrMapping xmlns:a="http://schemas.openxmlformats.org/drawingml/2006/main"/>
+    <a:masterClrMapping/>
   </p:clrMapOvr>
 </p:notes>
 </file>
 
 <file path=ppt/notesSlides/notesSlide3.xml><?xml version="1.0" encoding="utf-8"?>
-<p:notes xmlns:p="http://schemas.openxmlformats.org/presentationml/2006/main">
+<p:notes xmlns:a="http://schemas.openxmlformats.org/drawingml/2006/main" xmlns:r="http://schemas.openxmlformats.org/officeDocument/2006/relationships" xmlns:p="http://schemas.openxmlformats.org/presentationml/2006/main">
   <p:cSld>
     <p:spTree>
       <p:nvGrpSpPr>
@@ -915,16 +753,21 @@
         <p:nvPr/>
       </p:nvGrpSpPr>
       <p:grpSpPr>
-        <a:xfrm xmlns:a="http://schemas.openxmlformats.org/drawingml/2006/main"/>
+        <a:xfrm>
+          <a:off x="0" y="0"/>
+          <a:ext cx="0" cy="0"/>
+          <a:chOff x="0" y="0"/>
+          <a:chExt cx="0" cy="0"/>
+        </a:xfrm>
       </p:grpSpPr>
       <p:sp>
         <p:nvSpPr>
           <p:cNvPr id="2" name="Slide Image Placeholder 1"/>
           <p:cNvSpPr>
-            <a:spLocks xmlns:a="http://schemas.openxmlformats.org/drawingml/2006/main" noGrp="1"/>
+            <a:spLocks noGrp="1" noRot="1" noChangeAspect="1"/>
           </p:cNvSpPr>
           <p:nvPr>
-            <p:ph type="sldImg" idx="0"/>
+            <p:ph type="sldImg"/>
           </p:nvPr>
         </p:nvSpPr>
         <p:spPr/>
@@ -933,7 +776,7 @@
         <p:nvSpPr>
           <p:cNvPr id="3" name="Notes Placeholder 2"/>
           <p:cNvSpPr>
-            <a:spLocks xmlns:a="http://schemas.openxmlformats.org/drawingml/2006/main" noGrp="1"/>
+            <a:spLocks noGrp="1"/>
           </p:cNvSpPr>
           <p:nvPr>
             <p:ph type="body" idx="1"/>
@@ -941,16 +784,18 @@
         </p:nvSpPr>
         <p:spPr/>
         <p:txBody>
-          <a:bodyPr xmlns:a="http://schemas.openxmlformats.org/drawingml/2006/main"/>
-          <a:lstStyle xmlns:a="http://schemas.openxmlformats.org/drawingml/2006/main"/>
-          <a:p xmlns:a="http://schemas.openxmlformats.org/drawingml/2006/main"/>
+          <a:bodyPr/>
+          <a:lstStyle/>
+          <a:p>
+            <a:endParaRPr/>
+          </a:p>
         </p:txBody>
       </p:sp>
       <p:sp>
         <p:nvSpPr>
           <p:cNvPr id="4" name="Slide Number Placeholder 3"/>
           <p:cNvSpPr>
-            <a:spLocks xmlns:a="http://schemas.openxmlformats.org/drawingml/2006/main" noGrp="1"/>
+            <a:spLocks noGrp="1"/>
           </p:cNvSpPr>
           <p:nvPr>
             <p:ph type="sldNum" idx="5"/>
@@ -958,21 +803,23 @@
         </p:nvSpPr>
         <p:spPr/>
         <p:txBody>
-          <a:bodyPr xmlns:a="http://schemas.openxmlformats.org/drawingml/2006/main"/>
-          <a:lstStyle xmlns:a="http://schemas.openxmlformats.org/drawingml/2006/main"/>
-          <a:p xmlns:a="http://schemas.openxmlformats.org/drawingml/2006/main"/>
+          <a:bodyPr/>
+          <a:lstStyle/>
+          <a:p>
+            <a:endParaRPr/>
+          </a:p>
         </p:txBody>
       </p:sp>
     </p:spTree>
   </p:cSld>
   <p:clrMapOvr>
-    <a:masterClrMapping xmlns:a="http://schemas.openxmlformats.org/drawingml/2006/main"/>
+    <a:masterClrMapping/>
   </p:clrMapOvr>
 </p:notes>
 </file>
 
 <file path=ppt/notesSlides/notesSlide4.xml><?xml version="1.0" encoding="utf-8"?>
-<p:notes xmlns:p="http://schemas.openxmlformats.org/presentationml/2006/main">
+<p:notes xmlns:a="http://schemas.openxmlformats.org/drawingml/2006/main" xmlns:r="http://schemas.openxmlformats.org/officeDocument/2006/relationships" xmlns:p="http://schemas.openxmlformats.org/presentationml/2006/main">
   <p:cSld>
     <p:spTree>
       <p:nvGrpSpPr>
@@ -981,16 +828,21 @@
         <p:nvPr/>
       </p:nvGrpSpPr>
       <p:grpSpPr>
-        <a:xfrm xmlns:a="http://schemas.openxmlformats.org/drawingml/2006/main"/>
+        <a:xfrm>
+          <a:off x="0" y="0"/>
+          <a:ext cx="0" cy="0"/>
+          <a:chOff x="0" y="0"/>
+          <a:chExt cx="0" cy="0"/>
+        </a:xfrm>
       </p:grpSpPr>
       <p:sp>
         <p:nvSpPr>
           <p:cNvPr id="2" name="Slide Image Placeholder 1"/>
           <p:cNvSpPr>
-            <a:spLocks xmlns:a="http://schemas.openxmlformats.org/drawingml/2006/main" noGrp="1"/>
+            <a:spLocks noGrp="1" noRot="1" noChangeAspect="1"/>
           </p:cNvSpPr>
           <p:nvPr>
-            <p:ph type="sldImg" idx="0"/>
+            <p:ph type="sldImg"/>
           </p:nvPr>
         </p:nvSpPr>
         <p:spPr/>
@@ -999,7 +851,7 @@
         <p:nvSpPr>
           <p:cNvPr id="3" name="Notes Placeholder 2"/>
           <p:cNvSpPr>
-            <a:spLocks xmlns:a="http://schemas.openxmlformats.org/drawingml/2006/main" noGrp="1"/>
+            <a:spLocks noGrp="1"/>
           </p:cNvSpPr>
           <p:nvPr>
             <p:ph type="body" idx="1"/>
@@ -1007,16 +859,18 @@
         </p:nvSpPr>
         <p:spPr/>
         <p:txBody>
-          <a:bodyPr xmlns:a="http://schemas.openxmlformats.org/drawingml/2006/main"/>
-          <a:lstStyle xmlns:a="http://schemas.openxmlformats.org/drawingml/2006/main"/>
-          <a:p xmlns:a="http://schemas.openxmlformats.org/drawingml/2006/main"/>
+          <a:bodyPr/>
+          <a:lstStyle/>
+          <a:p>
+            <a:endParaRPr/>
+          </a:p>
         </p:txBody>
       </p:sp>
       <p:sp>
         <p:nvSpPr>
           <p:cNvPr id="4" name="Slide Number Placeholder 3"/>
           <p:cNvSpPr>
-            <a:spLocks xmlns:a="http://schemas.openxmlformats.org/drawingml/2006/main" noGrp="1"/>
+            <a:spLocks noGrp="1"/>
           </p:cNvSpPr>
           <p:nvPr>
             <p:ph type="sldNum" idx="5"/>
@@ -1024,21 +878,23 @@
         </p:nvSpPr>
         <p:spPr/>
         <p:txBody>
-          <a:bodyPr xmlns:a="http://schemas.openxmlformats.org/drawingml/2006/main"/>
-          <a:lstStyle xmlns:a="http://schemas.openxmlformats.org/drawingml/2006/main"/>
-          <a:p xmlns:a="http://schemas.openxmlformats.org/drawingml/2006/main"/>
+          <a:bodyPr/>
+          <a:lstStyle/>
+          <a:p>
+            <a:endParaRPr/>
+          </a:p>
         </p:txBody>
       </p:sp>
     </p:spTree>
   </p:cSld>
   <p:clrMapOvr>
-    <a:masterClrMapping xmlns:a="http://schemas.openxmlformats.org/drawingml/2006/main"/>
+    <a:masterClrMapping/>
   </p:clrMapOvr>
 </p:notes>
 </file>
 
 <file path=ppt/notesSlides/notesSlide5.xml><?xml version="1.0" encoding="utf-8"?>
-<p:notes xmlns:p="http://schemas.openxmlformats.org/presentationml/2006/main">
+<p:notes xmlns:a="http://schemas.openxmlformats.org/drawingml/2006/main" xmlns:r="http://schemas.openxmlformats.org/officeDocument/2006/relationships" xmlns:p="http://schemas.openxmlformats.org/presentationml/2006/main">
   <p:cSld>
     <p:spTree>
       <p:nvGrpSpPr>
@@ -1047,16 +903,21 @@
         <p:nvPr/>
       </p:nvGrpSpPr>
       <p:grpSpPr>
-        <a:xfrm xmlns:a="http://schemas.openxmlformats.org/drawingml/2006/main"/>
+        <a:xfrm>
+          <a:off x="0" y="0"/>
+          <a:ext cx="0" cy="0"/>
+          <a:chOff x="0" y="0"/>
+          <a:chExt cx="0" cy="0"/>
+        </a:xfrm>
       </p:grpSpPr>
       <p:sp>
         <p:nvSpPr>
           <p:cNvPr id="2" name="Slide Image Placeholder 1"/>
           <p:cNvSpPr>
-            <a:spLocks xmlns:a="http://schemas.openxmlformats.org/drawingml/2006/main" noGrp="1"/>
+            <a:spLocks noGrp="1" noRot="1" noChangeAspect="1"/>
           </p:cNvSpPr>
           <p:nvPr>
-            <p:ph type="sldImg" idx="0"/>
+            <p:ph type="sldImg"/>
           </p:nvPr>
         </p:nvSpPr>
         <p:spPr/>
@@ -1065,7 +926,7 @@
         <p:nvSpPr>
           <p:cNvPr id="3" name="Notes Placeholder 2"/>
           <p:cNvSpPr>
-            <a:spLocks xmlns:a="http://schemas.openxmlformats.org/drawingml/2006/main" noGrp="1"/>
+            <a:spLocks noGrp="1"/>
           </p:cNvSpPr>
           <p:nvPr>
             <p:ph type="body" idx="1"/>
@@ -1073,16 +934,18 @@
         </p:nvSpPr>
         <p:spPr/>
         <p:txBody>
-          <a:bodyPr xmlns:a="http://schemas.openxmlformats.org/drawingml/2006/main"/>
-          <a:lstStyle xmlns:a="http://schemas.openxmlformats.org/drawingml/2006/main"/>
-          <a:p xmlns:a="http://schemas.openxmlformats.org/drawingml/2006/main"/>
+          <a:bodyPr/>
+          <a:lstStyle/>
+          <a:p>
+            <a:endParaRPr/>
+          </a:p>
         </p:txBody>
       </p:sp>
       <p:sp>
         <p:nvSpPr>
           <p:cNvPr id="4" name="Slide Number Placeholder 3"/>
           <p:cNvSpPr>
-            <a:spLocks xmlns:a="http://schemas.openxmlformats.org/drawingml/2006/main" noGrp="1"/>
+            <a:spLocks noGrp="1"/>
           </p:cNvSpPr>
           <p:nvPr>
             <p:ph type="sldNum" idx="5"/>
@@ -1090,21 +953,23 @@
         </p:nvSpPr>
         <p:spPr/>
         <p:txBody>
-          <a:bodyPr xmlns:a="http://schemas.openxmlformats.org/drawingml/2006/main"/>
-          <a:lstStyle xmlns:a="http://schemas.openxmlformats.org/drawingml/2006/main"/>
-          <a:p xmlns:a="http://schemas.openxmlformats.org/drawingml/2006/main"/>
+          <a:bodyPr/>
+          <a:lstStyle/>
+          <a:p>
+            <a:endParaRPr/>
+          </a:p>
         </p:txBody>
       </p:sp>
     </p:spTree>
   </p:cSld>
   <p:clrMapOvr>
-    <a:masterClrMapping xmlns:a="http://schemas.openxmlformats.org/drawingml/2006/main"/>
+    <a:masterClrMapping/>
   </p:clrMapOvr>
 </p:notes>
 </file>
 
 <file path=ppt/notesSlides/notesSlide6.xml><?xml version="1.0" encoding="utf-8"?>
-<p:notes xmlns:p="http://schemas.openxmlformats.org/presentationml/2006/main">
+<p:notes xmlns:a="http://schemas.openxmlformats.org/drawingml/2006/main" xmlns:r="http://schemas.openxmlformats.org/officeDocument/2006/relationships" xmlns:p="http://schemas.openxmlformats.org/presentationml/2006/main">
   <p:cSld>
     <p:spTree>
       <p:nvGrpSpPr>
@@ -1113,16 +978,21 @@
         <p:nvPr/>
       </p:nvGrpSpPr>
       <p:grpSpPr>
-        <a:xfrm xmlns:a="http://schemas.openxmlformats.org/drawingml/2006/main"/>
+        <a:xfrm>
+          <a:off x="0" y="0"/>
+          <a:ext cx="0" cy="0"/>
+          <a:chOff x="0" y="0"/>
+          <a:chExt cx="0" cy="0"/>
+        </a:xfrm>
       </p:grpSpPr>
       <p:sp>
         <p:nvSpPr>
           <p:cNvPr id="2" name="Slide Image Placeholder 1"/>
           <p:cNvSpPr>
-            <a:spLocks xmlns:a="http://schemas.openxmlformats.org/drawingml/2006/main" noGrp="1"/>
+            <a:spLocks noGrp="1" noRot="1" noChangeAspect="1"/>
           </p:cNvSpPr>
           <p:nvPr>
-            <p:ph type="sldImg" idx="0"/>
+            <p:ph type="sldImg"/>
           </p:nvPr>
         </p:nvSpPr>
         <p:spPr/>
@@ -1131,7 +1001,7 @@
         <p:nvSpPr>
           <p:cNvPr id="3" name="Notes Placeholder 2"/>
           <p:cNvSpPr>
-            <a:spLocks xmlns:a="http://schemas.openxmlformats.org/drawingml/2006/main" noGrp="1"/>
+            <a:spLocks noGrp="1"/>
           </p:cNvSpPr>
           <p:nvPr>
             <p:ph type="body" idx="1"/>
@@ -1139,16 +1009,18 @@
         </p:nvSpPr>
         <p:spPr/>
         <p:txBody>
-          <a:bodyPr xmlns:a="http://schemas.openxmlformats.org/drawingml/2006/main"/>
-          <a:lstStyle xmlns:a="http://schemas.openxmlformats.org/drawingml/2006/main"/>
-          <a:p xmlns:a="http://schemas.openxmlformats.org/drawingml/2006/main"/>
+          <a:bodyPr/>
+          <a:lstStyle/>
+          <a:p>
+            <a:endParaRPr/>
+          </a:p>
         </p:txBody>
       </p:sp>
       <p:sp>
         <p:nvSpPr>
           <p:cNvPr id="4" name="Slide Number Placeholder 3"/>
           <p:cNvSpPr>
-            <a:spLocks xmlns:a="http://schemas.openxmlformats.org/drawingml/2006/main" noGrp="1"/>
+            <a:spLocks noGrp="1"/>
           </p:cNvSpPr>
           <p:nvPr>
             <p:ph type="sldNum" idx="5"/>
@@ -1156,21 +1028,23 @@
         </p:nvSpPr>
         <p:spPr/>
         <p:txBody>
-          <a:bodyPr xmlns:a="http://schemas.openxmlformats.org/drawingml/2006/main"/>
-          <a:lstStyle xmlns:a="http://schemas.openxmlformats.org/drawingml/2006/main"/>
-          <a:p xmlns:a="http://schemas.openxmlformats.org/drawingml/2006/main"/>
+          <a:bodyPr/>
+          <a:lstStyle/>
+          <a:p>
+            <a:endParaRPr/>
+          </a:p>
         </p:txBody>
       </p:sp>
     </p:spTree>
   </p:cSld>
   <p:clrMapOvr>
-    <a:masterClrMapping xmlns:a="http://schemas.openxmlformats.org/drawingml/2006/main"/>
+    <a:masterClrMapping/>
   </p:clrMapOvr>
 </p:notes>
 </file>
 
 <file path=ppt/notesSlides/notesSlide7.xml><?xml version="1.0" encoding="utf-8"?>
-<p:notes xmlns:p="http://schemas.openxmlformats.org/presentationml/2006/main">
+<p:notes xmlns:a="http://schemas.openxmlformats.org/drawingml/2006/main" xmlns:r="http://schemas.openxmlformats.org/officeDocument/2006/relationships" xmlns:p="http://schemas.openxmlformats.org/presentationml/2006/main">
   <p:cSld>
     <p:spTree>
       <p:nvGrpSpPr>
@@ -1179,16 +1053,21 @@
         <p:nvPr/>
       </p:nvGrpSpPr>
       <p:grpSpPr>
-        <a:xfrm xmlns:a="http://schemas.openxmlformats.org/drawingml/2006/main"/>
+        <a:xfrm>
+          <a:off x="0" y="0"/>
+          <a:ext cx="0" cy="0"/>
+          <a:chOff x="0" y="0"/>
+          <a:chExt cx="0" cy="0"/>
+        </a:xfrm>
       </p:grpSpPr>
       <p:sp>
         <p:nvSpPr>
           <p:cNvPr id="2" name="Slide Image Placeholder 1"/>
           <p:cNvSpPr>
-            <a:spLocks xmlns:a="http://schemas.openxmlformats.org/drawingml/2006/main" noGrp="1"/>
+            <a:spLocks noGrp="1" noRot="1" noChangeAspect="1"/>
           </p:cNvSpPr>
           <p:nvPr>
-            <p:ph type="sldImg" idx="0"/>
+            <p:ph type="sldImg"/>
           </p:nvPr>
         </p:nvSpPr>
         <p:spPr/>
@@ -1197,7 +1076,7 @@
         <p:nvSpPr>
           <p:cNvPr id="3" name="Notes Placeholder 2"/>
           <p:cNvSpPr>
-            <a:spLocks xmlns:a="http://schemas.openxmlformats.org/drawingml/2006/main" noGrp="1"/>
+            <a:spLocks noGrp="1"/>
           </p:cNvSpPr>
           <p:nvPr>
             <p:ph type="body" idx="1"/>
@@ -1205,16 +1084,18 @@
         </p:nvSpPr>
         <p:spPr/>
         <p:txBody>
-          <a:bodyPr xmlns:a="http://schemas.openxmlformats.org/drawingml/2006/main"/>
-          <a:lstStyle xmlns:a="http://schemas.openxmlformats.org/drawingml/2006/main"/>
-          <a:p xmlns:a="http://schemas.openxmlformats.org/drawingml/2006/main"/>
+          <a:bodyPr/>
+          <a:lstStyle/>
+          <a:p>
+            <a:endParaRPr/>
+          </a:p>
         </p:txBody>
       </p:sp>
       <p:sp>
         <p:nvSpPr>
           <p:cNvPr id="4" name="Slide Number Placeholder 3"/>
           <p:cNvSpPr>
-            <a:spLocks xmlns:a="http://schemas.openxmlformats.org/drawingml/2006/main" noGrp="1"/>
+            <a:spLocks noGrp="1"/>
           </p:cNvSpPr>
           <p:nvPr>
             <p:ph type="sldNum" idx="5"/>
@@ -1222,21 +1103,23 @@
         </p:nvSpPr>
         <p:spPr/>
         <p:txBody>
-          <a:bodyPr xmlns:a="http://schemas.openxmlformats.org/drawingml/2006/main"/>
-          <a:lstStyle xmlns:a="http://schemas.openxmlformats.org/drawingml/2006/main"/>
-          <a:p xmlns:a="http://schemas.openxmlformats.org/drawingml/2006/main"/>
+          <a:bodyPr/>
+          <a:lstStyle/>
+          <a:p>
+            <a:endParaRPr/>
+          </a:p>
         </p:txBody>
       </p:sp>
     </p:spTree>
   </p:cSld>
   <p:clrMapOvr>
-    <a:masterClrMapping xmlns:a="http://schemas.openxmlformats.org/drawingml/2006/main"/>
+    <a:masterClrMapping/>
   </p:clrMapOvr>
 </p:notes>
 </file>
 
 <file path=ppt/notesSlides/notesSlide8.xml><?xml version="1.0" encoding="utf-8"?>
-<p:notes xmlns:p="http://schemas.openxmlformats.org/presentationml/2006/main">
+<p:notes xmlns:a="http://schemas.openxmlformats.org/drawingml/2006/main" xmlns:r="http://schemas.openxmlformats.org/officeDocument/2006/relationships" xmlns:p="http://schemas.openxmlformats.org/presentationml/2006/main">
   <p:cSld>
     <p:spTree>
       <p:nvGrpSpPr>
@@ -1245,16 +1128,21 @@
         <p:nvPr/>
       </p:nvGrpSpPr>
       <p:grpSpPr>
-        <a:xfrm xmlns:a="http://schemas.openxmlformats.org/drawingml/2006/main"/>
+        <a:xfrm>
+          <a:off x="0" y="0"/>
+          <a:ext cx="0" cy="0"/>
+          <a:chOff x="0" y="0"/>
+          <a:chExt cx="0" cy="0"/>
+        </a:xfrm>
       </p:grpSpPr>
       <p:sp>
         <p:nvSpPr>
           <p:cNvPr id="2" name="Slide Image Placeholder 1"/>
           <p:cNvSpPr>
-            <a:spLocks xmlns:a="http://schemas.openxmlformats.org/drawingml/2006/main" noGrp="1"/>
+            <a:spLocks noGrp="1" noRot="1" noChangeAspect="1"/>
           </p:cNvSpPr>
           <p:nvPr>
-            <p:ph type="sldImg" idx="0"/>
+            <p:ph type="sldImg"/>
           </p:nvPr>
         </p:nvSpPr>
         <p:spPr/>
@@ -1263,7 +1151,7 @@
         <p:nvSpPr>
           <p:cNvPr id="3" name="Notes Placeholder 2"/>
           <p:cNvSpPr>
-            <a:spLocks xmlns:a="http://schemas.openxmlformats.org/drawingml/2006/main" noGrp="1"/>
+            <a:spLocks noGrp="1"/>
           </p:cNvSpPr>
           <p:nvPr>
             <p:ph type="body" idx="1"/>
@@ -1271,16 +1159,18 @@
         </p:nvSpPr>
         <p:spPr/>
         <p:txBody>
-          <a:bodyPr xmlns:a="http://schemas.openxmlformats.org/drawingml/2006/main"/>
-          <a:lstStyle xmlns:a="http://schemas.openxmlformats.org/drawingml/2006/main"/>
-          <a:p xmlns:a="http://schemas.openxmlformats.org/drawingml/2006/main"/>
+          <a:bodyPr/>
+          <a:lstStyle/>
+          <a:p>
+            <a:endParaRPr/>
+          </a:p>
         </p:txBody>
       </p:sp>
       <p:sp>
         <p:nvSpPr>
           <p:cNvPr id="4" name="Slide Number Placeholder 3"/>
           <p:cNvSpPr>
-            <a:spLocks xmlns:a="http://schemas.openxmlformats.org/drawingml/2006/main" noGrp="1"/>
+            <a:spLocks noGrp="1"/>
           </p:cNvSpPr>
           <p:nvPr>
             <p:ph type="sldNum" idx="5"/>
@@ -1288,21 +1178,23 @@
         </p:nvSpPr>
         <p:spPr/>
         <p:txBody>
-          <a:bodyPr xmlns:a="http://schemas.openxmlformats.org/drawingml/2006/main"/>
-          <a:lstStyle xmlns:a="http://schemas.openxmlformats.org/drawingml/2006/main"/>
-          <a:p xmlns:a="http://schemas.openxmlformats.org/drawingml/2006/main"/>
+          <a:bodyPr/>
+          <a:lstStyle/>
+          <a:p>
+            <a:endParaRPr/>
+          </a:p>
         </p:txBody>
       </p:sp>
     </p:spTree>
   </p:cSld>
   <p:clrMapOvr>
-    <a:masterClrMapping xmlns:a="http://schemas.openxmlformats.org/drawingml/2006/main"/>
+    <a:masterClrMapping/>
   </p:clrMapOvr>
 </p:notes>
 </file>
 
 <file path=ppt/notesSlides/notesSlide9.xml><?xml version="1.0" encoding="utf-8"?>
-<p:notes xmlns:p="http://schemas.openxmlformats.org/presentationml/2006/main">
+<p:notes xmlns:a="http://schemas.openxmlformats.org/drawingml/2006/main" xmlns:r="http://schemas.openxmlformats.org/officeDocument/2006/relationships" xmlns:p="http://schemas.openxmlformats.org/presentationml/2006/main">
   <p:cSld>
     <p:spTree>
       <p:nvGrpSpPr>
@@ -1311,16 +1203,21 @@
         <p:nvPr/>
       </p:nvGrpSpPr>
       <p:grpSpPr>
-        <a:xfrm xmlns:a="http://schemas.openxmlformats.org/drawingml/2006/main"/>
+        <a:xfrm>
+          <a:off x="0" y="0"/>
+          <a:ext cx="0" cy="0"/>
+          <a:chOff x="0" y="0"/>
+          <a:chExt cx="0" cy="0"/>
+        </a:xfrm>
       </p:grpSpPr>
       <p:sp>
         <p:nvSpPr>
           <p:cNvPr id="2" name="Slide Image Placeholder 1"/>
           <p:cNvSpPr>
-            <a:spLocks xmlns:a="http://schemas.openxmlformats.org/drawingml/2006/main" noGrp="1"/>
+            <a:spLocks noGrp="1" noRot="1" noChangeAspect="1"/>
           </p:cNvSpPr>
           <p:nvPr>
-            <p:ph type="sldImg" idx="0"/>
+            <p:ph type="sldImg"/>
           </p:nvPr>
         </p:nvSpPr>
         <p:spPr/>
@@ -1329,7 +1226,7 @@
         <p:nvSpPr>
           <p:cNvPr id="3" name="Notes Placeholder 2"/>
           <p:cNvSpPr>
-            <a:spLocks xmlns:a="http://schemas.openxmlformats.org/drawingml/2006/main" noGrp="1"/>
+            <a:spLocks noGrp="1"/>
           </p:cNvSpPr>
           <p:nvPr>
             <p:ph type="body" idx="1"/>
@@ -1337,16 +1234,18 @@
         </p:nvSpPr>
         <p:spPr/>
         <p:txBody>
-          <a:bodyPr xmlns:a="http://schemas.openxmlformats.org/drawingml/2006/main"/>
-          <a:lstStyle xmlns:a="http://schemas.openxmlformats.org/drawingml/2006/main"/>
-          <a:p xmlns:a="http://schemas.openxmlformats.org/drawingml/2006/main"/>
+          <a:bodyPr/>
+          <a:lstStyle/>
+          <a:p>
+            <a:endParaRPr/>
+          </a:p>
         </p:txBody>
       </p:sp>
       <p:sp>
         <p:nvSpPr>
           <p:cNvPr id="4" name="Slide Number Placeholder 3"/>
           <p:cNvSpPr>
-            <a:spLocks xmlns:a="http://schemas.openxmlformats.org/drawingml/2006/main" noGrp="1"/>
+            <a:spLocks noGrp="1"/>
           </p:cNvSpPr>
           <p:nvPr>
             <p:ph type="sldNum" idx="5"/>
@@ -1354,21 +1253,23 @@
         </p:nvSpPr>
         <p:spPr/>
         <p:txBody>
-          <a:bodyPr xmlns:a="http://schemas.openxmlformats.org/drawingml/2006/main"/>
-          <a:lstStyle xmlns:a="http://schemas.openxmlformats.org/drawingml/2006/main"/>
-          <a:p xmlns:a="http://schemas.openxmlformats.org/drawingml/2006/main"/>
+          <a:bodyPr/>
+          <a:lstStyle/>
+          <a:p>
+            <a:endParaRPr/>
+          </a:p>
         </p:txBody>
       </p:sp>
     </p:spTree>
   </p:cSld>
   <p:clrMapOvr>
-    <a:masterClrMapping xmlns:a="http://schemas.openxmlformats.org/drawingml/2006/main"/>
+    <a:masterClrMapping/>
   </p:clrMapOvr>
 </p:notes>
 </file>
 
 <file path=ppt/slideLayouts/slideLayout1.xml><?xml version="1.0" encoding="utf-8"?>
-<p:sldLayout xmlns:p="http://schemas.openxmlformats.org/presentationml/2006/main" type="title">
+<p:sldLayout xmlns:a="http://schemas.openxmlformats.org/drawingml/2006/main" xmlns:r="http://schemas.openxmlformats.org/officeDocument/2006/relationships" xmlns:p="http://schemas.openxmlformats.org/presentationml/2006/main" type="title">
   <p:cSld name="Title Slide">
     <p:spTree>
       <p:nvGrpSpPr>
@@ -1377,19 +1278,27 @@
         <p:nvPr/>
       </p:nvGrpSpPr>
       <p:grpSpPr>
-        <a:xfrm xmlns:a="http://schemas.openxmlformats.org/drawingml/2006/main"/>
+        <a:xfrm>
+          <a:off x="0" y="0"/>
+          <a:ext cx="0" cy="0"/>
+          <a:chOff x="0" y="0"/>
+          <a:chExt cx="0" cy="0"/>
+        </a:xfrm>
       </p:grpSpPr>
     </p:spTree>
   </p:cSld>
+  <p:clrMapOvr>
+    <a:masterClrMapping/>
+  </p:clrMapOvr>
 </p:sldLayout>
 </file>
 
 <file path=ppt/slideMasters/slideMaster1.xml><?xml version="1.0" encoding="utf-8"?>
-<p:sldMaster xmlns:p="http://schemas.openxmlformats.org/presentationml/2006/main">
+<p:sldMaster xmlns:a="http://schemas.openxmlformats.org/drawingml/2006/main" xmlns:r="http://schemas.openxmlformats.org/officeDocument/2006/relationships" xmlns:p="http://schemas.openxmlformats.org/presentationml/2006/main">
   <p:cSld name="Master">
     <p:bg>
       <p:bgRef idx="1001">
-        <a:schemeClr xmlns:a="http://schemas.openxmlformats.org/drawingml/2006/main" val="bg1"/>
+        <a:schemeClr val="bg1"/>
       </p:bgRef>
     </p:bg>
     <p:spTree>
@@ -1399,17 +1308,22 @@
         <p:nvPr/>
       </p:nvGrpSpPr>
       <p:grpSpPr>
-        <a:xfrm xmlns:a="http://schemas.openxmlformats.org/drawingml/2006/main"/>
+        <a:xfrm>
+          <a:off x="0" y="0"/>
+          <a:ext cx="0" cy="0"/>
+          <a:chOff x="0" y="0"/>
+          <a:chExt cx="0" cy="0"/>
+        </a:xfrm>
       </p:grpSpPr>
     </p:spTree>
   </p:cSld>
   <p:clrMap bg1="lt1" tx1="dk1" bg2="lt2" tx2="dk2" accent1="accent1" accent2="accent2" accent3="accent3" accent4="accent4" accent5="accent5" accent6="accent6" hlink="hlink" folHlink="folHlink"/>
   <p:sldLayoutIdLst>
-    <p:sldLayoutId xmlns:r="http://schemas.openxmlformats.org/officeDocument/2006/relationships" id="2147483649" r:id="R9e686aa9923044c7"/>
+    <p:sldLayoutId id="2147483649" r:id="rId1"/>
   </p:sldLayoutIdLst>
   <p:txStyles>
     <p:titleStyle>
-      <a:lvl1pPr xmlns:a="http://schemas.openxmlformats.org/drawingml/2006/main" algn="l">
+      <a:lvl1pPr algn="l">
         <a:lnSpc>
           <a:spcPct val="90000"/>
         </a:lnSpc>
@@ -1428,7 +1342,7 @@
       </a:lvl1pPr>
     </p:titleStyle>
     <p:bodyStyle>
-      <a:lvl1pPr xmlns:a="http://schemas.openxmlformats.org/drawingml/2006/main" marL="228600" indent="-228600" algn="l">
+      <a:lvl1pPr marL="228600" indent="-228600" algn="l">
         <a:lnSpc>
           <a:spcPct val="90000"/>
         </a:lnSpc>
@@ -1445,7 +1359,7 @@
           <a:cs typeface="+mn-lt"/>
         </a:defRPr>
       </a:lvl1pPr>
-      <a:lvl2pPr xmlns:a="http://schemas.openxmlformats.org/drawingml/2006/main" marL="685800" indent="-228600" algn="l">
+      <a:lvl2pPr marL="685800" indent="-228600" algn="l">
         <a:lnSpc>
           <a:spcPct val="90000"/>
         </a:lnSpc>
@@ -1462,7 +1376,7 @@
           <a:cs typeface="+mn-lt"/>
         </a:defRPr>
       </a:lvl2pPr>
-      <a:lvl3pPr xmlns:a="http://schemas.openxmlformats.org/drawingml/2006/main" marL="1143000" indent="-228600" algn="l">
+      <a:lvl3pPr marL="1143000" indent="-228600" algn="l">
         <a:lnSpc>
           <a:spcPct val="90000"/>
         </a:lnSpc>
@@ -1479,7 +1393,7 @@
           <a:cs typeface="+mn-lt"/>
         </a:defRPr>
       </a:lvl3pPr>
-      <a:lvl4pPr xmlns:a="http://schemas.openxmlformats.org/drawingml/2006/main" marL="1600200" indent="-228600" algn="l">
+      <a:lvl4pPr marL="1600200" indent="-228600" algn="l">
         <a:lnSpc>
           <a:spcPct val="90000"/>
         </a:lnSpc>
@@ -1496,7 +1410,7 @@
           <a:cs typeface="+mn-lt"/>
         </a:defRPr>
       </a:lvl4pPr>
-      <a:lvl5pPr xmlns:a="http://schemas.openxmlformats.org/drawingml/2006/main" marL="2057400" indent="-228600" algn="l">
+      <a:lvl5pPr marL="2057400" indent="-228600" algn="l">
         <a:lnSpc>
           <a:spcPct val="90000"/>
         </a:lnSpc>
@@ -1513,7 +1427,7 @@
           <a:cs typeface="+mn-lt"/>
         </a:defRPr>
       </a:lvl5pPr>
-      <a:lvl6pPr xmlns:a="http://schemas.openxmlformats.org/drawingml/2006/main" marL="2514600" indent="-228600" algn="l">
+      <a:lvl6pPr marL="2514600" indent="-228600" algn="l">
         <a:lnSpc>
           <a:spcPct val="90000"/>
         </a:lnSpc>
@@ -1530,7 +1444,7 @@
           <a:cs typeface="+mn-lt"/>
         </a:defRPr>
       </a:lvl6pPr>
-      <a:lvl7pPr xmlns:a="http://schemas.openxmlformats.org/drawingml/2006/main" marL="2971800" indent="-228600" algn="l">
+      <a:lvl7pPr marL="2971800" indent="-228600" algn="l">
         <a:lnSpc>
           <a:spcPct val="90000"/>
         </a:lnSpc>
@@ -1547,7 +1461,7 @@
           <a:cs typeface="+mn-lt"/>
         </a:defRPr>
       </a:lvl7pPr>
-      <a:lvl8pPr xmlns:a="http://schemas.openxmlformats.org/drawingml/2006/main" marL="3429000" indent="-228600" algn="l">
+      <a:lvl8pPr marL="3429000" indent="-228600" algn="l">
         <a:lnSpc>
           <a:spcPct val="90000"/>
         </a:lnSpc>
@@ -1564,7 +1478,7 @@
           <a:cs typeface="+mn-lt"/>
         </a:defRPr>
       </a:lvl8pPr>
-      <a:lvl9pPr xmlns:a="http://schemas.openxmlformats.org/drawingml/2006/main" marL="3886200" indent="-228600" algn="l">
+      <a:lvl9pPr marL="3886200" indent="-228600" algn="l">
         <a:lnSpc>
           <a:spcPct val="90000"/>
         </a:lnSpc>
@@ -1583,7 +1497,7 @@
       </a:lvl9pPr>
     </p:bodyStyle>
     <p:otherStyle>
-      <a:lvl1pPr xmlns:a="http://schemas.openxmlformats.org/drawingml/2006/main" marL="0" algn="l">
+      <a:lvl1pPr marL="0" algn="l">
         <a:buNone/>
         <a:defRPr sz="1800">
           <a:solidFill>
@@ -1594,7 +1508,7 @@
           <a:cs typeface="+mn-lt"/>
         </a:defRPr>
       </a:lvl1pPr>
-      <a:lvl2pPr xmlns:a="http://schemas.openxmlformats.org/drawingml/2006/main" marL="457200" algn="l">
+      <a:lvl2pPr marL="457200" algn="l">
         <a:buNone/>
         <a:defRPr sz="1800">
           <a:solidFill>
@@ -1605,7 +1519,7 @@
           <a:cs typeface="+mn-lt"/>
         </a:defRPr>
       </a:lvl2pPr>
-      <a:lvl3pPr xmlns:a="http://schemas.openxmlformats.org/drawingml/2006/main" marL="914400" algn="l">
+      <a:lvl3pPr marL="914400" algn="l">
         <a:buNone/>
         <a:defRPr sz="1800">
           <a:solidFill>
@@ -1616,7 +1530,7 @@
           <a:cs typeface="+mn-lt"/>
         </a:defRPr>
       </a:lvl3pPr>
-      <a:lvl4pPr xmlns:a="http://schemas.openxmlformats.org/drawingml/2006/main" marL="1371600" algn="l">
+      <a:lvl4pPr marL="1371600" algn="l">
         <a:buNone/>
         <a:defRPr sz="1800">
           <a:solidFill>
@@ -1627,7 +1541,7 @@
           <a:cs typeface="+mn-lt"/>
         </a:defRPr>
       </a:lvl4pPr>
-      <a:lvl5pPr xmlns:a="http://schemas.openxmlformats.org/drawingml/2006/main" marL="1828800" algn="l">
+      <a:lvl5pPr marL="1828800" algn="l">
         <a:buNone/>
         <a:defRPr sz="1800">
           <a:solidFill>
@@ -1638,7 +1552,7 @@
           <a:cs typeface="+mn-lt"/>
         </a:defRPr>
       </a:lvl5pPr>
-      <a:lvl6pPr xmlns:a="http://schemas.openxmlformats.org/drawingml/2006/main" marL="2286000" algn="l">
+      <a:lvl6pPr marL="2286000" algn="l">
         <a:buNone/>
         <a:defRPr sz="1800">
           <a:solidFill>
@@ -1649,7 +1563,7 @@
           <a:cs typeface="+mn-lt"/>
         </a:defRPr>
       </a:lvl6pPr>
-      <a:lvl7pPr xmlns:a="http://schemas.openxmlformats.org/drawingml/2006/main" marL="2743200" algn="l">
+      <a:lvl7pPr marL="2743200" algn="l">
         <a:buNone/>
         <a:defRPr sz="1800">
           <a:solidFill>
@@ -1660,7 +1574,7 @@
           <a:cs typeface="+mn-lt"/>
         </a:defRPr>
       </a:lvl7pPr>
-      <a:lvl8pPr xmlns:a="http://schemas.openxmlformats.org/drawingml/2006/main" marL="3200400" algn="l">
+      <a:lvl8pPr marL="3200400" algn="l">
         <a:buNone/>
         <a:defRPr sz="1800">
           <a:solidFill>
@@ -1671,7 +1585,7 @@
           <a:cs typeface="+mn-lt"/>
         </a:defRPr>
       </a:lvl8pPr>
-      <a:lvl9pPr xmlns:a="http://schemas.openxmlformats.org/drawingml/2006/main" marL="3657600" algn="l">
+      <a:lvl9pPr marL="3657600" algn="l">
         <a:buNone/>
         <a:defRPr sz="1800">
           <a:solidFill>
@@ -1687,253 +1601,8 @@
 </p:sldMaster>
 </file>
 
-<file path=ppt/slideMasters/theme/theme2.xml><?xml version="1.0" encoding="utf-8"?>
-<a:theme xmlns:a="http://schemas.openxmlformats.org/drawingml/2006/main" name="ChatGPT">
-  <a:themeElements>
-    <a:clrScheme name="ChatGPT">
-      <a:dk1>
-        <a:srgbClr val="000000"/>
-      </a:dk1>
-      <a:lt1>
-        <a:srgbClr val="FFFFFF"/>
-      </a:lt1>
-      <a:dk2>
-        <a:srgbClr val="0E2841"/>
-      </a:dk2>
-      <a:lt2>
-        <a:srgbClr val="E8E8E8"/>
-      </a:lt2>
-      <a:accent1>
-        <a:srgbClr val="156082"/>
-      </a:accent1>
-      <a:accent2>
-        <a:srgbClr val="E97132"/>
-      </a:accent2>
-      <a:accent3>
-        <a:srgbClr val="196B24"/>
-      </a:accent3>
-      <a:accent4>
-        <a:srgbClr val="0F9ED5"/>
-      </a:accent4>
-      <a:accent5>
-        <a:srgbClr val="A02B93"/>
-      </a:accent5>
-      <a:accent6>
-        <a:srgbClr val="4EA72E"/>
-      </a:accent6>
-      <a:hlink>
-        <a:srgbClr val="467886"/>
-      </a:hlink>
-      <a:folHlink>
-        <a:srgbClr val="96607D"/>
-      </a:folHlink>
-    </a:clrScheme>
-    <a:fontScheme name="Office">
-      <a:majorFont>
-        <a:latin typeface="Calibri Light"/>
-        <a:ea typeface="Calibri Light"/>
-        <a:cs typeface="Calibri Light"/>
-      </a:majorFont>
-      <a:minorFont>
-        <a:latin typeface="Calibri"/>
-        <a:ea typeface="Calibri"/>
-        <a:cs typeface="Calibri"/>
-      </a:minorFont>
-    </a:fontScheme>
-    <a:fmtScheme name="ChatGPT">
-      <a:fillStyleLst>
-        <a:solidFill>
-          <a:schemeClr val="phClr"/>
-        </a:solidFill>
-        <a:gradFill>
-          <a:gsLst>
-            <a:gs pos="0">
-              <a:schemeClr val="phClr">
-                <a:tint val="67000"/>
-                <a:lumMod val="110000"/>
-                <a:satMod val="105000"/>
-              </a:schemeClr>
-            </a:gs>
-            <a:gs pos="50000">
-              <a:schemeClr val="phClr">
-                <a:tint val="73000"/>
-                <a:lumMod val="105000"/>
-                <a:satMod val="103000"/>
-              </a:schemeClr>
-            </a:gs>
-            <a:gs pos="100000">
-              <a:schemeClr val="phClr">
-                <a:tint val="81000"/>
-                <a:lumMod val="105000"/>
-                <a:satMod val="109000"/>
-              </a:schemeClr>
-            </a:gs>
-          </a:gsLst>
-          <a:lin ang="5400000" scaled="0"/>
-        </a:gradFill>
-        <a:gradFill>
-          <a:gsLst>
-            <a:gs pos="0">
-              <a:schemeClr val="phClr">
-                <a:tint val="94000"/>
-                <a:lumMod val="102000"/>
-                <a:satMod val="103000"/>
-              </a:schemeClr>
-            </a:gs>
-            <a:gs pos="50000">
-              <a:schemeClr val="phClr">
-                <a:shade val="100000"/>
-                <a:lumMod val="100000"/>
-                <a:satMod val="110000"/>
-              </a:schemeClr>
-            </a:gs>
-            <a:gs pos="100000">
-              <a:schemeClr val="phClr">
-                <a:shade val="78000"/>
-                <a:lumMod val="99000"/>
-                <a:satMod val="120000"/>
-              </a:schemeClr>
-            </a:gs>
-          </a:gsLst>
-          <a:lin ang="5400000" scaled="0"/>
-        </a:gradFill>
-      </a:fillStyleLst>
-      <a:lnStyleLst>
-        <a:ln w="12700">
-          <a:solidFill>
-            <a:schemeClr val="phClr"/>
-          </a:solidFill>
-          <a:prstDash val="solid"/>
-        </a:ln>
-        <a:ln w="19050">
-          <a:solidFill>
-            <a:schemeClr val="phClr"/>
-          </a:solidFill>
-          <a:prstDash val="solid"/>
-        </a:ln>
-        <a:ln w="25400">
-          <a:solidFill>
-            <a:schemeClr val="phClr"/>
-          </a:solidFill>
-          <a:prstDash val="solid"/>
-        </a:ln>
-      </a:lnStyleLst>
-      <a:effectStyleLst>
-        <a:effectStyle>
-          <a:effectLst/>
-        </a:effectStyle>
-        <a:effectStyle>
-          <a:effectLst/>
-        </a:effectStyle>
-        <a:effectStyle>
-          <a:effectLst>
-            <a:outerShdw blurRad="57150" dist="19050" dir="5400000">
-              <a:srgbClr val="000000">
-                <a:alpha val="16000"/>
-              </a:srgbClr>
-            </a:outerShdw>
-          </a:effectLst>
-        </a:effectStyle>
-        <a:effectStyle>
-          <a:effectLst>
-            <a:outerShdw blurRad="19050" dist="9525" dir="5400000">
-              <a:srgbClr val="000000">
-                <a:alpha val="6000"/>
-              </a:srgbClr>
-            </a:outerShdw>
-          </a:effectLst>
-        </a:effectStyle>
-        <a:effectStyle>
-          <a:effectLst>
-            <a:outerShdw blurRad="28575" dist="9525" dir="5400000">
-              <a:srgbClr val="000000">
-                <a:alpha val="8000"/>
-              </a:srgbClr>
-            </a:outerShdw>
-          </a:effectLst>
-        </a:effectStyle>
-        <a:effectStyle>
-          <a:effectLst>
-            <a:outerShdw blurRad="57150" dist="19050" dir="5400000">
-              <a:srgbClr val="000000">
-                <a:alpha val="10000"/>
-              </a:srgbClr>
-            </a:outerShdw>
-          </a:effectLst>
-        </a:effectStyle>
-        <a:effectStyle>
-          <a:effectLst>
-            <a:outerShdw blurRad="114300" dist="38100" dir="5400000">
-              <a:srgbClr val="000000">
-                <a:alpha val="12000"/>
-              </a:srgbClr>
-            </a:outerShdw>
-          </a:effectLst>
-        </a:effectStyle>
-        <a:effectStyle>
-          <a:effectLst>
-            <a:outerShdw blurRad="171450" dist="57150" dir="5400000">
-              <a:srgbClr val="000000">
-                <a:alpha val="16000"/>
-              </a:srgbClr>
-            </a:outerShdw>
-          </a:effectLst>
-        </a:effectStyle>
-        <a:effectStyle>
-          <a:effectLst>
-            <a:outerShdw blurRad="266700" dist="95250" dir="5400000">
-              <a:srgbClr val="000000">
-                <a:alpha val="24000"/>
-              </a:srgbClr>
-            </a:outerShdw>
-          </a:effectLst>
-        </a:effectStyle>
-      </a:effectStyleLst>
-      <a:bgFillStyleLst>
-        <a:solidFill>
-          <a:schemeClr val="phClr"/>
-        </a:solidFill>
-        <a:solidFill>
-          <a:schemeClr val="phClr">
-            <a:tint val="95000"/>
-            <a:satMod val="170000"/>
-          </a:schemeClr>
-        </a:solidFill>
-        <a:gradFill>
-          <a:gsLst>
-            <a:gs pos="0">
-              <a:schemeClr val="phClr">
-                <a:tint val="93000"/>
-                <a:shade val="98000"/>
-                <a:lumMod val="102000"/>
-                <a:satMod val="150000"/>
-              </a:schemeClr>
-            </a:gs>
-            <a:gs pos="50000">
-              <a:schemeClr val="phClr">
-                <a:tint val="98000"/>
-                <a:shade val="90000"/>
-                <a:lumMod val="103000"/>
-                <a:satMod val="130000"/>
-              </a:schemeClr>
-            </a:gs>
-            <a:gs pos="100000">
-              <a:schemeClr val="phClr">
-                <a:shade val="63000"/>
-                <a:satMod val="120000"/>
-              </a:schemeClr>
-            </a:gs>
-          </a:gsLst>
-          <a:lin ang="5400000" scaled="0"/>
-        </a:gradFill>
-      </a:bgFillStyleLst>
-    </a:fmtScheme>
-  </a:themeElements>
-</a:theme>
-</file>
-
 <file path=ppt/slides/slide1.xml><?xml version="1.0" encoding="utf-8"?>
-<p:sld xmlns:p="http://schemas.openxmlformats.org/presentationml/2006/main">
+<p:sld xmlns:a="http://schemas.openxmlformats.org/drawingml/2006/main" xmlns:r="http://schemas.openxmlformats.org/officeDocument/2006/relationships" xmlns:p="http://schemas.openxmlformats.org/presentationml/2006/main">
   <p:cSld>
     <p:spTree>
       <p:nvGrpSpPr>
@@ -1942,37 +1611,42 @@
         <p:nvPr/>
       </p:nvGrpSpPr>
       <p:grpSpPr>
-        <a:xfrm xmlns:a="http://schemas.openxmlformats.org/drawingml/2006/main"/>
+        <a:xfrm>
+          <a:off x="0" y="0"/>
+          <a:ext cx="0" cy="0"/>
+          <a:chOff x="0" y="0"/>
+          <a:chExt cx="0" cy="0"/>
+        </a:xfrm>
       </p:grpSpPr>
       <p:sp>
         <p:nvSpPr>
-          <p:cNvPr id="1" name="Title-3-1">
-            <a:extLst xmlns:a="http://schemas.openxmlformats.org/drawingml/2006/main">
+          <p:cNvPr id="5" name="Title-3-1">
+            <a:extLst>
               <a:ext uri="{FF2B5EF4-FFF2-40B4-BE49-F238E27FC236}">
                 <a16:creationId xmlns:a16="http://schemas.microsoft.com/office/drawing/2014/main" id="{44DB822D-C25E-408C-BA69-F65896B3F0C9}"/>
               </a:ext>
             </a:extLst>
           </p:cNvPr>
           <p:cNvSpPr>
-            <a:spLocks xmlns:a="http://schemas.openxmlformats.org/drawingml/2006/main" noGrp="1"/>
-          </p:cNvSpPr>
-          <p:nvPr/>
-        </p:nvSpPr>
-        <p:spPr>
-          <a:xfrm xmlns:a="http://schemas.openxmlformats.org/drawingml/2006/main">
+            <a:spLocks noGrp="1"/>
+          </p:cNvSpPr>
+          <p:nvPr/>
+        </p:nvSpPr>
+        <p:spPr>
+          <a:xfrm>
             <a:off x="393668" y="1738789"/>
             <a:ext cx="9448800" cy="2491454"/>
           </a:xfrm>
-          <a:prstGeom xmlns:a="http://schemas.openxmlformats.org/drawingml/2006/main" prst="rect">
-            <a:avLst/>
-          </a:prstGeom>
-        </p:spPr>
-        <p:txBody>
-          <a:bodyPr xmlns:a="http://schemas.openxmlformats.org/drawingml/2006/main" lIns="0" tIns="0" rIns="0" bIns="0" anchor="b">
+          <a:prstGeom prst="rect">
+            <a:avLst/>
+          </a:prstGeom>
+        </p:spPr>
+        <p:txBody>
+          <a:bodyPr lIns="0" tIns="0" rIns="0" bIns="0" anchor="b">
             <a:noAutofit/>
           </a:bodyPr>
-          <a:lstStyle xmlns:a="http://schemas.openxmlformats.org/drawingml/2006/main"/>
-          <a:p xmlns:a="http://schemas.openxmlformats.org/drawingml/2006/main">
+          <a:lstStyle/>
+          <a:p>
             <a:pPr algn="l">
               <a:lnSpc>
                 <a:spcPct val="92000"/>
@@ -2008,32 +1682,32 @@
       <p:sp>
         <p:nvSpPr>
           <p:cNvPr id="2" name="Subtitle-4-2">
-            <a:extLst xmlns:a="http://schemas.openxmlformats.org/drawingml/2006/main">
+            <a:extLst>
               <a:ext uri="{FF2B5EF4-FFF2-40B4-BE49-F238E27FC236}">
                 <a16:creationId xmlns:a16="http://schemas.microsoft.com/office/drawing/2014/main" id="{D82D888A-360D-4A8A-90D3-042F76141E3C}"/>
               </a:ext>
             </a:extLst>
           </p:cNvPr>
           <p:cNvSpPr>
-            <a:spLocks xmlns:a="http://schemas.openxmlformats.org/drawingml/2006/main" noGrp="1"/>
-          </p:cNvSpPr>
-          <p:nvPr/>
-        </p:nvSpPr>
-        <p:spPr>
-          <a:xfrm xmlns:a="http://schemas.openxmlformats.org/drawingml/2006/main">
+            <a:spLocks noGrp="1"/>
+          </p:cNvSpPr>
+          <p:nvPr/>
+        </p:nvSpPr>
+        <p:spPr>
+          <a:xfrm>
             <a:off x="393668" y="4742212"/>
             <a:ext cx="5702332" cy="1080230"/>
           </a:xfrm>
-          <a:prstGeom xmlns:a="http://schemas.openxmlformats.org/drawingml/2006/main" prst="rect">
-            <a:avLst/>
-          </a:prstGeom>
-        </p:spPr>
-        <p:txBody>
-          <a:bodyPr xmlns:a="http://schemas.openxmlformats.org/drawingml/2006/main" lIns="0" tIns="0" rIns="0" bIns="0">
+          <a:prstGeom prst="rect">
+            <a:avLst/>
+          </a:prstGeom>
+        </p:spPr>
+        <p:txBody>
+          <a:bodyPr lIns="0" tIns="0" rIns="0" bIns="0">
             <a:noAutofit/>
           </a:bodyPr>
-          <a:lstStyle xmlns:a="http://schemas.openxmlformats.org/drawingml/2006/main"/>
-          <a:p xmlns:a="http://schemas.openxmlformats.org/drawingml/2006/main">
+          <a:lstStyle/>
+          <a:p>
             <a:pPr algn="l">
               <a:lnSpc>
                 <a:spcPct val="105000"/>
@@ -2068,32 +1742,32 @@
       <p:sp>
         <p:nvSpPr>
           <p:cNvPr id="3" name="Subtitle-4-3">
-            <a:extLst xmlns:a="http://schemas.openxmlformats.org/drawingml/2006/main">
+            <a:extLst>
               <a:ext uri="{FF2B5EF4-FFF2-40B4-BE49-F238E27FC236}">
                 <a16:creationId xmlns:a16="http://schemas.microsoft.com/office/drawing/2014/main" id="{AA241CA5-448F-4FF2-A602-A39C04E5DC68}"/>
               </a:ext>
             </a:extLst>
           </p:cNvPr>
           <p:cNvSpPr>
-            <a:spLocks xmlns:a="http://schemas.openxmlformats.org/drawingml/2006/main" noGrp="1"/>
-          </p:cNvSpPr>
-          <p:nvPr/>
-        </p:nvSpPr>
-        <p:spPr>
-          <a:xfrm xmlns:a="http://schemas.openxmlformats.org/drawingml/2006/main">
+            <a:spLocks noGrp="1"/>
+          </p:cNvSpPr>
+          <p:nvPr/>
+        </p:nvSpPr>
+        <p:spPr>
+          <a:xfrm>
             <a:off x="393668" y="392240"/>
             <a:ext cx="5702332" cy="649129"/>
           </a:xfrm>
-          <a:prstGeom xmlns:a="http://schemas.openxmlformats.org/drawingml/2006/main" prst="rect">
-            <a:avLst/>
-          </a:prstGeom>
-        </p:spPr>
-        <p:txBody>
-          <a:bodyPr xmlns:a="http://schemas.openxmlformats.org/drawingml/2006/main" lIns="0" tIns="0" rIns="0" bIns="0">
+          <a:prstGeom prst="rect">
+            <a:avLst/>
+          </a:prstGeom>
+        </p:spPr>
+        <p:txBody>
+          <a:bodyPr lIns="0" tIns="0" rIns="0" bIns="0">
             <a:noAutofit/>
           </a:bodyPr>
-          <a:lstStyle xmlns:a="http://schemas.openxmlformats.org/drawingml/2006/main"/>
-          <a:p xmlns:a="http://schemas.openxmlformats.org/drawingml/2006/main">
+          <a:lstStyle/>
+          <a:p>
             <a:pPr algn="l">
               <a:lnSpc>
                 <a:spcPct val="105000"/>
@@ -2128,29 +1802,29 @@
       <p:sp>
         <p:nvSpPr>
           <p:cNvPr id="4" name="veilpay-accent">
-            <a:extLst xmlns:a="http://schemas.openxmlformats.org/drawingml/2006/main">
+            <a:extLst>
               <a:ext uri="{FF2B5EF4-FFF2-40B4-BE49-F238E27FC236}">
                 <a16:creationId xmlns:a16="http://schemas.microsoft.com/office/drawing/2014/main" id="{FAACFF0C-7381-4871-B1C2-9376DF2C39A5}"/>
               </a:ext>
             </a:extLst>
           </p:cNvPr>
           <p:cNvSpPr>
-            <a:spLocks xmlns:a="http://schemas.openxmlformats.org/drawingml/2006/main" noGrp="1"/>
-          </p:cNvSpPr>
-          <p:nvPr/>
-        </p:nvSpPr>
-        <p:spPr>
-          <a:xfrm xmlns:a="http://schemas.openxmlformats.org/drawingml/2006/main">
+            <a:spLocks noGrp="1"/>
+          </p:cNvSpPr>
+          <p:nvPr/>
+        </p:nvSpPr>
+        <p:spPr>
+          <a:xfrm>
             <a:off x="0" y="0"/>
             <a:ext cx="85725" cy="6858000"/>
           </a:xfrm>
-          <a:prstGeom xmlns:a="http://schemas.openxmlformats.org/drawingml/2006/main" prst="rect">
-            <a:avLst/>
-          </a:prstGeom>
-          <a:solidFill xmlns:a="http://schemas.openxmlformats.org/drawingml/2006/main">
+          <a:prstGeom prst="rect">
+            <a:avLst/>
+          </a:prstGeom>
+          <a:solidFill>
             <a:srgbClr val="6DCBF4"/>
           </a:solidFill>
-          <a:ln xmlns:a="http://schemas.openxmlformats.org/drawingml/2006/main" w="0">
+          <a:ln w="0">
             <a:noFill/>
             <a:prstDash val="solid"/>
           </a:ln>
@@ -2163,11 +1837,14 @@
       </p:ext>
     </p:extLst>
   </p:cSld>
+  <p:clrMapOvr>
+    <a:masterClrMapping/>
+  </p:clrMapOvr>
 </p:sld>
 </file>
 
 <file path=ppt/slides/slide10.xml><?xml version="1.0" encoding="utf-8"?>
-<p:sld xmlns:p="http://schemas.openxmlformats.org/presentationml/2006/main">
+<p:sld xmlns:a="http://schemas.openxmlformats.org/drawingml/2006/main" xmlns:r="http://schemas.openxmlformats.org/officeDocument/2006/relationships" xmlns:p="http://schemas.openxmlformats.org/presentationml/2006/main">
   <p:cSld>
     <p:spTree>
       <p:nvGrpSpPr>
@@ -2176,33 +1853,38 @@
         <p:nvPr/>
       </p:nvGrpSpPr>
       <p:grpSpPr>
-        <a:xfrm xmlns:a="http://schemas.openxmlformats.org/drawingml/2006/main"/>
+        <a:xfrm>
+          <a:off x="0" y="0"/>
+          <a:ext cx="0" cy="0"/>
+          <a:chOff x="0" y="0"/>
+          <a:chExt cx="0" cy="0"/>
+        </a:xfrm>
       </p:grpSpPr>
       <p:sp>
         <p:nvSpPr>
-          <p:cNvPr id="1" name="Rounded-Rectangle-5-1">
-            <a:extLst xmlns:a="http://schemas.openxmlformats.org/drawingml/2006/main">
+          <p:cNvPr id="14" name="Rounded-Rectangle-5-1">
+            <a:extLst>
               <a:ext uri="{FF2B5EF4-FFF2-40B4-BE49-F238E27FC236}">
                 <a16:creationId xmlns:a16="http://schemas.microsoft.com/office/drawing/2014/main" id="{DF964145-F966-41E1-A815-3BE1C5F13819}"/>
               </a:ext>
             </a:extLst>
           </p:cNvPr>
           <p:cNvSpPr>
-            <a:spLocks xmlns:a="http://schemas.openxmlformats.org/drawingml/2006/main" noGrp="1"/>
-          </p:cNvSpPr>
-          <p:nvPr/>
-        </p:nvSpPr>
-        <p:spPr>
-          <a:xfrm xmlns:a="http://schemas.openxmlformats.org/drawingml/2006/main">
+            <a:spLocks noGrp="1"/>
+          </p:cNvSpPr>
+          <p:nvPr/>
+        </p:nvSpPr>
+        <p:spPr>
+          <a:xfrm>
             <a:off x="393668" y="3022568"/>
             <a:ext cx="3568732" cy="2971800"/>
           </a:xfrm>
-          <a:prstGeom xmlns:a="http://schemas.openxmlformats.org/drawingml/2006/main" prst="roundRect">
+          <a:prstGeom prst="roundRect">
             <a:avLst>
               <a:gd name="adj" fmla="val 2564"/>
             </a:avLst>
           </a:prstGeom>
-          <a:solidFill xmlns:a="http://schemas.openxmlformats.org/drawingml/2006/main">
+          <a:solidFill>
             <a:srgbClr val="F2F2F2"/>
           </a:solidFill>
         </p:spPr>
@@ -2210,28 +1892,28 @@
       <p:sp>
         <p:nvSpPr>
           <p:cNvPr id="2" name="Rounded-Rectangle-6-2">
-            <a:extLst xmlns:a="http://schemas.openxmlformats.org/drawingml/2006/main">
+            <a:extLst>
               <a:ext uri="{FF2B5EF4-FFF2-40B4-BE49-F238E27FC236}">
                 <a16:creationId xmlns:a16="http://schemas.microsoft.com/office/drawing/2014/main" id="{9A9FA403-A98F-4D13-A618-B52C0E8C4721}"/>
               </a:ext>
             </a:extLst>
           </p:cNvPr>
           <p:cNvSpPr>
-            <a:spLocks xmlns:a="http://schemas.openxmlformats.org/drawingml/2006/main" noGrp="1"/>
-          </p:cNvSpPr>
-          <p:nvPr/>
-        </p:nvSpPr>
-        <p:spPr>
-          <a:xfrm xmlns:a="http://schemas.openxmlformats.org/drawingml/2006/main">
+            <a:spLocks noGrp="1"/>
+          </p:cNvSpPr>
+          <p:nvPr/>
+        </p:nvSpPr>
+        <p:spPr>
+          <a:xfrm>
             <a:off x="4311682" y="3022568"/>
             <a:ext cx="3568732" cy="2971800"/>
           </a:xfrm>
-          <a:prstGeom xmlns:a="http://schemas.openxmlformats.org/drawingml/2006/main" prst="roundRect">
+          <a:prstGeom prst="roundRect">
             <a:avLst>
               <a:gd name="adj" fmla="val 2564"/>
             </a:avLst>
           </a:prstGeom>
-          <a:solidFill xmlns:a="http://schemas.openxmlformats.org/drawingml/2006/main">
+          <a:solidFill>
             <a:srgbClr val="F2F2F2"/>
           </a:solidFill>
         </p:spPr>
@@ -2239,28 +1921,28 @@
       <p:sp>
         <p:nvSpPr>
           <p:cNvPr id="3" name="Rounded-Rectangle-7-3">
-            <a:extLst xmlns:a="http://schemas.openxmlformats.org/drawingml/2006/main">
+            <a:extLst>
               <a:ext uri="{FF2B5EF4-FFF2-40B4-BE49-F238E27FC236}">
                 <a16:creationId xmlns:a16="http://schemas.microsoft.com/office/drawing/2014/main" id="{8F0B00C3-6410-423A-9324-D48AB65C7D18}"/>
               </a:ext>
             </a:extLst>
           </p:cNvPr>
           <p:cNvSpPr>
-            <a:spLocks xmlns:a="http://schemas.openxmlformats.org/drawingml/2006/main" noGrp="1"/>
-          </p:cNvSpPr>
-          <p:nvPr/>
-        </p:nvSpPr>
-        <p:spPr>
-          <a:xfrm xmlns:a="http://schemas.openxmlformats.org/drawingml/2006/main">
+            <a:spLocks noGrp="1"/>
+          </p:cNvSpPr>
+          <p:nvPr/>
+        </p:nvSpPr>
+        <p:spPr>
+          <a:xfrm>
             <a:off x="8232267" y="3022568"/>
             <a:ext cx="3568732" cy="2971800"/>
           </a:xfrm>
-          <a:prstGeom xmlns:a="http://schemas.openxmlformats.org/drawingml/2006/main" prst="roundRect">
+          <a:prstGeom prst="roundRect">
             <a:avLst>
               <a:gd name="adj" fmla="val 2564"/>
             </a:avLst>
           </a:prstGeom>
-          <a:solidFill xmlns:a="http://schemas.openxmlformats.org/drawingml/2006/main">
+          <a:solidFill>
             <a:srgbClr val="F2F2F2"/>
           </a:solidFill>
         </p:spPr>
@@ -2268,30 +1950,30 @@
       <p:sp>
         <p:nvSpPr>
           <p:cNvPr id="4" name="Slide-Number-Placeholder-1-4">
-            <a:extLst xmlns:a="http://schemas.openxmlformats.org/drawingml/2006/main">
+            <a:extLst>
               <a:ext uri="{FF2B5EF4-FFF2-40B4-BE49-F238E27FC236}">
                 <a16:creationId xmlns:a16="http://schemas.microsoft.com/office/drawing/2014/main" id="{50852000-E254-42C6-8F64-8F3090744547}"/>
               </a:ext>
             </a:extLst>
           </p:cNvPr>
           <p:cNvSpPr>
-            <a:spLocks xmlns:a="http://schemas.openxmlformats.org/drawingml/2006/main" noGrp="1"/>
-          </p:cNvSpPr>
-          <p:nvPr/>
-        </p:nvSpPr>
-        <p:spPr>
-          <a:xfrm xmlns:a="http://schemas.openxmlformats.org/drawingml/2006/main">
+            <a:spLocks noGrp="1"/>
+          </p:cNvSpPr>
+          <p:nvPr/>
+        </p:nvSpPr>
+        <p:spPr>
+          <a:xfrm>
             <a:off x="11279315" y="6279261"/>
             <a:ext cx="518922" cy="241268"/>
           </a:xfrm>
-          <a:prstGeom xmlns:a="http://schemas.openxmlformats.org/drawingml/2006/main" prst="rect">
-            <a:avLst/>
-          </a:prstGeom>
-        </p:spPr>
-        <p:txBody>
-          <a:bodyPr xmlns:a="http://schemas.openxmlformats.org/drawingml/2006/main" lIns="0" tIns="0" rIns="0" bIns="0" anchor="b"/>
-          <a:lstStyle xmlns:a="http://schemas.openxmlformats.org/drawingml/2006/main"/>
-          <a:p xmlns:a="http://schemas.openxmlformats.org/drawingml/2006/main">
+          <a:prstGeom prst="rect">
+            <a:avLst/>
+          </a:prstGeom>
+        </p:spPr>
+        <p:txBody>
+          <a:bodyPr lIns="0" tIns="0" rIns="0" bIns="0" anchor="b"/>
+          <a:lstStyle/>
+          <a:p>
             <a:pPr algn="r">
               <a:defRPr sz="1000">
                 <a:solidFill>
@@ -2311,32 +1993,32 @@
       <p:sp>
         <p:nvSpPr>
           <p:cNvPr id="5" name="Title-2-5">
-            <a:extLst xmlns:a="http://schemas.openxmlformats.org/drawingml/2006/main">
+            <a:extLst>
               <a:ext uri="{FF2B5EF4-FFF2-40B4-BE49-F238E27FC236}">
                 <a16:creationId xmlns:a16="http://schemas.microsoft.com/office/drawing/2014/main" id="{B9B7B2FA-7FA6-44E4-B33F-4E70A2EBBBF4}"/>
               </a:ext>
             </a:extLst>
           </p:cNvPr>
           <p:cNvSpPr>
-            <a:spLocks xmlns:a="http://schemas.openxmlformats.org/drawingml/2006/main" noGrp="1"/>
-          </p:cNvSpPr>
-          <p:nvPr/>
-        </p:nvSpPr>
-        <p:spPr>
-          <a:xfrm xmlns:a="http://schemas.openxmlformats.org/drawingml/2006/main">
+            <a:spLocks noGrp="1"/>
+          </p:cNvSpPr>
+          <p:nvPr/>
+        </p:nvSpPr>
+        <p:spPr>
+          <a:xfrm>
             <a:off x="393668" y="344043"/>
             <a:ext cx="11404568" cy="1047464"/>
           </a:xfrm>
-          <a:prstGeom xmlns:a="http://schemas.openxmlformats.org/drawingml/2006/main" prst="rect">
-            <a:avLst/>
-          </a:prstGeom>
-        </p:spPr>
-        <p:txBody>
-          <a:bodyPr xmlns:a="http://schemas.openxmlformats.org/drawingml/2006/main" lIns="0" tIns="0" rIns="0" bIns="0" anchor="t">
-            <a:normAutofit fontScale="100000"/>
+          <a:prstGeom prst="rect">
+            <a:avLst/>
+          </a:prstGeom>
+        </p:spPr>
+        <p:txBody>
+          <a:bodyPr lIns="0" tIns="0" rIns="0" bIns="0" anchor="t">
+            <a:normAutofit/>
           </a:bodyPr>
-          <a:lstStyle xmlns:a="http://schemas.openxmlformats.org/drawingml/2006/main"/>
-          <a:p xmlns:a="http://schemas.openxmlformats.org/drawingml/2006/main">
+          <a:lstStyle/>
+          <a:p>
             <a:pPr algn="l">
               <a:lnSpc>
                 <a:spcPct val="105000"/>
@@ -2371,32 +2053,32 @@
       <p:sp>
         <p:nvSpPr>
           <p:cNvPr id="6" name="Content-Placeholder-9-6">
-            <a:extLst xmlns:a="http://schemas.openxmlformats.org/drawingml/2006/main">
+            <a:extLst>
               <a:ext uri="{FF2B5EF4-FFF2-40B4-BE49-F238E27FC236}">
                 <a16:creationId xmlns:a16="http://schemas.microsoft.com/office/drawing/2014/main" id="{83D9469B-1948-4202-8428-40152463B504}"/>
               </a:ext>
             </a:extLst>
           </p:cNvPr>
           <p:cNvSpPr>
-            <a:spLocks xmlns:a="http://schemas.openxmlformats.org/drawingml/2006/main" noGrp="1"/>
-          </p:cNvSpPr>
-          <p:nvPr/>
-        </p:nvSpPr>
-        <p:spPr>
-          <a:xfrm xmlns:a="http://schemas.openxmlformats.org/drawingml/2006/main">
+            <a:spLocks noGrp="1"/>
+          </p:cNvSpPr>
+          <p:nvPr/>
+        </p:nvSpPr>
+        <p:spPr>
+          <a:xfrm>
             <a:off x="702374" y="4900613"/>
             <a:ext cx="2949607" cy="819150"/>
           </a:xfrm>
-          <a:prstGeom xmlns:a="http://schemas.openxmlformats.org/drawingml/2006/main" prst="rect">
-            <a:avLst/>
-          </a:prstGeom>
-        </p:spPr>
-        <p:txBody>
-          <a:bodyPr xmlns:a="http://schemas.openxmlformats.org/drawingml/2006/main" lIns="91440" tIns="45720" rIns="91440" bIns="45720">
-            <a:normAutofit fontScale="100000"/>
+          <a:prstGeom prst="rect">
+            <a:avLst/>
+          </a:prstGeom>
+        </p:spPr>
+        <p:txBody>
+          <a:bodyPr lIns="91440" tIns="45720" rIns="91440" bIns="45720">
+            <a:normAutofit/>
           </a:bodyPr>
-          <a:lstStyle xmlns:a="http://schemas.openxmlformats.org/drawingml/2006/main"/>
-          <a:p xmlns:a="http://schemas.openxmlformats.org/drawingml/2006/main">
+          <a:lstStyle/>
+          <a:p>
             <a:pPr algn="l">
               <a:lnSpc>
                 <a:spcPct val="105000"/>
@@ -2431,32 +2113,32 @@
       <p:sp>
         <p:nvSpPr>
           <p:cNvPr id="7" name="Content-Placeholder-10-7">
-            <a:extLst xmlns:a="http://schemas.openxmlformats.org/drawingml/2006/main">
+            <a:extLst>
               <a:ext uri="{FF2B5EF4-FFF2-40B4-BE49-F238E27FC236}">
                 <a16:creationId xmlns:a16="http://schemas.microsoft.com/office/drawing/2014/main" id="{08D76C4C-7DAD-4B83-A959-25153BCE1CE0}"/>
               </a:ext>
             </a:extLst>
           </p:cNvPr>
           <p:cNvSpPr>
-            <a:spLocks xmlns:a="http://schemas.openxmlformats.org/drawingml/2006/main" noGrp="1"/>
-          </p:cNvSpPr>
-          <p:nvPr/>
-        </p:nvSpPr>
-        <p:spPr>
-          <a:xfrm xmlns:a="http://schemas.openxmlformats.org/drawingml/2006/main">
+            <a:spLocks noGrp="1"/>
+          </p:cNvSpPr>
+          <p:nvPr/>
+        </p:nvSpPr>
+        <p:spPr>
+          <a:xfrm>
             <a:off x="8541830" y="4900613"/>
             <a:ext cx="2949607" cy="819150"/>
           </a:xfrm>
-          <a:prstGeom xmlns:a="http://schemas.openxmlformats.org/drawingml/2006/main" prst="rect">
-            <a:avLst/>
-          </a:prstGeom>
-        </p:spPr>
-        <p:txBody>
-          <a:bodyPr xmlns:a="http://schemas.openxmlformats.org/drawingml/2006/main" lIns="91440" tIns="45720" rIns="91440" bIns="45720">
-            <a:normAutofit fontScale="100000"/>
+          <a:prstGeom prst="rect">
+            <a:avLst/>
+          </a:prstGeom>
+        </p:spPr>
+        <p:txBody>
+          <a:bodyPr lIns="91440" tIns="45720" rIns="91440" bIns="45720">
+            <a:normAutofit/>
           </a:bodyPr>
-          <a:lstStyle xmlns:a="http://schemas.openxmlformats.org/drawingml/2006/main"/>
-          <a:p xmlns:a="http://schemas.openxmlformats.org/drawingml/2006/main">
+          <a:lstStyle/>
+          <a:p>
             <a:pPr algn="l">
               <a:lnSpc>
                 <a:spcPct val="105000"/>
@@ -2491,32 +2173,32 @@
       <p:sp>
         <p:nvSpPr>
           <p:cNvPr id="8" name="Content-Placeholder-11-8">
-            <a:extLst xmlns:a="http://schemas.openxmlformats.org/drawingml/2006/main">
+            <a:extLst>
               <a:ext uri="{FF2B5EF4-FFF2-40B4-BE49-F238E27FC236}">
                 <a16:creationId xmlns:a16="http://schemas.microsoft.com/office/drawing/2014/main" id="{25E6D2FC-C943-438D-9880-B21BFC624E6D}"/>
               </a:ext>
             </a:extLst>
           </p:cNvPr>
           <p:cNvSpPr>
-            <a:spLocks xmlns:a="http://schemas.openxmlformats.org/drawingml/2006/main" noGrp="1"/>
-          </p:cNvSpPr>
-          <p:nvPr/>
-        </p:nvSpPr>
-        <p:spPr>
-          <a:xfrm xmlns:a="http://schemas.openxmlformats.org/drawingml/2006/main">
+            <a:spLocks noGrp="1"/>
+          </p:cNvSpPr>
+          <p:nvPr/>
+        </p:nvSpPr>
+        <p:spPr>
+          <a:xfrm>
             <a:off x="4621244" y="4900613"/>
             <a:ext cx="2949607" cy="819150"/>
           </a:xfrm>
-          <a:prstGeom xmlns:a="http://schemas.openxmlformats.org/drawingml/2006/main" prst="rect">
-            <a:avLst/>
-          </a:prstGeom>
-        </p:spPr>
-        <p:txBody>
-          <a:bodyPr xmlns:a="http://schemas.openxmlformats.org/drawingml/2006/main" lIns="91440" tIns="45720" rIns="91440" bIns="45720">
-            <a:normAutofit fontScale="100000"/>
+          <a:prstGeom prst="rect">
+            <a:avLst/>
+          </a:prstGeom>
+        </p:spPr>
+        <p:txBody>
+          <a:bodyPr lIns="91440" tIns="45720" rIns="91440" bIns="45720">
+            <a:normAutofit/>
           </a:bodyPr>
-          <a:lstStyle xmlns:a="http://schemas.openxmlformats.org/drawingml/2006/main"/>
-          <a:p xmlns:a="http://schemas.openxmlformats.org/drawingml/2006/main">
+          <a:lstStyle/>
+          <a:p>
             <a:pPr algn="l">
               <a:lnSpc>
                 <a:spcPct val="105000"/>
@@ -2551,32 +2233,32 @@
       <p:sp>
         <p:nvSpPr>
           <p:cNvPr id="9" name="Content-Placeholder-9-9">
-            <a:extLst xmlns:a="http://schemas.openxmlformats.org/drawingml/2006/main">
+            <a:extLst>
               <a:ext uri="{FF2B5EF4-FFF2-40B4-BE49-F238E27FC236}">
                 <a16:creationId xmlns:a16="http://schemas.microsoft.com/office/drawing/2014/main" id="{623F0A14-78E6-4545-AF4B-B20601E3CFEA}"/>
               </a:ext>
             </a:extLst>
           </p:cNvPr>
           <p:cNvSpPr>
-            <a:spLocks xmlns:a="http://schemas.openxmlformats.org/drawingml/2006/main" noGrp="1"/>
-          </p:cNvSpPr>
-          <p:nvPr/>
-        </p:nvSpPr>
-        <p:spPr>
-          <a:xfrm xmlns:a="http://schemas.openxmlformats.org/drawingml/2006/main">
+            <a:spLocks noGrp="1"/>
+          </p:cNvSpPr>
+          <p:nvPr/>
+        </p:nvSpPr>
+        <p:spPr>
+          <a:xfrm>
             <a:off x="702374" y="3429000"/>
             <a:ext cx="2940082" cy="1359313"/>
           </a:xfrm>
-          <a:prstGeom xmlns:a="http://schemas.openxmlformats.org/drawingml/2006/main" prst="rect">
-            <a:avLst/>
-          </a:prstGeom>
-        </p:spPr>
-        <p:txBody>
-          <a:bodyPr xmlns:a="http://schemas.openxmlformats.org/drawingml/2006/main" lIns="0" tIns="0" rIns="0" bIns="0" anchor="b">
-            <a:normAutofit fontScale="100000"/>
+          <a:prstGeom prst="rect">
+            <a:avLst/>
+          </a:prstGeom>
+        </p:spPr>
+        <p:txBody>
+          <a:bodyPr lIns="0" tIns="0" rIns="0" bIns="0" anchor="b">
+            <a:normAutofit/>
           </a:bodyPr>
-          <a:lstStyle xmlns:a="http://schemas.openxmlformats.org/drawingml/2006/main"/>
-          <a:p xmlns:a="http://schemas.openxmlformats.org/drawingml/2006/main">
+          <a:lstStyle/>
+          <a:p>
             <a:pPr algn="l">
               <a:lnSpc>
                 <a:spcPct val="105000"/>
@@ -2611,32 +2293,32 @@
       <p:sp>
         <p:nvSpPr>
           <p:cNvPr id="10" name="Content-Placeholder-9-10">
-            <a:extLst xmlns:a="http://schemas.openxmlformats.org/drawingml/2006/main">
+            <a:extLst>
               <a:ext uri="{FF2B5EF4-FFF2-40B4-BE49-F238E27FC236}">
                 <a16:creationId xmlns:a16="http://schemas.microsoft.com/office/drawing/2014/main" id="{5F2B0FB8-0B9F-4A60-A2B1-28FAEF6E9004}"/>
               </a:ext>
             </a:extLst>
           </p:cNvPr>
           <p:cNvSpPr>
-            <a:spLocks xmlns:a="http://schemas.openxmlformats.org/drawingml/2006/main" noGrp="1"/>
-          </p:cNvSpPr>
-          <p:nvPr/>
-        </p:nvSpPr>
-        <p:spPr>
-          <a:xfrm xmlns:a="http://schemas.openxmlformats.org/drawingml/2006/main">
+            <a:spLocks noGrp="1"/>
+          </p:cNvSpPr>
+          <p:nvPr/>
+        </p:nvSpPr>
+        <p:spPr>
+          <a:xfrm>
             <a:off x="4612958" y="3429000"/>
             <a:ext cx="2940082" cy="1359313"/>
           </a:xfrm>
-          <a:prstGeom xmlns:a="http://schemas.openxmlformats.org/drawingml/2006/main" prst="rect">
-            <a:avLst/>
-          </a:prstGeom>
-        </p:spPr>
-        <p:txBody>
-          <a:bodyPr xmlns:a="http://schemas.openxmlformats.org/drawingml/2006/main" lIns="0" tIns="0" rIns="0" bIns="0" anchor="b">
-            <a:normAutofit fontScale="100000"/>
+          <a:prstGeom prst="rect">
+            <a:avLst/>
+          </a:prstGeom>
+        </p:spPr>
+        <p:txBody>
+          <a:bodyPr lIns="0" tIns="0" rIns="0" bIns="0" anchor="b">
+            <a:normAutofit/>
           </a:bodyPr>
-          <a:lstStyle xmlns:a="http://schemas.openxmlformats.org/drawingml/2006/main"/>
-          <a:p xmlns:a="http://schemas.openxmlformats.org/drawingml/2006/main">
+          <a:lstStyle/>
+          <a:p>
             <a:pPr algn="l">
               <a:lnSpc>
                 <a:spcPct val="105000"/>
@@ -2671,32 +2353,32 @@
       <p:sp>
         <p:nvSpPr>
           <p:cNvPr id="11" name="Content-Placeholder-9-11">
-            <a:extLst xmlns:a="http://schemas.openxmlformats.org/drawingml/2006/main">
+            <a:extLst>
               <a:ext uri="{FF2B5EF4-FFF2-40B4-BE49-F238E27FC236}">
                 <a16:creationId xmlns:a16="http://schemas.microsoft.com/office/drawing/2014/main" id="{45200BDB-87ED-4894-8B7E-6954DEE096FB}"/>
               </a:ext>
             </a:extLst>
           </p:cNvPr>
           <p:cNvSpPr>
-            <a:spLocks xmlns:a="http://schemas.openxmlformats.org/drawingml/2006/main" noGrp="1"/>
-          </p:cNvSpPr>
-          <p:nvPr/>
-        </p:nvSpPr>
-        <p:spPr>
-          <a:xfrm xmlns:a="http://schemas.openxmlformats.org/drawingml/2006/main">
+            <a:spLocks noGrp="1"/>
+          </p:cNvSpPr>
+          <p:nvPr/>
+        </p:nvSpPr>
+        <p:spPr>
+          <a:xfrm>
             <a:off x="8562404" y="3429000"/>
             <a:ext cx="2940082" cy="1359313"/>
           </a:xfrm>
-          <a:prstGeom xmlns:a="http://schemas.openxmlformats.org/drawingml/2006/main" prst="rect">
-            <a:avLst/>
-          </a:prstGeom>
-        </p:spPr>
-        <p:txBody>
-          <a:bodyPr xmlns:a="http://schemas.openxmlformats.org/drawingml/2006/main" lIns="0" tIns="0" rIns="0" bIns="0" anchor="b">
-            <a:normAutofit fontScale="100000"/>
+          <a:prstGeom prst="rect">
+            <a:avLst/>
+          </a:prstGeom>
+        </p:spPr>
+        <p:txBody>
+          <a:bodyPr lIns="0" tIns="0" rIns="0" bIns="0" anchor="b">
+            <a:normAutofit/>
           </a:bodyPr>
-          <a:lstStyle xmlns:a="http://schemas.openxmlformats.org/drawingml/2006/main"/>
-          <a:p xmlns:a="http://schemas.openxmlformats.org/drawingml/2006/main">
+          <a:lstStyle/>
+          <a:p>
             <a:pPr algn="l">
               <a:lnSpc>
                 <a:spcPct val="105000"/>
@@ -2731,32 +2413,32 @@
       <p:sp>
         <p:nvSpPr>
           <p:cNvPr id="12" name="Content-Placeholder-15-12">
-            <a:extLst xmlns:a="http://schemas.openxmlformats.org/drawingml/2006/main">
+            <a:extLst>
               <a:ext uri="{FF2B5EF4-FFF2-40B4-BE49-F238E27FC236}">
                 <a16:creationId xmlns:a16="http://schemas.microsoft.com/office/drawing/2014/main" id="{5D918152-014D-4A94-818C-5A3BB2B7AB6C}"/>
               </a:ext>
             </a:extLst>
           </p:cNvPr>
           <p:cNvSpPr>
-            <a:spLocks xmlns:a="http://schemas.openxmlformats.org/drawingml/2006/main" noGrp="1"/>
-          </p:cNvSpPr>
-          <p:nvPr/>
-        </p:nvSpPr>
-        <p:spPr>
-          <a:xfrm xmlns:a="http://schemas.openxmlformats.org/drawingml/2006/main">
+            <a:spLocks noGrp="1"/>
+          </p:cNvSpPr>
+          <p:nvPr/>
+        </p:nvSpPr>
+        <p:spPr>
+          <a:xfrm>
             <a:off x="393668" y="1138333"/>
             <a:ext cx="11404568" cy="1599438"/>
           </a:xfrm>
-          <a:prstGeom xmlns:a="http://schemas.openxmlformats.org/drawingml/2006/main" prst="rect">
-            <a:avLst/>
-          </a:prstGeom>
-        </p:spPr>
-        <p:txBody>
-          <a:bodyPr xmlns:a="http://schemas.openxmlformats.org/drawingml/2006/main" lIns="0" tIns="0" rIns="0" bIns="0">
+          <a:prstGeom prst="rect">
+            <a:avLst/>
+          </a:prstGeom>
+        </p:spPr>
+        <p:txBody>
+          <a:bodyPr lIns="0" tIns="0" rIns="0" bIns="0">
             <a:noAutofit/>
           </a:bodyPr>
-          <a:lstStyle xmlns:a="http://schemas.openxmlformats.org/drawingml/2006/main"/>
-          <a:p xmlns:a="http://schemas.openxmlformats.org/drawingml/2006/main">
+          <a:lstStyle/>
+          <a:p>
             <a:pPr algn="l">
               <a:lnSpc>
                 <a:spcPct val="105000"/>
@@ -2786,7 +2468,7 @@
               <a:t>VERIFIED BUILD PROGRESS</a:t>
             </a:r>
           </a:p>
-          <a:p xmlns:a="http://schemas.openxmlformats.org/drawingml/2006/main">
+          <a:p>
             <a:pPr algn="l">
               <a:lnSpc>
                 <a:spcPct val="105000"/>
@@ -2821,29 +2503,29 @@
       <p:sp>
         <p:nvSpPr>
           <p:cNvPr id="13" name="veilpay-accent">
-            <a:extLst xmlns:a="http://schemas.openxmlformats.org/drawingml/2006/main">
+            <a:extLst>
               <a:ext uri="{FF2B5EF4-FFF2-40B4-BE49-F238E27FC236}">
                 <a16:creationId xmlns:a16="http://schemas.microsoft.com/office/drawing/2014/main" id="{B9C8E727-6762-4A30-B85D-3943FA9A34A3}"/>
               </a:ext>
             </a:extLst>
           </p:cNvPr>
           <p:cNvSpPr>
-            <a:spLocks xmlns:a="http://schemas.openxmlformats.org/drawingml/2006/main" noGrp="1"/>
-          </p:cNvSpPr>
-          <p:nvPr/>
-        </p:nvSpPr>
-        <p:spPr>
-          <a:xfrm xmlns:a="http://schemas.openxmlformats.org/drawingml/2006/main">
+            <a:spLocks noGrp="1"/>
+          </p:cNvSpPr>
+          <p:nvPr/>
+        </p:nvSpPr>
+        <p:spPr>
+          <a:xfrm>
             <a:off x="0" y="0"/>
             <a:ext cx="85725" cy="6858000"/>
           </a:xfrm>
-          <a:prstGeom xmlns:a="http://schemas.openxmlformats.org/drawingml/2006/main" prst="rect">
-            <a:avLst/>
-          </a:prstGeom>
-          <a:solidFill xmlns:a="http://schemas.openxmlformats.org/drawingml/2006/main">
+          <a:prstGeom prst="rect">
+            <a:avLst/>
+          </a:prstGeom>
+          <a:solidFill>
             <a:srgbClr val="6DCBF4"/>
           </a:solidFill>
-          <a:ln xmlns:a="http://schemas.openxmlformats.org/drawingml/2006/main" w="0">
+          <a:ln w="0">
             <a:noFill/>
             <a:prstDash val="solid"/>
           </a:ln>
@@ -2856,11 +2538,14 @@
       </p:ext>
     </p:extLst>
   </p:cSld>
+  <p:clrMapOvr>
+    <a:masterClrMapping/>
+  </p:clrMapOvr>
 </p:sld>
 </file>
 
 <file path=ppt/slides/slide11.xml><?xml version="1.0" encoding="utf-8"?>
-<p:sld xmlns:p="http://schemas.openxmlformats.org/presentationml/2006/main">
+<p:sld xmlns:a="http://schemas.openxmlformats.org/drawingml/2006/main" xmlns:r="http://schemas.openxmlformats.org/officeDocument/2006/relationships" xmlns:p="http://schemas.openxmlformats.org/presentationml/2006/main">
   <p:cSld>
     <p:spTree>
       <p:nvGrpSpPr>
@@ -2869,35 +2554,40 @@
         <p:nvPr/>
       </p:nvGrpSpPr>
       <p:grpSpPr>
-        <a:xfrm xmlns:a="http://schemas.openxmlformats.org/drawingml/2006/main"/>
+        <a:xfrm>
+          <a:off x="0" y="0"/>
+          <a:ext cx="0" cy="0"/>
+          <a:chOff x="0" y="0"/>
+          <a:chExt cx="0" cy="0"/>
+        </a:xfrm>
       </p:grpSpPr>
       <p:sp>
         <p:nvSpPr>
-          <p:cNvPr id="1" name="Slide-Number-Placeholder-3-2">
-            <a:extLst xmlns:a="http://schemas.openxmlformats.org/drawingml/2006/main">
+          <p:cNvPr id="3" name="Slide-Number-Placeholder-3-2">
+            <a:extLst>
               <a:ext uri="{FF2B5EF4-FFF2-40B4-BE49-F238E27FC236}">
                 <a16:creationId xmlns:a16="http://schemas.microsoft.com/office/drawing/2014/main" id="{15B1AB5D-3551-4133-9EE7-F029F77CACB9}"/>
               </a:ext>
             </a:extLst>
           </p:cNvPr>
           <p:cNvSpPr>
-            <a:spLocks xmlns:a="http://schemas.openxmlformats.org/drawingml/2006/main" noGrp="1"/>
-          </p:cNvSpPr>
-          <p:nvPr/>
-        </p:nvSpPr>
-        <p:spPr>
-          <a:xfrm xmlns:a="http://schemas.openxmlformats.org/drawingml/2006/main">
+            <a:spLocks noGrp="1"/>
+          </p:cNvSpPr>
+          <p:nvPr/>
+        </p:nvSpPr>
+        <p:spPr>
+          <a:xfrm>
             <a:off x="11279315" y="6279261"/>
             <a:ext cx="518922" cy="241268"/>
           </a:xfrm>
-          <a:prstGeom xmlns:a="http://schemas.openxmlformats.org/drawingml/2006/main" prst="rect">
-            <a:avLst/>
-          </a:prstGeom>
-        </p:spPr>
-        <p:txBody>
-          <a:bodyPr xmlns:a="http://schemas.openxmlformats.org/drawingml/2006/main" lIns="0" tIns="0" rIns="0" bIns="0" anchor="b"/>
-          <a:lstStyle xmlns:a="http://schemas.openxmlformats.org/drawingml/2006/main"/>
-          <a:p xmlns:a="http://schemas.openxmlformats.org/drawingml/2006/main">
+          <a:prstGeom prst="rect">
+            <a:avLst/>
+          </a:prstGeom>
+        </p:spPr>
+        <p:txBody>
+          <a:bodyPr lIns="0" tIns="0" rIns="0" bIns="0" anchor="b"/>
+          <a:lstStyle/>
+          <a:p>
             <a:pPr algn="r">
               <a:defRPr sz="1000">
                 <a:solidFill>
@@ -2917,32 +2607,32 @@
       <p:sp>
         <p:nvSpPr>
           <p:cNvPr id="2" name="Title-10-3">
-            <a:extLst xmlns:a="http://schemas.openxmlformats.org/drawingml/2006/main">
+            <a:extLst>
               <a:ext uri="{FF2B5EF4-FFF2-40B4-BE49-F238E27FC236}">
                 <a16:creationId xmlns:a16="http://schemas.microsoft.com/office/drawing/2014/main" id="{12CEAA74-E175-42BF-BAA8-C559FFACCD49}"/>
               </a:ext>
             </a:extLst>
           </p:cNvPr>
           <p:cNvSpPr>
-            <a:spLocks xmlns:a="http://schemas.openxmlformats.org/drawingml/2006/main" noGrp="1"/>
-          </p:cNvSpPr>
-          <p:nvPr/>
-        </p:nvSpPr>
-        <p:spPr>
-          <a:xfrm xmlns:a="http://schemas.openxmlformats.org/drawingml/2006/main">
+            <a:spLocks noGrp="1"/>
+          </p:cNvSpPr>
+          <p:nvPr/>
+        </p:nvSpPr>
+        <p:spPr>
+          <a:xfrm>
             <a:off x="393668" y="344043"/>
             <a:ext cx="11404568" cy="1047464"/>
           </a:xfrm>
-          <a:prstGeom xmlns:a="http://schemas.openxmlformats.org/drawingml/2006/main" prst="rect">
-            <a:avLst/>
-          </a:prstGeom>
-        </p:spPr>
-        <p:txBody>
-          <a:bodyPr xmlns:a="http://schemas.openxmlformats.org/drawingml/2006/main" lIns="0" tIns="0" rIns="0" bIns="0" anchor="t">
-            <a:normAutofit fontScale="100000"/>
+          <a:prstGeom prst="rect">
+            <a:avLst/>
+          </a:prstGeom>
+        </p:spPr>
+        <p:txBody>
+          <a:bodyPr lIns="0" tIns="0" rIns="0" bIns="0" anchor="t">
+            <a:normAutofit/>
           </a:bodyPr>
-          <a:lstStyle xmlns:a="http://schemas.openxmlformats.org/drawingml/2006/main"/>
-          <a:p xmlns:a="http://schemas.openxmlformats.org/drawingml/2006/main">
+          <a:lstStyle/>
+          <a:p>
             <a:pPr algn="l">
               <a:lnSpc>
                 <a:spcPct val="105000"/>
@@ -2981,14 +2671,14 @@
           <p:nvPr/>
         </p:nvCxnSpPr>
         <p:spPr>
-          <a:xfrm xmlns:a="http://schemas.openxmlformats.org/drawingml/2006/main">
+          <a:xfrm>
             <a:off x="337757" y="3373755"/>
             <a:ext cx="12245435" cy="286"/>
           </a:xfrm>
-          <a:prstGeom xmlns:a="http://schemas.openxmlformats.org/drawingml/2006/main" prst="straightConnector1">
-            <a:avLst/>
-          </a:prstGeom>
-          <a:ln xmlns:a="http://schemas.openxmlformats.org/drawingml/2006/main" w="9525">
+          <a:prstGeom prst="straightConnector1">
+            <a:avLst/>
+          </a:prstGeom>
+          <a:ln w="9525">
             <a:solidFill>
               <a:srgbClr val="000000"/>
             </a:solidFill>
@@ -2999,26 +2689,26 @@
       <p:sp>
         <p:nvSpPr>
           <p:cNvPr id="4" name="Google-Shape-2260-p159-5">
-            <a:extLst xmlns:a="http://schemas.openxmlformats.org/drawingml/2006/main">
+            <a:extLst>
               <a:ext uri="{FF2B5EF4-FFF2-40B4-BE49-F238E27FC236}">
                 <a16:creationId xmlns:a16="http://schemas.microsoft.com/office/drawing/2014/main" id="{E74ADBD3-1BD5-44EE-A5A9-D3ABC96DC044}"/>
               </a:ext>
             </a:extLst>
           </p:cNvPr>
           <p:cNvSpPr>
-            <a:spLocks xmlns:a="http://schemas.openxmlformats.org/drawingml/2006/main" noGrp="1"/>
-          </p:cNvSpPr>
-          <p:nvPr/>
-        </p:nvSpPr>
-        <p:spPr>
-          <a:xfrm xmlns:a="http://schemas.openxmlformats.org/drawingml/2006/main">
+            <a:spLocks noGrp="1"/>
+          </p:cNvSpPr>
+          <p:nvPr/>
+        </p:nvSpPr>
+        <p:spPr>
+          <a:xfrm>
             <a:off x="337757" y="3320225"/>
             <a:ext cx="107061" cy="107061"/>
           </a:xfrm>
-          <a:prstGeom xmlns:a="http://schemas.openxmlformats.org/drawingml/2006/main" prst="ellipse">
-            <a:avLst/>
-          </a:prstGeom>
-          <a:solidFill xmlns:a="http://schemas.openxmlformats.org/drawingml/2006/main">
+          <a:prstGeom prst="ellipse">
+            <a:avLst/>
+          </a:prstGeom>
+          <a:solidFill>
             <a:srgbClr val="000000"/>
           </a:solidFill>
         </p:spPr>
@@ -3026,26 +2716,26 @@
       <p:sp>
         <p:nvSpPr>
           <p:cNvPr id="5" name="Google-Shape-2261-p159-6">
-            <a:extLst xmlns:a="http://schemas.openxmlformats.org/drawingml/2006/main">
+            <a:extLst>
               <a:ext uri="{FF2B5EF4-FFF2-40B4-BE49-F238E27FC236}">
                 <a16:creationId xmlns:a16="http://schemas.microsoft.com/office/drawing/2014/main" id="{39433F1A-24FE-4D1B-94F3-D1C2D4D53821}"/>
               </a:ext>
             </a:extLst>
           </p:cNvPr>
           <p:cNvSpPr>
-            <a:spLocks xmlns:a="http://schemas.openxmlformats.org/drawingml/2006/main" noGrp="1"/>
-          </p:cNvSpPr>
-          <p:nvPr/>
-        </p:nvSpPr>
-        <p:spPr>
-          <a:xfrm xmlns:a="http://schemas.openxmlformats.org/drawingml/2006/main">
+            <a:spLocks noGrp="1"/>
+          </p:cNvSpPr>
+          <p:nvPr/>
+        </p:nvSpPr>
+        <p:spPr>
+          <a:xfrm>
             <a:off x="4251770" y="3320225"/>
             <a:ext cx="107061" cy="107061"/>
           </a:xfrm>
-          <a:prstGeom xmlns:a="http://schemas.openxmlformats.org/drawingml/2006/main" prst="ellipse">
-            <a:avLst/>
-          </a:prstGeom>
-          <a:solidFill xmlns:a="http://schemas.openxmlformats.org/drawingml/2006/main">
+          <a:prstGeom prst="ellipse">
+            <a:avLst/>
+          </a:prstGeom>
+          <a:solidFill>
             <a:srgbClr val="000000"/>
           </a:solidFill>
         </p:spPr>
@@ -3053,26 +2743,26 @@
       <p:sp>
         <p:nvSpPr>
           <p:cNvPr id="6" name="Google-Shape-2262-p159-7">
-            <a:extLst xmlns:a="http://schemas.openxmlformats.org/drawingml/2006/main">
+            <a:extLst>
               <a:ext uri="{FF2B5EF4-FFF2-40B4-BE49-F238E27FC236}">
                 <a16:creationId xmlns:a16="http://schemas.microsoft.com/office/drawing/2014/main" id="{7BDBDAFF-C49B-46F2-A83F-69F49CB20E41}"/>
               </a:ext>
             </a:extLst>
           </p:cNvPr>
           <p:cNvSpPr>
-            <a:spLocks xmlns:a="http://schemas.openxmlformats.org/drawingml/2006/main" noGrp="1"/>
-          </p:cNvSpPr>
-          <p:nvPr/>
-        </p:nvSpPr>
-        <p:spPr>
-          <a:xfrm xmlns:a="http://schemas.openxmlformats.org/drawingml/2006/main">
+            <a:spLocks noGrp="1"/>
+          </p:cNvSpPr>
+          <p:nvPr/>
+        </p:nvSpPr>
+        <p:spPr>
+          <a:xfrm>
             <a:off x="8176070" y="3320225"/>
             <a:ext cx="107061" cy="107061"/>
           </a:xfrm>
-          <a:prstGeom xmlns:a="http://schemas.openxmlformats.org/drawingml/2006/main" prst="ellipse">
-            <a:avLst/>
-          </a:prstGeom>
-          <a:solidFill xmlns:a="http://schemas.openxmlformats.org/drawingml/2006/main">
+          <a:prstGeom prst="ellipse">
+            <a:avLst/>
+          </a:prstGeom>
+          <a:solidFill>
             <a:srgbClr val="000000"/>
           </a:solidFill>
         </p:spPr>
@@ -3080,32 +2770,32 @@
       <p:sp>
         <p:nvSpPr>
           <p:cNvPr id="7" name="Content-Placeholder-15-8">
-            <a:extLst xmlns:a="http://schemas.openxmlformats.org/drawingml/2006/main">
+            <a:extLst>
               <a:ext uri="{FF2B5EF4-FFF2-40B4-BE49-F238E27FC236}">
                 <a16:creationId xmlns:a16="http://schemas.microsoft.com/office/drawing/2014/main" id="{11CF321F-9191-4F9E-9C70-64B02B97F84B}"/>
               </a:ext>
             </a:extLst>
           </p:cNvPr>
           <p:cNvSpPr>
-            <a:spLocks xmlns:a="http://schemas.openxmlformats.org/drawingml/2006/main" noGrp="1"/>
-          </p:cNvSpPr>
-          <p:nvPr/>
-        </p:nvSpPr>
-        <p:spPr>
-          <a:xfrm xmlns:a="http://schemas.openxmlformats.org/drawingml/2006/main">
+            <a:spLocks noGrp="1"/>
+          </p:cNvSpPr>
+          <p:nvPr/>
+        </p:nvSpPr>
+        <p:spPr>
+          <a:xfrm>
             <a:off x="393668" y="2843308"/>
             <a:ext cx="1612868" cy="262414"/>
           </a:xfrm>
-          <a:prstGeom xmlns:a="http://schemas.openxmlformats.org/drawingml/2006/main" prst="rect">
-            <a:avLst/>
-          </a:prstGeom>
-        </p:spPr>
-        <p:txBody>
-          <a:bodyPr xmlns:a="http://schemas.openxmlformats.org/drawingml/2006/main" lIns="0" tIns="0" rIns="0" bIns="0">
+          <a:prstGeom prst="rect">
+            <a:avLst/>
+          </a:prstGeom>
+        </p:spPr>
+        <p:txBody>
+          <a:bodyPr lIns="0" tIns="0" rIns="0" bIns="0">
             <a:noAutofit/>
           </a:bodyPr>
-          <a:lstStyle xmlns:a="http://schemas.openxmlformats.org/drawingml/2006/main"/>
-          <a:p xmlns:a="http://schemas.openxmlformats.org/drawingml/2006/main">
+          <a:lstStyle/>
+          <a:p>
             <a:pPr algn="l">
               <a:lnSpc>
                 <a:spcPct val="105000"/>
@@ -3140,32 +2830,32 @@
       <p:sp>
         <p:nvSpPr>
           <p:cNvPr id="8" name="Content-Placeholder-15-9">
-            <a:extLst xmlns:a="http://schemas.openxmlformats.org/drawingml/2006/main">
+            <a:extLst>
               <a:ext uri="{FF2B5EF4-FFF2-40B4-BE49-F238E27FC236}">
                 <a16:creationId xmlns:a16="http://schemas.microsoft.com/office/drawing/2014/main" id="{3FB3D6B1-46C6-44BF-8A82-6C1144A64347}"/>
               </a:ext>
             </a:extLst>
           </p:cNvPr>
           <p:cNvSpPr>
-            <a:spLocks xmlns:a="http://schemas.openxmlformats.org/drawingml/2006/main" noGrp="1"/>
-          </p:cNvSpPr>
-          <p:nvPr/>
-        </p:nvSpPr>
-        <p:spPr>
-          <a:xfrm xmlns:a="http://schemas.openxmlformats.org/drawingml/2006/main">
+            <a:spLocks noGrp="1"/>
+          </p:cNvSpPr>
+          <p:nvPr/>
+        </p:nvSpPr>
+        <p:spPr>
+          <a:xfrm>
             <a:off x="4294156" y="2843308"/>
             <a:ext cx="1612868" cy="262414"/>
           </a:xfrm>
-          <a:prstGeom xmlns:a="http://schemas.openxmlformats.org/drawingml/2006/main" prst="rect">
-            <a:avLst/>
-          </a:prstGeom>
-        </p:spPr>
-        <p:txBody>
-          <a:bodyPr xmlns:a="http://schemas.openxmlformats.org/drawingml/2006/main" lIns="0" tIns="0" rIns="0" bIns="0">
+          <a:prstGeom prst="rect">
+            <a:avLst/>
+          </a:prstGeom>
+        </p:spPr>
+        <p:txBody>
+          <a:bodyPr lIns="0" tIns="0" rIns="0" bIns="0">
             <a:noAutofit/>
           </a:bodyPr>
-          <a:lstStyle xmlns:a="http://schemas.openxmlformats.org/drawingml/2006/main"/>
-          <a:p xmlns:a="http://schemas.openxmlformats.org/drawingml/2006/main">
+          <a:lstStyle/>
+          <a:p>
             <a:pPr algn="l">
               <a:lnSpc>
                 <a:spcPct val="105000"/>
@@ -3200,32 +2890,32 @@
       <p:sp>
         <p:nvSpPr>
           <p:cNvPr id="9" name="Content-Placeholder-15-10">
-            <a:extLst xmlns:a="http://schemas.openxmlformats.org/drawingml/2006/main">
+            <a:extLst>
               <a:ext uri="{FF2B5EF4-FFF2-40B4-BE49-F238E27FC236}">
                 <a16:creationId xmlns:a16="http://schemas.microsoft.com/office/drawing/2014/main" id="{80BAF868-A011-45CE-A51B-2242C9CF286A}"/>
               </a:ext>
             </a:extLst>
           </p:cNvPr>
           <p:cNvSpPr>
-            <a:spLocks xmlns:a="http://schemas.openxmlformats.org/drawingml/2006/main" noGrp="1"/>
-          </p:cNvSpPr>
-          <p:nvPr/>
-        </p:nvSpPr>
-        <p:spPr>
-          <a:xfrm xmlns:a="http://schemas.openxmlformats.org/drawingml/2006/main">
+            <a:spLocks noGrp="1"/>
+          </p:cNvSpPr>
+          <p:nvPr/>
+        </p:nvSpPr>
+        <p:spPr>
+          <a:xfrm>
             <a:off x="8223218" y="2843308"/>
             <a:ext cx="1612868" cy="262414"/>
           </a:xfrm>
-          <a:prstGeom xmlns:a="http://schemas.openxmlformats.org/drawingml/2006/main" prst="rect">
-            <a:avLst/>
-          </a:prstGeom>
-        </p:spPr>
-        <p:txBody>
-          <a:bodyPr xmlns:a="http://schemas.openxmlformats.org/drawingml/2006/main" lIns="0" tIns="0" rIns="0" bIns="0">
+          <a:prstGeom prst="rect">
+            <a:avLst/>
+          </a:prstGeom>
+        </p:spPr>
+        <p:txBody>
+          <a:bodyPr lIns="0" tIns="0" rIns="0" bIns="0">
             <a:noAutofit/>
           </a:bodyPr>
-          <a:lstStyle xmlns:a="http://schemas.openxmlformats.org/drawingml/2006/main"/>
-          <a:p xmlns:a="http://schemas.openxmlformats.org/drawingml/2006/main">
+          <a:lstStyle/>
+          <a:p>
             <a:pPr algn="l">
               <a:lnSpc>
                 <a:spcPct val="105000"/>
@@ -3260,32 +2950,32 @@
       <p:sp>
         <p:nvSpPr>
           <p:cNvPr id="10" name="Text-Placeholder-16-11">
-            <a:extLst xmlns:a="http://schemas.openxmlformats.org/drawingml/2006/main">
+            <a:extLst>
               <a:ext uri="{FF2B5EF4-FFF2-40B4-BE49-F238E27FC236}">
                 <a16:creationId xmlns:a16="http://schemas.microsoft.com/office/drawing/2014/main" id="{52E00787-E012-4414-958E-6DBBB581453D}"/>
               </a:ext>
             </a:extLst>
           </p:cNvPr>
           <p:cNvSpPr>
-            <a:spLocks xmlns:a="http://schemas.openxmlformats.org/drawingml/2006/main" noGrp="1"/>
-          </p:cNvSpPr>
-          <p:nvPr/>
-        </p:nvSpPr>
-        <p:spPr>
-          <a:xfrm xmlns:a="http://schemas.openxmlformats.org/drawingml/2006/main">
+            <a:spLocks noGrp="1"/>
+          </p:cNvSpPr>
+          <p:nvPr/>
+        </p:nvSpPr>
+        <p:spPr>
+          <a:xfrm>
             <a:off x="4317111" y="3822668"/>
             <a:ext cx="3156109" cy="1586294"/>
           </a:xfrm>
-          <a:prstGeom xmlns:a="http://schemas.openxmlformats.org/drawingml/2006/main" prst="rect">
-            <a:avLst/>
-          </a:prstGeom>
-        </p:spPr>
-        <p:txBody>
-          <a:bodyPr xmlns:a="http://schemas.openxmlformats.org/drawingml/2006/main" lIns="0" tIns="0" rIns="0" bIns="0">
+          <a:prstGeom prst="rect">
+            <a:avLst/>
+          </a:prstGeom>
+        </p:spPr>
+        <p:txBody>
+          <a:bodyPr lIns="0" tIns="0" rIns="0" bIns="0">
             <a:noAutofit/>
           </a:bodyPr>
-          <a:lstStyle xmlns:a="http://schemas.openxmlformats.org/drawingml/2006/main"/>
-          <a:p xmlns:a="http://schemas.openxmlformats.org/drawingml/2006/main">
+          <a:lstStyle/>
+          <a:p>
             <a:pPr algn="l">
               <a:lnSpc>
                 <a:spcPct val="105000"/>
@@ -3315,7 +3005,7 @@
               <a:t>Deploy safely</a:t>
             </a:r>
           </a:p>
-          <a:p xmlns:a="http://schemas.openxmlformats.org/drawingml/2006/main">
+          <a:p>
             <a:pPr algn="l">
               <a:lnSpc>
                 <a:spcPct val="105000"/>
@@ -3350,32 +3040,32 @@
       <p:sp>
         <p:nvSpPr>
           <p:cNvPr id="11" name="Text-Placeholder-16-12">
-            <a:extLst xmlns:a="http://schemas.openxmlformats.org/drawingml/2006/main">
+            <a:extLst>
               <a:ext uri="{FF2B5EF4-FFF2-40B4-BE49-F238E27FC236}">
                 <a16:creationId xmlns:a16="http://schemas.microsoft.com/office/drawing/2014/main" id="{F86445AA-D5EE-4A85-836F-48F0AA0675D0}"/>
               </a:ext>
             </a:extLst>
           </p:cNvPr>
           <p:cNvSpPr>
-            <a:spLocks xmlns:a="http://schemas.openxmlformats.org/drawingml/2006/main" noGrp="1"/>
-          </p:cNvSpPr>
-          <p:nvPr/>
-        </p:nvSpPr>
-        <p:spPr>
-          <a:xfrm xmlns:a="http://schemas.openxmlformats.org/drawingml/2006/main">
+            <a:spLocks noGrp="1"/>
+          </p:cNvSpPr>
+          <p:nvPr/>
+        </p:nvSpPr>
+        <p:spPr>
+          <a:xfrm>
             <a:off x="399859" y="3822668"/>
             <a:ext cx="3156109" cy="1586294"/>
           </a:xfrm>
-          <a:prstGeom xmlns:a="http://schemas.openxmlformats.org/drawingml/2006/main" prst="rect">
-            <a:avLst/>
-          </a:prstGeom>
-        </p:spPr>
-        <p:txBody>
-          <a:bodyPr xmlns:a="http://schemas.openxmlformats.org/drawingml/2006/main" lIns="0" tIns="0" rIns="0" bIns="0">
+          <a:prstGeom prst="rect">
+            <a:avLst/>
+          </a:prstGeom>
+        </p:spPr>
+        <p:txBody>
+          <a:bodyPr lIns="0" tIns="0" rIns="0" bIns="0">
             <a:noAutofit/>
           </a:bodyPr>
-          <a:lstStyle xmlns:a="http://schemas.openxmlformats.org/drawingml/2006/main"/>
-          <a:p xmlns:a="http://schemas.openxmlformats.org/drawingml/2006/main">
+          <a:lstStyle/>
+          <a:p>
             <a:pPr algn="l">
               <a:lnSpc>
                 <a:spcPct val="105000"/>
@@ -3405,7 +3095,7 @@
               <a:t>Prove the core</a:t>
             </a:r>
           </a:p>
-          <a:p xmlns:a="http://schemas.openxmlformats.org/drawingml/2006/main">
+          <a:p>
             <a:pPr algn="l">
               <a:lnSpc>
                 <a:spcPct val="105000"/>
@@ -3440,32 +3130,32 @@
       <p:sp>
         <p:nvSpPr>
           <p:cNvPr id="12" name="Text-Placeholder-16-13">
-            <a:extLst xmlns:a="http://schemas.openxmlformats.org/drawingml/2006/main">
+            <a:extLst>
               <a:ext uri="{FF2B5EF4-FFF2-40B4-BE49-F238E27FC236}">
                 <a16:creationId xmlns:a16="http://schemas.microsoft.com/office/drawing/2014/main" id="{0383DB7A-84EC-4EDA-99E5-62C187FB29CA}"/>
               </a:ext>
             </a:extLst>
           </p:cNvPr>
           <p:cNvSpPr>
-            <a:spLocks xmlns:a="http://schemas.openxmlformats.org/drawingml/2006/main" noGrp="1"/>
-          </p:cNvSpPr>
-          <p:nvPr/>
-        </p:nvSpPr>
-        <p:spPr>
-          <a:xfrm xmlns:a="http://schemas.openxmlformats.org/drawingml/2006/main">
+            <a:spLocks noGrp="1"/>
+          </p:cNvSpPr>
+          <p:nvPr/>
+        </p:nvSpPr>
+        <p:spPr>
+          <a:xfrm>
             <a:off x="8177879" y="3822668"/>
             <a:ext cx="3156109" cy="1586294"/>
           </a:xfrm>
-          <a:prstGeom xmlns:a="http://schemas.openxmlformats.org/drawingml/2006/main" prst="rect">
-            <a:avLst/>
-          </a:prstGeom>
-        </p:spPr>
-        <p:txBody>
-          <a:bodyPr xmlns:a="http://schemas.openxmlformats.org/drawingml/2006/main" lIns="0" tIns="0" rIns="0" bIns="0">
+          <a:prstGeom prst="rect">
+            <a:avLst/>
+          </a:prstGeom>
+        </p:spPr>
+        <p:txBody>
+          <a:bodyPr lIns="0" tIns="0" rIns="0" bIns="0">
             <a:noAutofit/>
           </a:bodyPr>
-          <a:lstStyle xmlns:a="http://schemas.openxmlformats.org/drawingml/2006/main"/>
-          <a:p xmlns:a="http://schemas.openxmlformats.org/drawingml/2006/main">
+          <a:lstStyle/>
+          <a:p>
             <a:pPr algn="l">
               <a:lnSpc>
                 <a:spcPct val="105000"/>
@@ -3495,7 +3185,7 @@
               <a:t>Validate a pilot</a:t>
             </a:r>
           </a:p>
-          <a:p xmlns:a="http://schemas.openxmlformats.org/drawingml/2006/main">
+          <a:p>
             <a:pPr algn="l">
               <a:lnSpc>
                 <a:spcPct val="105000"/>
@@ -3530,29 +3220,29 @@
       <p:sp>
         <p:nvSpPr>
           <p:cNvPr id="13" name="veilpay-accent">
-            <a:extLst xmlns:a="http://schemas.openxmlformats.org/drawingml/2006/main">
+            <a:extLst>
               <a:ext uri="{FF2B5EF4-FFF2-40B4-BE49-F238E27FC236}">
                 <a16:creationId xmlns:a16="http://schemas.microsoft.com/office/drawing/2014/main" id="{D9728D1C-2C5A-4B9C-A835-36A02894A57C}"/>
               </a:ext>
             </a:extLst>
           </p:cNvPr>
           <p:cNvSpPr>
-            <a:spLocks xmlns:a="http://schemas.openxmlformats.org/drawingml/2006/main" noGrp="1"/>
-          </p:cNvSpPr>
-          <p:nvPr/>
-        </p:nvSpPr>
-        <p:spPr>
-          <a:xfrm xmlns:a="http://schemas.openxmlformats.org/drawingml/2006/main">
+            <a:spLocks noGrp="1"/>
+          </p:cNvSpPr>
+          <p:nvPr/>
+        </p:nvSpPr>
+        <p:spPr>
+          <a:xfrm>
             <a:off x="0" y="0"/>
             <a:ext cx="85725" cy="6858000"/>
           </a:xfrm>
-          <a:prstGeom xmlns:a="http://schemas.openxmlformats.org/drawingml/2006/main" prst="rect">
-            <a:avLst/>
-          </a:prstGeom>
-          <a:solidFill xmlns:a="http://schemas.openxmlformats.org/drawingml/2006/main">
+          <a:prstGeom prst="rect">
+            <a:avLst/>
+          </a:prstGeom>
+          <a:solidFill>
             <a:srgbClr val="6DCBF4"/>
           </a:solidFill>
-          <a:ln xmlns:a="http://schemas.openxmlformats.org/drawingml/2006/main" w="0">
+          <a:ln w="0">
             <a:noFill/>
             <a:prstDash val="solid"/>
           </a:ln>
@@ -3565,17 +3255,21 @@
       </p:ext>
     </p:extLst>
   </p:cSld>
+  <p:clrMapOvr>
+    <a:masterClrMapping/>
+  </p:clrMapOvr>
 </p:sld>
 </file>
 
 <file path=ppt/slides/slide12.xml><?xml version="1.0" encoding="utf-8"?>
-<p:sld xmlns:p="http://schemas.openxmlformats.org/presentationml/2006/main">
+<p:sld xmlns:a="http://schemas.openxmlformats.org/drawingml/2006/main" xmlns:r="http://schemas.openxmlformats.org/officeDocument/2006/relationships" xmlns:p="http://schemas.openxmlformats.org/presentationml/2006/main">
   <p:cSld>
     <p:bg>
       <p:bgPr>
-        <a:solidFill xmlns:a="http://schemas.openxmlformats.org/drawingml/2006/main">
+        <a:solidFill>
           <a:srgbClr val="FFFFFF"/>
         </a:solidFill>
+        <a:effectLst/>
       </p:bgPr>
     </p:bg>
     <p:spTree>
@@ -3585,40 +3279,45 @@
         <p:nvPr/>
       </p:nvGrpSpPr>
       <p:grpSpPr>
-        <a:xfrm xmlns:a="http://schemas.openxmlformats.org/drawingml/2006/main"/>
+        <a:xfrm>
+          <a:off x="0" y="0"/>
+          <a:ext cx="0" cy="0"/>
+          <a:chOff x="0" y="0"/>
+          <a:chExt cx="0" cy="0"/>
+        </a:xfrm>
       </p:grpSpPr>
       <p:sp>
         <p:nvSpPr>
-          <p:cNvPr id="1" name="team-title">
-            <a:extLst xmlns:a="http://schemas.openxmlformats.org/drawingml/2006/main">
+          <p:cNvPr id="21" name="team-title">
+            <a:extLst>
               <a:ext uri="{FF2B5EF4-FFF2-40B4-BE49-F238E27FC236}">
                 <a16:creationId xmlns:a16="http://schemas.microsoft.com/office/drawing/2014/main" id="{3E8E1692-9D98-49DC-B3D6-38FB8348E7AC}"/>
               </a:ext>
             </a:extLst>
           </p:cNvPr>
           <p:cNvSpPr>
-            <a:spLocks xmlns:a="http://schemas.openxmlformats.org/drawingml/2006/main" noGrp="1"/>
-          </p:cNvSpPr>
-          <p:nvPr/>
-        </p:nvSpPr>
-        <p:spPr>
-          <a:xfrm xmlns:a="http://schemas.openxmlformats.org/drawingml/2006/main">
+            <a:spLocks noGrp="1"/>
+          </p:cNvSpPr>
+          <p:nvPr/>
+        </p:nvSpPr>
+        <p:spPr>
+          <a:xfrm>
             <a:off x="400050" y="342900"/>
             <a:ext cx="10668000" cy="609600"/>
           </a:xfrm>
-          <a:prstGeom xmlns:a="http://schemas.openxmlformats.org/drawingml/2006/main" prst="rect">
-            <a:avLst/>
-          </a:prstGeom>
-          <a:noFill xmlns:a="http://schemas.openxmlformats.org/drawingml/2006/main"/>
-          <a:ln xmlns:a="http://schemas.openxmlformats.org/drawingml/2006/main" w="0">
+          <a:prstGeom prst="rect">
+            <a:avLst/>
+          </a:prstGeom>
+          <a:noFill/>
+          <a:ln w="0">
             <a:noFill/>
             <a:prstDash val="solid"/>
           </a:ln>
         </p:spPr>
         <p:txBody>
-          <a:bodyPr xmlns:a="http://schemas.openxmlformats.org/drawingml/2006/main" anchor="t"/>
-          <a:lstStyle xmlns:a="http://schemas.openxmlformats.org/drawingml/2006/main"/>
-          <a:p xmlns:a="http://schemas.openxmlformats.org/drawingml/2006/main">
+          <a:bodyPr anchor="t"/>
+          <a:lstStyle/>
+          <a:p>
             <a:pPr algn="l">
               <a:defRPr sz="2925" b="1">
                 <a:solidFill>
@@ -3640,35 +3339,35 @@
       <p:sp>
         <p:nvSpPr>
           <p:cNvPr id="2" name="team-kicker">
-            <a:extLst xmlns:a="http://schemas.openxmlformats.org/drawingml/2006/main">
+            <a:extLst>
               <a:ext uri="{FF2B5EF4-FFF2-40B4-BE49-F238E27FC236}">
                 <a16:creationId xmlns:a16="http://schemas.microsoft.com/office/drawing/2014/main" id="{E905F71F-A905-4605-BDC6-903440B64FFF}"/>
               </a:ext>
             </a:extLst>
           </p:cNvPr>
           <p:cNvSpPr>
-            <a:spLocks xmlns:a="http://schemas.openxmlformats.org/drawingml/2006/main" noGrp="1"/>
-          </p:cNvSpPr>
-          <p:nvPr/>
-        </p:nvSpPr>
-        <p:spPr>
-          <a:xfrm xmlns:a="http://schemas.openxmlformats.org/drawingml/2006/main">
+            <a:spLocks noGrp="1"/>
+          </p:cNvSpPr>
+          <p:nvPr/>
+        </p:nvSpPr>
+        <p:spPr>
+          <a:xfrm>
             <a:off x="400050" y="1181100"/>
             <a:ext cx="2286000" cy="266700"/>
           </a:xfrm>
-          <a:prstGeom xmlns:a="http://schemas.openxmlformats.org/drawingml/2006/main" prst="rect">
-            <a:avLst/>
-          </a:prstGeom>
-          <a:noFill xmlns:a="http://schemas.openxmlformats.org/drawingml/2006/main"/>
-          <a:ln xmlns:a="http://schemas.openxmlformats.org/drawingml/2006/main" w="0">
+          <a:prstGeom prst="rect">
+            <a:avLst/>
+          </a:prstGeom>
+          <a:noFill/>
+          <a:ln w="0">
             <a:noFill/>
             <a:prstDash val="solid"/>
           </a:ln>
         </p:spPr>
         <p:txBody>
-          <a:bodyPr xmlns:a="http://schemas.openxmlformats.org/drawingml/2006/main" anchor="t"/>
-          <a:lstStyle xmlns:a="http://schemas.openxmlformats.org/drawingml/2006/main"/>
-          <a:p xmlns:a="http://schemas.openxmlformats.org/drawingml/2006/main">
+          <a:bodyPr anchor="t"/>
+          <a:lstStyle/>
+          <a:p>
             <a:pPr algn="l">
               <a:defRPr sz="1350" b="1">
                 <a:solidFill>
@@ -3690,31 +3389,31 @@
       <p:sp>
         <p:nvSpPr>
           <p:cNvPr id="3" name="team-photo-1">
-            <a:extLst xmlns:a="http://schemas.openxmlformats.org/drawingml/2006/main">
+            <a:extLst>
               <a:ext uri="{FF2B5EF4-FFF2-40B4-BE49-F238E27FC236}">
                 <a16:creationId xmlns:a16="http://schemas.microsoft.com/office/drawing/2014/main" id="{B5EA2B62-A57C-4935-B26E-EF6FF2C407D1}"/>
               </a:ext>
             </a:extLst>
           </p:cNvPr>
           <p:cNvSpPr>
-            <a:spLocks xmlns:a="http://schemas.openxmlformats.org/drawingml/2006/main" noGrp="1"/>
-          </p:cNvSpPr>
-          <p:nvPr/>
-        </p:nvSpPr>
-        <p:spPr>
-          <a:xfrm xmlns:a="http://schemas.openxmlformats.org/drawingml/2006/main">
+            <a:spLocks noGrp="1"/>
+          </p:cNvSpPr>
+          <p:nvPr/>
+        </p:nvSpPr>
+        <p:spPr>
+          <a:xfrm>
             <a:off x="400050" y="1809750"/>
             <a:ext cx="2381250" cy="2381250"/>
           </a:xfrm>
-          <a:prstGeom xmlns:a="http://schemas.openxmlformats.org/drawingml/2006/main" prst="roundRect">
+          <a:prstGeom prst="roundRect">
             <a:avLst>
               <a:gd name="adj" fmla="val 4800"/>
             </a:avLst>
           </a:prstGeom>
-          <a:solidFill xmlns:a="http://schemas.openxmlformats.org/drawingml/2006/main">
+          <a:solidFill>
             <a:srgbClr val="F2F2F2"/>
           </a:solidFill>
-          <a:ln xmlns:a="http://schemas.openxmlformats.org/drawingml/2006/main" w="14288">
+          <a:ln w="14288">
             <a:solidFill>
               <a:srgbClr val="B8BCC4"/>
             </a:solidFill>
@@ -3722,9 +3421,9 @@
           </a:ln>
         </p:spPr>
         <p:txBody>
-          <a:bodyPr xmlns:a="http://schemas.openxmlformats.org/drawingml/2006/main" anchor="ctr"/>
-          <a:lstStyle xmlns:a="http://schemas.openxmlformats.org/drawingml/2006/main"/>
-          <a:p xmlns:a="http://schemas.openxmlformats.org/drawingml/2006/main">
+          <a:bodyPr anchor="ctr"/>
+          <a:lstStyle/>
+          <a:p>
             <a:pPr algn="ctr">
               <a:defRPr sz="1200" b="1">
                 <a:solidFill>
@@ -3733,48 +3432,53 @@
               </a:defRPr>
             </a:pPr>
             <a:r>
-              <a:rPr sz="1200" b="1">
+              <a:rPr sz="1200" b="1" smtClean="0">
                 <a:solidFill>
                   <a:srgbClr val="6B7280"/>
                 </a:solidFill>
               </a:rPr>
               <a:t>ADD PHOTO</a:t>
             </a:r>
+            <a:endParaRPr sz="1200" b="1">
+              <a:solidFill>
+                <a:srgbClr val="6B7280"/>
+              </a:solidFill>
+            </a:endParaRPr>
           </a:p>
         </p:txBody>
       </p:sp>
       <p:sp>
         <p:nvSpPr>
           <p:cNvPr id="4" name="team-name-1">
-            <a:extLst xmlns:a="http://schemas.openxmlformats.org/drawingml/2006/main">
+            <a:extLst>
               <a:ext uri="{FF2B5EF4-FFF2-40B4-BE49-F238E27FC236}">
                 <a16:creationId xmlns:a16="http://schemas.microsoft.com/office/drawing/2014/main" id="{143922FF-78BD-4517-9F5B-0913520F24AF}"/>
               </a:ext>
             </a:extLst>
           </p:cNvPr>
           <p:cNvSpPr>
-            <a:spLocks xmlns:a="http://schemas.openxmlformats.org/drawingml/2006/main" noGrp="1"/>
-          </p:cNvSpPr>
-          <p:nvPr/>
-        </p:nvSpPr>
-        <p:spPr>
-          <a:xfrm xmlns:a="http://schemas.openxmlformats.org/drawingml/2006/main">
+            <a:spLocks noGrp="1"/>
+          </p:cNvSpPr>
+          <p:nvPr/>
+        </p:nvSpPr>
+        <p:spPr>
+          <a:xfrm>
             <a:off x="400050" y="4438650"/>
             <a:ext cx="2381250" cy="609600"/>
           </a:xfrm>
-          <a:prstGeom xmlns:a="http://schemas.openxmlformats.org/drawingml/2006/main" prst="rect">
-            <a:avLst/>
-          </a:prstGeom>
-          <a:noFill xmlns:a="http://schemas.openxmlformats.org/drawingml/2006/main"/>
-          <a:ln xmlns:a="http://schemas.openxmlformats.org/drawingml/2006/main" w="0">
+          <a:prstGeom prst="rect">
+            <a:avLst/>
+          </a:prstGeom>
+          <a:noFill/>
+          <a:ln w="0">
             <a:noFill/>
             <a:prstDash val="solid"/>
           </a:ln>
         </p:spPr>
         <p:txBody>
-          <a:bodyPr xmlns:a="http://schemas.openxmlformats.org/drawingml/2006/main" anchor="t"/>
-          <a:lstStyle xmlns:a="http://schemas.openxmlformats.org/drawingml/2006/main"/>
-          <a:p xmlns:a="http://schemas.openxmlformats.org/drawingml/2006/main">
+          <a:bodyPr anchor="t"/>
+          <a:lstStyle/>
+          <a:p>
             <a:pPr algn="l">
               <a:defRPr sz="1800" b="1">
                 <a:solidFill>
@@ -3783,48 +3487,61 @@
               </a:defRPr>
             </a:pPr>
             <a:r>
-              <a:rPr sz="1800" b="1">
+              <a:rPr sz="1800" b="1" dirty="0" smtClean="0">
                 <a:solidFill>
                   <a:srgbClr val="000000"/>
                 </a:solidFill>
               </a:rPr>
               <a:t>Uğur</a:t>
             </a:r>
+            <a:r>
+              <a:rPr lang="tr-TR" sz="1800" b="1" dirty="0" smtClean="0">
+                <a:solidFill>
+                  <a:srgbClr val="000000"/>
+                </a:solidFill>
+              </a:rPr>
+              <a:t> Erdoğan</a:t>
+            </a:r>
+            <a:endParaRPr sz="1800" b="1" dirty="0">
+              <a:solidFill>
+                <a:srgbClr val="000000"/>
+              </a:solidFill>
+            </a:endParaRPr>
           </a:p>
         </p:txBody>
       </p:sp>
       <p:sp>
         <p:nvSpPr>
           <p:cNvPr id="5" name="team-role-1">
-            <a:extLst xmlns:a="http://schemas.openxmlformats.org/drawingml/2006/main">
+            <a:extLst>
               <a:ext uri="{FF2B5EF4-FFF2-40B4-BE49-F238E27FC236}">
                 <a16:creationId xmlns:a16="http://schemas.microsoft.com/office/drawing/2014/main" id="{CF781486-D4A8-4B0C-858D-E8D8E2197273}"/>
               </a:ext>
             </a:extLst>
           </p:cNvPr>
           <p:cNvSpPr>
-            <a:spLocks xmlns:a="http://schemas.openxmlformats.org/drawingml/2006/main" noGrp="1"/>
-          </p:cNvSpPr>
-          <p:nvPr/>
-        </p:nvSpPr>
-        <p:spPr>
-          <a:xfrm xmlns:a="http://schemas.openxmlformats.org/drawingml/2006/main">
+            <a:spLocks noGrp="1"/>
+          </p:cNvSpPr>
+          <p:nvPr/>
+        </p:nvSpPr>
+        <p:spPr>
+          <a:xfrm>
             <a:off x="400050" y="5105400"/>
             <a:ext cx="2381250" cy="495300"/>
           </a:xfrm>
-          <a:prstGeom xmlns:a="http://schemas.openxmlformats.org/drawingml/2006/main" prst="rect">
-            <a:avLst/>
-          </a:prstGeom>
-          <a:noFill xmlns:a="http://schemas.openxmlformats.org/drawingml/2006/main"/>
-          <a:ln xmlns:a="http://schemas.openxmlformats.org/drawingml/2006/main" w="0">
+          <a:prstGeom prst="rect">
+            <a:avLst/>
+          </a:prstGeom>
+          <a:noFill/>
+          <a:ln w="0">
             <a:noFill/>
             <a:prstDash val="solid"/>
           </a:ln>
         </p:spPr>
         <p:txBody>
-          <a:bodyPr xmlns:a="http://schemas.openxmlformats.org/drawingml/2006/main" anchor="t"/>
-          <a:lstStyle xmlns:a="http://schemas.openxmlformats.org/drawingml/2006/main"/>
-          <a:p xmlns:a="http://schemas.openxmlformats.org/drawingml/2006/main">
+          <a:bodyPr anchor="t"/>
+          <a:lstStyle/>
+          <a:p>
             <a:pPr algn="l">
               <a:defRPr sz="1275" b="1">
                 <a:solidFill>
@@ -3846,35 +3563,35 @@
       <p:sp>
         <p:nvSpPr>
           <p:cNvPr id="6" name="team-focus-1">
-            <a:extLst xmlns:a="http://schemas.openxmlformats.org/drawingml/2006/main">
+            <a:extLst>
               <a:ext uri="{FF2B5EF4-FFF2-40B4-BE49-F238E27FC236}">
                 <a16:creationId xmlns:a16="http://schemas.microsoft.com/office/drawing/2014/main" id="{2A2EBA2B-4936-4E30-9744-EFF4CE3B9634}"/>
               </a:ext>
             </a:extLst>
           </p:cNvPr>
           <p:cNvSpPr>
-            <a:spLocks xmlns:a="http://schemas.openxmlformats.org/drawingml/2006/main" noGrp="1"/>
-          </p:cNvSpPr>
-          <p:nvPr/>
-        </p:nvSpPr>
-        <p:spPr>
-          <a:xfrm xmlns:a="http://schemas.openxmlformats.org/drawingml/2006/main">
+            <a:spLocks noGrp="1"/>
+          </p:cNvSpPr>
+          <p:nvPr/>
+        </p:nvSpPr>
+        <p:spPr>
+          <a:xfrm>
             <a:off x="400050" y="5638800"/>
             <a:ext cx="2381250" cy="514350"/>
           </a:xfrm>
-          <a:prstGeom xmlns:a="http://schemas.openxmlformats.org/drawingml/2006/main" prst="rect">
-            <a:avLst/>
-          </a:prstGeom>
-          <a:noFill xmlns:a="http://schemas.openxmlformats.org/drawingml/2006/main"/>
-          <a:ln xmlns:a="http://schemas.openxmlformats.org/drawingml/2006/main" w="0">
+          <a:prstGeom prst="rect">
+            <a:avLst/>
+          </a:prstGeom>
+          <a:noFill/>
+          <a:ln w="0">
             <a:noFill/>
             <a:prstDash val="solid"/>
           </a:ln>
         </p:spPr>
         <p:txBody>
-          <a:bodyPr xmlns:a="http://schemas.openxmlformats.org/drawingml/2006/main" anchor="t"/>
-          <a:lstStyle xmlns:a="http://schemas.openxmlformats.org/drawingml/2006/main"/>
-          <a:p xmlns:a="http://schemas.openxmlformats.org/drawingml/2006/main">
+          <a:bodyPr anchor="t"/>
+          <a:lstStyle/>
+          <a:p>
             <a:pPr algn="l">
               <a:defRPr sz="1125" b="0">
                 <a:solidFill>
@@ -3896,31 +3613,31 @@
       <p:sp>
         <p:nvSpPr>
           <p:cNvPr id="7" name="team-photo-2">
-            <a:extLst xmlns:a="http://schemas.openxmlformats.org/drawingml/2006/main">
+            <a:extLst>
               <a:ext uri="{FF2B5EF4-FFF2-40B4-BE49-F238E27FC236}">
                 <a16:creationId xmlns:a16="http://schemas.microsoft.com/office/drawing/2014/main" id="{8EC78DD1-91FD-4283-92C1-85BD5712FC32}"/>
               </a:ext>
             </a:extLst>
           </p:cNvPr>
           <p:cNvSpPr>
-            <a:spLocks xmlns:a="http://schemas.openxmlformats.org/drawingml/2006/main" noGrp="1"/>
-          </p:cNvSpPr>
-          <p:nvPr/>
-        </p:nvSpPr>
-        <p:spPr>
-          <a:xfrm xmlns:a="http://schemas.openxmlformats.org/drawingml/2006/main">
+            <a:spLocks noGrp="1"/>
+          </p:cNvSpPr>
+          <p:nvPr/>
+        </p:nvSpPr>
+        <p:spPr>
+          <a:xfrm>
             <a:off x="3248025" y="1809750"/>
             <a:ext cx="2381250" cy="2381250"/>
           </a:xfrm>
-          <a:prstGeom xmlns:a="http://schemas.openxmlformats.org/drawingml/2006/main" prst="roundRect">
+          <a:prstGeom prst="roundRect">
             <a:avLst>
               <a:gd name="adj" fmla="val 4800"/>
             </a:avLst>
           </a:prstGeom>
-          <a:solidFill xmlns:a="http://schemas.openxmlformats.org/drawingml/2006/main">
+          <a:solidFill>
             <a:srgbClr val="F2F2F2"/>
           </a:solidFill>
-          <a:ln xmlns:a="http://schemas.openxmlformats.org/drawingml/2006/main" w="14288">
+          <a:ln w="14288">
             <a:solidFill>
               <a:srgbClr val="B8BCC4"/>
             </a:solidFill>
@@ -3928,9 +3645,9 @@
           </a:ln>
         </p:spPr>
         <p:txBody>
-          <a:bodyPr xmlns:a="http://schemas.openxmlformats.org/drawingml/2006/main" anchor="ctr"/>
-          <a:lstStyle xmlns:a="http://schemas.openxmlformats.org/drawingml/2006/main"/>
-          <a:p xmlns:a="http://schemas.openxmlformats.org/drawingml/2006/main">
+          <a:bodyPr anchor="ctr"/>
+          <a:lstStyle/>
+          <a:p>
             <a:pPr algn="ctr">
               <a:defRPr sz="1200" b="1">
                 <a:solidFill>
@@ -3952,35 +3669,35 @@
       <p:sp>
         <p:nvSpPr>
           <p:cNvPr id="8" name="team-name-2">
-            <a:extLst xmlns:a="http://schemas.openxmlformats.org/drawingml/2006/main">
+            <a:extLst>
               <a:ext uri="{FF2B5EF4-FFF2-40B4-BE49-F238E27FC236}">
                 <a16:creationId xmlns:a16="http://schemas.microsoft.com/office/drawing/2014/main" id="{98747F16-A92E-429E-B521-23147D4CD15C}"/>
               </a:ext>
             </a:extLst>
           </p:cNvPr>
           <p:cNvSpPr>
-            <a:spLocks xmlns:a="http://schemas.openxmlformats.org/drawingml/2006/main" noGrp="1"/>
-          </p:cNvSpPr>
-          <p:nvPr/>
-        </p:nvSpPr>
-        <p:spPr>
-          <a:xfrm xmlns:a="http://schemas.openxmlformats.org/drawingml/2006/main">
+            <a:spLocks noGrp="1"/>
+          </p:cNvSpPr>
+          <p:nvPr/>
+        </p:nvSpPr>
+        <p:spPr>
+          <a:xfrm>
             <a:off x="3248025" y="4438650"/>
             <a:ext cx="2381250" cy="609600"/>
           </a:xfrm>
-          <a:prstGeom xmlns:a="http://schemas.openxmlformats.org/drawingml/2006/main" prst="rect">
-            <a:avLst/>
-          </a:prstGeom>
-          <a:noFill xmlns:a="http://schemas.openxmlformats.org/drawingml/2006/main"/>
-          <a:ln xmlns:a="http://schemas.openxmlformats.org/drawingml/2006/main" w="0">
+          <a:prstGeom prst="rect">
+            <a:avLst/>
+          </a:prstGeom>
+          <a:noFill/>
+          <a:ln w="0">
             <a:noFill/>
             <a:prstDash val="solid"/>
           </a:ln>
         </p:spPr>
         <p:txBody>
-          <a:bodyPr xmlns:a="http://schemas.openxmlformats.org/drawingml/2006/main" anchor="t"/>
-          <a:lstStyle xmlns:a="http://schemas.openxmlformats.org/drawingml/2006/main"/>
-          <a:p xmlns:a="http://schemas.openxmlformats.org/drawingml/2006/main">
+          <a:bodyPr anchor="t"/>
+          <a:lstStyle/>
+          <a:p>
             <a:pPr algn="l">
               <a:defRPr sz="1800" b="1">
                 <a:solidFill>
@@ -4002,35 +3719,35 @@
       <p:sp>
         <p:nvSpPr>
           <p:cNvPr id="9" name="team-role-2">
-            <a:extLst xmlns:a="http://schemas.openxmlformats.org/drawingml/2006/main">
+            <a:extLst>
               <a:ext uri="{FF2B5EF4-FFF2-40B4-BE49-F238E27FC236}">
                 <a16:creationId xmlns:a16="http://schemas.microsoft.com/office/drawing/2014/main" id="{1D5865C0-7205-4335-BFE2-D54976ED5778}"/>
               </a:ext>
             </a:extLst>
           </p:cNvPr>
           <p:cNvSpPr>
-            <a:spLocks xmlns:a="http://schemas.openxmlformats.org/drawingml/2006/main" noGrp="1"/>
-          </p:cNvSpPr>
-          <p:nvPr/>
-        </p:nvSpPr>
-        <p:spPr>
-          <a:xfrm xmlns:a="http://schemas.openxmlformats.org/drawingml/2006/main">
+            <a:spLocks noGrp="1"/>
+          </p:cNvSpPr>
+          <p:nvPr/>
+        </p:nvSpPr>
+        <p:spPr>
+          <a:xfrm>
             <a:off x="3248025" y="5105400"/>
             <a:ext cx="2381250" cy="495300"/>
           </a:xfrm>
-          <a:prstGeom xmlns:a="http://schemas.openxmlformats.org/drawingml/2006/main" prst="rect">
-            <a:avLst/>
-          </a:prstGeom>
-          <a:noFill xmlns:a="http://schemas.openxmlformats.org/drawingml/2006/main"/>
-          <a:ln xmlns:a="http://schemas.openxmlformats.org/drawingml/2006/main" w="0">
+          <a:prstGeom prst="rect">
+            <a:avLst/>
+          </a:prstGeom>
+          <a:noFill/>
+          <a:ln w="0">
             <a:noFill/>
             <a:prstDash val="solid"/>
           </a:ln>
         </p:spPr>
         <p:txBody>
-          <a:bodyPr xmlns:a="http://schemas.openxmlformats.org/drawingml/2006/main" anchor="t"/>
-          <a:lstStyle xmlns:a="http://schemas.openxmlformats.org/drawingml/2006/main"/>
-          <a:p xmlns:a="http://schemas.openxmlformats.org/drawingml/2006/main">
+          <a:bodyPr anchor="t"/>
+          <a:lstStyle/>
+          <a:p>
             <a:pPr algn="l">
               <a:defRPr sz="1275" b="1">
                 <a:solidFill>
@@ -4052,35 +3769,35 @@
       <p:sp>
         <p:nvSpPr>
           <p:cNvPr id="10" name="team-focus-2">
-            <a:extLst xmlns:a="http://schemas.openxmlformats.org/drawingml/2006/main">
+            <a:extLst>
               <a:ext uri="{FF2B5EF4-FFF2-40B4-BE49-F238E27FC236}">
                 <a16:creationId xmlns:a16="http://schemas.microsoft.com/office/drawing/2014/main" id="{74DE5676-DA24-4A2F-B1BF-04A2EC415A53}"/>
               </a:ext>
             </a:extLst>
           </p:cNvPr>
           <p:cNvSpPr>
-            <a:spLocks xmlns:a="http://schemas.openxmlformats.org/drawingml/2006/main" noGrp="1"/>
-          </p:cNvSpPr>
-          <p:nvPr/>
-        </p:nvSpPr>
-        <p:spPr>
-          <a:xfrm xmlns:a="http://schemas.openxmlformats.org/drawingml/2006/main">
+            <a:spLocks noGrp="1"/>
+          </p:cNvSpPr>
+          <p:nvPr/>
+        </p:nvSpPr>
+        <p:spPr>
+          <a:xfrm>
             <a:off x="3248025" y="5638800"/>
             <a:ext cx="2381250" cy="514350"/>
           </a:xfrm>
-          <a:prstGeom xmlns:a="http://schemas.openxmlformats.org/drawingml/2006/main" prst="rect">
-            <a:avLst/>
-          </a:prstGeom>
-          <a:noFill xmlns:a="http://schemas.openxmlformats.org/drawingml/2006/main"/>
-          <a:ln xmlns:a="http://schemas.openxmlformats.org/drawingml/2006/main" w="0">
+          <a:prstGeom prst="rect">
+            <a:avLst/>
+          </a:prstGeom>
+          <a:noFill/>
+          <a:ln w="0">
             <a:noFill/>
             <a:prstDash val="solid"/>
           </a:ln>
         </p:spPr>
         <p:txBody>
-          <a:bodyPr xmlns:a="http://schemas.openxmlformats.org/drawingml/2006/main" anchor="t"/>
-          <a:lstStyle xmlns:a="http://schemas.openxmlformats.org/drawingml/2006/main"/>
-          <a:p xmlns:a="http://schemas.openxmlformats.org/drawingml/2006/main">
+          <a:bodyPr anchor="t"/>
+          <a:lstStyle/>
+          <a:p>
             <a:pPr algn="l">
               <a:defRPr sz="1125" b="0">
                 <a:solidFill>
@@ -4102,31 +3819,31 @@
       <p:sp>
         <p:nvSpPr>
           <p:cNvPr id="11" name="team-photo-3">
-            <a:extLst xmlns:a="http://schemas.openxmlformats.org/drawingml/2006/main">
+            <a:extLst>
               <a:ext uri="{FF2B5EF4-FFF2-40B4-BE49-F238E27FC236}">
                 <a16:creationId xmlns:a16="http://schemas.microsoft.com/office/drawing/2014/main" id="{FA482EE4-8F2D-46FE-80A9-ACD081D05CE9}"/>
               </a:ext>
             </a:extLst>
           </p:cNvPr>
           <p:cNvSpPr>
-            <a:spLocks xmlns:a="http://schemas.openxmlformats.org/drawingml/2006/main" noGrp="1"/>
-          </p:cNvSpPr>
-          <p:nvPr/>
-        </p:nvSpPr>
-        <p:spPr>
-          <a:xfrm xmlns:a="http://schemas.openxmlformats.org/drawingml/2006/main">
+            <a:spLocks noGrp="1"/>
+          </p:cNvSpPr>
+          <p:nvPr/>
+        </p:nvSpPr>
+        <p:spPr>
+          <a:xfrm>
             <a:off x="6096000" y="1809750"/>
             <a:ext cx="2381250" cy="2381250"/>
           </a:xfrm>
-          <a:prstGeom xmlns:a="http://schemas.openxmlformats.org/drawingml/2006/main" prst="roundRect">
+          <a:prstGeom prst="roundRect">
             <a:avLst>
               <a:gd name="adj" fmla="val 4800"/>
             </a:avLst>
           </a:prstGeom>
-          <a:solidFill xmlns:a="http://schemas.openxmlformats.org/drawingml/2006/main">
+          <a:solidFill>
             <a:srgbClr val="F2F2F2"/>
           </a:solidFill>
-          <a:ln xmlns:a="http://schemas.openxmlformats.org/drawingml/2006/main" w="14288">
+          <a:ln w="14288">
             <a:solidFill>
               <a:srgbClr val="B8BCC4"/>
             </a:solidFill>
@@ -4134,9 +3851,9 @@
           </a:ln>
         </p:spPr>
         <p:txBody>
-          <a:bodyPr xmlns:a="http://schemas.openxmlformats.org/drawingml/2006/main" anchor="ctr"/>
-          <a:lstStyle xmlns:a="http://schemas.openxmlformats.org/drawingml/2006/main"/>
-          <a:p xmlns:a="http://schemas.openxmlformats.org/drawingml/2006/main">
+          <a:bodyPr anchor="ctr"/>
+          <a:lstStyle/>
+          <a:p>
             <a:pPr algn="ctr">
               <a:defRPr sz="1200" b="1">
                 <a:solidFill>
@@ -4158,35 +3875,35 @@
       <p:sp>
         <p:nvSpPr>
           <p:cNvPr id="12" name="team-name-3">
-            <a:extLst xmlns:a="http://schemas.openxmlformats.org/drawingml/2006/main">
+            <a:extLst>
               <a:ext uri="{FF2B5EF4-FFF2-40B4-BE49-F238E27FC236}">
                 <a16:creationId xmlns:a16="http://schemas.microsoft.com/office/drawing/2014/main" id="{7223976F-6393-4702-8769-A5749C8B136C}"/>
               </a:ext>
             </a:extLst>
           </p:cNvPr>
           <p:cNvSpPr>
-            <a:spLocks xmlns:a="http://schemas.openxmlformats.org/drawingml/2006/main" noGrp="1"/>
-          </p:cNvSpPr>
-          <p:nvPr/>
-        </p:nvSpPr>
-        <p:spPr>
-          <a:xfrm xmlns:a="http://schemas.openxmlformats.org/drawingml/2006/main">
+            <a:spLocks noGrp="1"/>
+          </p:cNvSpPr>
+          <p:nvPr/>
+        </p:nvSpPr>
+        <p:spPr>
+          <a:xfrm>
             <a:off x="6096000" y="4438650"/>
             <a:ext cx="2381250" cy="609600"/>
           </a:xfrm>
-          <a:prstGeom xmlns:a="http://schemas.openxmlformats.org/drawingml/2006/main" prst="rect">
-            <a:avLst/>
-          </a:prstGeom>
-          <a:noFill xmlns:a="http://schemas.openxmlformats.org/drawingml/2006/main"/>
-          <a:ln xmlns:a="http://schemas.openxmlformats.org/drawingml/2006/main" w="0">
+          <a:prstGeom prst="rect">
+            <a:avLst/>
+          </a:prstGeom>
+          <a:noFill/>
+          <a:ln w="0">
             <a:noFill/>
             <a:prstDash val="solid"/>
           </a:ln>
         </p:spPr>
         <p:txBody>
-          <a:bodyPr xmlns:a="http://schemas.openxmlformats.org/drawingml/2006/main" anchor="t"/>
-          <a:lstStyle xmlns:a="http://schemas.openxmlformats.org/drawingml/2006/main"/>
-          <a:p xmlns:a="http://schemas.openxmlformats.org/drawingml/2006/main">
+          <a:bodyPr anchor="t"/>
+          <a:lstStyle/>
+          <a:p>
             <a:pPr algn="l">
               <a:defRPr sz="1800" b="1">
                 <a:solidFill>
@@ -4208,35 +3925,35 @@
       <p:sp>
         <p:nvSpPr>
           <p:cNvPr id="13" name="team-role-3">
-            <a:extLst xmlns:a="http://schemas.openxmlformats.org/drawingml/2006/main">
+            <a:extLst>
               <a:ext uri="{FF2B5EF4-FFF2-40B4-BE49-F238E27FC236}">
                 <a16:creationId xmlns:a16="http://schemas.microsoft.com/office/drawing/2014/main" id="{9252BF06-08B7-487C-BE64-2C697607ABF5}"/>
               </a:ext>
             </a:extLst>
           </p:cNvPr>
           <p:cNvSpPr>
-            <a:spLocks xmlns:a="http://schemas.openxmlformats.org/drawingml/2006/main" noGrp="1"/>
-          </p:cNvSpPr>
-          <p:nvPr/>
-        </p:nvSpPr>
-        <p:spPr>
-          <a:xfrm xmlns:a="http://schemas.openxmlformats.org/drawingml/2006/main">
+            <a:spLocks noGrp="1"/>
+          </p:cNvSpPr>
+          <p:nvPr/>
+        </p:nvSpPr>
+        <p:spPr>
+          <a:xfrm>
             <a:off x="6096000" y="5105400"/>
             <a:ext cx="2381250" cy="495300"/>
           </a:xfrm>
-          <a:prstGeom xmlns:a="http://schemas.openxmlformats.org/drawingml/2006/main" prst="rect">
-            <a:avLst/>
-          </a:prstGeom>
-          <a:noFill xmlns:a="http://schemas.openxmlformats.org/drawingml/2006/main"/>
-          <a:ln xmlns:a="http://schemas.openxmlformats.org/drawingml/2006/main" w="0">
+          <a:prstGeom prst="rect">
+            <a:avLst/>
+          </a:prstGeom>
+          <a:noFill/>
+          <a:ln w="0">
             <a:noFill/>
             <a:prstDash val="solid"/>
           </a:ln>
         </p:spPr>
         <p:txBody>
-          <a:bodyPr xmlns:a="http://schemas.openxmlformats.org/drawingml/2006/main" anchor="t"/>
-          <a:lstStyle xmlns:a="http://schemas.openxmlformats.org/drawingml/2006/main"/>
-          <a:p xmlns:a="http://schemas.openxmlformats.org/drawingml/2006/main">
+          <a:bodyPr anchor="t"/>
+          <a:lstStyle/>
+          <a:p>
             <a:pPr algn="l">
               <a:defRPr sz="1275" b="1">
                 <a:solidFill>
@@ -4258,35 +3975,35 @@
       <p:sp>
         <p:nvSpPr>
           <p:cNvPr id="14" name="team-focus-3">
-            <a:extLst xmlns:a="http://schemas.openxmlformats.org/drawingml/2006/main">
+            <a:extLst>
               <a:ext uri="{FF2B5EF4-FFF2-40B4-BE49-F238E27FC236}">
                 <a16:creationId xmlns:a16="http://schemas.microsoft.com/office/drawing/2014/main" id="{6890EB7E-6826-447B-9F26-739B6B0CCF91}"/>
               </a:ext>
             </a:extLst>
           </p:cNvPr>
           <p:cNvSpPr>
-            <a:spLocks xmlns:a="http://schemas.openxmlformats.org/drawingml/2006/main" noGrp="1"/>
-          </p:cNvSpPr>
-          <p:nvPr/>
-        </p:nvSpPr>
-        <p:spPr>
-          <a:xfrm xmlns:a="http://schemas.openxmlformats.org/drawingml/2006/main">
+            <a:spLocks noGrp="1"/>
+          </p:cNvSpPr>
+          <p:nvPr/>
+        </p:nvSpPr>
+        <p:spPr>
+          <a:xfrm>
             <a:off x="6096000" y="5638800"/>
             <a:ext cx="2381250" cy="514350"/>
           </a:xfrm>
-          <a:prstGeom xmlns:a="http://schemas.openxmlformats.org/drawingml/2006/main" prst="rect">
-            <a:avLst/>
-          </a:prstGeom>
-          <a:noFill xmlns:a="http://schemas.openxmlformats.org/drawingml/2006/main"/>
-          <a:ln xmlns:a="http://schemas.openxmlformats.org/drawingml/2006/main" w="0">
+          <a:prstGeom prst="rect">
+            <a:avLst/>
+          </a:prstGeom>
+          <a:noFill/>
+          <a:ln w="0">
             <a:noFill/>
             <a:prstDash val="solid"/>
           </a:ln>
         </p:spPr>
         <p:txBody>
-          <a:bodyPr xmlns:a="http://schemas.openxmlformats.org/drawingml/2006/main" anchor="t"/>
-          <a:lstStyle xmlns:a="http://schemas.openxmlformats.org/drawingml/2006/main"/>
-          <a:p xmlns:a="http://schemas.openxmlformats.org/drawingml/2006/main">
+          <a:bodyPr anchor="t"/>
+          <a:lstStyle/>
+          <a:p>
             <a:pPr algn="l">
               <a:defRPr sz="1125" b="0">
                 <a:solidFill>
@@ -4308,31 +4025,31 @@
       <p:sp>
         <p:nvSpPr>
           <p:cNvPr id="15" name="team-photo-4">
-            <a:extLst xmlns:a="http://schemas.openxmlformats.org/drawingml/2006/main">
+            <a:extLst>
               <a:ext uri="{FF2B5EF4-FFF2-40B4-BE49-F238E27FC236}">
                 <a16:creationId xmlns:a16="http://schemas.microsoft.com/office/drawing/2014/main" id="{39DC4E5A-BD58-4E3D-8C4B-52309E1AAD96}"/>
               </a:ext>
             </a:extLst>
           </p:cNvPr>
           <p:cNvSpPr>
-            <a:spLocks xmlns:a="http://schemas.openxmlformats.org/drawingml/2006/main" noGrp="1"/>
-          </p:cNvSpPr>
-          <p:nvPr/>
-        </p:nvSpPr>
-        <p:spPr>
-          <a:xfrm xmlns:a="http://schemas.openxmlformats.org/drawingml/2006/main">
+            <a:spLocks noGrp="1"/>
+          </p:cNvSpPr>
+          <p:nvPr/>
+        </p:nvSpPr>
+        <p:spPr>
+          <a:xfrm>
             <a:off x="8943975" y="1809750"/>
             <a:ext cx="2381250" cy="2381250"/>
           </a:xfrm>
-          <a:prstGeom xmlns:a="http://schemas.openxmlformats.org/drawingml/2006/main" prst="roundRect">
+          <a:prstGeom prst="roundRect">
             <a:avLst>
               <a:gd name="adj" fmla="val 4800"/>
             </a:avLst>
           </a:prstGeom>
-          <a:solidFill xmlns:a="http://schemas.openxmlformats.org/drawingml/2006/main">
+          <a:solidFill>
             <a:srgbClr val="F2F2F2"/>
           </a:solidFill>
-          <a:ln xmlns:a="http://schemas.openxmlformats.org/drawingml/2006/main" w="14288">
+          <a:ln w="14288">
             <a:solidFill>
               <a:srgbClr val="B8BCC4"/>
             </a:solidFill>
@@ -4340,9 +4057,9 @@
           </a:ln>
         </p:spPr>
         <p:txBody>
-          <a:bodyPr xmlns:a="http://schemas.openxmlformats.org/drawingml/2006/main" anchor="ctr"/>
-          <a:lstStyle xmlns:a="http://schemas.openxmlformats.org/drawingml/2006/main"/>
-          <a:p xmlns:a="http://schemas.openxmlformats.org/drawingml/2006/main">
+          <a:bodyPr anchor="ctr"/>
+          <a:lstStyle/>
+          <a:p>
             <a:pPr algn="ctr">
               <a:defRPr sz="1200" b="1">
                 <a:solidFill>
@@ -4364,35 +4081,35 @@
       <p:sp>
         <p:nvSpPr>
           <p:cNvPr id="16" name="team-name-4">
-            <a:extLst xmlns:a="http://schemas.openxmlformats.org/drawingml/2006/main">
+            <a:extLst>
               <a:ext uri="{FF2B5EF4-FFF2-40B4-BE49-F238E27FC236}">
                 <a16:creationId xmlns:a16="http://schemas.microsoft.com/office/drawing/2014/main" id="{AC2F7A2E-283F-41B7-80E9-11C6178A1FBB}"/>
               </a:ext>
             </a:extLst>
           </p:cNvPr>
           <p:cNvSpPr>
-            <a:spLocks xmlns:a="http://schemas.openxmlformats.org/drawingml/2006/main" noGrp="1"/>
-          </p:cNvSpPr>
-          <p:nvPr/>
-        </p:nvSpPr>
-        <p:spPr>
-          <a:xfrm xmlns:a="http://schemas.openxmlformats.org/drawingml/2006/main">
+            <a:spLocks noGrp="1"/>
+          </p:cNvSpPr>
+          <p:nvPr/>
+        </p:nvSpPr>
+        <p:spPr>
+          <a:xfrm>
             <a:off x="8943975" y="4438650"/>
             <a:ext cx="2381250" cy="609600"/>
           </a:xfrm>
-          <a:prstGeom xmlns:a="http://schemas.openxmlformats.org/drawingml/2006/main" prst="rect">
-            <a:avLst/>
-          </a:prstGeom>
-          <a:noFill xmlns:a="http://schemas.openxmlformats.org/drawingml/2006/main"/>
-          <a:ln xmlns:a="http://schemas.openxmlformats.org/drawingml/2006/main" w="0">
+          <a:prstGeom prst="rect">
+            <a:avLst/>
+          </a:prstGeom>
+          <a:noFill/>
+          <a:ln w="0">
             <a:noFill/>
             <a:prstDash val="solid"/>
           </a:ln>
         </p:spPr>
         <p:txBody>
-          <a:bodyPr xmlns:a="http://schemas.openxmlformats.org/drawingml/2006/main" anchor="t"/>
-          <a:lstStyle xmlns:a="http://schemas.openxmlformats.org/drawingml/2006/main"/>
-          <a:p xmlns:a="http://schemas.openxmlformats.org/drawingml/2006/main">
+          <a:bodyPr anchor="t"/>
+          <a:lstStyle/>
+          <a:p>
             <a:pPr algn="l">
               <a:defRPr sz="1800" b="1">
                 <a:solidFill>
@@ -4414,35 +4131,35 @@
       <p:sp>
         <p:nvSpPr>
           <p:cNvPr id="17" name="team-role-4">
-            <a:extLst xmlns:a="http://schemas.openxmlformats.org/drawingml/2006/main">
+            <a:extLst>
               <a:ext uri="{FF2B5EF4-FFF2-40B4-BE49-F238E27FC236}">
                 <a16:creationId xmlns:a16="http://schemas.microsoft.com/office/drawing/2014/main" id="{B1377A48-0BD9-49E2-959A-3D72D2C0F135}"/>
               </a:ext>
             </a:extLst>
           </p:cNvPr>
           <p:cNvSpPr>
-            <a:spLocks xmlns:a="http://schemas.openxmlformats.org/drawingml/2006/main" noGrp="1"/>
-          </p:cNvSpPr>
-          <p:nvPr/>
-        </p:nvSpPr>
-        <p:spPr>
-          <a:xfrm xmlns:a="http://schemas.openxmlformats.org/drawingml/2006/main">
+            <a:spLocks noGrp="1"/>
+          </p:cNvSpPr>
+          <p:nvPr/>
+        </p:nvSpPr>
+        <p:spPr>
+          <a:xfrm>
             <a:off x="8943975" y="5105400"/>
             <a:ext cx="2381250" cy="495300"/>
           </a:xfrm>
-          <a:prstGeom xmlns:a="http://schemas.openxmlformats.org/drawingml/2006/main" prst="rect">
-            <a:avLst/>
-          </a:prstGeom>
-          <a:noFill xmlns:a="http://schemas.openxmlformats.org/drawingml/2006/main"/>
-          <a:ln xmlns:a="http://schemas.openxmlformats.org/drawingml/2006/main" w="0">
+          <a:prstGeom prst="rect">
+            <a:avLst/>
+          </a:prstGeom>
+          <a:noFill/>
+          <a:ln w="0">
             <a:noFill/>
             <a:prstDash val="solid"/>
           </a:ln>
         </p:spPr>
         <p:txBody>
-          <a:bodyPr xmlns:a="http://schemas.openxmlformats.org/drawingml/2006/main" anchor="t"/>
-          <a:lstStyle xmlns:a="http://schemas.openxmlformats.org/drawingml/2006/main"/>
-          <a:p xmlns:a="http://schemas.openxmlformats.org/drawingml/2006/main">
+          <a:bodyPr anchor="t"/>
+          <a:lstStyle/>
+          <a:p>
             <a:pPr algn="l">
               <a:defRPr sz="1275" b="1">
                 <a:solidFill>
@@ -4464,35 +4181,35 @@
       <p:sp>
         <p:nvSpPr>
           <p:cNvPr id="18" name="team-focus-4">
-            <a:extLst xmlns:a="http://schemas.openxmlformats.org/drawingml/2006/main">
+            <a:extLst>
               <a:ext uri="{FF2B5EF4-FFF2-40B4-BE49-F238E27FC236}">
                 <a16:creationId xmlns:a16="http://schemas.microsoft.com/office/drawing/2014/main" id="{7A760809-86A2-4494-89C7-00AD186816A5}"/>
               </a:ext>
             </a:extLst>
           </p:cNvPr>
           <p:cNvSpPr>
-            <a:spLocks xmlns:a="http://schemas.openxmlformats.org/drawingml/2006/main" noGrp="1"/>
-          </p:cNvSpPr>
-          <p:nvPr/>
-        </p:nvSpPr>
-        <p:spPr>
-          <a:xfrm xmlns:a="http://schemas.openxmlformats.org/drawingml/2006/main">
+            <a:spLocks noGrp="1"/>
+          </p:cNvSpPr>
+          <p:nvPr/>
+        </p:nvSpPr>
+        <p:spPr>
+          <a:xfrm>
             <a:off x="8943975" y="5638800"/>
             <a:ext cx="2381250" cy="514350"/>
           </a:xfrm>
-          <a:prstGeom xmlns:a="http://schemas.openxmlformats.org/drawingml/2006/main" prst="rect">
-            <a:avLst/>
-          </a:prstGeom>
-          <a:noFill xmlns:a="http://schemas.openxmlformats.org/drawingml/2006/main"/>
-          <a:ln xmlns:a="http://schemas.openxmlformats.org/drawingml/2006/main" w="0">
+          <a:prstGeom prst="rect">
+            <a:avLst/>
+          </a:prstGeom>
+          <a:noFill/>
+          <a:ln w="0">
             <a:noFill/>
             <a:prstDash val="solid"/>
           </a:ln>
         </p:spPr>
         <p:txBody>
-          <a:bodyPr xmlns:a="http://schemas.openxmlformats.org/drawingml/2006/main" anchor="t"/>
-          <a:lstStyle xmlns:a="http://schemas.openxmlformats.org/drawingml/2006/main"/>
-          <a:p xmlns:a="http://schemas.openxmlformats.org/drawingml/2006/main">
+          <a:bodyPr anchor="t"/>
+          <a:lstStyle/>
+          <a:p>
             <a:pPr algn="l">
               <a:defRPr sz="1125" b="0">
                 <a:solidFill>
@@ -4514,35 +4231,35 @@
       <p:sp>
         <p:nvSpPr>
           <p:cNvPr id="19" name="team-page-number">
-            <a:extLst xmlns:a="http://schemas.openxmlformats.org/drawingml/2006/main">
+            <a:extLst>
               <a:ext uri="{FF2B5EF4-FFF2-40B4-BE49-F238E27FC236}">
                 <a16:creationId xmlns:a16="http://schemas.microsoft.com/office/drawing/2014/main" id="{E474E423-351A-4779-9046-559DAC16A3C7}"/>
               </a:ext>
             </a:extLst>
           </p:cNvPr>
           <p:cNvSpPr>
-            <a:spLocks xmlns:a="http://schemas.openxmlformats.org/drawingml/2006/main" noGrp="1"/>
-          </p:cNvSpPr>
-          <p:nvPr/>
-        </p:nvSpPr>
-        <p:spPr>
-          <a:xfrm xmlns:a="http://schemas.openxmlformats.org/drawingml/2006/main">
+            <a:spLocks noGrp="1"/>
+          </p:cNvSpPr>
+          <p:nvPr/>
+        </p:nvSpPr>
+        <p:spPr>
+          <a:xfrm>
             <a:off x="11277600" y="6276975"/>
             <a:ext cx="514350" cy="238125"/>
           </a:xfrm>
-          <a:prstGeom xmlns:a="http://schemas.openxmlformats.org/drawingml/2006/main" prst="rect">
-            <a:avLst/>
-          </a:prstGeom>
-          <a:noFill xmlns:a="http://schemas.openxmlformats.org/drawingml/2006/main"/>
-          <a:ln xmlns:a="http://schemas.openxmlformats.org/drawingml/2006/main" w="0">
+          <a:prstGeom prst="rect">
+            <a:avLst/>
+          </a:prstGeom>
+          <a:noFill/>
+          <a:ln w="0">
             <a:noFill/>
             <a:prstDash val="solid"/>
           </a:ln>
         </p:spPr>
         <p:txBody>
-          <a:bodyPr xmlns:a="http://schemas.openxmlformats.org/drawingml/2006/main" anchor="b"/>
-          <a:lstStyle xmlns:a="http://schemas.openxmlformats.org/drawingml/2006/main"/>
-          <a:p xmlns:a="http://schemas.openxmlformats.org/drawingml/2006/main">
+          <a:bodyPr anchor="b"/>
+          <a:lstStyle/>
+          <a:p>
             <a:pPr algn="r">
               <a:defRPr sz="975" b="0">
                 <a:solidFill>
@@ -4564,34 +4281,154 @@
       <p:sp>
         <p:nvSpPr>
           <p:cNvPr id="20" name="veilpay-accent">
-            <a:extLst xmlns:a="http://schemas.openxmlformats.org/drawingml/2006/main">
+            <a:extLst>
               <a:ext uri="{FF2B5EF4-FFF2-40B4-BE49-F238E27FC236}">
                 <a16:creationId xmlns:a16="http://schemas.microsoft.com/office/drawing/2014/main" id="{B822D36D-9410-483D-B07F-0119B164E58A}"/>
               </a:ext>
             </a:extLst>
           </p:cNvPr>
           <p:cNvSpPr>
-            <a:spLocks xmlns:a="http://schemas.openxmlformats.org/drawingml/2006/main" noGrp="1"/>
-          </p:cNvSpPr>
-          <p:nvPr/>
-        </p:nvSpPr>
-        <p:spPr>
-          <a:xfrm xmlns:a="http://schemas.openxmlformats.org/drawingml/2006/main">
+            <a:spLocks noGrp="1"/>
+          </p:cNvSpPr>
+          <p:nvPr/>
+        </p:nvSpPr>
+        <p:spPr>
+          <a:xfrm>
             <a:off x="0" y="0"/>
             <a:ext cx="85725" cy="6858000"/>
           </a:xfrm>
-          <a:prstGeom xmlns:a="http://schemas.openxmlformats.org/drawingml/2006/main" prst="rect">
-            <a:avLst/>
-          </a:prstGeom>
-          <a:solidFill xmlns:a="http://schemas.openxmlformats.org/drawingml/2006/main">
+          <a:prstGeom prst="rect">
+            <a:avLst/>
+          </a:prstGeom>
+          <a:solidFill>
             <a:srgbClr val="6DCBF4"/>
           </a:solidFill>
-          <a:ln xmlns:a="http://schemas.openxmlformats.org/drawingml/2006/main" w="0">
+          <a:ln w="0">
             <a:noFill/>
             <a:prstDash val="solid"/>
           </a:ln>
         </p:spPr>
       </p:sp>
+      <p:pic>
+        <p:nvPicPr>
+          <p:cNvPr id="22" name="Resim 21"/>
+          <p:cNvPicPr>
+            <a:picLocks noChangeAspect="1"/>
+          </p:cNvPicPr>
+          <p:nvPr/>
+        </p:nvPicPr>
+        <p:blipFill>
+          <a:blip r:embed="rId3" cstate="hqprint">
+            <a:extLst>
+              <a:ext uri="{28A0092B-C50C-407E-A947-70E740481C1C}">
+                <a14:useLocalDpi xmlns:a14="http://schemas.microsoft.com/office/drawing/2010/main" val="0"/>
+              </a:ext>
+            </a:extLst>
+          </a:blip>
+          <a:stretch>
+            <a:fillRect/>
+          </a:stretch>
+        </p:blipFill>
+        <p:spPr>
+          <a:xfrm>
+            <a:off x="3266104" y="1809751"/>
+            <a:ext cx="2363171" cy="2381250"/>
+          </a:xfrm>
+          <a:prstGeom prst="rect">
+            <a:avLst/>
+          </a:prstGeom>
+        </p:spPr>
+      </p:pic>
+      <p:pic>
+        <p:nvPicPr>
+          <p:cNvPr id="23" name="Resim 22"/>
+          <p:cNvPicPr>
+            <a:picLocks noChangeAspect="1"/>
+          </p:cNvPicPr>
+          <p:nvPr/>
+        </p:nvPicPr>
+        <p:blipFill>
+          <a:blip r:embed="rId4" cstate="hqprint">
+            <a:extLst>
+              <a:ext uri="{28A0092B-C50C-407E-A947-70E740481C1C}">
+                <a14:useLocalDpi xmlns:a14="http://schemas.microsoft.com/office/drawing/2010/main" val="0"/>
+              </a:ext>
+            </a:extLst>
+          </a:blip>
+          <a:stretch>
+            <a:fillRect/>
+          </a:stretch>
+        </p:blipFill>
+        <p:spPr>
+          <a:xfrm>
+            <a:off x="400050" y="1809751"/>
+            <a:ext cx="2381250" cy="2381250"/>
+          </a:xfrm>
+          <a:prstGeom prst="rect">
+            <a:avLst/>
+          </a:prstGeom>
+        </p:spPr>
+      </p:pic>
+      <p:pic>
+        <p:nvPicPr>
+          <p:cNvPr id="24" name="Resim 23"/>
+          <p:cNvPicPr>
+            <a:picLocks noChangeAspect="1"/>
+          </p:cNvPicPr>
+          <p:nvPr/>
+        </p:nvPicPr>
+        <p:blipFill>
+          <a:blip r:embed="rId5">
+            <a:extLst>
+              <a:ext uri="{28A0092B-C50C-407E-A947-70E740481C1C}">
+                <a14:useLocalDpi xmlns:a14="http://schemas.microsoft.com/office/drawing/2010/main" val="0"/>
+              </a:ext>
+            </a:extLst>
+          </a:blip>
+          <a:stretch>
+            <a:fillRect/>
+          </a:stretch>
+        </p:blipFill>
+        <p:spPr>
+          <a:xfrm>
+            <a:off x="8943975" y="1809750"/>
+            <a:ext cx="2381250" cy="2381250"/>
+          </a:xfrm>
+          <a:prstGeom prst="rect">
+            <a:avLst/>
+          </a:prstGeom>
+        </p:spPr>
+      </p:pic>
+      <p:pic>
+        <p:nvPicPr>
+          <p:cNvPr id="25" name="Resim 24"/>
+          <p:cNvPicPr>
+            <a:picLocks noChangeAspect="1"/>
+          </p:cNvPicPr>
+          <p:nvPr/>
+        </p:nvPicPr>
+        <p:blipFill>
+          <a:blip r:embed="rId6">
+            <a:extLst>
+              <a:ext uri="{28A0092B-C50C-407E-A947-70E740481C1C}">
+                <a14:useLocalDpi xmlns:a14="http://schemas.microsoft.com/office/drawing/2010/main" val="0"/>
+              </a:ext>
+            </a:extLst>
+          </a:blip>
+          <a:stretch>
+            <a:fillRect/>
+          </a:stretch>
+        </p:blipFill>
+        <p:spPr>
+          <a:xfrm>
+            <a:off x="6114079" y="1809750"/>
+            <a:ext cx="2363171" cy="2381250"/>
+          </a:xfrm>
+          <a:prstGeom prst="rect">
+            <a:avLst/>
+          </a:prstGeom>
+        </p:spPr>
+      </p:pic>
     </p:spTree>
     <p:extLst>
       <p:ext uri="{BB962C8B-B14F-4D97-AF65-F5344CB8AC3E}">
@@ -4599,11 +4436,14 @@
       </p:ext>
     </p:extLst>
   </p:cSld>
+  <p:clrMapOvr>
+    <a:masterClrMapping/>
+  </p:clrMapOvr>
 </p:sld>
 </file>
 
 <file path=ppt/slides/slide13.xml><?xml version="1.0" encoding="utf-8"?>
-<p:sld xmlns:p="http://schemas.openxmlformats.org/presentationml/2006/main">
+<p:sld xmlns:a="http://schemas.openxmlformats.org/drawingml/2006/main" xmlns:r="http://schemas.openxmlformats.org/officeDocument/2006/relationships" xmlns:p="http://schemas.openxmlformats.org/presentationml/2006/main">
   <p:cSld>
     <p:spTree>
       <p:nvGrpSpPr>
@@ -4612,37 +4452,42 @@
         <p:nvPr/>
       </p:nvGrpSpPr>
       <p:grpSpPr>
-        <a:xfrm xmlns:a="http://schemas.openxmlformats.org/drawingml/2006/main"/>
+        <a:xfrm>
+          <a:off x="0" y="0"/>
+          <a:ext cx="0" cy="0"/>
+          <a:chOff x="0" y="0"/>
+          <a:chExt cx="0" cy="0"/>
+        </a:xfrm>
       </p:grpSpPr>
       <p:sp>
         <p:nvSpPr>
-          <p:cNvPr id="1" name="Title-3-1">
-            <a:extLst xmlns:a="http://schemas.openxmlformats.org/drawingml/2006/main">
+          <p:cNvPr id="5" name="Title-3-1">
+            <a:extLst>
               <a:ext uri="{FF2B5EF4-FFF2-40B4-BE49-F238E27FC236}">
                 <a16:creationId xmlns:a16="http://schemas.microsoft.com/office/drawing/2014/main" id="{F7F19DC0-B780-4D61-B2E7-D34BD2D08F5D}"/>
               </a:ext>
             </a:extLst>
           </p:cNvPr>
           <p:cNvSpPr>
-            <a:spLocks xmlns:a="http://schemas.openxmlformats.org/drawingml/2006/main" noGrp="1"/>
-          </p:cNvSpPr>
-          <p:nvPr/>
-        </p:nvSpPr>
-        <p:spPr>
-          <a:xfrm xmlns:a="http://schemas.openxmlformats.org/drawingml/2006/main">
+            <a:spLocks noGrp="1"/>
+          </p:cNvSpPr>
+          <p:nvPr/>
+        </p:nvSpPr>
+        <p:spPr>
+          <a:xfrm>
             <a:off x="393668" y="1738789"/>
             <a:ext cx="9448800" cy="2491454"/>
           </a:xfrm>
-          <a:prstGeom xmlns:a="http://schemas.openxmlformats.org/drawingml/2006/main" prst="rect">
-            <a:avLst/>
-          </a:prstGeom>
-        </p:spPr>
-        <p:txBody>
-          <a:bodyPr xmlns:a="http://schemas.openxmlformats.org/drawingml/2006/main" lIns="0" tIns="0" rIns="0" bIns="0" anchor="b">
+          <a:prstGeom prst="rect">
+            <a:avLst/>
+          </a:prstGeom>
+        </p:spPr>
+        <p:txBody>
+          <a:bodyPr lIns="0" tIns="0" rIns="0" bIns="0" anchor="b">
             <a:noAutofit/>
           </a:bodyPr>
-          <a:lstStyle xmlns:a="http://schemas.openxmlformats.org/drawingml/2006/main"/>
-          <a:p xmlns:a="http://schemas.openxmlformats.org/drawingml/2006/main">
+          <a:lstStyle/>
+          <a:p>
             <a:pPr algn="l">
               <a:lnSpc>
                 <a:spcPct val="92000"/>
@@ -4677,32 +4522,32 @@
       <p:sp>
         <p:nvSpPr>
           <p:cNvPr id="2" name="Subtitle-4-2">
-            <a:extLst xmlns:a="http://schemas.openxmlformats.org/drawingml/2006/main">
+            <a:extLst>
               <a:ext uri="{FF2B5EF4-FFF2-40B4-BE49-F238E27FC236}">
                 <a16:creationId xmlns:a16="http://schemas.microsoft.com/office/drawing/2014/main" id="{76121D68-374F-410E-B33F-2C2BBE33AA23}"/>
               </a:ext>
             </a:extLst>
           </p:cNvPr>
           <p:cNvSpPr>
-            <a:spLocks xmlns:a="http://schemas.openxmlformats.org/drawingml/2006/main" noGrp="1"/>
-          </p:cNvSpPr>
-          <p:nvPr/>
-        </p:nvSpPr>
-        <p:spPr>
-          <a:xfrm xmlns:a="http://schemas.openxmlformats.org/drawingml/2006/main">
+            <a:spLocks noGrp="1"/>
+          </p:cNvSpPr>
+          <p:nvPr/>
+        </p:nvSpPr>
+        <p:spPr>
+          <a:xfrm>
             <a:off x="393668" y="4973288"/>
             <a:ext cx="3568732" cy="1080230"/>
           </a:xfrm>
-          <a:prstGeom xmlns:a="http://schemas.openxmlformats.org/drawingml/2006/main" prst="rect">
-            <a:avLst/>
-          </a:prstGeom>
-        </p:spPr>
-        <p:txBody>
-          <a:bodyPr xmlns:a="http://schemas.openxmlformats.org/drawingml/2006/main" lIns="0" tIns="0" rIns="0" bIns="0">
+          <a:prstGeom prst="rect">
+            <a:avLst/>
+          </a:prstGeom>
+        </p:spPr>
+        <p:txBody>
+          <a:bodyPr lIns="0" tIns="0" rIns="0" bIns="0">
             <a:noAutofit/>
           </a:bodyPr>
-          <a:lstStyle xmlns:a="http://schemas.openxmlformats.org/drawingml/2006/main"/>
-          <a:p xmlns:a="http://schemas.openxmlformats.org/drawingml/2006/main">
+          <a:lstStyle/>
+          <a:p>
             <a:pPr algn="l">
               <a:lnSpc>
                 <a:spcPct val="105000"/>
@@ -4732,7 +4577,7 @@
               <a:t>Compact and proof mentorship</a:t>
             </a:r>
           </a:p>
-          <a:p xmlns:a="http://schemas.openxmlformats.org/drawingml/2006/main">
+          <a:p>
             <a:pPr algn="l">
               <a:lnSpc>
                 <a:spcPct val="105000"/>
@@ -4762,7 +4607,7 @@
               <a:t>Pilot introductions</a:t>
             </a:r>
           </a:p>
-          <a:p xmlns:a="http://schemas.openxmlformats.org/drawingml/2006/main">
+          <a:p>
             <a:pPr algn="l">
               <a:lnSpc>
                 <a:spcPct val="105000"/>
@@ -4797,32 +4642,32 @@
       <p:sp>
         <p:nvSpPr>
           <p:cNvPr id="3" name="Subtitle-4-3">
-            <a:extLst xmlns:a="http://schemas.openxmlformats.org/drawingml/2006/main">
+            <a:extLst>
               <a:ext uri="{FF2B5EF4-FFF2-40B4-BE49-F238E27FC236}">
                 <a16:creationId xmlns:a16="http://schemas.microsoft.com/office/drawing/2014/main" id="{BEE80914-0AAD-47AC-9552-4BA0AB0DF569}"/>
               </a:ext>
             </a:extLst>
           </p:cNvPr>
           <p:cNvSpPr>
-            <a:spLocks xmlns:a="http://schemas.openxmlformats.org/drawingml/2006/main" noGrp="1"/>
-          </p:cNvSpPr>
-          <p:nvPr/>
-        </p:nvSpPr>
-        <p:spPr>
-          <a:xfrm xmlns:a="http://schemas.openxmlformats.org/drawingml/2006/main">
+            <a:spLocks noGrp="1"/>
+          </p:cNvSpPr>
+          <p:nvPr/>
+        </p:nvSpPr>
+        <p:spPr>
+          <a:xfrm>
             <a:off x="393668" y="392240"/>
             <a:ext cx="1612868" cy="649129"/>
           </a:xfrm>
-          <a:prstGeom xmlns:a="http://schemas.openxmlformats.org/drawingml/2006/main" prst="rect">
-            <a:avLst/>
-          </a:prstGeom>
-        </p:spPr>
-        <p:txBody>
-          <a:bodyPr xmlns:a="http://schemas.openxmlformats.org/drawingml/2006/main" lIns="0" tIns="0" rIns="0" bIns="0">
+          <a:prstGeom prst="rect">
+            <a:avLst/>
+          </a:prstGeom>
+        </p:spPr>
+        <p:txBody>
+          <a:bodyPr lIns="0" tIns="0" rIns="0" bIns="0">
             <a:noAutofit/>
           </a:bodyPr>
-          <a:lstStyle xmlns:a="http://schemas.openxmlformats.org/drawingml/2006/main"/>
-          <a:p xmlns:a="http://schemas.openxmlformats.org/drawingml/2006/main">
+          <a:lstStyle/>
+          <a:p>
             <a:pPr algn="l">
               <a:lnSpc>
                 <a:spcPct val="105000"/>
@@ -4857,29 +4702,29 @@
       <p:sp>
         <p:nvSpPr>
           <p:cNvPr id="4" name="veilpay-accent">
-            <a:extLst xmlns:a="http://schemas.openxmlformats.org/drawingml/2006/main">
+            <a:extLst>
               <a:ext uri="{FF2B5EF4-FFF2-40B4-BE49-F238E27FC236}">
                 <a16:creationId xmlns:a16="http://schemas.microsoft.com/office/drawing/2014/main" id="{811019AD-3EDB-4C1C-8105-CE7981860101}"/>
               </a:ext>
             </a:extLst>
           </p:cNvPr>
           <p:cNvSpPr>
-            <a:spLocks xmlns:a="http://schemas.openxmlformats.org/drawingml/2006/main" noGrp="1"/>
-          </p:cNvSpPr>
-          <p:nvPr/>
-        </p:nvSpPr>
-        <p:spPr>
-          <a:xfrm xmlns:a="http://schemas.openxmlformats.org/drawingml/2006/main">
+            <a:spLocks noGrp="1"/>
+          </p:cNvSpPr>
+          <p:nvPr/>
+        </p:nvSpPr>
+        <p:spPr>
+          <a:xfrm>
             <a:off x="0" y="0"/>
             <a:ext cx="85725" cy="6858000"/>
           </a:xfrm>
-          <a:prstGeom xmlns:a="http://schemas.openxmlformats.org/drawingml/2006/main" prst="rect">
-            <a:avLst/>
-          </a:prstGeom>
-          <a:solidFill xmlns:a="http://schemas.openxmlformats.org/drawingml/2006/main">
+          <a:prstGeom prst="rect">
+            <a:avLst/>
+          </a:prstGeom>
+          <a:solidFill>
             <a:srgbClr val="6DCBF4"/>
           </a:solidFill>
-          <a:ln xmlns:a="http://schemas.openxmlformats.org/drawingml/2006/main" w="0">
+          <a:ln w="0">
             <a:noFill/>
             <a:prstDash val="solid"/>
           </a:ln>
@@ -4892,11 +4737,14 @@
       </p:ext>
     </p:extLst>
   </p:cSld>
+  <p:clrMapOvr>
+    <a:masterClrMapping/>
+  </p:clrMapOvr>
 </p:sld>
 </file>
 
 <file path=ppt/slides/slide2.xml><?xml version="1.0" encoding="utf-8"?>
-<p:sld xmlns:p="http://schemas.openxmlformats.org/presentationml/2006/main">
+<p:sld xmlns:a="http://schemas.openxmlformats.org/drawingml/2006/main" xmlns:r="http://schemas.openxmlformats.org/officeDocument/2006/relationships" xmlns:p="http://schemas.openxmlformats.org/presentationml/2006/main">
   <p:cSld>
     <p:spTree>
       <p:nvGrpSpPr>
@@ -4905,37 +4753,42 @@
         <p:nvPr/>
       </p:nvGrpSpPr>
       <p:grpSpPr>
-        <a:xfrm xmlns:a="http://schemas.openxmlformats.org/drawingml/2006/main"/>
+        <a:xfrm>
+          <a:off x="0" y="0"/>
+          <a:ext cx="0" cy="0"/>
+          <a:chOff x="0" y="0"/>
+          <a:chExt cx="0" cy="0"/>
+        </a:xfrm>
       </p:grpSpPr>
       <p:sp>
         <p:nvSpPr>
-          <p:cNvPr id="1" name="Google-Shape-532-p58-2">
-            <a:extLst xmlns:a="http://schemas.openxmlformats.org/drawingml/2006/main">
+          <p:cNvPr id="11" name="Google-Shape-532-p58-2">
+            <a:extLst>
               <a:ext uri="{FF2B5EF4-FFF2-40B4-BE49-F238E27FC236}">
                 <a16:creationId xmlns:a16="http://schemas.microsoft.com/office/drawing/2014/main" id="{44C065DF-2787-4303-912C-8800B5612AE5}"/>
               </a:ext>
             </a:extLst>
           </p:cNvPr>
           <p:cNvSpPr>
-            <a:spLocks xmlns:a="http://schemas.openxmlformats.org/drawingml/2006/main" noGrp="1"/>
-          </p:cNvSpPr>
-          <p:nvPr/>
-        </p:nvSpPr>
-        <p:spPr>
-          <a:xfrm xmlns:a="http://schemas.openxmlformats.org/drawingml/2006/main">
+            <a:spLocks noGrp="1"/>
+          </p:cNvSpPr>
+          <p:nvPr/>
+        </p:nvSpPr>
+        <p:spPr>
+          <a:xfrm>
             <a:off x="11279315" y="6279261"/>
             <a:ext cx="518922" cy="241268"/>
           </a:xfrm>
-          <a:prstGeom xmlns:a="http://schemas.openxmlformats.org/drawingml/2006/main" prst="rect">
-            <a:avLst/>
-          </a:prstGeom>
-        </p:spPr>
-        <p:txBody>
-          <a:bodyPr xmlns:a="http://schemas.openxmlformats.org/drawingml/2006/main" wrap="square" lIns="0" tIns="0" rIns="0" bIns="0" anchor="b">
+          <a:prstGeom prst="rect">
+            <a:avLst/>
+          </a:prstGeom>
+        </p:spPr>
+        <p:txBody>
+          <a:bodyPr wrap="square" lIns="0" tIns="0" rIns="0" bIns="0" anchor="b">
             <a:noAutofit/>
           </a:bodyPr>
-          <a:lstStyle xmlns:a="http://schemas.openxmlformats.org/drawingml/2006/main"/>
-          <a:p xmlns:a="http://schemas.openxmlformats.org/drawingml/2006/main">
+          <a:lstStyle/>
+          <a:p>
             <a:pPr algn="r">
               <a:defRPr sz="1000">
                 <a:solidFill>
@@ -4955,32 +4808,32 @@
       <p:sp>
         <p:nvSpPr>
           <p:cNvPr id="2" name="Google-Shape-533-p58-3">
-            <a:extLst xmlns:a="http://schemas.openxmlformats.org/drawingml/2006/main">
+            <a:extLst>
               <a:ext uri="{FF2B5EF4-FFF2-40B4-BE49-F238E27FC236}">
                 <a16:creationId xmlns:a16="http://schemas.microsoft.com/office/drawing/2014/main" id="{33B98CF8-40A5-47BD-85A6-14D4D1888F2F}"/>
               </a:ext>
             </a:extLst>
           </p:cNvPr>
           <p:cNvSpPr>
-            <a:spLocks xmlns:a="http://schemas.openxmlformats.org/drawingml/2006/main" noGrp="1"/>
-          </p:cNvSpPr>
-          <p:nvPr/>
-        </p:nvSpPr>
-        <p:spPr>
-          <a:xfrm xmlns:a="http://schemas.openxmlformats.org/drawingml/2006/main">
+            <a:spLocks noGrp="1"/>
+          </p:cNvSpPr>
+          <p:nvPr/>
+        </p:nvSpPr>
+        <p:spPr>
+          <a:xfrm>
             <a:off x="393668" y="344519"/>
             <a:ext cx="11404568" cy="644271"/>
           </a:xfrm>
-          <a:prstGeom xmlns:a="http://schemas.openxmlformats.org/drawingml/2006/main" prst="rect">
-            <a:avLst/>
-          </a:prstGeom>
-        </p:spPr>
-        <p:txBody>
-          <a:bodyPr xmlns:a="http://schemas.openxmlformats.org/drawingml/2006/main" wrap="square" lIns="0" tIns="0" rIns="0" bIns="0" anchor="t">
+          <a:prstGeom prst="rect">
+            <a:avLst/>
+          </a:prstGeom>
+        </p:spPr>
+        <p:txBody>
+          <a:bodyPr wrap="square" lIns="0" tIns="0" rIns="0" bIns="0" anchor="t">
             <a:noAutofit/>
           </a:bodyPr>
-          <a:lstStyle xmlns:a="http://schemas.openxmlformats.org/drawingml/2006/main"/>
-          <a:p xmlns:a="http://schemas.openxmlformats.org/drawingml/2006/main">
+          <a:lstStyle/>
+          <a:p>
             <a:pPr algn="l">
               <a:lnSpc>
                 <a:spcPct val="105000"/>
@@ -5015,28 +4868,28 @@
       <p:sp>
         <p:nvSpPr>
           <p:cNvPr id="3" name="Rounded-Rectangle-1-4">
-            <a:extLst xmlns:a="http://schemas.openxmlformats.org/drawingml/2006/main">
+            <a:extLst>
               <a:ext uri="{FF2B5EF4-FFF2-40B4-BE49-F238E27FC236}">
                 <a16:creationId xmlns:a16="http://schemas.microsoft.com/office/drawing/2014/main" id="{621B1BCB-10BA-4420-87C2-D2305611EE42}"/>
               </a:ext>
             </a:extLst>
           </p:cNvPr>
           <p:cNvSpPr>
-            <a:spLocks xmlns:a="http://schemas.openxmlformats.org/drawingml/2006/main" noGrp="1"/>
-          </p:cNvSpPr>
-          <p:nvPr/>
-        </p:nvSpPr>
-        <p:spPr>
-          <a:xfrm xmlns:a="http://schemas.openxmlformats.org/drawingml/2006/main">
+            <a:spLocks noGrp="1"/>
+          </p:cNvSpPr>
+          <p:nvPr/>
+        </p:nvSpPr>
+        <p:spPr>
+          <a:xfrm>
             <a:off x="397002" y="3339084"/>
             <a:ext cx="5533930" cy="1320832"/>
           </a:xfrm>
-          <a:prstGeom xmlns:a="http://schemas.openxmlformats.org/drawingml/2006/main" prst="roundRect">
+          <a:prstGeom prst="roundRect">
             <a:avLst>
               <a:gd name="adj" fmla="val 5769"/>
             </a:avLst>
           </a:prstGeom>
-          <a:solidFill xmlns:a="http://schemas.openxmlformats.org/drawingml/2006/main">
+          <a:solidFill>
             <a:srgbClr val="F2F2F2"/>
           </a:solidFill>
         </p:spPr>
@@ -5044,32 +4897,32 @@
       <p:sp>
         <p:nvSpPr>
           <p:cNvPr id="4" name="Content-Placeholder-10-5">
-            <a:extLst xmlns:a="http://schemas.openxmlformats.org/drawingml/2006/main">
+            <a:extLst>
               <a:ext uri="{FF2B5EF4-FFF2-40B4-BE49-F238E27FC236}">
                 <a16:creationId xmlns:a16="http://schemas.microsoft.com/office/drawing/2014/main" id="{BB0285CC-8CB1-4949-95DA-0ABF56782CC0}"/>
               </a:ext>
             </a:extLst>
           </p:cNvPr>
           <p:cNvSpPr>
-            <a:spLocks xmlns:a="http://schemas.openxmlformats.org/drawingml/2006/main" noGrp="1"/>
-          </p:cNvSpPr>
-          <p:nvPr/>
-        </p:nvSpPr>
-        <p:spPr>
-          <a:xfrm xmlns:a="http://schemas.openxmlformats.org/drawingml/2006/main">
+            <a:spLocks noGrp="1"/>
+          </p:cNvSpPr>
+          <p:nvPr/>
+        </p:nvSpPr>
+        <p:spPr>
+          <a:xfrm>
             <a:off x="694277" y="3587972"/>
             <a:ext cx="4986909" cy="877824"/>
           </a:xfrm>
-          <a:prstGeom xmlns:a="http://schemas.openxmlformats.org/drawingml/2006/main" prst="rect">
-            <a:avLst/>
-          </a:prstGeom>
-        </p:spPr>
-        <p:txBody>
-          <a:bodyPr xmlns:a="http://schemas.openxmlformats.org/drawingml/2006/main" lIns="0" tIns="0" rIns="0" bIns="0">
+          <a:prstGeom prst="rect">
+            <a:avLst/>
+          </a:prstGeom>
+        </p:spPr>
+        <p:txBody>
+          <a:bodyPr lIns="0" tIns="0" rIns="0" bIns="0">
             <a:noAutofit/>
           </a:bodyPr>
-          <a:lstStyle xmlns:a="http://schemas.openxmlformats.org/drawingml/2006/main"/>
-          <a:p xmlns:a="http://schemas.openxmlformats.org/drawingml/2006/main">
+          <a:lstStyle/>
+          <a:p>
             <a:pPr algn="l">
               <a:lnSpc>
                 <a:spcPct val="105000"/>
@@ -5104,32 +4957,32 @@
       <p:sp>
         <p:nvSpPr>
           <p:cNvPr id="5" name="Content-Placeholder-15-6">
-            <a:extLst xmlns:a="http://schemas.openxmlformats.org/drawingml/2006/main">
+            <a:extLst>
               <a:ext uri="{FF2B5EF4-FFF2-40B4-BE49-F238E27FC236}">
                 <a16:creationId xmlns:a16="http://schemas.microsoft.com/office/drawing/2014/main" id="{6C2DF292-476F-4198-9CE1-AFF0E548B349}"/>
               </a:ext>
             </a:extLst>
           </p:cNvPr>
           <p:cNvSpPr>
-            <a:spLocks xmlns:a="http://schemas.openxmlformats.org/drawingml/2006/main" noGrp="1"/>
-          </p:cNvSpPr>
-          <p:nvPr/>
-        </p:nvSpPr>
-        <p:spPr>
-          <a:xfrm xmlns:a="http://schemas.openxmlformats.org/drawingml/2006/main">
+            <a:spLocks noGrp="1"/>
+          </p:cNvSpPr>
+          <p:nvPr/>
+        </p:nvSpPr>
+        <p:spPr>
+          <a:xfrm>
             <a:off x="694277" y="4828604"/>
             <a:ext cx="5236655" cy="977932"/>
           </a:xfrm>
-          <a:prstGeom xmlns:a="http://schemas.openxmlformats.org/drawingml/2006/main" prst="rect">
-            <a:avLst/>
-          </a:prstGeom>
-        </p:spPr>
-        <p:txBody>
-          <a:bodyPr xmlns:a="http://schemas.openxmlformats.org/drawingml/2006/main" lIns="0" tIns="0" rIns="0" bIns="0">
+          <a:prstGeom prst="rect">
+            <a:avLst/>
+          </a:prstGeom>
+        </p:spPr>
+        <p:txBody>
+          <a:bodyPr lIns="0" tIns="0" rIns="0" bIns="0">
             <a:noAutofit/>
           </a:bodyPr>
-          <a:lstStyle xmlns:a="http://schemas.openxmlformats.org/drawingml/2006/main"/>
-          <a:p xmlns:a="http://schemas.openxmlformats.org/drawingml/2006/main">
+          <a:lstStyle/>
+          <a:p>
             <a:pPr algn="l">
               <a:lnSpc>
                 <a:spcPct val="105000"/>
@@ -5159,7 +5012,7 @@
               <a:t>Private, but hard to verify independently</a:t>
             </a:r>
           </a:p>
-          <a:p xmlns:a="http://schemas.openxmlformats.org/drawingml/2006/main">
+          <a:p>
             <a:pPr algn="l">
               <a:lnSpc>
                 <a:spcPct val="105000"/>
@@ -5189,7 +5042,7 @@
               <a:t>Closed reconciliation and audit trails</a:t>
             </a:r>
           </a:p>
-          <a:p xmlns:a="http://schemas.openxmlformats.org/drawingml/2006/main">
+          <a:p>
             <a:pPr algn="l">
               <a:lnSpc>
                 <a:spcPct val="105000"/>
@@ -5224,28 +5077,28 @@
       <p:sp>
         <p:nvSpPr>
           <p:cNvPr id="6" name="Rounded-Rectangle-7-7">
-            <a:extLst xmlns:a="http://schemas.openxmlformats.org/drawingml/2006/main">
+            <a:extLst>
               <a:ext uri="{FF2B5EF4-FFF2-40B4-BE49-F238E27FC236}">
                 <a16:creationId xmlns:a16="http://schemas.microsoft.com/office/drawing/2014/main" id="{25EA2581-57E8-4C4C-A4A5-FB61D9C8C094}"/>
               </a:ext>
             </a:extLst>
           </p:cNvPr>
           <p:cNvSpPr>
-            <a:spLocks xmlns:a="http://schemas.openxmlformats.org/drawingml/2006/main" noGrp="1"/>
-          </p:cNvSpPr>
-          <p:nvPr/>
-        </p:nvSpPr>
-        <p:spPr>
-          <a:xfrm xmlns:a="http://schemas.openxmlformats.org/drawingml/2006/main">
+            <a:spLocks noGrp="1"/>
+          </p:cNvSpPr>
+          <p:nvPr/>
+        </p:nvSpPr>
+        <p:spPr>
+          <a:xfrm>
             <a:off x="6260783" y="3339084"/>
             <a:ext cx="5533930" cy="1320832"/>
           </a:xfrm>
-          <a:prstGeom xmlns:a="http://schemas.openxmlformats.org/drawingml/2006/main" prst="roundRect">
+          <a:prstGeom prst="roundRect">
             <a:avLst>
               <a:gd name="adj" fmla="val 5769"/>
             </a:avLst>
           </a:prstGeom>
-          <a:solidFill xmlns:a="http://schemas.openxmlformats.org/drawingml/2006/main">
+          <a:solidFill>
             <a:srgbClr val="F2F2F2"/>
           </a:solidFill>
         </p:spPr>
@@ -5253,32 +5106,32 @@
       <p:sp>
         <p:nvSpPr>
           <p:cNvPr id="7" name="Content-Placeholder-10-8">
-            <a:extLst xmlns:a="http://schemas.openxmlformats.org/drawingml/2006/main">
+            <a:extLst>
               <a:ext uri="{FF2B5EF4-FFF2-40B4-BE49-F238E27FC236}">
                 <a16:creationId xmlns:a16="http://schemas.microsoft.com/office/drawing/2014/main" id="{13415FCF-C9E5-4A3D-86B3-7A814A285428}"/>
               </a:ext>
             </a:extLst>
           </p:cNvPr>
           <p:cNvSpPr>
-            <a:spLocks xmlns:a="http://schemas.openxmlformats.org/drawingml/2006/main" noGrp="1"/>
-          </p:cNvSpPr>
-          <p:nvPr/>
-        </p:nvSpPr>
-        <p:spPr>
-          <a:xfrm xmlns:a="http://schemas.openxmlformats.org/drawingml/2006/main">
+            <a:spLocks noGrp="1"/>
+          </p:cNvSpPr>
+          <p:nvPr/>
+        </p:nvSpPr>
+        <p:spPr>
+          <a:xfrm>
             <a:off x="6558058" y="3587972"/>
             <a:ext cx="4986909" cy="877824"/>
           </a:xfrm>
-          <a:prstGeom xmlns:a="http://schemas.openxmlformats.org/drawingml/2006/main" prst="rect">
-            <a:avLst/>
-          </a:prstGeom>
-        </p:spPr>
-        <p:txBody>
-          <a:bodyPr xmlns:a="http://schemas.openxmlformats.org/drawingml/2006/main" lIns="0" tIns="0" rIns="0" bIns="0">
+          <a:prstGeom prst="rect">
+            <a:avLst/>
+          </a:prstGeom>
+        </p:spPr>
+        <p:txBody>
+          <a:bodyPr lIns="0" tIns="0" rIns="0" bIns="0">
             <a:noAutofit/>
           </a:bodyPr>
-          <a:lstStyle xmlns:a="http://schemas.openxmlformats.org/drawingml/2006/main"/>
-          <a:p xmlns:a="http://schemas.openxmlformats.org/drawingml/2006/main">
+          <a:lstStyle/>
+          <a:p>
             <a:pPr algn="l">
               <a:lnSpc>
                 <a:spcPct val="105000"/>
@@ -5313,32 +5166,32 @@
       <p:sp>
         <p:nvSpPr>
           <p:cNvPr id="8" name="Content-Placeholder-15-9">
-            <a:extLst xmlns:a="http://schemas.openxmlformats.org/drawingml/2006/main">
+            <a:extLst>
               <a:ext uri="{FF2B5EF4-FFF2-40B4-BE49-F238E27FC236}">
                 <a16:creationId xmlns:a16="http://schemas.microsoft.com/office/drawing/2014/main" id="{BD0027D3-90BF-46F0-B043-A8C53CD19D74}"/>
               </a:ext>
             </a:extLst>
           </p:cNvPr>
           <p:cNvSpPr>
-            <a:spLocks xmlns:a="http://schemas.openxmlformats.org/drawingml/2006/main" noGrp="1"/>
-          </p:cNvSpPr>
-          <p:nvPr/>
-        </p:nvSpPr>
-        <p:spPr>
-          <a:xfrm xmlns:a="http://schemas.openxmlformats.org/drawingml/2006/main">
+            <a:spLocks noGrp="1"/>
+          </p:cNvSpPr>
+          <p:nvPr/>
+        </p:nvSpPr>
+        <p:spPr>
+          <a:xfrm>
             <a:off x="6558058" y="4828604"/>
             <a:ext cx="5236655" cy="977932"/>
           </a:xfrm>
-          <a:prstGeom xmlns:a="http://schemas.openxmlformats.org/drawingml/2006/main" prst="rect">
-            <a:avLst/>
-          </a:prstGeom>
-        </p:spPr>
-        <p:txBody>
-          <a:bodyPr xmlns:a="http://schemas.openxmlformats.org/drawingml/2006/main" lIns="0" tIns="0" rIns="0" bIns="0">
+          <a:prstGeom prst="rect">
+            <a:avLst/>
+          </a:prstGeom>
+        </p:spPr>
+        <p:txBody>
+          <a:bodyPr lIns="0" tIns="0" rIns="0" bIns="0">
             <a:noAutofit/>
           </a:bodyPr>
-          <a:lstStyle xmlns:a="http://schemas.openxmlformats.org/drawingml/2006/main"/>
-          <a:p xmlns:a="http://schemas.openxmlformats.org/drawingml/2006/main">
+          <a:lstStyle/>
+          <a:p>
             <a:pPr algn="l">
               <a:lnSpc>
                 <a:spcPct val="105000"/>
@@ -5368,7 +5221,7 @@
               <a:t>Verifiable, but exposes sensitive payment graphs</a:t>
             </a:r>
           </a:p>
-          <a:p xmlns:a="http://schemas.openxmlformats.org/drawingml/2006/main">
+          <a:p>
             <a:pPr algn="l">
               <a:lnSpc>
                 <a:spcPct val="105000"/>
@@ -5398,7 +5251,7 @@
               <a:t>Permanent metadata creates new attack surfaces</a:t>
             </a:r>
           </a:p>
-          <a:p xmlns:a="http://schemas.openxmlformats.org/drawingml/2006/main">
+          <a:p>
             <a:pPr algn="l">
               <a:lnSpc>
                 <a:spcPct val="105000"/>
@@ -5433,32 +5286,32 @@
       <p:sp>
         <p:nvSpPr>
           <p:cNvPr id="9" name="Content-Placeholder-15-10">
-            <a:extLst xmlns:a="http://schemas.openxmlformats.org/drawingml/2006/main">
+            <a:extLst>
               <a:ext uri="{FF2B5EF4-FFF2-40B4-BE49-F238E27FC236}">
                 <a16:creationId xmlns:a16="http://schemas.microsoft.com/office/drawing/2014/main" id="{0E5FD0AE-3871-4DA4-830B-7E1716F61B23}"/>
               </a:ext>
             </a:extLst>
           </p:cNvPr>
           <p:cNvSpPr>
-            <a:spLocks xmlns:a="http://schemas.openxmlformats.org/drawingml/2006/main" noGrp="1"/>
-          </p:cNvSpPr>
-          <p:nvPr/>
-        </p:nvSpPr>
-        <p:spPr>
-          <a:xfrm xmlns:a="http://schemas.openxmlformats.org/drawingml/2006/main">
+            <a:spLocks noGrp="1"/>
+          </p:cNvSpPr>
+          <p:nvPr/>
+        </p:nvSpPr>
+        <p:spPr>
+          <a:xfrm>
             <a:off x="400907" y="1157478"/>
             <a:ext cx="11404568" cy="1629251"/>
           </a:xfrm>
-          <a:prstGeom xmlns:a="http://schemas.openxmlformats.org/drawingml/2006/main" prst="rect">
-            <a:avLst/>
-          </a:prstGeom>
-        </p:spPr>
-        <p:txBody>
-          <a:bodyPr xmlns:a="http://schemas.openxmlformats.org/drawingml/2006/main" lIns="0" tIns="0" rIns="0" bIns="0">
+          <a:prstGeom prst="rect">
+            <a:avLst/>
+          </a:prstGeom>
+        </p:spPr>
+        <p:txBody>
+          <a:bodyPr lIns="0" tIns="0" rIns="0" bIns="0">
             <a:noAutofit/>
           </a:bodyPr>
-          <a:lstStyle xmlns:a="http://schemas.openxmlformats.org/drawingml/2006/main"/>
-          <a:p xmlns:a="http://schemas.openxmlformats.org/drawingml/2006/main">
+          <a:lstStyle/>
+          <a:p>
             <a:pPr algn="l">
               <a:lnSpc>
                 <a:spcPct val="105000"/>
@@ -5488,7 +5341,7 @@
               <a:t>THE PROBLEM</a:t>
             </a:r>
           </a:p>
-          <a:p xmlns:a="http://schemas.openxmlformats.org/drawingml/2006/main">
+          <a:p>
             <a:pPr algn="l">
               <a:lnSpc>
                 <a:spcPct val="105000"/>
@@ -5518,7 +5371,7 @@
               <a:t>Salary amounts, payment timing and employer-employee relationships become observable when payroll moves onto transparent public rails.</a:t>
             </a:r>
           </a:p>
-          <a:p xmlns:a="http://schemas.openxmlformats.org/drawingml/2006/main">
+          <a:p>
             <a:pPr algn="l">
               <a:lnSpc>
                 <a:spcPct val="105000"/>
@@ -5553,29 +5406,29 @@
       <p:sp>
         <p:nvSpPr>
           <p:cNvPr id="10" name="veilpay-accent">
-            <a:extLst xmlns:a="http://schemas.openxmlformats.org/drawingml/2006/main">
+            <a:extLst>
               <a:ext uri="{FF2B5EF4-FFF2-40B4-BE49-F238E27FC236}">
                 <a16:creationId xmlns:a16="http://schemas.microsoft.com/office/drawing/2014/main" id="{046B93CA-699A-44D2-B433-CA3B54E185A2}"/>
               </a:ext>
             </a:extLst>
           </p:cNvPr>
           <p:cNvSpPr>
-            <a:spLocks xmlns:a="http://schemas.openxmlformats.org/drawingml/2006/main" noGrp="1"/>
-          </p:cNvSpPr>
-          <p:nvPr/>
-        </p:nvSpPr>
-        <p:spPr>
-          <a:xfrm xmlns:a="http://schemas.openxmlformats.org/drawingml/2006/main">
+            <a:spLocks noGrp="1"/>
+          </p:cNvSpPr>
+          <p:nvPr/>
+        </p:nvSpPr>
+        <p:spPr>
+          <a:xfrm>
             <a:off x="0" y="0"/>
             <a:ext cx="85725" cy="6858000"/>
           </a:xfrm>
-          <a:prstGeom xmlns:a="http://schemas.openxmlformats.org/drawingml/2006/main" prst="rect">
-            <a:avLst/>
-          </a:prstGeom>
-          <a:solidFill xmlns:a="http://schemas.openxmlformats.org/drawingml/2006/main">
+          <a:prstGeom prst="rect">
+            <a:avLst/>
+          </a:prstGeom>
+          <a:solidFill>
             <a:srgbClr val="6DCBF4"/>
           </a:solidFill>
-          <a:ln xmlns:a="http://schemas.openxmlformats.org/drawingml/2006/main" w="0">
+          <a:ln w="0">
             <a:noFill/>
             <a:prstDash val="solid"/>
           </a:ln>
@@ -5588,11 +5441,14 @@
       </p:ext>
     </p:extLst>
   </p:cSld>
+  <p:clrMapOvr>
+    <a:masterClrMapping/>
+  </p:clrMapOvr>
 </p:sld>
 </file>
 
 <file path=ppt/slides/slide3.xml><?xml version="1.0" encoding="utf-8"?>
-<p:sld xmlns:p="http://schemas.openxmlformats.org/presentationml/2006/main">
+<p:sld xmlns:a="http://schemas.openxmlformats.org/drawingml/2006/main" xmlns:r="http://schemas.openxmlformats.org/officeDocument/2006/relationships" xmlns:p="http://schemas.openxmlformats.org/presentationml/2006/main">
   <p:cSld>
     <p:spTree>
       <p:nvGrpSpPr>
@@ -5601,37 +5457,42 @@
         <p:nvPr/>
       </p:nvGrpSpPr>
       <p:grpSpPr>
-        <a:xfrm xmlns:a="http://schemas.openxmlformats.org/drawingml/2006/main"/>
+        <a:xfrm>
+          <a:off x="0" y="0"/>
+          <a:ext cx="0" cy="0"/>
+          <a:chOff x="0" y="0"/>
+          <a:chExt cx="0" cy="0"/>
+        </a:xfrm>
       </p:grpSpPr>
       <p:sp>
         <p:nvSpPr>
-          <p:cNvPr id="1" name="Google-Shape-532-p58-2">
-            <a:extLst xmlns:a="http://schemas.openxmlformats.org/drawingml/2006/main">
+          <p:cNvPr id="8" name="Google-Shape-532-p58-2">
+            <a:extLst>
               <a:ext uri="{FF2B5EF4-FFF2-40B4-BE49-F238E27FC236}">
                 <a16:creationId xmlns:a16="http://schemas.microsoft.com/office/drawing/2014/main" id="{2D788ABC-1A04-47C1-A780-310897A5ACE4}"/>
               </a:ext>
             </a:extLst>
           </p:cNvPr>
           <p:cNvSpPr>
-            <a:spLocks xmlns:a="http://schemas.openxmlformats.org/drawingml/2006/main" noGrp="1"/>
-          </p:cNvSpPr>
-          <p:nvPr/>
-        </p:nvSpPr>
-        <p:spPr>
-          <a:xfrm xmlns:a="http://schemas.openxmlformats.org/drawingml/2006/main">
+            <a:spLocks noGrp="1"/>
+          </p:cNvSpPr>
+          <p:nvPr/>
+        </p:nvSpPr>
+        <p:spPr>
+          <a:xfrm>
             <a:off x="11279315" y="6279261"/>
             <a:ext cx="518922" cy="241268"/>
           </a:xfrm>
-          <a:prstGeom xmlns:a="http://schemas.openxmlformats.org/drawingml/2006/main" prst="rect">
-            <a:avLst/>
-          </a:prstGeom>
-        </p:spPr>
-        <p:txBody>
-          <a:bodyPr xmlns:a="http://schemas.openxmlformats.org/drawingml/2006/main" wrap="square" lIns="0" tIns="0" rIns="0" bIns="0" anchor="b">
+          <a:prstGeom prst="rect">
+            <a:avLst/>
+          </a:prstGeom>
+        </p:spPr>
+        <p:txBody>
+          <a:bodyPr wrap="square" lIns="0" tIns="0" rIns="0" bIns="0" anchor="b">
             <a:noAutofit/>
           </a:bodyPr>
-          <a:lstStyle xmlns:a="http://schemas.openxmlformats.org/drawingml/2006/main"/>
-          <a:p xmlns:a="http://schemas.openxmlformats.org/drawingml/2006/main">
+          <a:lstStyle/>
+          <a:p>
             <a:pPr algn="r">
               <a:defRPr sz="1000">
                 <a:solidFill>
@@ -5651,32 +5512,32 @@
       <p:sp>
         <p:nvSpPr>
           <p:cNvPr id="2" name="Google-Shape-533-p58-3">
-            <a:extLst xmlns:a="http://schemas.openxmlformats.org/drawingml/2006/main">
+            <a:extLst>
               <a:ext uri="{FF2B5EF4-FFF2-40B4-BE49-F238E27FC236}">
                 <a16:creationId xmlns:a16="http://schemas.microsoft.com/office/drawing/2014/main" id="{9E3D30A5-9AB3-4C9D-99E3-85C8FB12FA59}"/>
               </a:ext>
             </a:extLst>
           </p:cNvPr>
           <p:cNvSpPr>
-            <a:spLocks xmlns:a="http://schemas.openxmlformats.org/drawingml/2006/main" noGrp="1"/>
-          </p:cNvSpPr>
-          <p:nvPr/>
-        </p:nvSpPr>
-        <p:spPr>
-          <a:xfrm xmlns:a="http://schemas.openxmlformats.org/drawingml/2006/main">
+            <a:spLocks noGrp="1"/>
+          </p:cNvSpPr>
+          <p:nvPr/>
+        </p:nvSpPr>
+        <p:spPr>
+          <a:xfrm>
             <a:off x="393668" y="344043"/>
             <a:ext cx="11404568" cy="1047464"/>
           </a:xfrm>
-          <a:prstGeom xmlns:a="http://schemas.openxmlformats.org/drawingml/2006/main" prst="rect">
-            <a:avLst/>
-          </a:prstGeom>
-        </p:spPr>
-        <p:txBody>
-          <a:bodyPr xmlns:a="http://schemas.openxmlformats.org/drawingml/2006/main" wrap="square" lIns="0" tIns="0" rIns="0" bIns="0" anchor="t">
+          <a:prstGeom prst="rect">
+            <a:avLst/>
+          </a:prstGeom>
+        </p:spPr>
+        <p:txBody>
+          <a:bodyPr wrap="square" lIns="0" tIns="0" rIns="0" bIns="0" anchor="t">
             <a:noAutofit/>
           </a:bodyPr>
-          <a:lstStyle xmlns:a="http://schemas.openxmlformats.org/drawingml/2006/main"/>
-          <a:p xmlns:a="http://schemas.openxmlformats.org/drawingml/2006/main">
+          <a:lstStyle/>
+          <a:p>
             <a:pPr algn="l">
               <a:lnSpc>
                 <a:spcPct val="105000"/>
@@ -5711,32 +5572,32 @@
       <p:sp>
         <p:nvSpPr>
           <p:cNvPr id="3" name="Google-Shape-534-p58-4">
-            <a:extLst xmlns:a="http://schemas.openxmlformats.org/drawingml/2006/main">
+            <a:extLst>
               <a:ext uri="{FF2B5EF4-FFF2-40B4-BE49-F238E27FC236}">
                 <a16:creationId xmlns:a16="http://schemas.microsoft.com/office/drawing/2014/main" id="{002F7B19-9A48-402C-A347-52DA288BCEDD}"/>
               </a:ext>
             </a:extLst>
           </p:cNvPr>
           <p:cNvSpPr>
-            <a:spLocks xmlns:a="http://schemas.openxmlformats.org/drawingml/2006/main" noGrp="1"/>
-          </p:cNvSpPr>
-          <p:nvPr/>
-        </p:nvSpPr>
-        <p:spPr>
-          <a:xfrm xmlns:a="http://schemas.openxmlformats.org/drawingml/2006/main">
+            <a:spLocks noGrp="1"/>
+          </p:cNvSpPr>
+          <p:nvPr/>
+        </p:nvSpPr>
+        <p:spPr>
+          <a:xfrm>
             <a:off x="393668" y="3365468"/>
             <a:ext cx="3568732" cy="2628900"/>
           </a:xfrm>
-          <a:prstGeom xmlns:a="http://schemas.openxmlformats.org/drawingml/2006/main" prst="rect">
-            <a:avLst/>
-          </a:prstGeom>
-        </p:spPr>
-        <p:txBody>
-          <a:bodyPr xmlns:a="http://schemas.openxmlformats.org/drawingml/2006/main" wrap="square" lIns="0" tIns="0" rIns="0" bIns="0" anchor="t">
+          <a:prstGeom prst="rect">
+            <a:avLst/>
+          </a:prstGeom>
+        </p:spPr>
+        <p:txBody>
+          <a:bodyPr wrap="square" lIns="0" tIns="0" rIns="0" bIns="0" anchor="t">
             <a:noAutofit/>
           </a:bodyPr>
-          <a:lstStyle xmlns:a="http://schemas.openxmlformats.org/drawingml/2006/main"/>
-          <a:p xmlns:a="http://schemas.openxmlformats.org/drawingml/2006/main">
+          <a:lstStyle/>
+          <a:p>
             <a:pPr algn="l">
               <a:lnSpc>
                 <a:spcPct val="105000"/>
@@ -5766,7 +5627,7 @@
               <a:t>1. Private batch</a:t>
             </a:r>
           </a:p>
-          <a:p xmlns:a="http://schemas.openxmlformats.org/drawingml/2006/main">
+          <a:p>
             <a:pPr algn="l">
               <a:lnSpc>
                 <a:spcPct val="105000"/>
@@ -5801,32 +5662,32 @@
       <p:sp>
         <p:nvSpPr>
           <p:cNvPr id="4" name="Content-Placeholder-1-5">
-            <a:extLst xmlns:a="http://schemas.openxmlformats.org/drawingml/2006/main">
+            <a:extLst>
               <a:ext uri="{FF2B5EF4-FFF2-40B4-BE49-F238E27FC236}">
                 <a16:creationId xmlns:a16="http://schemas.microsoft.com/office/drawing/2014/main" id="{08192F95-EAC4-4DAC-B9FF-E3B3F280B894}"/>
               </a:ext>
             </a:extLst>
           </p:cNvPr>
           <p:cNvSpPr>
-            <a:spLocks xmlns:a="http://schemas.openxmlformats.org/drawingml/2006/main" noGrp="1"/>
-          </p:cNvSpPr>
-          <p:nvPr/>
-        </p:nvSpPr>
-        <p:spPr>
-          <a:xfrm xmlns:a="http://schemas.openxmlformats.org/drawingml/2006/main">
+            <a:spLocks noGrp="1"/>
+          </p:cNvSpPr>
+          <p:nvPr/>
+        </p:nvSpPr>
+        <p:spPr>
+          <a:xfrm>
             <a:off x="8229600" y="3365468"/>
             <a:ext cx="3568732" cy="2628900"/>
           </a:xfrm>
-          <a:prstGeom xmlns:a="http://schemas.openxmlformats.org/drawingml/2006/main" prst="rect">
-            <a:avLst/>
-          </a:prstGeom>
-        </p:spPr>
-        <p:txBody>
-          <a:bodyPr xmlns:a="http://schemas.openxmlformats.org/drawingml/2006/main" lIns="91440" tIns="45720" rIns="91440" bIns="45720">
-            <a:normAutofit fontScale="100000"/>
+          <a:prstGeom prst="rect">
+            <a:avLst/>
+          </a:prstGeom>
+        </p:spPr>
+        <p:txBody>
+          <a:bodyPr lIns="91440" tIns="45720" rIns="91440" bIns="45720">
+            <a:normAutofit/>
           </a:bodyPr>
-          <a:lstStyle xmlns:a="http://schemas.openxmlformats.org/drawingml/2006/main"/>
-          <a:p xmlns:a="http://schemas.openxmlformats.org/drawingml/2006/main">
+          <a:lstStyle/>
+          <a:p>
             <a:pPr algn="l">
               <a:lnSpc>
                 <a:spcPct val="105000"/>
@@ -5856,7 +5717,7 @@
               <a:t>3. Selective audit</a:t>
             </a:r>
           </a:p>
-          <a:p xmlns:a="http://schemas.openxmlformats.org/drawingml/2006/main">
+          <a:p>
             <a:pPr algn="l">
               <a:lnSpc>
                 <a:spcPct val="105000"/>
@@ -5891,32 +5752,32 @@
       <p:sp>
         <p:nvSpPr>
           <p:cNvPr id="5" name="Content-Placeholder-2-6">
-            <a:extLst xmlns:a="http://schemas.openxmlformats.org/drawingml/2006/main">
+            <a:extLst>
               <a:ext uri="{FF2B5EF4-FFF2-40B4-BE49-F238E27FC236}">
                 <a16:creationId xmlns:a16="http://schemas.microsoft.com/office/drawing/2014/main" id="{ECD880D3-614F-4A4A-8BC0-1B7EABA2DD31}"/>
               </a:ext>
             </a:extLst>
           </p:cNvPr>
           <p:cNvSpPr>
-            <a:spLocks xmlns:a="http://schemas.openxmlformats.org/drawingml/2006/main" noGrp="1"/>
-          </p:cNvSpPr>
-          <p:nvPr/>
-        </p:nvSpPr>
-        <p:spPr>
-          <a:xfrm xmlns:a="http://schemas.openxmlformats.org/drawingml/2006/main">
+            <a:spLocks noGrp="1"/>
+          </p:cNvSpPr>
+          <p:nvPr/>
+        </p:nvSpPr>
+        <p:spPr>
+          <a:xfrm>
             <a:off x="4311682" y="3365468"/>
             <a:ext cx="3568732" cy="2628900"/>
           </a:xfrm>
-          <a:prstGeom xmlns:a="http://schemas.openxmlformats.org/drawingml/2006/main" prst="rect">
-            <a:avLst/>
-          </a:prstGeom>
-        </p:spPr>
-        <p:txBody>
-          <a:bodyPr xmlns:a="http://schemas.openxmlformats.org/drawingml/2006/main" lIns="91440" tIns="45720" rIns="91440" bIns="45720">
-            <a:normAutofit fontScale="100000"/>
+          <a:prstGeom prst="rect">
+            <a:avLst/>
+          </a:prstGeom>
+        </p:spPr>
+        <p:txBody>
+          <a:bodyPr lIns="91440" tIns="45720" rIns="91440" bIns="45720">
+            <a:normAutofit/>
           </a:bodyPr>
-          <a:lstStyle xmlns:a="http://schemas.openxmlformats.org/drawingml/2006/main"/>
-          <a:p xmlns:a="http://schemas.openxmlformats.org/drawingml/2006/main">
+          <a:lstStyle/>
+          <a:p>
             <a:pPr algn="l">
               <a:lnSpc>
                 <a:spcPct val="105000"/>
@@ -5946,7 +5807,7 @@
               <a:t>2. One-time claim</a:t>
             </a:r>
           </a:p>
-          <a:p xmlns:a="http://schemas.openxmlformats.org/drawingml/2006/main">
+          <a:p>
             <a:pPr algn="l">
               <a:lnSpc>
                 <a:spcPct val="105000"/>
@@ -5981,29 +5842,29 @@
       <p:sp>
         <p:nvSpPr>
           <p:cNvPr id="6" name="veilpay-accent">
-            <a:extLst xmlns:a="http://schemas.openxmlformats.org/drawingml/2006/main">
+            <a:extLst>
               <a:ext uri="{FF2B5EF4-FFF2-40B4-BE49-F238E27FC236}">
                 <a16:creationId xmlns:a16="http://schemas.microsoft.com/office/drawing/2014/main" id="{F93075BD-2E1B-4C0F-AA15-9A6ACE5A9A12}"/>
               </a:ext>
             </a:extLst>
           </p:cNvPr>
           <p:cNvSpPr>
-            <a:spLocks xmlns:a="http://schemas.openxmlformats.org/drawingml/2006/main" noGrp="1"/>
-          </p:cNvSpPr>
-          <p:nvPr/>
-        </p:nvSpPr>
-        <p:spPr>
-          <a:xfrm xmlns:a="http://schemas.openxmlformats.org/drawingml/2006/main">
+            <a:spLocks noGrp="1"/>
+          </p:cNvSpPr>
+          <p:nvPr/>
+        </p:nvSpPr>
+        <p:spPr>
+          <a:xfrm>
             <a:off x="0" y="0"/>
             <a:ext cx="85725" cy="6858000"/>
           </a:xfrm>
-          <a:prstGeom xmlns:a="http://schemas.openxmlformats.org/drawingml/2006/main" prst="rect">
-            <a:avLst/>
-          </a:prstGeom>
-          <a:solidFill xmlns:a="http://schemas.openxmlformats.org/drawingml/2006/main">
+          <a:prstGeom prst="rect">
+            <a:avLst/>
+          </a:prstGeom>
+          <a:solidFill>
             <a:srgbClr val="6DCBF4"/>
           </a:solidFill>
-          <a:ln xmlns:a="http://schemas.openxmlformats.org/drawingml/2006/main" w="0">
+          <a:ln w="0">
             <a:noFill/>
             <a:prstDash val="solid"/>
           </a:ln>
@@ -6012,31 +5873,31 @@
       <p:sp>
         <p:nvSpPr>
           <p:cNvPr id="7" name="status-pill">
-            <a:extLst xmlns:a="http://schemas.openxmlformats.org/drawingml/2006/main">
+            <a:extLst>
               <a:ext uri="{FF2B5EF4-FFF2-40B4-BE49-F238E27FC236}">
                 <a16:creationId xmlns:a16="http://schemas.microsoft.com/office/drawing/2014/main" id="{3735EE9D-F38D-482A-918E-6D7164224F30}"/>
               </a:ext>
             </a:extLst>
           </p:cNvPr>
           <p:cNvSpPr>
-            <a:spLocks xmlns:a="http://schemas.openxmlformats.org/drawingml/2006/main" noGrp="1"/>
-          </p:cNvSpPr>
-          <p:nvPr/>
-        </p:nvSpPr>
-        <p:spPr>
-          <a:xfrm xmlns:a="http://schemas.openxmlformats.org/drawingml/2006/main">
+            <a:spLocks noGrp="1"/>
+          </p:cNvSpPr>
+          <p:nvPr/>
+        </p:nvSpPr>
+        <p:spPr>
+          <a:xfrm>
             <a:off x="9525000" y="1381125"/>
             <a:ext cx="1952625" cy="381000"/>
           </a:xfrm>
-          <a:prstGeom xmlns:a="http://schemas.openxmlformats.org/drawingml/2006/main" prst="roundRect">
+          <a:prstGeom prst="roundRect">
             <a:avLst>
               <a:gd name="adj" fmla="val 30000"/>
             </a:avLst>
           </a:prstGeom>
-          <a:solidFill xmlns:a="http://schemas.openxmlformats.org/drawingml/2006/main">
+          <a:solidFill>
             <a:srgbClr val="D0EDFA"/>
           </a:solidFill>
-          <a:ln xmlns:a="http://schemas.openxmlformats.org/drawingml/2006/main" w="9525">
+          <a:ln w="9525">
             <a:solidFill>
               <a:srgbClr val="6DCBF4"/>
             </a:solidFill>
@@ -6044,9 +5905,9 @@
           </a:ln>
         </p:spPr>
         <p:txBody>
-          <a:bodyPr xmlns:a="http://schemas.openxmlformats.org/drawingml/2006/main" anchor="ctr"/>
-          <a:lstStyle xmlns:a="http://schemas.openxmlformats.org/drawingml/2006/main"/>
-          <a:p xmlns:a="http://schemas.openxmlformats.org/drawingml/2006/main">
+          <a:bodyPr anchor="ctr"/>
+          <a:lstStyle/>
+          <a:p>
             <a:pPr algn="ctr">
               <a:defRPr sz="1125" b="1">
                 <a:solidFill>
@@ -6072,11 +5933,14 @@
       </p:ext>
     </p:extLst>
   </p:cSld>
+  <p:clrMapOvr>
+    <a:masterClrMapping/>
+  </p:clrMapOvr>
 </p:sld>
 </file>
 
 <file path=ppt/slides/slide4.xml><?xml version="1.0" encoding="utf-8"?>
-<p:sld xmlns:p="http://schemas.openxmlformats.org/presentationml/2006/main">
+<p:sld xmlns:a="http://schemas.openxmlformats.org/drawingml/2006/main" xmlns:r="http://schemas.openxmlformats.org/officeDocument/2006/relationships" xmlns:p="http://schemas.openxmlformats.org/presentationml/2006/main">
   <p:cSld>
     <p:spTree>
       <p:nvGrpSpPr>
@@ -6085,35 +5949,40 @@
         <p:nvPr/>
       </p:nvGrpSpPr>
       <p:grpSpPr>
-        <a:xfrm xmlns:a="http://schemas.openxmlformats.org/drawingml/2006/main"/>
+        <a:xfrm>
+          <a:off x="0" y="0"/>
+          <a:ext cx="0" cy="0"/>
+          <a:chOff x="0" y="0"/>
+          <a:chExt cx="0" cy="0"/>
+        </a:xfrm>
       </p:grpSpPr>
       <p:sp>
         <p:nvSpPr>
-          <p:cNvPr id="1" name="Slide-Number-Placeholder-1-2">
-            <a:extLst xmlns:a="http://schemas.openxmlformats.org/drawingml/2006/main">
+          <p:cNvPr id="10" name="Slide-Number-Placeholder-1-2">
+            <a:extLst>
               <a:ext uri="{FF2B5EF4-FFF2-40B4-BE49-F238E27FC236}">
                 <a16:creationId xmlns:a16="http://schemas.microsoft.com/office/drawing/2014/main" id="{A40BE888-2FF9-4351-9965-FE4EC12BA010}"/>
               </a:ext>
             </a:extLst>
           </p:cNvPr>
           <p:cNvSpPr>
-            <a:spLocks xmlns:a="http://schemas.openxmlformats.org/drawingml/2006/main" noGrp="1"/>
-          </p:cNvSpPr>
-          <p:nvPr/>
-        </p:nvSpPr>
-        <p:spPr>
-          <a:xfrm xmlns:a="http://schemas.openxmlformats.org/drawingml/2006/main">
+            <a:spLocks noGrp="1"/>
+          </p:cNvSpPr>
+          <p:nvPr/>
+        </p:nvSpPr>
+        <p:spPr>
+          <a:xfrm>
             <a:off x="11279219" y="6278594"/>
             <a:ext cx="519113" cy="241268"/>
           </a:xfrm>
-          <a:prstGeom xmlns:a="http://schemas.openxmlformats.org/drawingml/2006/main" prst="rect">
-            <a:avLst/>
-          </a:prstGeom>
-        </p:spPr>
-        <p:txBody>
-          <a:bodyPr xmlns:a="http://schemas.openxmlformats.org/drawingml/2006/main" lIns="0" tIns="0" rIns="0" bIns="0" anchor="b"/>
-          <a:lstStyle xmlns:a="http://schemas.openxmlformats.org/drawingml/2006/main"/>
-          <a:p xmlns:a="http://schemas.openxmlformats.org/drawingml/2006/main">
+          <a:prstGeom prst="rect">
+            <a:avLst/>
+          </a:prstGeom>
+        </p:spPr>
+        <p:txBody>
+          <a:bodyPr lIns="0" tIns="0" rIns="0" bIns="0" anchor="b"/>
+          <a:lstStyle/>
+          <a:p>
             <a:pPr algn="r">
               <a:defRPr sz="1000">
                 <a:solidFill>
@@ -6133,32 +6002,32 @@
       <p:sp>
         <p:nvSpPr>
           <p:cNvPr id="2" name="Title-2-3">
-            <a:extLst xmlns:a="http://schemas.openxmlformats.org/drawingml/2006/main">
+            <a:extLst>
               <a:ext uri="{FF2B5EF4-FFF2-40B4-BE49-F238E27FC236}">
                 <a16:creationId xmlns:a16="http://schemas.microsoft.com/office/drawing/2014/main" id="{476C31CF-1E6C-47EF-B6E3-84BD49B3EE71}"/>
               </a:ext>
             </a:extLst>
           </p:cNvPr>
           <p:cNvSpPr>
-            <a:spLocks xmlns:a="http://schemas.openxmlformats.org/drawingml/2006/main" noGrp="1"/>
-          </p:cNvSpPr>
-          <p:nvPr/>
-        </p:nvSpPr>
-        <p:spPr>
-          <a:xfrm xmlns:a="http://schemas.openxmlformats.org/drawingml/2006/main">
+            <a:spLocks noGrp="1"/>
+          </p:cNvSpPr>
+          <p:nvPr/>
+        </p:nvSpPr>
+        <p:spPr>
+          <a:xfrm>
             <a:off x="393668" y="344043"/>
             <a:ext cx="11404568" cy="1047464"/>
           </a:xfrm>
-          <a:prstGeom xmlns:a="http://schemas.openxmlformats.org/drawingml/2006/main" prst="rect">
-            <a:avLst/>
-          </a:prstGeom>
-        </p:spPr>
-        <p:txBody>
-          <a:bodyPr xmlns:a="http://schemas.openxmlformats.org/drawingml/2006/main" lIns="0" tIns="0" rIns="0" bIns="0" anchor="t">
-            <a:normAutofit fontScale="100000"/>
+          <a:prstGeom prst="rect">
+            <a:avLst/>
+          </a:prstGeom>
+        </p:spPr>
+        <p:txBody>
+          <a:bodyPr lIns="0" tIns="0" rIns="0" bIns="0" anchor="t">
+            <a:normAutofit/>
           </a:bodyPr>
-          <a:lstStyle xmlns:a="http://schemas.openxmlformats.org/drawingml/2006/main"/>
-          <a:p xmlns:a="http://schemas.openxmlformats.org/drawingml/2006/main">
+          <a:lstStyle/>
+          <a:p>
             <a:pPr algn="l">
               <a:lnSpc>
                 <a:spcPct val="105000"/>
@@ -6193,30 +6062,30 @@
       <p:sp>
         <p:nvSpPr>
           <p:cNvPr id="3" name="Content-Placeholder-9-4">
-            <a:extLst xmlns:a="http://schemas.openxmlformats.org/drawingml/2006/main">
+            <a:extLst>
               <a:ext uri="{FF2B5EF4-FFF2-40B4-BE49-F238E27FC236}">
                 <a16:creationId xmlns:a16="http://schemas.microsoft.com/office/drawing/2014/main" id="{3984F4A8-FC60-487E-8EE5-31073760BF32}"/>
               </a:ext>
             </a:extLst>
           </p:cNvPr>
           <p:cNvSpPr>
-            <a:spLocks xmlns:a="http://schemas.openxmlformats.org/drawingml/2006/main" noGrp="1"/>
-          </p:cNvSpPr>
-          <p:nvPr/>
-        </p:nvSpPr>
-        <p:spPr>
-          <a:xfrm xmlns:a="http://schemas.openxmlformats.org/drawingml/2006/main">
+            <a:spLocks noGrp="1"/>
+          </p:cNvSpPr>
+          <p:nvPr/>
+        </p:nvSpPr>
+        <p:spPr>
+          <a:xfrm>
             <a:off x="393668" y="2031968"/>
             <a:ext cx="5537168" cy="1643063"/>
           </a:xfrm>
-          <a:prstGeom xmlns:a="http://schemas.openxmlformats.org/drawingml/2006/main" prst="rect">
-            <a:avLst/>
-          </a:prstGeom>
-        </p:spPr>
-        <p:txBody>
-          <a:bodyPr xmlns:a="http://schemas.openxmlformats.org/drawingml/2006/main" lIns="91440" tIns="45720" rIns="91440" bIns="45720"/>
-          <a:lstStyle xmlns:a="http://schemas.openxmlformats.org/drawingml/2006/main"/>
-          <a:p xmlns:a="http://schemas.openxmlformats.org/drawingml/2006/main">
+          <a:prstGeom prst="rect">
+            <a:avLst/>
+          </a:prstGeom>
+        </p:spPr>
+        <p:txBody>
+          <a:bodyPr lIns="91440" tIns="45720" rIns="91440" bIns="45720"/>
+          <a:lstStyle/>
+          <a:p>
             <a:pPr algn="l">
               <a:lnSpc>
                 <a:spcPct val="105000"/>
@@ -6246,7 +6115,7 @@
               <a:t>Hybrid ledger</a:t>
             </a:r>
           </a:p>
-          <a:p xmlns:a="http://schemas.openxmlformats.org/drawingml/2006/main">
+          <a:p>
             <a:pPr algn="l">
               <a:lnSpc>
                 <a:spcPct val="105000"/>
@@ -6281,30 +6150,30 @@
       <p:sp>
         <p:nvSpPr>
           <p:cNvPr id="4" name="Content-Placeholder-10-5">
-            <a:extLst xmlns:a="http://schemas.openxmlformats.org/drawingml/2006/main">
+            <a:extLst>
               <a:ext uri="{FF2B5EF4-FFF2-40B4-BE49-F238E27FC236}">
                 <a16:creationId xmlns:a16="http://schemas.microsoft.com/office/drawing/2014/main" id="{E6DEF119-C3C3-4EAD-B520-C7DF63D7826E}"/>
               </a:ext>
             </a:extLst>
           </p:cNvPr>
           <p:cNvSpPr>
-            <a:spLocks xmlns:a="http://schemas.openxmlformats.org/drawingml/2006/main" noGrp="1"/>
-          </p:cNvSpPr>
-          <p:nvPr/>
-        </p:nvSpPr>
-        <p:spPr>
-          <a:xfrm xmlns:a="http://schemas.openxmlformats.org/drawingml/2006/main">
+            <a:spLocks noGrp="1"/>
+          </p:cNvSpPr>
+          <p:nvPr/>
+        </p:nvSpPr>
+        <p:spPr>
+          <a:xfrm>
             <a:off x="6256592" y="2031968"/>
             <a:ext cx="5537168" cy="1643063"/>
           </a:xfrm>
-          <a:prstGeom xmlns:a="http://schemas.openxmlformats.org/drawingml/2006/main" prst="rect">
-            <a:avLst/>
-          </a:prstGeom>
-        </p:spPr>
-        <p:txBody>
-          <a:bodyPr xmlns:a="http://schemas.openxmlformats.org/drawingml/2006/main" lIns="91440" tIns="45720" rIns="91440" bIns="45720"/>
-          <a:lstStyle xmlns:a="http://schemas.openxmlformats.org/drawingml/2006/main"/>
-          <a:p xmlns:a="http://schemas.openxmlformats.org/drawingml/2006/main">
+          <a:prstGeom prst="rect">
+            <a:avLst/>
+          </a:prstGeom>
+        </p:spPr>
+        <p:txBody>
+          <a:bodyPr lIns="91440" tIns="45720" rIns="91440" bIns="45720"/>
+          <a:lstStyle/>
+          <a:p>
             <a:pPr algn="l">
               <a:lnSpc>
                 <a:spcPct val="105000"/>
@@ -6334,7 +6203,7 @@
               <a:t>Compact + ZK</a:t>
             </a:r>
           </a:p>
-          <a:p xmlns:a="http://schemas.openxmlformats.org/drawingml/2006/main">
+          <a:p>
             <a:pPr algn="l">
               <a:lnSpc>
                 <a:spcPct val="105000"/>
@@ -6369,32 +6238,32 @@
       <p:sp>
         <p:nvSpPr>
           <p:cNvPr id="5" name="Content-Placeholder-9-6">
-            <a:extLst xmlns:a="http://schemas.openxmlformats.org/drawingml/2006/main">
+            <a:extLst>
               <a:ext uri="{FF2B5EF4-FFF2-40B4-BE49-F238E27FC236}">
                 <a16:creationId xmlns:a16="http://schemas.microsoft.com/office/drawing/2014/main" id="{99C7D928-7C31-455F-A0E1-2394FD460759}"/>
               </a:ext>
             </a:extLst>
           </p:cNvPr>
           <p:cNvSpPr>
-            <a:spLocks xmlns:a="http://schemas.openxmlformats.org/drawingml/2006/main" noGrp="1"/>
-          </p:cNvSpPr>
-          <p:nvPr/>
-        </p:nvSpPr>
-        <p:spPr>
-          <a:xfrm xmlns:a="http://schemas.openxmlformats.org/drawingml/2006/main">
+            <a:spLocks noGrp="1"/>
+          </p:cNvSpPr>
+          <p:nvPr/>
+        </p:nvSpPr>
+        <p:spPr>
+          <a:xfrm>
             <a:off x="393668" y="4016978"/>
             <a:ext cx="5537168" cy="1643158"/>
           </a:xfrm>
-          <a:prstGeom xmlns:a="http://schemas.openxmlformats.org/drawingml/2006/main" prst="rect">
-            <a:avLst/>
-          </a:prstGeom>
-        </p:spPr>
-        <p:txBody>
-          <a:bodyPr xmlns:a="http://schemas.openxmlformats.org/drawingml/2006/main" lIns="0" tIns="0" rIns="0" bIns="0">
-            <a:normAutofit fontScale="100000"/>
+          <a:prstGeom prst="rect">
+            <a:avLst/>
+          </a:prstGeom>
+        </p:spPr>
+        <p:txBody>
+          <a:bodyPr lIns="0" tIns="0" rIns="0" bIns="0">
+            <a:normAutofit/>
           </a:bodyPr>
-          <a:lstStyle xmlns:a="http://schemas.openxmlformats.org/drawingml/2006/main"/>
-          <a:p xmlns:a="http://schemas.openxmlformats.org/drawingml/2006/main">
+          <a:lstStyle/>
+          <a:p>
             <a:pPr algn="l">
               <a:lnSpc>
                 <a:spcPct val="105000"/>
@@ -6424,7 +6293,7 @@
               <a:t>Selective disclosure</a:t>
             </a:r>
           </a:p>
-          <a:p xmlns:a="http://schemas.openxmlformats.org/drawingml/2006/main">
+          <a:p>
             <a:pPr algn="l">
               <a:lnSpc>
                 <a:spcPct val="105000"/>
@@ -6459,32 +6328,32 @@
       <p:sp>
         <p:nvSpPr>
           <p:cNvPr id="6" name="Content-Placeholder-10-7">
-            <a:extLst xmlns:a="http://schemas.openxmlformats.org/drawingml/2006/main">
+            <a:extLst>
               <a:ext uri="{FF2B5EF4-FFF2-40B4-BE49-F238E27FC236}">
                 <a16:creationId xmlns:a16="http://schemas.microsoft.com/office/drawing/2014/main" id="{CE76E708-2FDE-41A3-A46F-9C013293CE63}"/>
               </a:ext>
             </a:extLst>
           </p:cNvPr>
           <p:cNvSpPr>
-            <a:spLocks xmlns:a="http://schemas.openxmlformats.org/drawingml/2006/main" noGrp="1"/>
-          </p:cNvSpPr>
-          <p:nvPr/>
-        </p:nvSpPr>
-        <p:spPr>
-          <a:xfrm xmlns:a="http://schemas.openxmlformats.org/drawingml/2006/main">
+            <a:spLocks noGrp="1"/>
+          </p:cNvSpPr>
+          <p:nvPr/>
+        </p:nvSpPr>
+        <p:spPr>
+          <a:xfrm>
             <a:off x="6256592" y="4016978"/>
             <a:ext cx="5537168" cy="1643158"/>
           </a:xfrm>
-          <a:prstGeom xmlns:a="http://schemas.openxmlformats.org/drawingml/2006/main" prst="rect">
-            <a:avLst/>
-          </a:prstGeom>
-        </p:spPr>
-        <p:txBody>
-          <a:bodyPr xmlns:a="http://schemas.openxmlformats.org/drawingml/2006/main" lIns="0" tIns="0" rIns="0" bIns="0">
-            <a:normAutofit fontScale="100000"/>
+          <a:prstGeom prst="rect">
+            <a:avLst/>
+          </a:prstGeom>
+        </p:spPr>
+        <p:txBody>
+          <a:bodyPr lIns="0" tIns="0" rIns="0" bIns="0">
+            <a:normAutofit/>
           </a:bodyPr>
-          <a:lstStyle xmlns:a="http://schemas.openxmlformats.org/drawingml/2006/main"/>
-          <a:p xmlns:a="http://schemas.openxmlformats.org/drawingml/2006/main">
+          <a:lstStyle/>
+          <a:p>
             <a:pPr algn="l">
               <a:lnSpc>
                 <a:spcPct val="105000"/>
@@ -6514,7 +6383,7 @@
               <a:t>NIGHT / DUST</a:t>
             </a:r>
           </a:p>
-          <a:p xmlns:a="http://schemas.openxmlformats.org/drawingml/2006/main">
+          <a:p>
             <a:pPr algn="l">
               <a:lnSpc>
                 <a:spcPct val="105000"/>
@@ -6549,29 +6418,29 @@
       <p:sp>
         <p:nvSpPr>
           <p:cNvPr id="7" name="veilpay-accent">
-            <a:extLst xmlns:a="http://schemas.openxmlformats.org/drawingml/2006/main">
+            <a:extLst>
               <a:ext uri="{FF2B5EF4-FFF2-40B4-BE49-F238E27FC236}">
                 <a16:creationId xmlns:a16="http://schemas.microsoft.com/office/drawing/2014/main" id="{C8DCC9DE-D9D4-4E29-B291-222726BB8FF1}"/>
               </a:ext>
             </a:extLst>
           </p:cNvPr>
           <p:cNvSpPr>
-            <a:spLocks xmlns:a="http://schemas.openxmlformats.org/drawingml/2006/main" noGrp="1"/>
-          </p:cNvSpPr>
-          <p:nvPr/>
-        </p:nvSpPr>
-        <p:spPr>
-          <a:xfrm xmlns:a="http://schemas.openxmlformats.org/drawingml/2006/main">
+            <a:spLocks noGrp="1"/>
+          </p:cNvSpPr>
+          <p:nvPr/>
+        </p:nvSpPr>
+        <p:spPr>
+          <a:xfrm>
             <a:off x="0" y="0"/>
             <a:ext cx="85725" cy="6858000"/>
           </a:xfrm>
-          <a:prstGeom xmlns:a="http://schemas.openxmlformats.org/drawingml/2006/main" prst="rect">
-            <a:avLst/>
-          </a:prstGeom>
-          <a:solidFill xmlns:a="http://schemas.openxmlformats.org/drawingml/2006/main">
+          <a:prstGeom prst="rect">
+            <a:avLst/>
+          </a:prstGeom>
+          <a:solidFill>
             <a:srgbClr val="6DCBF4"/>
           </a:solidFill>
-          <a:ln xmlns:a="http://schemas.openxmlformats.org/drawingml/2006/main" w="0">
+          <a:ln w="0">
             <a:noFill/>
             <a:prstDash val="solid"/>
           </a:ln>
@@ -6580,31 +6449,31 @@
       <p:sp>
         <p:nvSpPr>
           <p:cNvPr id="8" name="status-pill">
-            <a:extLst xmlns:a="http://schemas.openxmlformats.org/drawingml/2006/main">
+            <a:extLst>
               <a:ext uri="{FF2B5EF4-FFF2-40B4-BE49-F238E27FC236}">
                 <a16:creationId xmlns:a16="http://schemas.microsoft.com/office/drawing/2014/main" id="{C46F19C5-91EE-466D-B403-1517E5719440}"/>
               </a:ext>
             </a:extLst>
           </p:cNvPr>
           <p:cNvSpPr>
-            <a:spLocks xmlns:a="http://schemas.openxmlformats.org/drawingml/2006/main" noGrp="1"/>
-          </p:cNvSpPr>
-          <p:nvPr/>
-        </p:nvSpPr>
-        <p:spPr>
-          <a:xfrm xmlns:a="http://schemas.openxmlformats.org/drawingml/2006/main">
+            <a:spLocks noGrp="1"/>
+          </p:cNvSpPr>
+          <p:nvPr/>
+        </p:nvSpPr>
+        <p:spPr>
+          <a:xfrm>
             <a:off x="9525000" y="1381125"/>
             <a:ext cx="1952625" cy="381000"/>
           </a:xfrm>
-          <a:prstGeom xmlns:a="http://schemas.openxmlformats.org/drawingml/2006/main" prst="roundRect">
+          <a:prstGeom prst="roundRect">
             <a:avLst>
               <a:gd name="adj" fmla="val 30000"/>
             </a:avLst>
           </a:prstGeom>
-          <a:solidFill xmlns:a="http://schemas.openxmlformats.org/drawingml/2006/main">
+          <a:solidFill>
             <a:srgbClr val="D0EDFA"/>
           </a:solidFill>
-          <a:ln xmlns:a="http://schemas.openxmlformats.org/drawingml/2006/main" w="9525">
+          <a:ln w="9525">
             <a:solidFill>
               <a:srgbClr val="6DCBF4"/>
             </a:solidFill>
@@ -6612,9 +6481,9 @@
           </a:ln>
         </p:spPr>
         <p:txBody>
-          <a:bodyPr xmlns:a="http://schemas.openxmlformats.org/drawingml/2006/main" anchor="ctr"/>
-          <a:lstStyle xmlns:a="http://schemas.openxmlformats.org/drawingml/2006/main"/>
-          <a:p xmlns:a="http://schemas.openxmlformats.org/drawingml/2006/main">
+          <a:bodyPr anchor="ctr"/>
+          <a:lstStyle/>
+          <a:p>
             <a:pPr algn="ctr">
               <a:defRPr sz="1125" b="1">
                 <a:solidFill>
@@ -6636,35 +6505,35 @@
       <p:sp>
         <p:nvSpPr>
           <p:cNvPr id="9" name="source-footnote">
-            <a:extLst xmlns:a="http://schemas.openxmlformats.org/drawingml/2006/main">
+            <a:extLst>
               <a:ext uri="{FF2B5EF4-FFF2-40B4-BE49-F238E27FC236}">
                 <a16:creationId xmlns:a16="http://schemas.microsoft.com/office/drawing/2014/main" id="{02B3A93E-42E0-4BD2-A689-CFE10BC7C50E}"/>
               </a:ext>
             </a:extLst>
           </p:cNvPr>
           <p:cNvSpPr>
-            <a:spLocks xmlns:a="http://schemas.openxmlformats.org/drawingml/2006/main" noGrp="1"/>
-          </p:cNvSpPr>
-          <p:nvPr/>
-        </p:nvSpPr>
-        <p:spPr>
-          <a:xfrm xmlns:a="http://schemas.openxmlformats.org/drawingml/2006/main">
+            <a:spLocks noGrp="1"/>
+          </p:cNvSpPr>
+          <p:nvPr/>
+        </p:nvSpPr>
+        <p:spPr>
+          <a:xfrm>
             <a:off x="400050" y="6343650"/>
             <a:ext cx="10001250" cy="190500"/>
           </a:xfrm>
-          <a:prstGeom xmlns:a="http://schemas.openxmlformats.org/drawingml/2006/main" prst="rect">
-            <a:avLst/>
-          </a:prstGeom>
-          <a:noFill xmlns:a="http://schemas.openxmlformats.org/drawingml/2006/main"/>
-          <a:ln xmlns:a="http://schemas.openxmlformats.org/drawingml/2006/main" w="0">
+          <a:prstGeom prst="rect">
+            <a:avLst/>
+          </a:prstGeom>
+          <a:noFill/>
+          <a:ln w="0">
             <a:noFill/>
             <a:prstDash val="solid"/>
           </a:ln>
         </p:spPr>
         <p:txBody>
-          <a:bodyPr xmlns:a="http://schemas.openxmlformats.org/drawingml/2006/main"/>
-          <a:lstStyle xmlns:a="http://schemas.openxmlformats.org/drawingml/2006/main"/>
-          <a:p xmlns:a="http://schemas.openxmlformats.org/drawingml/2006/main">
+          <a:bodyPr/>
+          <a:lstStyle/>
+          <a:p>
             <a:pPr>
               <a:defRPr sz="825">
                 <a:solidFill>
@@ -6690,11 +6559,14 @@
       </p:ext>
     </p:extLst>
   </p:cSld>
+  <p:clrMapOvr>
+    <a:masterClrMapping/>
+  </p:clrMapOvr>
 </p:sld>
 </file>
 
 <file path=ppt/slides/slide5.xml><?xml version="1.0" encoding="utf-8"?>
-<p:sld xmlns:p="http://schemas.openxmlformats.org/presentationml/2006/main">
+<p:sld xmlns:a="http://schemas.openxmlformats.org/drawingml/2006/main" xmlns:r="http://schemas.openxmlformats.org/officeDocument/2006/relationships" xmlns:p="http://schemas.openxmlformats.org/presentationml/2006/main">
   <p:cSld>
     <p:spTree>
       <p:nvGrpSpPr>
@@ -6703,37 +6575,42 @@
         <p:nvPr/>
       </p:nvGrpSpPr>
       <p:grpSpPr>
-        <a:xfrm xmlns:a="http://schemas.openxmlformats.org/drawingml/2006/main"/>
+        <a:xfrm>
+          <a:off x="0" y="0"/>
+          <a:ext cx="0" cy="0"/>
+          <a:chOff x="0" y="0"/>
+          <a:chExt cx="0" cy="0"/>
+        </a:xfrm>
       </p:grpSpPr>
       <p:sp>
         <p:nvSpPr>
-          <p:cNvPr id="1" name="Google-Shape-532-p58-2">
-            <a:extLst xmlns:a="http://schemas.openxmlformats.org/drawingml/2006/main">
+          <p:cNvPr id="13" name="Google-Shape-532-p58-2">
+            <a:extLst>
               <a:ext uri="{FF2B5EF4-FFF2-40B4-BE49-F238E27FC236}">
                 <a16:creationId xmlns:a16="http://schemas.microsoft.com/office/drawing/2014/main" id="{A8E48781-D6C8-458D-A1E0-F9B8DBDD632A}"/>
               </a:ext>
             </a:extLst>
           </p:cNvPr>
           <p:cNvSpPr>
-            <a:spLocks xmlns:a="http://schemas.openxmlformats.org/drawingml/2006/main" noGrp="1"/>
-          </p:cNvSpPr>
-          <p:nvPr/>
-        </p:nvSpPr>
-        <p:spPr>
-          <a:xfrm xmlns:a="http://schemas.openxmlformats.org/drawingml/2006/main">
+            <a:spLocks noGrp="1"/>
+          </p:cNvSpPr>
+          <p:nvPr/>
+        </p:nvSpPr>
+        <p:spPr>
+          <a:xfrm>
             <a:off x="11279315" y="6279261"/>
             <a:ext cx="518922" cy="241268"/>
           </a:xfrm>
-          <a:prstGeom xmlns:a="http://schemas.openxmlformats.org/drawingml/2006/main" prst="rect">
-            <a:avLst/>
-          </a:prstGeom>
-        </p:spPr>
-        <p:txBody>
-          <a:bodyPr xmlns:a="http://schemas.openxmlformats.org/drawingml/2006/main" wrap="square" lIns="0" tIns="0" rIns="0" bIns="0" anchor="b">
+          <a:prstGeom prst="rect">
+            <a:avLst/>
+          </a:prstGeom>
+        </p:spPr>
+        <p:txBody>
+          <a:bodyPr wrap="square" lIns="0" tIns="0" rIns="0" bIns="0" anchor="b">
             <a:noAutofit/>
           </a:bodyPr>
-          <a:lstStyle xmlns:a="http://schemas.openxmlformats.org/drawingml/2006/main"/>
-          <a:p xmlns:a="http://schemas.openxmlformats.org/drawingml/2006/main">
+          <a:lstStyle/>
+          <a:p>
             <a:pPr algn="r">
               <a:defRPr sz="1000">
                 <a:solidFill>
@@ -6753,32 +6630,32 @@
       <p:sp>
         <p:nvSpPr>
           <p:cNvPr id="2" name="Google-Shape-533-p58-3">
-            <a:extLst xmlns:a="http://schemas.openxmlformats.org/drawingml/2006/main">
+            <a:extLst>
               <a:ext uri="{FF2B5EF4-FFF2-40B4-BE49-F238E27FC236}">
                 <a16:creationId xmlns:a16="http://schemas.microsoft.com/office/drawing/2014/main" id="{965E7861-1BA3-4E57-8B40-1A4FB81C3F94}"/>
               </a:ext>
             </a:extLst>
           </p:cNvPr>
           <p:cNvSpPr>
-            <a:spLocks xmlns:a="http://schemas.openxmlformats.org/drawingml/2006/main" noGrp="1"/>
-          </p:cNvSpPr>
-          <p:nvPr/>
-        </p:nvSpPr>
-        <p:spPr>
-          <a:xfrm xmlns:a="http://schemas.openxmlformats.org/drawingml/2006/main">
+            <a:spLocks noGrp="1"/>
+          </p:cNvSpPr>
+          <p:nvPr/>
+        </p:nvSpPr>
+        <p:spPr>
+          <a:xfrm>
             <a:off x="393668" y="344519"/>
             <a:ext cx="11404568" cy="644271"/>
           </a:xfrm>
-          <a:prstGeom xmlns:a="http://schemas.openxmlformats.org/drawingml/2006/main" prst="rect">
-            <a:avLst/>
-          </a:prstGeom>
-        </p:spPr>
-        <p:txBody>
-          <a:bodyPr xmlns:a="http://schemas.openxmlformats.org/drawingml/2006/main" wrap="square" lIns="0" tIns="0" rIns="0" bIns="0" anchor="t">
+          <a:prstGeom prst="rect">
+            <a:avLst/>
+          </a:prstGeom>
+        </p:spPr>
+        <p:txBody>
+          <a:bodyPr wrap="square" lIns="0" tIns="0" rIns="0" bIns="0" anchor="t">
             <a:noAutofit/>
           </a:bodyPr>
-          <a:lstStyle xmlns:a="http://schemas.openxmlformats.org/drawingml/2006/main"/>
-          <a:p xmlns:a="http://schemas.openxmlformats.org/drawingml/2006/main">
+          <a:lstStyle/>
+          <a:p>
             <a:pPr algn="l">
               <a:lnSpc>
                 <a:spcPct val="105000"/>
@@ -6813,28 +6690,28 @@
       <p:sp>
         <p:nvSpPr>
           <p:cNvPr id="3" name="Rounded-Rectangle-1-4">
-            <a:extLst xmlns:a="http://schemas.openxmlformats.org/drawingml/2006/main">
+            <a:extLst>
               <a:ext uri="{FF2B5EF4-FFF2-40B4-BE49-F238E27FC236}">
                 <a16:creationId xmlns:a16="http://schemas.microsoft.com/office/drawing/2014/main" id="{FB70C3F9-EBB4-4FAA-BE30-079BD6E26EA4}"/>
               </a:ext>
             </a:extLst>
           </p:cNvPr>
           <p:cNvSpPr>
-            <a:spLocks xmlns:a="http://schemas.openxmlformats.org/drawingml/2006/main" noGrp="1"/>
-          </p:cNvSpPr>
-          <p:nvPr/>
-        </p:nvSpPr>
-        <p:spPr>
-          <a:xfrm xmlns:a="http://schemas.openxmlformats.org/drawingml/2006/main">
+            <a:spLocks noGrp="1"/>
+          </p:cNvSpPr>
+          <p:nvPr/>
+        </p:nvSpPr>
+        <p:spPr>
+          <a:xfrm>
             <a:off x="397002" y="3339084"/>
             <a:ext cx="5533930" cy="1320832"/>
           </a:xfrm>
-          <a:prstGeom xmlns:a="http://schemas.openxmlformats.org/drawingml/2006/main" prst="roundRect">
+          <a:prstGeom prst="roundRect">
             <a:avLst>
               <a:gd name="adj" fmla="val 5769"/>
             </a:avLst>
           </a:prstGeom>
-          <a:solidFill xmlns:a="http://schemas.openxmlformats.org/drawingml/2006/main">
+          <a:solidFill>
             <a:srgbClr val="F2F2F2"/>
           </a:solidFill>
         </p:spPr>
@@ -6842,32 +6719,32 @@
       <p:sp>
         <p:nvSpPr>
           <p:cNvPr id="4" name="Content-Placeholder-10-5">
-            <a:extLst xmlns:a="http://schemas.openxmlformats.org/drawingml/2006/main">
+            <a:extLst>
               <a:ext uri="{FF2B5EF4-FFF2-40B4-BE49-F238E27FC236}">
                 <a16:creationId xmlns:a16="http://schemas.microsoft.com/office/drawing/2014/main" id="{E9F2DF8E-03C7-4A5B-9EA7-A017C94FF8CA}"/>
               </a:ext>
             </a:extLst>
           </p:cNvPr>
           <p:cNvSpPr>
-            <a:spLocks xmlns:a="http://schemas.openxmlformats.org/drawingml/2006/main" noGrp="1"/>
-          </p:cNvSpPr>
-          <p:nvPr/>
-        </p:nvSpPr>
-        <p:spPr>
-          <a:xfrm xmlns:a="http://schemas.openxmlformats.org/drawingml/2006/main">
+            <a:spLocks noGrp="1"/>
+          </p:cNvSpPr>
+          <p:nvPr/>
+        </p:nvSpPr>
+        <p:spPr>
+          <a:xfrm>
             <a:off x="694277" y="3587972"/>
             <a:ext cx="4986909" cy="877824"/>
           </a:xfrm>
-          <a:prstGeom xmlns:a="http://schemas.openxmlformats.org/drawingml/2006/main" prst="rect">
-            <a:avLst/>
-          </a:prstGeom>
-        </p:spPr>
-        <p:txBody>
-          <a:bodyPr xmlns:a="http://schemas.openxmlformats.org/drawingml/2006/main" lIns="0" tIns="0" rIns="0" bIns="0">
+          <a:prstGeom prst="rect">
+            <a:avLst/>
+          </a:prstGeom>
+        </p:spPr>
+        <p:txBody>
+          <a:bodyPr lIns="0" tIns="0" rIns="0" bIns="0">
             <a:noAutofit/>
           </a:bodyPr>
-          <a:lstStyle xmlns:a="http://schemas.openxmlformats.org/drawingml/2006/main"/>
-          <a:p xmlns:a="http://schemas.openxmlformats.org/drawingml/2006/main">
+          <a:lstStyle/>
+          <a:p>
             <a:pPr algn="l">
               <a:lnSpc>
                 <a:spcPct val="105000"/>
@@ -6902,32 +6779,32 @@
       <p:sp>
         <p:nvSpPr>
           <p:cNvPr id="5" name="Content-Placeholder-15-6">
-            <a:extLst xmlns:a="http://schemas.openxmlformats.org/drawingml/2006/main">
+            <a:extLst>
               <a:ext uri="{FF2B5EF4-FFF2-40B4-BE49-F238E27FC236}">
                 <a16:creationId xmlns:a16="http://schemas.microsoft.com/office/drawing/2014/main" id="{5AD34495-0639-4C69-99BB-2B79D3A44984}"/>
               </a:ext>
             </a:extLst>
           </p:cNvPr>
           <p:cNvSpPr>
-            <a:spLocks xmlns:a="http://schemas.openxmlformats.org/drawingml/2006/main" noGrp="1"/>
-          </p:cNvSpPr>
-          <p:nvPr/>
-        </p:nvSpPr>
-        <p:spPr>
-          <a:xfrm xmlns:a="http://schemas.openxmlformats.org/drawingml/2006/main">
+            <a:spLocks noGrp="1"/>
+          </p:cNvSpPr>
+          <p:nvPr/>
+        </p:nvSpPr>
+        <p:spPr>
+          <a:xfrm>
             <a:off x="694277" y="4828604"/>
             <a:ext cx="5236655" cy="977932"/>
           </a:xfrm>
-          <a:prstGeom xmlns:a="http://schemas.openxmlformats.org/drawingml/2006/main" prst="rect">
-            <a:avLst/>
-          </a:prstGeom>
-        </p:spPr>
-        <p:txBody>
-          <a:bodyPr xmlns:a="http://schemas.openxmlformats.org/drawingml/2006/main" lIns="0" tIns="0" rIns="0" bIns="0">
+          <a:prstGeom prst="rect">
+            <a:avLst/>
+          </a:prstGeom>
+        </p:spPr>
+        <p:txBody>
+          <a:bodyPr lIns="0" tIns="0" rIns="0" bIns="0">
             <a:noAutofit/>
           </a:bodyPr>
-          <a:lstStyle xmlns:a="http://schemas.openxmlformats.org/drawingml/2006/main"/>
-          <a:p xmlns:a="http://schemas.openxmlformats.org/drawingml/2006/main">
+          <a:lstStyle/>
+          <a:p>
             <a:pPr algn="l">
               <a:lnSpc>
                 <a:spcPct val="105000"/>
@@ -6957,7 +6834,7 @@
               <a:t>Discover installed Midnight wallets and request permission</a:t>
             </a:r>
           </a:p>
-          <a:p xmlns:a="http://schemas.openxmlformats.org/drawingml/2006/main">
+          <a:p>
             <a:pPr algn="l">
               <a:lnSpc>
                 <a:spcPct val="105000"/>
@@ -6987,7 +6864,7 @@
               <a:t>Validate connection status and a compatible network ID</a:t>
             </a:r>
           </a:p>
-          <a:p xmlns:a="http://schemas.openxmlformats.org/drawingml/2006/main">
+          <a:p>
             <a:pPr algn="l">
               <a:lnSpc>
                 <a:spcPct val="105000"/>
@@ -7022,28 +6899,28 @@
       <p:sp>
         <p:nvSpPr>
           <p:cNvPr id="6" name="Rounded-Rectangle-7-7">
-            <a:extLst xmlns:a="http://schemas.openxmlformats.org/drawingml/2006/main">
+            <a:extLst>
               <a:ext uri="{FF2B5EF4-FFF2-40B4-BE49-F238E27FC236}">
                 <a16:creationId xmlns:a16="http://schemas.microsoft.com/office/drawing/2014/main" id="{89BBD1E5-B19E-45AE-AA79-0CE92681BA9A}"/>
               </a:ext>
             </a:extLst>
           </p:cNvPr>
           <p:cNvSpPr>
-            <a:spLocks xmlns:a="http://schemas.openxmlformats.org/drawingml/2006/main" noGrp="1"/>
-          </p:cNvSpPr>
-          <p:nvPr/>
-        </p:nvSpPr>
-        <p:spPr>
-          <a:xfrm xmlns:a="http://schemas.openxmlformats.org/drawingml/2006/main">
+            <a:spLocks noGrp="1"/>
+          </p:cNvSpPr>
+          <p:nvPr/>
+        </p:nvSpPr>
+        <p:spPr>
+          <a:xfrm>
             <a:off x="6260783" y="3339084"/>
             <a:ext cx="5533930" cy="1320832"/>
           </a:xfrm>
-          <a:prstGeom xmlns:a="http://schemas.openxmlformats.org/drawingml/2006/main" prst="roundRect">
+          <a:prstGeom prst="roundRect">
             <a:avLst>
               <a:gd name="adj" fmla="val 5769"/>
             </a:avLst>
           </a:prstGeom>
-          <a:solidFill xmlns:a="http://schemas.openxmlformats.org/drawingml/2006/main">
+          <a:solidFill>
             <a:srgbClr val="F2F2F2"/>
           </a:solidFill>
         </p:spPr>
@@ -7051,32 +6928,32 @@
       <p:sp>
         <p:nvSpPr>
           <p:cNvPr id="7" name="Content-Placeholder-10-8">
-            <a:extLst xmlns:a="http://schemas.openxmlformats.org/drawingml/2006/main">
+            <a:extLst>
               <a:ext uri="{FF2B5EF4-FFF2-40B4-BE49-F238E27FC236}">
                 <a16:creationId xmlns:a16="http://schemas.microsoft.com/office/drawing/2014/main" id="{17FE07C4-D90D-4152-92CB-21807B373B21}"/>
               </a:ext>
             </a:extLst>
           </p:cNvPr>
           <p:cNvSpPr>
-            <a:spLocks xmlns:a="http://schemas.openxmlformats.org/drawingml/2006/main" noGrp="1"/>
-          </p:cNvSpPr>
-          <p:nvPr/>
-        </p:nvSpPr>
-        <p:spPr>
-          <a:xfrm xmlns:a="http://schemas.openxmlformats.org/drawingml/2006/main">
+            <a:spLocks noGrp="1"/>
+          </p:cNvSpPr>
+          <p:nvPr/>
+        </p:nvSpPr>
+        <p:spPr>
+          <a:xfrm>
             <a:off x="6558058" y="3587972"/>
             <a:ext cx="4986909" cy="877824"/>
           </a:xfrm>
-          <a:prstGeom xmlns:a="http://schemas.openxmlformats.org/drawingml/2006/main" prst="rect">
-            <a:avLst/>
-          </a:prstGeom>
-        </p:spPr>
-        <p:txBody>
-          <a:bodyPr xmlns:a="http://schemas.openxmlformats.org/drawingml/2006/main" lIns="0" tIns="0" rIns="0" bIns="0">
+          <a:prstGeom prst="rect">
+            <a:avLst/>
+          </a:prstGeom>
+        </p:spPr>
+        <p:txBody>
+          <a:bodyPr lIns="0" tIns="0" rIns="0" bIns="0">
             <a:noAutofit/>
           </a:bodyPr>
-          <a:lstStyle xmlns:a="http://schemas.openxmlformats.org/drawingml/2006/main"/>
-          <a:p xmlns:a="http://schemas.openxmlformats.org/drawingml/2006/main">
+          <a:lstStyle/>
+          <a:p>
             <a:pPr algn="l">
               <a:lnSpc>
                 <a:spcPct val="105000"/>
@@ -7111,32 +6988,32 @@
       <p:sp>
         <p:nvSpPr>
           <p:cNvPr id="8" name="Content-Placeholder-15-9">
-            <a:extLst xmlns:a="http://schemas.openxmlformats.org/drawingml/2006/main">
+            <a:extLst>
               <a:ext uri="{FF2B5EF4-FFF2-40B4-BE49-F238E27FC236}">
                 <a16:creationId xmlns:a16="http://schemas.microsoft.com/office/drawing/2014/main" id="{DFBA849B-A379-457E-AC71-3A2187540FC2}"/>
               </a:ext>
             </a:extLst>
           </p:cNvPr>
           <p:cNvSpPr>
-            <a:spLocks xmlns:a="http://schemas.openxmlformats.org/drawingml/2006/main" noGrp="1"/>
-          </p:cNvSpPr>
-          <p:nvPr/>
-        </p:nvSpPr>
-        <p:spPr>
-          <a:xfrm xmlns:a="http://schemas.openxmlformats.org/drawingml/2006/main">
+            <a:spLocks noGrp="1"/>
+          </p:cNvSpPr>
+          <p:nvPr/>
+        </p:nvSpPr>
+        <p:spPr>
+          <a:xfrm>
             <a:off x="6558058" y="4828604"/>
             <a:ext cx="5236655" cy="977932"/>
           </a:xfrm>
-          <a:prstGeom xmlns:a="http://schemas.openxmlformats.org/drawingml/2006/main" prst="rect">
-            <a:avLst/>
-          </a:prstGeom>
-        </p:spPr>
-        <p:txBody>
-          <a:bodyPr xmlns:a="http://schemas.openxmlformats.org/drawingml/2006/main" lIns="0" tIns="0" rIns="0" bIns="0">
+          <a:prstGeom prst="rect">
+            <a:avLst/>
+          </a:prstGeom>
+        </p:spPr>
+        <p:txBody>
+          <a:bodyPr lIns="0" tIns="0" rIns="0" bIns="0">
             <a:noAutofit/>
           </a:bodyPr>
-          <a:lstStyle xmlns:a="http://schemas.openxmlformats.org/drawingml/2006/main"/>
-          <a:p xmlns:a="http://schemas.openxmlformats.org/drawingml/2006/main">
+          <a:lstStyle/>
+          <a:p>
             <a:pPr algn="l">
               <a:lnSpc>
                 <a:spcPct val="105000"/>
@@ -7166,7 +7043,7 @@
               <a:t>Build the claim transaction with generated contract bindings</a:t>
             </a:r>
           </a:p>
-          <a:p xmlns:a="http://schemas.openxmlformats.org/drawingml/2006/main">
+          <a:p>
             <a:pPr algn="l">
               <a:lnSpc>
                 <a:spcPct val="105000"/>
@@ -7196,7 +7073,7 @@
               <a:t>Request wallet authorization and client-side proof generation</a:t>
             </a:r>
           </a:p>
-          <a:p xmlns:a="http://schemas.openxmlformats.org/drawingml/2006/main">
+          <a:p>
             <a:pPr algn="l">
               <a:lnSpc>
                 <a:spcPct val="105000"/>
@@ -7231,32 +7108,32 @@
       <p:sp>
         <p:nvSpPr>
           <p:cNvPr id="9" name="Content-Placeholder-15-10">
-            <a:extLst xmlns:a="http://schemas.openxmlformats.org/drawingml/2006/main">
+            <a:extLst>
               <a:ext uri="{FF2B5EF4-FFF2-40B4-BE49-F238E27FC236}">
                 <a16:creationId xmlns:a16="http://schemas.microsoft.com/office/drawing/2014/main" id="{6E6A1C00-9C1F-4060-ADB7-BFE6671C68B6}"/>
               </a:ext>
             </a:extLst>
           </p:cNvPr>
           <p:cNvSpPr>
-            <a:spLocks xmlns:a="http://schemas.openxmlformats.org/drawingml/2006/main" noGrp="1"/>
-          </p:cNvSpPr>
-          <p:nvPr/>
-        </p:nvSpPr>
-        <p:spPr>
-          <a:xfrm xmlns:a="http://schemas.openxmlformats.org/drawingml/2006/main">
+            <a:spLocks noGrp="1"/>
+          </p:cNvSpPr>
+          <p:nvPr/>
+        </p:nvSpPr>
+        <p:spPr>
+          <a:xfrm>
             <a:off x="400907" y="1157478"/>
             <a:ext cx="11404568" cy="1629251"/>
           </a:xfrm>
-          <a:prstGeom xmlns:a="http://schemas.openxmlformats.org/drawingml/2006/main" prst="rect">
-            <a:avLst/>
-          </a:prstGeom>
-        </p:spPr>
-        <p:txBody>
-          <a:bodyPr xmlns:a="http://schemas.openxmlformats.org/drawingml/2006/main" lIns="0" tIns="0" rIns="0" bIns="0">
+          <a:prstGeom prst="rect">
+            <a:avLst/>
+          </a:prstGeom>
+        </p:spPr>
+        <p:txBody>
+          <a:bodyPr lIns="0" tIns="0" rIns="0" bIns="0">
             <a:noAutofit/>
           </a:bodyPr>
-          <a:lstStyle xmlns:a="http://schemas.openxmlformats.org/drawingml/2006/main"/>
-          <a:p xmlns:a="http://schemas.openxmlformats.org/drawingml/2006/main">
+          <a:lstStyle/>
+          <a:p>
             <a:pPr algn="l">
               <a:lnSpc>
                 <a:spcPct val="105000"/>
@@ -7286,7 +7163,7 @@
               <a:t>WALLET INTEGRATION</a:t>
             </a:r>
           </a:p>
-          <a:p xmlns:a="http://schemas.openxmlformats.org/drawingml/2006/main">
+          <a:p>
             <a:pPr algn="l">
               <a:lnSpc>
                 <a:spcPct val="105000"/>
@@ -7316,7 +7193,7 @@
               <a:t>VeilPay uses the Midnight DApp connector so wallet permission and the shielded address remain under employee control.</a:t>
             </a:r>
           </a:p>
-          <a:p xmlns:a="http://schemas.openxmlformats.org/drawingml/2006/main">
+          <a:p>
             <a:pPr algn="l">
               <a:lnSpc>
                 <a:spcPct val="105000"/>
@@ -7351,29 +7228,29 @@
       <p:sp>
         <p:nvSpPr>
           <p:cNvPr id="10" name="veilpay-accent">
-            <a:extLst xmlns:a="http://schemas.openxmlformats.org/drawingml/2006/main">
+            <a:extLst>
               <a:ext uri="{FF2B5EF4-FFF2-40B4-BE49-F238E27FC236}">
                 <a16:creationId xmlns:a16="http://schemas.microsoft.com/office/drawing/2014/main" id="{F1AAFD0A-A835-44A5-B214-DA317F0C4549}"/>
               </a:ext>
             </a:extLst>
           </p:cNvPr>
           <p:cNvSpPr>
-            <a:spLocks xmlns:a="http://schemas.openxmlformats.org/drawingml/2006/main" noGrp="1"/>
-          </p:cNvSpPr>
-          <p:nvPr/>
-        </p:nvSpPr>
-        <p:spPr>
-          <a:xfrm xmlns:a="http://schemas.openxmlformats.org/drawingml/2006/main">
+            <a:spLocks noGrp="1"/>
+          </p:cNvSpPr>
+          <p:nvPr/>
+        </p:nvSpPr>
+        <p:spPr>
+          <a:xfrm>
             <a:off x="0" y="0"/>
             <a:ext cx="85725" cy="6858000"/>
           </a:xfrm>
-          <a:prstGeom xmlns:a="http://schemas.openxmlformats.org/drawingml/2006/main" prst="rect">
-            <a:avLst/>
-          </a:prstGeom>
-          <a:solidFill xmlns:a="http://schemas.openxmlformats.org/drawingml/2006/main">
+          <a:prstGeom prst="rect">
+            <a:avLst/>
+          </a:prstGeom>
+          <a:solidFill>
             <a:srgbClr val="6DCBF4"/>
           </a:solidFill>
-          <a:ln xmlns:a="http://schemas.openxmlformats.org/drawingml/2006/main" w="0">
+          <a:ln w="0">
             <a:noFill/>
             <a:prstDash val="solid"/>
           </a:ln>
@@ -7382,31 +7259,31 @@
       <p:sp>
         <p:nvSpPr>
           <p:cNvPr id="11" name="status-pill">
-            <a:extLst xmlns:a="http://schemas.openxmlformats.org/drawingml/2006/main">
+            <a:extLst>
               <a:ext uri="{FF2B5EF4-FFF2-40B4-BE49-F238E27FC236}">
                 <a16:creationId xmlns:a16="http://schemas.microsoft.com/office/drawing/2014/main" id="{0D97141C-BDD7-4D4B-AA3E-6B76A981AAB0}"/>
               </a:ext>
             </a:extLst>
           </p:cNvPr>
           <p:cNvSpPr>
-            <a:spLocks xmlns:a="http://schemas.openxmlformats.org/drawingml/2006/main" noGrp="1"/>
-          </p:cNvSpPr>
-          <p:nvPr/>
-        </p:nvSpPr>
-        <p:spPr>
-          <a:xfrm xmlns:a="http://schemas.openxmlformats.org/drawingml/2006/main">
+            <a:spLocks noGrp="1"/>
+          </p:cNvSpPr>
+          <p:nvPr/>
+        </p:nvSpPr>
+        <p:spPr>
+          <a:xfrm>
             <a:off x="9525000" y="361950"/>
             <a:ext cx="1952625" cy="381000"/>
           </a:xfrm>
-          <a:prstGeom xmlns:a="http://schemas.openxmlformats.org/drawingml/2006/main" prst="roundRect">
+          <a:prstGeom prst="roundRect">
             <a:avLst>
               <a:gd name="adj" fmla="val 30000"/>
             </a:avLst>
           </a:prstGeom>
-          <a:solidFill xmlns:a="http://schemas.openxmlformats.org/drawingml/2006/main">
+          <a:solidFill>
             <a:srgbClr val="D0EDFA"/>
           </a:solidFill>
-          <a:ln xmlns:a="http://schemas.openxmlformats.org/drawingml/2006/main" w="9525">
+          <a:ln w="9525">
             <a:solidFill>
               <a:srgbClr val="6DCBF4"/>
             </a:solidFill>
@@ -7414,9 +7291,9 @@
           </a:ln>
         </p:spPr>
         <p:txBody>
-          <a:bodyPr xmlns:a="http://schemas.openxmlformats.org/drawingml/2006/main" anchor="ctr"/>
-          <a:lstStyle xmlns:a="http://schemas.openxmlformats.org/drawingml/2006/main"/>
-          <a:p xmlns:a="http://schemas.openxmlformats.org/drawingml/2006/main">
+          <a:bodyPr anchor="ctr"/>
+          <a:lstStyle/>
+          <a:p>
             <a:pPr algn="ctr">
               <a:defRPr sz="1125" b="1">
                 <a:solidFill>
@@ -7438,35 +7315,35 @@
       <p:sp>
         <p:nvSpPr>
           <p:cNvPr id="12" name="source-footnote">
-            <a:extLst xmlns:a="http://schemas.openxmlformats.org/drawingml/2006/main">
+            <a:extLst>
               <a:ext uri="{FF2B5EF4-FFF2-40B4-BE49-F238E27FC236}">
                 <a16:creationId xmlns:a16="http://schemas.microsoft.com/office/drawing/2014/main" id="{468B10CA-C4F4-435B-91CD-4989093C6624}"/>
               </a:ext>
             </a:extLst>
           </p:cNvPr>
           <p:cNvSpPr>
-            <a:spLocks xmlns:a="http://schemas.openxmlformats.org/drawingml/2006/main" noGrp="1"/>
-          </p:cNvSpPr>
-          <p:nvPr/>
-        </p:nvSpPr>
-        <p:spPr>
-          <a:xfrm xmlns:a="http://schemas.openxmlformats.org/drawingml/2006/main">
+            <a:spLocks noGrp="1"/>
+          </p:cNvSpPr>
+          <p:nvPr/>
+        </p:nvSpPr>
+        <p:spPr>
+          <a:xfrm>
             <a:off x="400050" y="6343650"/>
             <a:ext cx="10001250" cy="190500"/>
           </a:xfrm>
-          <a:prstGeom xmlns:a="http://schemas.openxmlformats.org/drawingml/2006/main" prst="rect">
-            <a:avLst/>
-          </a:prstGeom>
-          <a:noFill xmlns:a="http://schemas.openxmlformats.org/drawingml/2006/main"/>
-          <a:ln xmlns:a="http://schemas.openxmlformats.org/drawingml/2006/main" w="0">
+          <a:prstGeom prst="rect">
+            <a:avLst/>
+          </a:prstGeom>
+          <a:noFill/>
+          <a:ln w="0">
             <a:noFill/>
             <a:prstDash val="solid"/>
           </a:ln>
         </p:spPr>
         <p:txBody>
-          <a:bodyPr xmlns:a="http://schemas.openxmlformats.org/drawingml/2006/main"/>
-          <a:lstStyle xmlns:a="http://schemas.openxmlformats.org/drawingml/2006/main"/>
-          <a:p xmlns:a="http://schemas.openxmlformats.org/drawingml/2006/main">
+          <a:bodyPr/>
+          <a:lstStyle/>
+          <a:p>
             <a:pPr>
               <a:defRPr sz="825">
                 <a:solidFill>
@@ -7492,11 +7369,14 @@
       </p:ext>
     </p:extLst>
   </p:cSld>
+  <p:clrMapOvr>
+    <a:masterClrMapping/>
+  </p:clrMapOvr>
 </p:sld>
 </file>
 
 <file path=ppt/slides/slide6.xml><?xml version="1.0" encoding="utf-8"?>
-<p:sld xmlns:p="http://schemas.openxmlformats.org/presentationml/2006/main">
+<p:sld xmlns:a="http://schemas.openxmlformats.org/drawingml/2006/main" xmlns:r="http://schemas.openxmlformats.org/officeDocument/2006/relationships" xmlns:p="http://schemas.openxmlformats.org/presentationml/2006/main">
   <p:cSld>
     <p:spTree>
       <p:nvGrpSpPr>
@@ -7505,37 +7385,42 @@
         <p:nvPr/>
       </p:nvGrpSpPr>
       <p:grpSpPr>
-        <a:xfrm xmlns:a="http://schemas.openxmlformats.org/drawingml/2006/main"/>
+        <a:xfrm>
+          <a:off x="0" y="0"/>
+          <a:ext cx="0" cy="0"/>
+          <a:chOff x="0" y="0"/>
+          <a:chExt cx="0" cy="0"/>
+        </a:xfrm>
       </p:grpSpPr>
       <p:sp>
         <p:nvSpPr>
-          <p:cNvPr id="1" name="Google-Shape-532-p58-2">
-            <a:extLst xmlns:a="http://schemas.openxmlformats.org/drawingml/2006/main">
+          <p:cNvPr id="12" name="Google-Shape-532-p58-2">
+            <a:extLst>
               <a:ext uri="{FF2B5EF4-FFF2-40B4-BE49-F238E27FC236}">
                 <a16:creationId xmlns:a16="http://schemas.microsoft.com/office/drawing/2014/main" id="{EB6E3222-D332-40F4-9E96-1F7C1F605D20}"/>
               </a:ext>
             </a:extLst>
           </p:cNvPr>
           <p:cNvSpPr>
-            <a:spLocks xmlns:a="http://schemas.openxmlformats.org/drawingml/2006/main" noGrp="1"/>
-          </p:cNvSpPr>
-          <p:nvPr/>
-        </p:nvSpPr>
-        <p:spPr>
-          <a:xfrm xmlns:a="http://schemas.openxmlformats.org/drawingml/2006/main">
+            <a:spLocks noGrp="1"/>
+          </p:cNvSpPr>
+          <p:nvPr/>
+        </p:nvSpPr>
+        <p:spPr>
+          <a:xfrm>
             <a:off x="11279315" y="6279261"/>
             <a:ext cx="518922" cy="241268"/>
           </a:xfrm>
-          <a:prstGeom xmlns:a="http://schemas.openxmlformats.org/drawingml/2006/main" prst="rect">
-            <a:avLst/>
-          </a:prstGeom>
-        </p:spPr>
-        <p:txBody>
-          <a:bodyPr xmlns:a="http://schemas.openxmlformats.org/drawingml/2006/main" wrap="square" lIns="0" tIns="0" rIns="0" bIns="0" anchor="b">
+          <a:prstGeom prst="rect">
+            <a:avLst/>
+          </a:prstGeom>
+        </p:spPr>
+        <p:txBody>
+          <a:bodyPr wrap="square" lIns="0" tIns="0" rIns="0" bIns="0" anchor="b">
             <a:noAutofit/>
           </a:bodyPr>
-          <a:lstStyle xmlns:a="http://schemas.openxmlformats.org/drawingml/2006/main"/>
-          <a:p xmlns:a="http://schemas.openxmlformats.org/drawingml/2006/main">
+          <a:lstStyle/>
+          <a:p>
             <a:pPr algn="r">
               <a:defRPr sz="1000">
                 <a:solidFill>
@@ -7555,32 +7440,32 @@
       <p:sp>
         <p:nvSpPr>
           <p:cNvPr id="2" name="Google-Shape-533-p58-3">
-            <a:extLst xmlns:a="http://schemas.openxmlformats.org/drawingml/2006/main">
+            <a:extLst>
               <a:ext uri="{FF2B5EF4-FFF2-40B4-BE49-F238E27FC236}">
                 <a16:creationId xmlns:a16="http://schemas.microsoft.com/office/drawing/2014/main" id="{4D19F6CF-234E-4933-A7BF-BA0916FF7C79}"/>
               </a:ext>
             </a:extLst>
           </p:cNvPr>
           <p:cNvSpPr>
-            <a:spLocks xmlns:a="http://schemas.openxmlformats.org/drawingml/2006/main" noGrp="1"/>
-          </p:cNvSpPr>
-          <p:nvPr/>
-        </p:nvSpPr>
-        <p:spPr>
-          <a:xfrm xmlns:a="http://schemas.openxmlformats.org/drawingml/2006/main">
+            <a:spLocks noGrp="1"/>
+          </p:cNvSpPr>
+          <p:nvPr/>
+        </p:nvSpPr>
+        <p:spPr>
+          <a:xfrm>
             <a:off x="393668" y="344519"/>
             <a:ext cx="11404568" cy="644271"/>
           </a:xfrm>
-          <a:prstGeom xmlns:a="http://schemas.openxmlformats.org/drawingml/2006/main" prst="rect">
-            <a:avLst/>
-          </a:prstGeom>
-        </p:spPr>
-        <p:txBody>
-          <a:bodyPr xmlns:a="http://schemas.openxmlformats.org/drawingml/2006/main" wrap="square" lIns="0" tIns="0" rIns="0" bIns="0" anchor="t">
+          <a:prstGeom prst="rect">
+            <a:avLst/>
+          </a:prstGeom>
+        </p:spPr>
+        <p:txBody>
+          <a:bodyPr wrap="square" lIns="0" tIns="0" rIns="0" bIns="0" anchor="t">
             <a:noAutofit/>
           </a:bodyPr>
-          <a:lstStyle xmlns:a="http://schemas.openxmlformats.org/drawingml/2006/main"/>
-          <a:p xmlns:a="http://schemas.openxmlformats.org/drawingml/2006/main">
+          <a:lstStyle/>
+          <a:p>
             <a:pPr algn="l">
               <a:lnSpc>
                 <a:spcPct val="105000"/>
@@ -7615,28 +7500,28 @@
       <p:sp>
         <p:nvSpPr>
           <p:cNvPr id="3" name="Rounded-Rectangle-1-4">
-            <a:extLst xmlns:a="http://schemas.openxmlformats.org/drawingml/2006/main">
+            <a:extLst>
               <a:ext uri="{FF2B5EF4-FFF2-40B4-BE49-F238E27FC236}">
                 <a16:creationId xmlns:a16="http://schemas.microsoft.com/office/drawing/2014/main" id="{2AE9BF15-FA3A-4C28-90C1-2CB27036A71E}"/>
               </a:ext>
             </a:extLst>
           </p:cNvPr>
           <p:cNvSpPr>
-            <a:spLocks xmlns:a="http://schemas.openxmlformats.org/drawingml/2006/main" noGrp="1"/>
-          </p:cNvSpPr>
-          <p:nvPr/>
-        </p:nvSpPr>
-        <p:spPr>
-          <a:xfrm xmlns:a="http://schemas.openxmlformats.org/drawingml/2006/main">
+            <a:spLocks noGrp="1"/>
+          </p:cNvSpPr>
+          <p:nvPr/>
+        </p:nvSpPr>
+        <p:spPr>
+          <a:xfrm>
             <a:off x="397002" y="3339084"/>
             <a:ext cx="5533930" cy="1320832"/>
           </a:xfrm>
-          <a:prstGeom xmlns:a="http://schemas.openxmlformats.org/drawingml/2006/main" prst="roundRect">
+          <a:prstGeom prst="roundRect">
             <a:avLst>
               <a:gd name="adj" fmla="val 5769"/>
             </a:avLst>
           </a:prstGeom>
-          <a:solidFill xmlns:a="http://schemas.openxmlformats.org/drawingml/2006/main">
+          <a:solidFill>
             <a:srgbClr val="F2F2F2"/>
           </a:solidFill>
         </p:spPr>
@@ -7644,32 +7529,32 @@
       <p:sp>
         <p:nvSpPr>
           <p:cNvPr id="4" name="Content-Placeholder-10-5">
-            <a:extLst xmlns:a="http://schemas.openxmlformats.org/drawingml/2006/main">
+            <a:extLst>
               <a:ext uri="{FF2B5EF4-FFF2-40B4-BE49-F238E27FC236}">
                 <a16:creationId xmlns:a16="http://schemas.microsoft.com/office/drawing/2014/main" id="{4B9B7F63-6691-4158-ABDB-55D94AF49C8C}"/>
               </a:ext>
             </a:extLst>
           </p:cNvPr>
           <p:cNvSpPr>
-            <a:spLocks xmlns:a="http://schemas.openxmlformats.org/drawingml/2006/main" noGrp="1"/>
-          </p:cNvSpPr>
-          <p:nvPr/>
-        </p:nvSpPr>
-        <p:spPr>
-          <a:xfrm xmlns:a="http://schemas.openxmlformats.org/drawingml/2006/main">
+            <a:spLocks noGrp="1"/>
+          </p:cNvSpPr>
+          <p:nvPr/>
+        </p:nvSpPr>
+        <p:spPr>
+          <a:xfrm>
             <a:off x="694277" y="3587972"/>
             <a:ext cx="4986909" cy="877824"/>
           </a:xfrm>
-          <a:prstGeom xmlns:a="http://schemas.openxmlformats.org/drawingml/2006/main" prst="rect">
-            <a:avLst/>
-          </a:prstGeom>
-        </p:spPr>
-        <p:txBody>
-          <a:bodyPr xmlns:a="http://schemas.openxmlformats.org/drawingml/2006/main" lIns="0" tIns="0" rIns="0" bIns="0">
+          <a:prstGeom prst="rect">
+            <a:avLst/>
+          </a:prstGeom>
+        </p:spPr>
+        <p:txBody>
+          <a:bodyPr lIns="0" tIns="0" rIns="0" bIns="0">
             <a:noAutofit/>
           </a:bodyPr>
-          <a:lstStyle xmlns:a="http://schemas.openxmlformats.org/drawingml/2006/main"/>
-          <a:p xmlns:a="http://schemas.openxmlformats.org/drawingml/2006/main">
+          <a:lstStyle/>
+          <a:p>
             <a:pPr algn="l">
               <a:lnSpc>
                 <a:spcPct val="105000"/>
@@ -7704,32 +7589,32 @@
       <p:sp>
         <p:nvSpPr>
           <p:cNvPr id="5" name="Content-Placeholder-15-6">
-            <a:extLst xmlns:a="http://schemas.openxmlformats.org/drawingml/2006/main">
+            <a:extLst>
               <a:ext uri="{FF2B5EF4-FFF2-40B4-BE49-F238E27FC236}">
                 <a16:creationId xmlns:a16="http://schemas.microsoft.com/office/drawing/2014/main" id="{9B08CB04-701A-43F7-BBB6-440BD80E5C3C}"/>
               </a:ext>
             </a:extLst>
           </p:cNvPr>
           <p:cNvSpPr>
-            <a:spLocks xmlns:a="http://schemas.openxmlformats.org/drawingml/2006/main" noGrp="1"/>
-          </p:cNvSpPr>
-          <p:nvPr/>
-        </p:nvSpPr>
-        <p:spPr>
-          <a:xfrm xmlns:a="http://schemas.openxmlformats.org/drawingml/2006/main">
+            <a:spLocks noGrp="1"/>
+          </p:cNvSpPr>
+          <p:nvPr/>
+        </p:nvSpPr>
+        <p:spPr>
+          <a:xfrm>
             <a:off x="694277" y="4828604"/>
             <a:ext cx="5236655" cy="977932"/>
           </a:xfrm>
-          <a:prstGeom xmlns:a="http://schemas.openxmlformats.org/drawingml/2006/main" prst="rect">
-            <a:avLst/>
-          </a:prstGeom>
-        </p:spPr>
-        <p:txBody>
-          <a:bodyPr xmlns:a="http://schemas.openxmlformats.org/drawingml/2006/main" lIns="0" tIns="0" rIns="0" bIns="0">
+          <a:prstGeom prst="rect">
+            <a:avLst/>
+          </a:prstGeom>
+        </p:spPr>
+        <p:txBody>
+          <a:bodyPr lIns="0" tIns="0" rIns="0" bIns="0">
             <a:noAutofit/>
           </a:bodyPr>
-          <a:lstStyle xmlns:a="http://schemas.openxmlformats.org/drawingml/2006/main"/>
-          <a:p xmlns:a="http://schemas.openxmlformats.org/drawingml/2006/main">
+          <a:lstStyle/>
+          <a:p>
             <a:pPr algn="l">
               <a:lnSpc>
                 <a:spcPct val="105000"/>
@@ -7759,7 +7644,7 @@
               <a:t>React role-based portals + Express API</a:t>
             </a:r>
           </a:p>
-          <a:p xmlns:a="http://schemas.openxmlformats.org/drawingml/2006/main">
+          <a:p>
             <a:pPr algn="l">
               <a:lnSpc>
                 <a:spcPct val="105000"/>
@@ -7789,7 +7674,7 @@
               <a:t>CSV validation, encrypted claim data, SQLite</a:t>
             </a:r>
           </a:p>
-          <a:p xmlns:a="http://schemas.openxmlformats.org/drawingml/2006/main">
+          <a:p>
             <a:pPr algn="l">
               <a:lnSpc>
                 <a:spcPct val="105000"/>
@@ -7824,28 +7709,28 @@
       <p:sp>
         <p:nvSpPr>
           <p:cNvPr id="6" name="Rounded-Rectangle-7-7">
-            <a:extLst xmlns:a="http://schemas.openxmlformats.org/drawingml/2006/main">
+            <a:extLst>
               <a:ext uri="{FF2B5EF4-FFF2-40B4-BE49-F238E27FC236}">
                 <a16:creationId xmlns:a16="http://schemas.microsoft.com/office/drawing/2014/main" id="{D5E3EF17-54C5-4670-BA70-5AF06F1413F5}"/>
               </a:ext>
             </a:extLst>
           </p:cNvPr>
           <p:cNvSpPr>
-            <a:spLocks xmlns:a="http://schemas.openxmlformats.org/drawingml/2006/main" noGrp="1"/>
-          </p:cNvSpPr>
-          <p:nvPr/>
-        </p:nvSpPr>
-        <p:spPr>
-          <a:xfrm xmlns:a="http://schemas.openxmlformats.org/drawingml/2006/main">
+            <a:spLocks noGrp="1"/>
+          </p:cNvSpPr>
+          <p:nvPr/>
+        </p:nvSpPr>
+        <p:spPr>
+          <a:xfrm>
             <a:off x="6260783" y="3339084"/>
             <a:ext cx="5533930" cy="1320832"/>
           </a:xfrm>
-          <a:prstGeom xmlns:a="http://schemas.openxmlformats.org/drawingml/2006/main" prst="roundRect">
+          <a:prstGeom prst="roundRect">
             <a:avLst>
               <a:gd name="adj" fmla="val 5769"/>
             </a:avLst>
           </a:prstGeom>
-          <a:solidFill xmlns:a="http://schemas.openxmlformats.org/drawingml/2006/main">
+          <a:solidFill>
             <a:srgbClr val="F2F2F2"/>
           </a:solidFill>
         </p:spPr>
@@ -7853,32 +7738,32 @@
       <p:sp>
         <p:nvSpPr>
           <p:cNvPr id="7" name="Content-Placeholder-10-8">
-            <a:extLst xmlns:a="http://schemas.openxmlformats.org/drawingml/2006/main">
+            <a:extLst>
               <a:ext uri="{FF2B5EF4-FFF2-40B4-BE49-F238E27FC236}">
                 <a16:creationId xmlns:a16="http://schemas.microsoft.com/office/drawing/2014/main" id="{A57679D9-50A5-4D7F-B272-FEDF95E9202C}"/>
               </a:ext>
             </a:extLst>
           </p:cNvPr>
           <p:cNvSpPr>
-            <a:spLocks xmlns:a="http://schemas.openxmlformats.org/drawingml/2006/main" noGrp="1"/>
-          </p:cNvSpPr>
-          <p:nvPr/>
-        </p:nvSpPr>
-        <p:spPr>
-          <a:xfrm xmlns:a="http://schemas.openxmlformats.org/drawingml/2006/main">
+            <a:spLocks noGrp="1"/>
+          </p:cNvSpPr>
+          <p:nvPr/>
+        </p:nvSpPr>
+        <p:spPr>
+          <a:xfrm>
             <a:off x="6558058" y="3587972"/>
             <a:ext cx="4986909" cy="877824"/>
           </a:xfrm>
-          <a:prstGeom xmlns:a="http://schemas.openxmlformats.org/drawingml/2006/main" prst="rect">
-            <a:avLst/>
-          </a:prstGeom>
-        </p:spPr>
-        <p:txBody>
-          <a:bodyPr xmlns:a="http://schemas.openxmlformats.org/drawingml/2006/main" lIns="0" tIns="0" rIns="0" bIns="0">
+          <a:prstGeom prst="rect">
+            <a:avLst/>
+          </a:prstGeom>
+        </p:spPr>
+        <p:txBody>
+          <a:bodyPr lIns="0" tIns="0" rIns="0" bIns="0">
             <a:noAutofit/>
           </a:bodyPr>
-          <a:lstStyle xmlns:a="http://schemas.openxmlformats.org/drawingml/2006/main"/>
-          <a:p xmlns:a="http://schemas.openxmlformats.org/drawingml/2006/main">
+          <a:lstStyle/>
+          <a:p>
             <a:pPr algn="l">
               <a:lnSpc>
                 <a:spcPct val="105000"/>
@@ -7913,32 +7798,32 @@
       <p:sp>
         <p:nvSpPr>
           <p:cNvPr id="8" name="Content-Placeholder-15-9">
-            <a:extLst xmlns:a="http://schemas.openxmlformats.org/drawingml/2006/main">
+            <a:extLst>
               <a:ext uri="{FF2B5EF4-FFF2-40B4-BE49-F238E27FC236}">
                 <a16:creationId xmlns:a16="http://schemas.microsoft.com/office/drawing/2014/main" id="{C34DDCA8-1CC1-403C-8752-763766E1DC32}"/>
               </a:ext>
             </a:extLst>
           </p:cNvPr>
           <p:cNvSpPr>
-            <a:spLocks xmlns:a="http://schemas.openxmlformats.org/drawingml/2006/main" noGrp="1"/>
-          </p:cNvSpPr>
-          <p:nvPr/>
-        </p:nvSpPr>
-        <p:spPr>
-          <a:xfrm xmlns:a="http://schemas.openxmlformats.org/drawingml/2006/main">
+            <a:spLocks noGrp="1"/>
+          </p:cNvSpPr>
+          <p:nvPr/>
+        </p:nvSpPr>
+        <p:spPr>
+          <a:xfrm>
             <a:off x="6558058" y="4828604"/>
             <a:ext cx="5236655" cy="977932"/>
           </a:xfrm>
-          <a:prstGeom xmlns:a="http://schemas.openxmlformats.org/drawingml/2006/main" prst="rect">
-            <a:avLst/>
-          </a:prstGeom>
-        </p:spPr>
-        <p:txBody>
-          <a:bodyPr xmlns:a="http://schemas.openxmlformats.org/drawingml/2006/main" lIns="0" tIns="0" rIns="0" bIns="0">
+          <a:prstGeom prst="rect">
+            <a:avLst/>
+          </a:prstGeom>
+        </p:spPr>
+        <p:txBody>
+          <a:bodyPr lIns="0" tIns="0" rIns="0" bIns="0">
             <a:noAutofit/>
           </a:bodyPr>
-          <a:lstStyle xmlns:a="http://schemas.openxmlformats.org/drawingml/2006/main"/>
-          <a:p xmlns:a="http://schemas.openxmlformats.org/drawingml/2006/main">
+          <a:lstStyle/>
+          <a:p>
             <a:pPr algn="l">
               <a:lnSpc>
                 <a:spcPct val="105000"/>
@@ -7968,7 +7853,7 @@
               <a:t>Compiled Compact artifacts and generated bindings</a:t>
             </a:r>
           </a:p>
-          <a:p xmlns:a="http://schemas.openxmlformats.org/drawingml/2006/main">
+          <a:p>
             <a:pPr algn="l">
               <a:lnSpc>
                 <a:spcPct val="105000"/>
@@ -7998,7 +7883,7 @@
               <a:t>Deployed preprod contract and proof service</a:t>
             </a:r>
           </a:p>
-          <a:p xmlns:a="http://schemas.openxmlformats.org/drawingml/2006/main">
+          <a:p>
             <a:pPr algn="l">
               <a:lnSpc>
                 <a:spcPct val="105000"/>
@@ -8033,32 +7918,32 @@
       <p:sp>
         <p:nvSpPr>
           <p:cNvPr id="9" name="Content-Placeholder-15-10">
-            <a:extLst xmlns:a="http://schemas.openxmlformats.org/drawingml/2006/main">
+            <a:extLst>
               <a:ext uri="{FF2B5EF4-FFF2-40B4-BE49-F238E27FC236}">
                 <a16:creationId xmlns:a16="http://schemas.microsoft.com/office/drawing/2014/main" id="{BBA38290-DCD0-49A8-82D1-C7268553AAB4}"/>
               </a:ext>
             </a:extLst>
           </p:cNvPr>
           <p:cNvSpPr>
-            <a:spLocks xmlns:a="http://schemas.openxmlformats.org/drawingml/2006/main" noGrp="1"/>
-          </p:cNvSpPr>
-          <p:nvPr/>
-        </p:nvSpPr>
-        <p:spPr>
-          <a:xfrm xmlns:a="http://schemas.openxmlformats.org/drawingml/2006/main">
+            <a:spLocks noGrp="1"/>
+          </p:cNvSpPr>
+          <p:nvPr/>
+        </p:nvSpPr>
+        <p:spPr>
+          <a:xfrm>
             <a:off x="400907" y="1157478"/>
             <a:ext cx="11404568" cy="1629251"/>
           </a:xfrm>
-          <a:prstGeom xmlns:a="http://schemas.openxmlformats.org/drawingml/2006/main" prst="rect">
-            <a:avLst/>
-          </a:prstGeom>
-        </p:spPr>
-        <p:txBody>
-          <a:bodyPr xmlns:a="http://schemas.openxmlformats.org/drawingml/2006/main" lIns="0" tIns="0" rIns="0" bIns="0">
+          <a:prstGeom prst="rect">
+            <a:avLst/>
+          </a:prstGeom>
+        </p:spPr>
+        <p:txBody>
+          <a:bodyPr lIns="0" tIns="0" rIns="0" bIns="0">
             <a:noAutofit/>
           </a:bodyPr>
-          <a:lstStyle xmlns:a="http://schemas.openxmlformats.org/drawingml/2006/main"/>
-          <a:p xmlns:a="http://schemas.openxmlformats.org/drawingml/2006/main">
+          <a:lstStyle/>
+          <a:p>
             <a:pPr algn="l">
               <a:lnSpc>
                 <a:spcPct val="105000"/>
@@ -8088,7 +7973,7 @@
               <a:t>CURRENT PRODUCT STATE</a:t>
             </a:r>
           </a:p>
-          <a:p xmlns:a="http://schemas.openxmlformats.org/drawingml/2006/main">
+          <a:p>
             <a:pPr algn="l">
               <a:lnSpc>
                 <a:spcPct val="105000"/>
@@ -8118,7 +8003,7 @@
               <a:t>A working local full-stack demo covers employer payroll upload, employee claims and compliance review.</a:t>
             </a:r>
           </a:p>
-          <a:p xmlns:a="http://schemas.openxmlformats.org/drawingml/2006/main">
+          <a:p>
             <a:pPr algn="l">
               <a:lnSpc>
                 <a:spcPct val="105000"/>
@@ -8153,29 +8038,29 @@
       <p:sp>
         <p:nvSpPr>
           <p:cNvPr id="10" name="veilpay-accent">
-            <a:extLst xmlns:a="http://schemas.openxmlformats.org/drawingml/2006/main">
+            <a:extLst>
               <a:ext uri="{FF2B5EF4-FFF2-40B4-BE49-F238E27FC236}">
                 <a16:creationId xmlns:a16="http://schemas.microsoft.com/office/drawing/2014/main" id="{03711B23-7DAC-4340-9DBB-BBBF0895E074}"/>
               </a:ext>
             </a:extLst>
           </p:cNvPr>
           <p:cNvSpPr>
-            <a:spLocks xmlns:a="http://schemas.openxmlformats.org/drawingml/2006/main" noGrp="1"/>
-          </p:cNvSpPr>
-          <p:nvPr/>
-        </p:nvSpPr>
-        <p:spPr>
-          <a:xfrm xmlns:a="http://schemas.openxmlformats.org/drawingml/2006/main">
+            <a:spLocks noGrp="1"/>
+          </p:cNvSpPr>
+          <p:nvPr/>
+        </p:nvSpPr>
+        <p:spPr>
+          <a:xfrm>
             <a:off x="0" y="0"/>
             <a:ext cx="85725" cy="6858000"/>
           </a:xfrm>
-          <a:prstGeom xmlns:a="http://schemas.openxmlformats.org/drawingml/2006/main" prst="rect">
-            <a:avLst/>
-          </a:prstGeom>
-          <a:solidFill xmlns:a="http://schemas.openxmlformats.org/drawingml/2006/main">
+          <a:prstGeom prst="rect">
+            <a:avLst/>
+          </a:prstGeom>
+          <a:solidFill>
             <a:srgbClr val="6DCBF4"/>
           </a:solidFill>
-          <a:ln xmlns:a="http://schemas.openxmlformats.org/drawingml/2006/main" w="0">
+          <a:ln w="0">
             <a:noFill/>
             <a:prstDash val="solid"/>
           </a:ln>
@@ -8184,31 +8069,31 @@
       <p:sp>
         <p:nvSpPr>
           <p:cNvPr id="11" name="status-pill">
-            <a:extLst xmlns:a="http://schemas.openxmlformats.org/drawingml/2006/main">
+            <a:extLst>
               <a:ext uri="{FF2B5EF4-FFF2-40B4-BE49-F238E27FC236}">
                 <a16:creationId xmlns:a16="http://schemas.microsoft.com/office/drawing/2014/main" id="{FC65B152-8367-4C1E-B0EC-FBF6705B0B89}"/>
               </a:ext>
             </a:extLst>
           </p:cNvPr>
           <p:cNvSpPr>
-            <a:spLocks xmlns:a="http://schemas.openxmlformats.org/drawingml/2006/main" noGrp="1"/>
-          </p:cNvSpPr>
-          <p:nvPr/>
-        </p:nvSpPr>
-        <p:spPr>
-          <a:xfrm xmlns:a="http://schemas.openxmlformats.org/drawingml/2006/main">
+            <a:spLocks noGrp="1"/>
+          </p:cNvSpPr>
+          <p:nvPr/>
+        </p:nvSpPr>
+        <p:spPr>
+          <a:xfrm>
             <a:off x="9525000" y="361950"/>
             <a:ext cx="1952625" cy="381000"/>
           </a:xfrm>
-          <a:prstGeom xmlns:a="http://schemas.openxmlformats.org/drawingml/2006/main" prst="roundRect">
+          <a:prstGeom prst="roundRect">
             <a:avLst>
               <a:gd name="adj" fmla="val 30000"/>
             </a:avLst>
           </a:prstGeom>
-          <a:solidFill xmlns:a="http://schemas.openxmlformats.org/drawingml/2006/main">
+          <a:solidFill>
             <a:srgbClr val="D0EDFA"/>
           </a:solidFill>
-          <a:ln xmlns:a="http://schemas.openxmlformats.org/drawingml/2006/main" w="9525">
+          <a:ln w="9525">
             <a:solidFill>
               <a:srgbClr val="6DCBF4"/>
             </a:solidFill>
@@ -8216,9 +8101,9 @@
           </a:ln>
         </p:spPr>
         <p:txBody>
-          <a:bodyPr xmlns:a="http://schemas.openxmlformats.org/drawingml/2006/main" anchor="ctr"/>
-          <a:lstStyle xmlns:a="http://schemas.openxmlformats.org/drawingml/2006/main"/>
-          <a:p xmlns:a="http://schemas.openxmlformats.org/drawingml/2006/main">
+          <a:bodyPr anchor="ctr"/>
+          <a:lstStyle/>
+          <a:p>
             <a:pPr algn="ctr">
               <a:defRPr sz="1125" b="1">
                 <a:solidFill>
@@ -8244,11 +8129,14 @@
       </p:ext>
     </p:extLst>
   </p:cSld>
+  <p:clrMapOvr>
+    <a:masterClrMapping/>
+  </p:clrMapOvr>
 </p:sld>
 </file>
 
 <file path=ppt/slides/slide7.xml><?xml version="1.0" encoding="utf-8"?>
-<p:sld xmlns:p="http://schemas.openxmlformats.org/presentationml/2006/main">
+<p:sld xmlns:a="http://schemas.openxmlformats.org/drawingml/2006/main" xmlns:r="http://schemas.openxmlformats.org/officeDocument/2006/relationships" xmlns:p="http://schemas.openxmlformats.org/presentationml/2006/main">
   <p:cSld>
     <p:spTree>
       <p:nvGrpSpPr>
@@ -8257,35 +8145,40 @@
         <p:nvPr/>
       </p:nvGrpSpPr>
       <p:grpSpPr>
-        <a:xfrm xmlns:a="http://schemas.openxmlformats.org/drawingml/2006/main"/>
+        <a:xfrm>
+          <a:off x="0" y="0"/>
+          <a:ext cx="0" cy="0"/>
+          <a:chOff x="0" y="0"/>
+          <a:chExt cx="0" cy="0"/>
+        </a:xfrm>
       </p:grpSpPr>
       <p:sp>
         <p:nvSpPr>
-          <p:cNvPr id="1" name="Slide-Number-Placeholder-1-2">
-            <a:extLst xmlns:a="http://schemas.openxmlformats.org/drawingml/2006/main">
+          <p:cNvPr id="8" name="Slide-Number-Placeholder-1-2">
+            <a:extLst>
               <a:ext uri="{FF2B5EF4-FFF2-40B4-BE49-F238E27FC236}">
                 <a16:creationId xmlns:a16="http://schemas.microsoft.com/office/drawing/2014/main" id="{C9150DDC-7409-4F36-8AA7-65593A7EE0BC}"/>
               </a:ext>
             </a:extLst>
           </p:cNvPr>
           <p:cNvSpPr>
-            <a:spLocks xmlns:a="http://schemas.openxmlformats.org/drawingml/2006/main" noGrp="1"/>
-          </p:cNvSpPr>
-          <p:nvPr/>
-        </p:nvSpPr>
-        <p:spPr>
-          <a:xfrm xmlns:a="http://schemas.openxmlformats.org/drawingml/2006/main">
+            <a:spLocks noGrp="1"/>
+          </p:cNvSpPr>
+          <p:nvPr/>
+        </p:nvSpPr>
+        <p:spPr>
+          <a:xfrm>
             <a:off x="11279219" y="6278594"/>
             <a:ext cx="519113" cy="241268"/>
           </a:xfrm>
-          <a:prstGeom xmlns:a="http://schemas.openxmlformats.org/drawingml/2006/main" prst="rect">
-            <a:avLst/>
-          </a:prstGeom>
-        </p:spPr>
-        <p:txBody>
-          <a:bodyPr xmlns:a="http://schemas.openxmlformats.org/drawingml/2006/main" lIns="0" tIns="0" rIns="0" bIns="0" anchor="b"/>
-          <a:lstStyle xmlns:a="http://schemas.openxmlformats.org/drawingml/2006/main"/>
-          <a:p xmlns:a="http://schemas.openxmlformats.org/drawingml/2006/main">
+          <a:prstGeom prst="rect">
+            <a:avLst/>
+          </a:prstGeom>
+        </p:spPr>
+        <p:txBody>
+          <a:bodyPr lIns="0" tIns="0" rIns="0" bIns="0" anchor="b"/>
+          <a:lstStyle/>
+          <a:p>
             <a:pPr algn="r">
               <a:defRPr sz="1000">
                 <a:solidFill>
@@ -8305,32 +8198,32 @@
       <p:sp>
         <p:nvSpPr>
           <p:cNvPr id="2" name="Title-2-3">
-            <a:extLst xmlns:a="http://schemas.openxmlformats.org/drawingml/2006/main">
+            <a:extLst>
               <a:ext uri="{FF2B5EF4-FFF2-40B4-BE49-F238E27FC236}">
                 <a16:creationId xmlns:a16="http://schemas.microsoft.com/office/drawing/2014/main" id="{878704C9-50CD-4901-9CED-705DD70927A0}"/>
               </a:ext>
             </a:extLst>
           </p:cNvPr>
           <p:cNvSpPr>
-            <a:spLocks xmlns:a="http://schemas.openxmlformats.org/drawingml/2006/main" noGrp="1"/>
-          </p:cNvSpPr>
-          <p:nvPr/>
-        </p:nvSpPr>
-        <p:spPr>
-          <a:xfrm xmlns:a="http://schemas.openxmlformats.org/drawingml/2006/main">
+            <a:spLocks noGrp="1"/>
+          </p:cNvSpPr>
+          <p:nvPr/>
+        </p:nvSpPr>
+        <p:spPr>
+          <a:xfrm>
             <a:off x="393668" y="344043"/>
             <a:ext cx="11404568" cy="1047464"/>
           </a:xfrm>
-          <a:prstGeom xmlns:a="http://schemas.openxmlformats.org/drawingml/2006/main" prst="rect">
-            <a:avLst/>
-          </a:prstGeom>
-        </p:spPr>
-        <p:txBody>
-          <a:bodyPr xmlns:a="http://schemas.openxmlformats.org/drawingml/2006/main" lIns="0" tIns="0" rIns="0" bIns="0" anchor="t">
-            <a:normAutofit fontScale="100000"/>
+          <a:prstGeom prst="rect">
+            <a:avLst/>
+          </a:prstGeom>
+        </p:spPr>
+        <p:txBody>
+          <a:bodyPr lIns="0" tIns="0" rIns="0" bIns="0" anchor="t">
+            <a:normAutofit/>
           </a:bodyPr>
-          <a:lstStyle xmlns:a="http://schemas.openxmlformats.org/drawingml/2006/main"/>
-          <a:p xmlns:a="http://schemas.openxmlformats.org/drawingml/2006/main">
+          <a:lstStyle/>
+          <a:p>
             <a:pPr algn="l">
               <a:lnSpc>
                 <a:spcPct val="105000"/>
@@ -8365,30 +8258,30 @@
       <p:sp>
         <p:nvSpPr>
           <p:cNvPr id="3" name="Content-Placeholder-9-4">
-            <a:extLst xmlns:a="http://schemas.openxmlformats.org/drawingml/2006/main">
+            <a:extLst>
               <a:ext uri="{FF2B5EF4-FFF2-40B4-BE49-F238E27FC236}">
                 <a16:creationId xmlns:a16="http://schemas.microsoft.com/office/drawing/2014/main" id="{2F09814E-D1CC-410A-AD4A-12D19E6702D6}"/>
               </a:ext>
             </a:extLst>
           </p:cNvPr>
           <p:cNvSpPr>
-            <a:spLocks xmlns:a="http://schemas.openxmlformats.org/drawingml/2006/main" noGrp="1"/>
-          </p:cNvSpPr>
-          <p:nvPr/>
-        </p:nvSpPr>
-        <p:spPr>
-          <a:xfrm xmlns:a="http://schemas.openxmlformats.org/drawingml/2006/main">
+            <a:spLocks noGrp="1"/>
+          </p:cNvSpPr>
+          <p:nvPr/>
+        </p:nvSpPr>
+        <p:spPr>
+          <a:xfrm>
             <a:off x="393668" y="2031968"/>
             <a:ext cx="5537168" cy="1643063"/>
           </a:xfrm>
-          <a:prstGeom xmlns:a="http://schemas.openxmlformats.org/drawingml/2006/main" prst="rect">
-            <a:avLst/>
-          </a:prstGeom>
-        </p:spPr>
-        <p:txBody>
-          <a:bodyPr xmlns:a="http://schemas.openxmlformats.org/drawingml/2006/main" lIns="91440" tIns="45720" rIns="91440" bIns="45720"/>
-          <a:lstStyle xmlns:a="http://schemas.openxmlformats.org/drawingml/2006/main"/>
-          <a:p xmlns:a="http://schemas.openxmlformats.org/drawingml/2006/main">
+          <a:prstGeom prst="rect">
+            <a:avLst/>
+          </a:prstGeom>
+        </p:spPr>
+        <p:txBody>
+          <a:bodyPr lIns="91440" tIns="45720" rIns="91440" bIns="45720"/>
+          <a:lstStyle/>
+          <a:p>
             <a:pPr algn="l">
               <a:lnSpc>
                 <a:spcPct val="105000"/>
@@ -8418,7 +8311,7 @@
               <a:t>Crypto-native teams</a:t>
             </a:r>
           </a:p>
-          <a:p xmlns:a="http://schemas.openxmlformats.org/drawingml/2006/main">
+          <a:p>
             <a:pPr algn="l">
               <a:lnSpc>
                 <a:spcPct val="105000"/>
@@ -8453,30 +8346,30 @@
       <p:sp>
         <p:nvSpPr>
           <p:cNvPr id="4" name="Content-Placeholder-10-5">
-            <a:extLst xmlns:a="http://schemas.openxmlformats.org/drawingml/2006/main">
+            <a:extLst>
               <a:ext uri="{FF2B5EF4-FFF2-40B4-BE49-F238E27FC236}">
                 <a16:creationId xmlns:a16="http://schemas.microsoft.com/office/drawing/2014/main" id="{17980FC5-0CAA-4294-84F9-6F1517BB1148}"/>
               </a:ext>
             </a:extLst>
           </p:cNvPr>
           <p:cNvSpPr>
-            <a:spLocks xmlns:a="http://schemas.openxmlformats.org/drawingml/2006/main" noGrp="1"/>
-          </p:cNvSpPr>
-          <p:nvPr/>
-        </p:nvSpPr>
-        <p:spPr>
-          <a:xfrm xmlns:a="http://schemas.openxmlformats.org/drawingml/2006/main">
+            <a:spLocks noGrp="1"/>
+          </p:cNvSpPr>
+          <p:nvPr/>
+        </p:nvSpPr>
+        <p:spPr>
+          <a:xfrm>
             <a:off x="6256592" y="2031968"/>
             <a:ext cx="5537168" cy="1643063"/>
           </a:xfrm>
-          <a:prstGeom xmlns:a="http://schemas.openxmlformats.org/drawingml/2006/main" prst="rect">
-            <a:avLst/>
-          </a:prstGeom>
-        </p:spPr>
-        <p:txBody>
-          <a:bodyPr xmlns:a="http://schemas.openxmlformats.org/drawingml/2006/main" lIns="91440" tIns="45720" rIns="91440" bIns="45720"/>
-          <a:lstStyle xmlns:a="http://schemas.openxmlformats.org/drawingml/2006/main"/>
-          <a:p xmlns:a="http://schemas.openxmlformats.org/drawingml/2006/main">
+          <a:prstGeom prst="rect">
+            <a:avLst/>
+          </a:prstGeom>
+        </p:spPr>
+        <p:txBody>
+          <a:bodyPr lIns="91440" tIns="45720" rIns="91440" bIns="45720"/>
+          <a:lstStyle/>
+          <a:p>
             <a:pPr algn="l">
               <a:lnSpc>
                 <a:spcPct val="105000"/>
@@ -8506,7 +8399,7 @@
               <a:t>DAOs and foundations</a:t>
             </a:r>
           </a:p>
-          <a:p xmlns:a="http://schemas.openxmlformats.org/drawingml/2006/main">
+          <a:p>
             <a:pPr algn="l">
               <a:lnSpc>
                 <a:spcPct val="105000"/>
@@ -8541,32 +8434,32 @@
       <p:sp>
         <p:nvSpPr>
           <p:cNvPr id="5" name="Content-Placeholder-9-6">
-            <a:extLst xmlns:a="http://schemas.openxmlformats.org/drawingml/2006/main">
+            <a:extLst>
               <a:ext uri="{FF2B5EF4-FFF2-40B4-BE49-F238E27FC236}">
                 <a16:creationId xmlns:a16="http://schemas.microsoft.com/office/drawing/2014/main" id="{FC422FAA-D216-41CA-81F5-EFE91FAB87EA}"/>
               </a:ext>
             </a:extLst>
           </p:cNvPr>
           <p:cNvSpPr>
-            <a:spLocks xmlns:a="http://schemas.openxmlformats.org/drawingml/2006/main" noGrp="1"/>
-          </p:cNvSpPr>
-          <p:nvPr/>
-        </p:nvSpPr>
-        <p:spPr>
-          <a:xfrm xmlns:a="http://schemas.openxmlformats.org/drawingml/2006/main">
+            <a:spLocks noGrp="1"/>
+          </p:cNvSpPr>
+          <p:nvPr/>
+        </p:nvSpPr>
+        <p:spPr>
+          <a:xfrm>
             <a:off x="393668" y="4016978"/>
             <a:ext cx="5537168" cy="1643158"/>
           </a:xfrm>
-          <a:prstGeom xmlns:a="http://schemas.openxmlformats.org/drawingml/2006/main" prst="rect">
-            <a:avLst/>
-          </a:prstGeom>
-        </p:spPr>
-        <p:txBody>
-          <a:bodyPr xmlns:a="http://schemas.openxmlformats.org/drawingml/2006/main" lIns="0" tIns="0" rIns="0" bIns="0">
-            <a:normAutofit fontScale="100000"/>
+          <a:prstGeom prst="rect">
+            <a:avLst/>
+          </a:prstGeom>
+        </p:spPr>
+        <p:txBody>
+          <a:bodyPr lIns="0" tIns="0" rIns="0" bIns="0">
+            <a:normAutofit/>
           </a:bodyPr>
-          <a:lstStyle xmlns:a="http://schemas.openxmlformats.org/drawingml/2006/main"/>
-          <a:p xmlns:a="http://schemas.openxmlformats.org/drawingml/2006/main">
+          <a:lstStyle/>
+          <a:p>
             <a:pPr algn="l">
               <a:lnSpc>
                 <a:spcPct val="105000"/>
@@ -8596,7 +8489,7 @@
               <a:t>Payroll providers</a:t>
             </a:r>
           </a:p>
-          <a:p xmlns:a="http://schemas.openxmlformats.org/drawingml/2006/main">
+          <a:p>
             <a:pPr algn="l">
               <a:lnSpc>
                 <a:spcPct val="105000"/>
@@ -8631,32 +8524,32 @@
       <p:sp>
         <p:nvSpPr>
           <p:cNvPr id="6" name="Content-Placeholder-10-7">
-            <a:extLst xmlns:a="http://schemas.openxmlformats.org/drawingml/2006/main">
+            <a:extLst>
               <a:ext uri="{FF2B5EF4-FFF2-40B4-BE49-F238E27FC236}">
                 <a16:creationId xmlns:a16="http://schemas.microsoft.com/office/drawing/2014/main" id="{BDFB21FE-D17A-4E99-942E-4FC6BFE35575}"/>
               </a:ext>
             </a:extLst>
           </p:cNvPr>
           <p:cNvSpPr>
-            <a:spLocks xmlns:a="http://schemas.openxmlformats.org/drawingml/2006/main" noGrp="1"/>
-          </p:cNvSpPr>
-          <p:nvPr/>
-        </p:nvSpPr>
-        <p:spPr>
-          <a:xfrm xmlns:a="http://schemas.openxmlformats.org/drawingml/2006/main">
+            <a:spLocks noGrp="1"/>
+          </p:cNvSpPr>
+          <p:nvPr/>
+        </p:nvSpPr>
+        <p:spPr>
+          <a:xfrm>
             <a:off x="6256592" y="4016978"/>
             <a:ext cx="5537168" cy="1643158"/>
           </a:xfrm>
-          <a:prstGeom xmlns:a="http://schemas.openxmlformats.org/drawingml/2006/main" prst="rect">
-            <a:avLst/>
-          </a:prstGeom>
-        </p:spPr>
-        <p:txBody>
-          <a:bodyPr xmlns:a="http://schemas.openxmlformats.org/drawingml/2006/main" lIns="0" tIns="0" rIns="0" bIns="0">
-            <a:normAutofit fontScale="100000"/>
+          <a:prstGeom prst="rect">
+            <a:avLst/>
+          </a:prstGeom>
+        </p:spPr>
+        <p:txBody>
+          <a:bodyPr lIns="0" tIns="0" rIns="0" bIns="0">
+            <a:normAutofit/>
           </a:bodyPr>
-          <a:lstStyle xmlns:a="http://schemas.openxmlformats.org/drawingml/2006/main"/>
-          <a:p xmlns:a="http://schemas.openxmlformats.org/drawingml/2006/main">
+          <a:lstStyle/>
+          <a:p>
             <a:pPr algn="l">
               <a:lnSpc>
                 <a:spcPct val="105000"/>
@@ -8686,7 +8579,7 @@
               <a:t>Distributed employers</a:t>
             </a:r>
           </a:p>
-          <a:p xmlns:a="http://schemas.openxmlformats.org/drawingml/2006/main">
+          <a:p>
             <a:pPr algn="l">
               <a:lnSpc>
                 <a:spcPct val="105000"/>
@@ -8721,29 +8614,29 @@
       <p:sp>
         <p:nvSpPr>
           <p:cNvPr id="7" name="veilpay-accent">
-            <a:extLst xmlns:a="http://schemas.openxmlformats.org/drawingml/2006/main">
+            <a:extLst>
               <a:ext uri="{FF2B5EF4-FFF2-40B4-BE49-F238E27FC236}">
                 <a16:creationId xmlns:a16="http://schemas.microsoft.com/office/drawing/2014/main" id="{29CC9341-B55D-430C-B822-3E11EAB0D293}"/>
               </a:ext>
             </a:extLst>
           </p:cNvPr>
           <p:cNvSpPr>
-            <a:spLocks xmlns:a="http://schemas.openxmlformats.org/drawingml/2006/main" noGrp="1"/>
-          </p:cNvSpPr>
-          <p:nvPr/>
-        </p:nvSpPr>
-        <p:spPr>
-          <a:xfrm xmlns:a="http://schemas.openxmlformats.org/drawingml/2006/main">
+            <a:spLocks noGrp="1"/>
+          </p:cNvSpPr>
+          <p:nvPr/>
+        </p:nvSpPr>
+        <p:spPr>
+          <a:xfrm>
             <a:off x="0" y="0"/>
             <a:ext cx="85725" cy="6858000"/>
           </a:xfrm>
-          <a:prstGeom xmlns:a="http://schemas.openxmlformats.org/drawingml/2006/main" prst="rect">
-            <a:avLst/>
-          </a:prstGeom>
-          <a:solidFill xmlns:a="http://schemas.openxmlformats.org/drawingml/2006/main">
+          <a:prstGeom prst="rect">
+            <a:avLst/>
+          </a:prstGeom>
+          <a:solidFill>
             <a:srgbClr val="6DCBF4"/>
           </a:solidFill>
-          <a:ln xmlns:a="http://schemas.openxmlformats.org/drawingml/2006/main" w="0">
+          <a:ln w="0">
             <a:noFill/>
             <a:prstDash val="solid"/>
           </a:ln>
@@ -8756,11 +8649,14 @@
       </p:ext>
     </p:extLst>
   </p:cSld>
+  <p:clrMapOvr>
+    <a:masterClrMapping/>
+  </p:clrMapOvr>
 </p:sld>
 </file>
 
 <file path=ppt/slides/slide8.xml><?xml version="1.0" encoding="utf-8"?>
-<p:sld xmlns:p="http://schemas.openxmlformats.org/presentationml/2006/main">
+<p:sld xmlns:a="http://schemas.openxmlformats.org/drawingml/2006/main" xmlns:r="http://schemas.openxmlformats.org/officeDocument/2006/relationships" xmlns:p="http://schemas.openxmlformats.org/presentationml/2006/main">
   <p:cSld>
     <p:spTree>
       <p:nvGrpSpPr>
@@ -8769,37 +8665,42 @@
         <p:nvPr/>
       </p:nvGrpSpPr>
       <p:grpSpPr>
-        <a:xfrm xmlns:a="http://schemas.openxmlformats.org/drawingml/2006/main"/>
+        <a:xfrm>
+          <a:off x="0" y="0"/>
+          <a:ext cx="0" cy="0"/>
+          <a:chOff x="0" y="0"/>
+          <a:chExt cx="0" cy="0"/>
+        </a:xfrm>
       </p:grpSpPr>
       <p:sp>
         <p:nvSpPr>
-          <p:cNvPr id="1" name="Google-Shape-532-p58-2">
-            <a:extLst xmlns:a="http://schemas.openxmlformats.org/drawingml/2006/main">
+          <p:cNvPr id="7" name="Google-Shape-532-p58-2">
+            <a:extLst>
               <a:ext uri="{FF2B5EF4-FFF2-40B4-BE49-F238E27FC236}">
                 <a16:creationId xmlns:a16="http://schemas.microsoft.com/office/drawing/2014/main" id="{07156D6E-36F7-4616-ACEB-B2D643CC4DD4}"/>
               </a:ext>
             </a:extLst>
           </p:cNvPr>
           <p:cNvSpPr>
-            <a:spLocks xmlns:a="http://schemas.openxmlformats.org/drawingml/2006/main" noGrp="1"/>
-          </p:cNvSpPr>
-          <p:nvPr/>
-        </p:nvSpPr>
-        <p:spPr>
-          <a:xfrm xmlns:a="http://schemas.openxmlformats.org/drawingml/2006/main">
+            <a:spLocks noGrp="1"/>
+          </p:cNvSpPr>
+          <p:nvPr/>
+        </p:nvSpPr>
+        <p:spPr>
+          <a:xfrm>
             <a:off x="11279315" y="6279261"/>
             <a:ext cx="518922" cy="241268"/>
           </a:xfrm>
-          <a:prstGeom xmlns:a="http://schemas.openxmlformats.org/drawingml/2006/main" prst="rect">
-            <a:avLst/>
-          </a:prstGeom>
-        </p:spPr>
-        <p:txBody>
-          <a:bodyPr xmlns:a="http://schemas.openxmlformats.org/drawingml/2006/main" wrap="square" lIns="0" tIns="0" rIns="0" bIns="0" anchor="b">
+          <a:prstGeom prst="rect">
+            <a:avLst/>
+          </a:prstGeom>
+        </p:spPr>
+        <p:txBody>
+          <a:bodyPr wrap="square" lIns="0" tIns="0" rIns="0" bIns="0" anchor="b">
             <a:noAutofit/>
           </a:bodyPr>
-          <a:lstStyle xmlns:a="http://schemas.openxmlformats.org/drawingml/2006/main"/>
-          <a:p xmlns:a="http://schemas.openxmlformats.org/drawingml/2006/main">
+          <a:lstStyle/>
+          <a:p>
             <a:pPr algn="r">
               <a:defRPr sz="1000">
                 <a:solidFill>
@@ -8819,32 +8720,32 @@
       <p:sp>
         <p:nvSpPr>
           <p:cNvPr id="2" name="Google-Shape-533-p58-3">
-            <a:extLst xmlns:a="http://schemas.openxmlformats.org/drawingml/2006/main">
+            <a:extLst>
               <a:ext uri="{FF2B5EF4-FFF2-40B4-BE49-F238E27FC236}">
                 <a16:creationId xmlns:a16="http://schemas.microsoft.com/office/drawing/2014/main" id="{11669E10-B8B6-4E7B-8D3F-F33A42F48155}"/>
               </a:ext>
             </a:extLst>
           </p:cNvPr>
           <p:cNvSpPr>
-            <a:spLocks xmlns:a="http://schemas.openxmlformats.org/drawingml/2006/main" noGrp="1"/>
-          </p:cNvSpPr>
-          <p:nvPr/>
-        </p:nvSpPr>
-        <p:spPr>
-          <a:xfrm xmlns:a="http://schemas.openxmlformats.org/drawingml/2006/main">
+            <a:spLocks noGrp="1"/>
+          </p:cNvSpPr>
+          <p:nvPr/>
+        </p:nvSpPr>
+        <p:spPr>
+          <a:xfrm>
             <a:off x="393668" y="344043"/>
             <a:ext cx="11404568" cy="1047464"/>
           </a:xfrm>
-          <a:prstGeom xmlns:a="http://schemas.openxmlformats.org/drawingml/2006/main" prst="rect">
-            <a:avLst/>
-          </a:prstGeom>
-        </p:spPr>
-        <p:txBody>
-          <a:bodyPr xmlns:a="http://schemas.openxmlformats.org/drawingml/2006/main" wrap="square" lIns="0" tIns="0" rIns="0" bIns="0" anchor="t">
+          <a:prstGeom prst="rect">
+            <a:avLst/>
+          </a:prstGeom>
+        </p:spPr>
+        <p:txBody>
+          <a:bodyPr wrap="square" lIns="0" tIns="0" rIns="0" bIns="0" anchor="t">
             <a:noAutofit/>
           </a:bodyPr>
-          <a:lstStyle xmlns:a="http://schemas.openxmlformats.org/drawingml/2006/main"/>
-          <a:p xmlns:a="http://schemas.openxmlformats.org/drawingml/2006/main">
+          <a:lstStyle/>
+          <a:p>
             <a:pPr algn="l">
               <a:lnSpc>
                 <a:spcPct val="105000"/>
@@ -8879,32 +8780,32 @@
       <p:sp>
         <p:nvSpPr>
           <p:cNvPr id="3" name="Google-Shape-534-p58-4">
-            <a:extLst xmlns:a="http://schemas.openxmlformats.org/drawingml/2006/main">
+            <a:extLst>
               <a:ext uri="{FF2B5EF4-FFF2-40B4-BE49-F238E27FC236}">
                 <a16:creationId xmlns:a16="http://schemas.microsoft.com/office/drawing/2014/main" id="{1C6847A5-C467-40FE-906A-034AD3E34AAB}"/>
               </a:ext>
             </a:extLst>
           </p:cNvPr>
           <p:cNvSpPr>
-            <a:spLocks xmlns:a="http://schemas.openxmlformats.org/drawingml/2006/main" noGrp="1"/>
-          </p:cNvSpPr>
-          <p:nvPr/>
-        </p:nvSpPr>
-        <p:spPr>
-          <a:xfrm xmlns:a="http://schemas.openxmlformats.org/drawingml/2006/main">
+            <a:spLocks noGrp="1"/>
+          </p:cNvSpPr>
+          <p:nvPr/>
+        </p:nvSpPr>
+        <p:spPr>
+          <a:xfrm>
             <a:off x="393668" y="3365468"/>
             <a:ext cx="3568732" cy="2628900"/>
           </a:xfrm>
-          <a:prstGeom xmlns:a="http://schemas.openxmlformats.org/drawingml/2006/main" prst="rect">
-            <a:avLst/>
-          </a:prstGeom>
-        </p:spPr>
-        <p:txBody>
-          <a:bodyPr xmlns:a="http://schemas.openxmlformats.org/drawingml/2006/main" wrap="square" lIns="0" tIns="0" rIns="0" bIns="0" anchor="t">
+          <a:prstGeom prst="rect">
+            <a:avLst/>
+          </a:prstGeom>
+        </p:spPr>
+        <p:txBody>
+          <a:bodyPr wrap="square" lIns="0" tIns="0" rIns="0" bIns="0" anchor="t">
             <a:noAutofit/>
           </a:bodyPr>
-          <a:lstStyle xmlns:a="http://schemas.openxmlformats.org/drawingml/2006/main"/>
-          <a:p xmlns:a="http://schemas.openxmlformats.org/drawingml/2006/main">
+          <a:lstStyle/>
+          <a:p>
             <a:pPr algn="l">
               <a:lnSpc>
                 <a:spcPct val="105000"/>
@@ -8934,7 +8835,7 @@
               <a:t>Traditional payroll</a:t>
             </a:r>
           </a:p>
-          <a:p xmlns:a="http://schemas.openxmlformats.org/drawingml/2006/main">
+          <a:p>
             <a:pPr algn="l">
               <a:lnSpc>
                 <a:spcPct val="105000"/>
@@ -8969,32 +8870,32 @@
       <p:sp>
         <p:nvSpPr>
           <p:cNvPr id="4" name="Content-Placeholder-1-5">
-            <a:extLst xmlns:a="http://schemas.openxmlformats.org/drawingml/2006/main">
+            <a:extLst>
               <a:ext uri="{FF2B5EF4-FFF2-40B4-BE49-F238E27FC236}">
                 <a16:creationId xmlns:a16="http://schemas.microsoft.com/office/drawing/2014/main" id="{0CD48501-3D5B-439A-A62E-300E89DB1F92}"/>
               </a:ext>
             </a:extLst>
           </p:cNvPr>
           <p:cNvSpPr>
-            <a:spLocks xmlns:a="http://schemas.openxmlformats.org/drawingml/2006/main" noGrp="1"/>
-          </p:cNvSpPr>
-          <p:nvPr/>
-        </p:nvSpPr>
-        <p:spPr>
-          <a:xfrm xmlns:a="http://schemas.openxmlformats.org/drawingml/2006/main">
+            <a:spLocks noGrp="1"/>
+          </p:cNvSpPr>
+          <p:nvPr/>
+        </p:nvSpPr>
+        <p:spPr>
+          <a:xfrm>
             <a:off x="8229600" y="3365468"/>
             <a:ext cx="3568732" cy="2628900"/>
           </a:xfrm>
-          <a:prstGeom xmlns:a="http://schemas.openxmlformats.org/drawingml/2006/main" prst="rect">
-            <a:avLst/>
-          </a:prstGeom>
-        </p:spPr>
-        <p:txBody>
-          <a:bodyPr xmlns:a="http://schemas.openxmlformats.org/drawingml/2006/main" lIns="91440" tIns="45720" rIns="91440" bIns="45720">
-            <a:normAutofit fontScale="100000"/>
+          <a:prstGeom prst="rect">
+            <a:avLst/>
+          </a:prstGeom>
+        </p:spPr>
+        <p:txBody>
+          <a:bodyPr lIns="91440" tIns="45720" rIns="91440" bIns="45720">
+            <a:normAutofit/>
           </a:bodyPr>
-          <a:lstStyle xmlns:a="http://schemas.openxmlformats.org/drawingml/2006/main"/>
-          <a:p xmlns:a="http://schemas.openxmlformats.org/drawingml/2006/main">
+          <a:lstStyle/>
+          <a:p>
             <a:pPr algn="l">
               <a:lnSpc>
                 <a:spcPct val="105000"/>
@@ -9024,7 +8925,7 @@
               <a:t>VeilPay</a:t>
             </a:r>
           </a:p>
-          <a:p xmlns:a="http://schemas.openxmlformats.org/drawingml/2006/main">
+          <a:p>
             <a:pPr algn="l">
               <a:lnSpc>
                 <a:spcPct val="105000"/>
@@ -9059,32 +8960,32 @@
       <p:sp>
         <p:nvSpPr>
           <p:cNvPr id="5" name="Content-Placeholder-2-6">
-            <a:extLst xmlns:a="http://schemas.openxmlformats.org/drawingml/2006/main">
+            <a:extLst>
               <a:ext uri="{FF2B5EF4-FFF2-40B4-BE49-F238E27FC236}">
                 <a16:creationId xmlns:a16="http://schemas.microsoft.com/office/drawing/2014/main" id="{F4F8B705-F31A-4452-B915-6A9E11C8C81E}"/>
               </a:ext>
             </a:extLst>
           </p:cNvPr>
           <p:cNvSpPr>
-            <a:spLocks xmlns:a="http://schemas.openxmlformats.org/drawingml/2006/main" noGrp="1"/>
-          </p:cNvSpPr>
-          <p:nvPr/>
-        </p:nvSpPr>
-        <p:spPr>
-          <a:xfrm xmlns:a="http://schemas.openxmlformats.org/drawingml/2006/main">
+            <a:spLocks noGrp="1"/>
+          </p:cNvSpPr>
+          <p:nvPr/>
+        </p:nvSpPr>
+        <p:spPr>
+          <a:xfrm>
             <a:off x="4311682" y="3365468"/>
             <a:ext cx="3568732" cy="2628900"/>
           </a:xfrm>
-          <a:prstGeom xmlns:a="http://schemas.openxmlformats.org/drawingml/2006/main" prst="rect">
-            <a:avLst/>
-          </a:prstGeom>
-        </p:spPr>
-        <p:txBody>
-          <a:bodyPr xmlns:a="http://schemas.openxmlformats.org/drawingml/2006/main" lIns="91440" tIns="45720" rIns="91440" bIns="45720">
-            <a:normAutofit fontScale="100000"/>
+          <a:prstGeom prst="rect">
+            <a:avLst/>
+          </a:prstGeom>
+        </p:spPr>
+        <p:txBody>
+          <a:bodyPr lIns="91440" tIns="45720" rIns="91440" bIns="45720">
+            <a:normAutofit/>
           </a:bodyPr>
-          <a:lstStyle xmlns:a="http://schemas.openxmlformats.org/drawingml/2006/main"/>
-          <a:p xmlns:a="http://schemas.openxmlformats.org/drawingml/2006/main">
+          <a:lstStyle/>
+          <a:p>
             <a:pPr algn="l">
               <a:lnSpc>
                 <a:spcPct val="105000"/>
@@ -9114,7 +9015,7 @@
               <a:t>Privacy transfer tools</a:t>
             </a:r>
           </a:p>
-          <a:p xmlns:a="http://schemas.openxmlformats.org/drawingml/2006/main">
+          <a:p>
             <a:pPr algn="l">
               <a:lnSpc>
                 <a:spcPct val="105000"/>
@@ -9149,29 +9050,29 @@
       <p:sp>
         <p:nvSpPr>
           <p:cNvPr id="6" name="veilpay-accent">
-            <a:extLst xmlns:a="http://schemas.openxmlformats.org/drawingml/2006/main">
+            <a:extLst>
               <a:ext uri="{FF2B5EF4-FFF2-40B4-BE49-F238E27FC236}">
                 <a16:creationId xmlns:a16="http://schemas.microsoft.com/office/drawing/2014/main" id="{B1801F26-3626-4540-878A-4D1FB5640160}"/>
               </a:ext>
             </a:extLst>
           </p:cNvPr>
           <p:cNvSpPr>
-            <a:spLocks xmlns:a="http://schemas.openxmlformats.org/drawingml/2006/main" noGrp="1"/>
-          </p:cNvSpPr>
-          <p:nvPr/>
-        </p:nvSpPr>
-        <p:spPr>
-          <a:xfrm xmlns:a="http://schemas.openxmlformats.org/drawingml/2006/main">
+            <a:spLocks noGrp="1"/>
+          </p:cNvSpPr>
+          <p:nvPr/>
+        </p:nvSpPr>
+        <p:spPr>
+          <a:xfrm>
             <a:off x="0" y="0"/>
             <a:ext cx="85725" cy="6858000"/>
           </a:xfrm>
-          <a:prstGeom xmlns:a="http://schemas.openxmlformats.org/drawingml/2006/main" prst="rect">
-            <a:avLst/>
-          </a:prstGeom>
-          <a:solidFill xmlns:a="http://schemas.openxmlformats.org/drawingml/2006/main">
+          <a:prstGeom prst="rect">
+            <a:avLst/>
+          </a:prstGeom>
+          <a:solidFill>
             <a:srgbClr val="6DCBF4"/>
           </a:solidFill>
-          <a:ln xmlns:a="http://schemas.openxmlformats.org/drawingml/2006/main" w="0">
+          <a:ln w="0">
             <a:noFill/>
             <a:prstDash val="solid"/>
           </a:ln>
@@ -9184,11 +9085,14 @@
       </p:ext>
     </p:extLst>
   </p:cSld>
+  <p:clrMapOvr>
+    <a:masterClrMapping/>
+  </p:clrMapOvr>
 </p:sld>
 </file>
 
 <file path=ppt/slides/slide9.xml><?xml version="1.0" encoding="utf-8"?>
-<p:sld xmlns:p="http://schemas.openxmlformats.org/presentationml/2006/main">
+<p:sld xmlns:a="http://schemas.openxmlformats.org/drawingml/2006/main" xmlns:r="http://schemas.openxmlformats.org/officeDocument/2006/relationships" xmlns:p="http://schemas.openxmlformats.org/presentationml/2006/main">
   <p:cSld>
     <p:spTree>
       <p:nvGrpSpPr>
@@ -9197,37 +9101,42 @@
         <p:nvPr/>
       </p:nvGrpSpPr>
       <p:grpSpPr>
-        <a:xfrm xmlns:a="http://schemas.openxmlformats.org/drawingml/2006/main"/>
+        <a:xfrm>
+          <a:off x="0" y="0"/>
+          <a:ext cx="0" cy="0"/>
+          <a:chOff x="0" y="0"/>
+          <a:chExt cx="0" cy="0"/>
+        </a:xfrm>
       </p:grpSpPr>
       <p:sp>
         <p:nvSpPr>
-          <p:cNvPr id="1" name="Google-Shape-532-p58-2">
-            <a:extLst xmlns:a="http://schemas.openxmlformats.org/drawingml/2006/main">
+          <p:cNvPr id="8" name="Google-Shape-532-p58-2">
+            <a:extLst>
               <a:ext uri="{FF2B5EF4-FFF2-40B4-BE49-F238E27FC236}">
                 <a16:creationId xmlns:a16="http://schemas.microsoft.com/office/drawing/2014/main" id="{06EA6427-6FFC-436C-BFAA-97B4CBF643E4}"/>
               </a:ext>
             </a:extLst>
           </p:cNvPr>
           <p:cNvSpPr>
-            <a:spLocks xmlns:a="http://schemas.openxmlformats.org/drawingml/2006/main" noGrp="1"/>
-          </p:cNvSpPr>
-          <p:nvPr/>
-        </p:nvSpPr>
-        <p:spPr>
-          <a:xfrm xmlns:a="http://schemas.openxmlformats.org/drawingml/2006/main">
+            <a:spLocks noGrp="1"/>
+          </p:cNvSpPr>
+          <p:nvPr/>
+        </p:nvSpPr>
+        <p:spPr>
+          <a:xfrm>
             <a:off x="11279315" y="6279261"/>
             <a:ext cx="518922" cy="241268"/>
           </a:xfrm>
-          <a:prstGeom xmlns:a="http://schemas.openxmlformats.org/drawingml/2006/main" prst="rect">
-            <a:avLst/>
-          </a:prstGeom>
-        </p:spPr>
-        <p:txBody>
-          <a:bodyPr xmlns:a="http://schemas.openxmlformats.org/drawingml/2006/main" wrap="square" lIns="0" tIns="0" rIns="0" bIns="0" anchor="b">
+          <a:prstGeom prst="rect">
+            <a:avLst/>
+          </a:prstGeom>
+        </p:spPr>
+        <p:txBody>
+          <a:bodyPr wrap="square" lIns="0" tIns="0" rIns="0" bIns="0" anchor="b">
             <a:noAutofit/>
           </a:bodyPr>
-          <a:lstStyle xmlns:a="http://schemas.openxmlformats.org/drawingml/2006/main"/>
-          <a:p xmlns:a="http://schemas.openxmlformats.org/drawingml/2006/main">
+          <a:lstStyle/>
+          <a:p>
             <a:pPr algn="r">
               <a:defRPr sz="1000">
                 <a:solidFill>
@@ -9247,32 +9156,32 @@
       <p:sp>
         <p:nvSpPr>
           <p:cNvPr id="2" name="Google-Shape-533-p58-3">
-            <a:extLst xmlns:a="http://schemas.openxmlformats.org/drawingml/2006/main">
+            <a:extLst>
               <a:ext uri="{FF2B5EF4-FFF2-40B4-BE49-F238E27FC236}">
                 <a16:creationId xmlns:a16="http://schemas.microsoft.com/office/drawing/2014/main" id="{56DB537E-C5B6-47A8-86E5-38A872B52ECB}"/>
               </a:ext>
             </a:extLst>
           </p:cNvPr>
           <p:cNvSpPr>
-            <a:spLocks xmlns:a="http://schemas.openxmlformats.org/drawingml/2006/main" noGrp="1"/>
-          </p:cNvSpPr>
-          <p:nvPr/>
-        </p:nvSpPr>
-        <p:spPr>
-          <a:xfrm xmlns:a="http://schemas.openxmlformats.org/drawingml/2006/main">
+            <a:spLocks noGrp="1"/>
+          </p:cNvSpPr>
+          <p:nvPr/>
+        </p:nvSpPr>
+        <p:spPr>
+          <a:xfrm>
             <a:off x="393668" y="344043"/>
             <a:ext cx="11404568" cy="1047464"/>
           </a:xfrm>
-          <a:prstGeom xmlns:a="http://schemas.openxmlformats.org/drawingml/2006/main" prst="rect">
-            <a:avLst/>
-          </a:prstGeom>
-        </p:spPr>
-        <p:txBody>
-          <a:bodyPr xmlns:a="http://schemas.openxmlformats.org/drawingml/2006/main" wrap="square" lIns="0" tIns="0" rIns="0" bIns="0" anchor="t">
+          <a:prstGeom prst="rect">
+            <a:avLst/>
+          </a:prstGeom>
+        </p:spPr>
+        <p:txBody>
+          <a:bodyPr wrap="square" lIns="0" tIns="0" rIns="0" bIns="0" anchor="t">
             <a:noAutofit/>
           </a:bodyPr>
-          <a:lstStyle xmlns:a="http://schemas.openxmlformats.org/drawingml/2006/main"/>
-          <a:p xmlns:a="http://schemas.openxmlformats.org/drawingml/2006/main">
+          <a:lstStyle/>
+          <a:p>
             <a:pPr algn="l">
               <a:lnSpc>
                 <a:spcPct val="105000"/>
@@ -9307,32 +9216,32 @@
       <p:sp>
         <p:nvSpPr>
           <p:cNvPr id="3" name="Google-Shape-534-p58-4">
-            <a:extLst xmlns:a="http://schemas.openxmlformats.org/drawingml/2006/main">
+            <a:extLst>
               <a:ext uri="{FF2B5EF4-FFF2-40B4-BE49-F238E27FC236}">
                 <a16:creationId xmlns:a16="http://schemas.microsoft.com/office/drawing/2014/main" id="{B7B5C16D-13D8-469F-BED8-B1CBF020194F}"/>
               </a:ext>
             </a:extLst>
           </p:cNvPr>
           <p:cNvSpPr>
-            <a:spLocks xmlns:a="http://schemas.openxmlformats.org/drawingml/2006/main" noGrp="1"/>
-          </p:cNvSpPr>
-          <p:nvPr/>
-        </p:nvSpPr>
-        <p:spPr>
-          <a:xfrm xmlns:a="http://schemas.openxmlformats.org/drawingml/2006/main">
+            <a:spLocks noGrp="1"/>
+          </p:cNvSpPr>
+          <p:nvPr/>
+        </p:nvSpPr>
+        <p:spPr>
+          <a:xfrm>
             <a:off x="393668" y="3365468"/>
             <a:ext cx="3568732" cy="2628900"/>
           </a:xfrm>
-          <a:prstGeom xmlns:a="http://schemas.openxmlformats.org/drawingml/2006/main" prst="rect">
-            <a:avLst/>
-          </a:prstGeom>
-        </p:spPr>
-        <p:txBody>
-          <a:bodyPr xmlns:a="http://schemas.openxmlformats.org/drawingml/2006/main" wrap="square" lIns="0" tIns="0" rIns="0" bIns="0" anchor="t">
+          <a:prstGeom prst="rect">
+            <a:avLst/>
+          </a:prstGeom>
+        </p:spPr>
+        <p:txBody>
+          <a:bodyPr wrap="square" lIns="0" tIns="0" rIns="0" bIns="0" anchor="t">
             <a:noAutofit/>
           </a:bodyPr>
-          <a:lstStyle xmlns:a="http://schemas.openxmlformats.org/drawingml/2006/main"/>
-          <a:p xmlns:a="http://schemas.openxmlformats.org/drawingml/2006/main">
+          <a:lstStyle/>
+          <a:p>
             <a:pPr algn="l">
               <a:lnSpc>
                 <a:spcPct val="105000"/>
@@ -9362,7 +9271,7 @@
               <a:t>Platform subscription</a:t>
             </a:r>
           </a:p>
-          <a:p xmlns:a="http://schemas.openxmlformats.org/drawingml/2006/main">
+          <a:p>
             <a:pPr algn="l">
               <a:lnSpc>
                 <a:spcPct val="105000"/>
@@ -9397,32 +9306,32 @@
       <p:sp>
         <p:nvSpPr>
           <p:cNvPr id="4" name="Content-Placeholder-1-5">
-            <a:extLst xmlns:a="http://schemas.openxmlformats.org/drawingml/2006/main">
+            <a:extLst>
               <a:ext uri="{FF2B5EF4-FFF2-40B4-BE49-F238E27FC236}">
                 <a16:creationId xmlns:a16="http://schemas.microsoft.com/office/drawing/2014/main" id="{5EF1C6CC-105D-499B-8026-05CBB442899C}"/>
               </a:ext>
             </a:extLst>
           </p:cNvPr>
           <p:cNvSpPr>
-            <a:spLocks xmlns:a="http://schemas.openxmlformats.org/drawingml/2006/main" noGrp="1"/>
-          </p:cNvSpPr>
-          <p:nvPr/>
-        </p:nvSpPr>
-        <p:spPr>
-          <a:xfrm xmlns:a="http://schemas.openxmlformats.org/drawingml/2006/main">
+            <a:spLocks noGrp="1"/>
+          </p:cNvSpPr>
+          <p:nvPr/>
+        </p:nvSpPr>
+        <p:spPr>
+          <a:xfrm>
             <a:off x="8229600" y="3365468"/>
             <a:ext cx="3568732" cy="2628900"/>
           </a:xfrm>
-          <a:prstGeom xmlns:a="http://schemas.openxmlformats.org/drawingml/2006/main" prst="rect">
-            <a:avLst/>
-          </a:prstGeom>
-        </p:spPr>
-        <p:txBody>
-          <a:bodyPr xmlns:a="http://schemas.openxmlformats.org/drawingml/2006/main" lIns="91440" tIns="45720" rIns="91440" bIns="45720">
-            <a:normAutofit fontScale="100000"/>
+          <a:prstGeom prst="rect">
+            <a:avLst/>
+          </a:prstGeom>
+        </p:spPr>
+        <p:txBody>
+          <a:bodyPr lIns="91440" tIns="45720" rIns="91440" bIns="45720">
+            <a:normAutofit/>
           </a:bodyPr>
-          <a:lstStyle xmlns:a="http://schemas.openxmlformats.org/drawingml/2006/main"/>
-          <a:p xmlns:a="http://schemas.openxmlformats.org/drawingml/2006/main">
+          <a:lstStyle/>
+          <a:p>
             <a:pPr algn="l">
               <a:lnSpc>
                 <a:spcPct val="105000"/>
@@ -9452,7 +9361,7 @@
               <a:t>Enterprise services</a:t>
             </a:r>
           </a:p>
-          <a:p xmlns:a="http://schemas.openxmlformats.org/drawingml/2006/main">
+          <a:p>
             <a:pPr algn="l">
               <a:lnSpc>
                 <a:spcPct val="105000"/>
@@ -9487,32 +9396,32 @@
       <p:sp>
         <p:nvSpPr>
           <p:cNvPr id="5" name="Content-Placeholder-2-6">
-            <a:extLst xmlns:a="http://schemas.openxmlformats.org/drawingml/2006/main">
+            <a:extLst>
               <a:ext uri="{FF2B5EF4-FFF2-40B4-BE49-F238E27FC236}">
                 <a16:creationId xmlns:a16="http://schemas.microsoft.com/office/drawing/2014/main" id="{16C7AAB3-AAC6-49AA-AAEC-751DB5044925}"/>
               </a:ext>
             </a:extLst>
           </p:cNvPr>
           <p:cNvSpPr>
-            <a:spLocks xmlns:a="http://schemas.openxmlformats.org/drawingml/2006/main" noGrp="1"/>
-          </p:cNvSpPr>
-          <p:nvPr/>
-        </p:nvSpPr>
-        <p:spPr>
-          <a:xfrm xmlns:a="http://schemas.openxmlformats.org/drawingml/2006/main">
+            <a:spLocks noGrp="1"/>
+          </p:cNvSpPr>
+          <p:nvPr/>
+        </p:nvSpPr>
+        <p:spPr>
+          <a:xfrm>
             <a:off x="4311682" y="3365468"/>
             <a:ext cx="3568732" cy="2628900"/>
           </a:xfrm>
-          <a:prstGeom xmlns:a="http://schemas.openxmlformats.org/drawingml/2006/main" prst="rect">
-            <a:avLst/>
-          </a:prstGeom>
-        </p:spPr>
-        <p:txBody>
-          <a:bodyPr xmlns:a="http://schemas.openxmlformats.org/drawingml/2006/main" lIns="91440" tIns="45720" rIns="91440" bIns="45720">
-            <a:normAutofit fontScale="100000"/>
+          <a:prstGeom prst="rect">
+            <a:avLst/>
+          </a:prstGeom>
+        </p:spPr>
+        <p:txBody>
+          <a:bodyPr lIns="91440" tIns="45720" rIns="91440" bIns="45720">
+            <a:normAutofit/>
           </a:bodyPr>
-          <a:lstStyle xmlns:a="http://schemas.openxmlformats.org/drawingml/2006/main"/>
-          <a:p xmlns:a="http://schemas.openxmlformats.org/drawingml/2006/main">
+          <a:lstStyle/>
+          <a:p>
             <a:pPr algn="l">
               <a:lnSpc>
                 <a:spcPct val="105000"/>
@@ -9542,7 +9451,7 @@
               <a:t>Usage fee</a:t>
             </a:r>
           </a:p>
-          <a:p xmlns:a="http://schemas.openxmlformats.org/drawingml/2006/main">
+          <a:p>
             <a:pPr algn="l">
               <a:lnSpc>
                 <a:spcPct val="105000"/>
@@ -9577,29 +9486,29 @@
       <p:sp>
         <p:nvSpPr>
           <p:cNvPr id="6" name="veilpay-accent">
-            <a:extLst xmlns:a="http://schemas.openxmlformats.org/drawingml/2006/main">
+            <a:extLst>
               <a:ext uri="{FF2B5EF4-FFF2-40B4-BE49-F238E27FC236}">
                 <a16:creationId xmlns:a16="http://schemas.microsoft.com/office/drawing/2014/main" id="{5A4094FC-37AD-4FAA-88EC-CDC7509D96C5}"/>
               </a:ext>
             </a:extLst>
           </p:cNvPr>
           <p:cNvSpPr>
-            <a:spLocks xmlns:a="http://schemas.openxmlformats.org/drawingml/2006/main" noGrp="1"/>
-          </p:cNvSpPr>
-          <p:nvPr/>
-        </p:nvSpPr>
-        <p:spPr>
-          <a:xfrm xmlns:a="http://schemas.openxmlformats.org/drawingml/2006/main">
+            <a:spLocks noGrp="1"/>
+          </p:cNvSpPr>
+          <p:nvPr/>
+        </p:nvSpPr>
+        <p:spPr>
+          <a:xfrm>
             <a:off x="0" y="0"/>
             <a:ext cx="85725" cy="6858000"/>
           </a:xfrm>
-          <a:prstGeom xmlns:a="http://schemas.openxmlformats.org/drawingml/2006/main" prst="rect">
-            <a:avLst/>
-          </a:prstGeom>
-          <a:solidFill xmlns:a="http://schemas.openxmlformats.org/drawingml/2006/main">
+          <a:prstGeom prst="rect">
+            <a:avLst/>
+          </a:prstGeom>
+          <a:solidFill>
             <a:srgbClr val="6DCBF4"/>
           </a:solidFill>
-          <a:ln xmlns:a="http://schemas.openxmlformats.org/drawingml/2006/main" w="0">
+          <a:ln w="0">
             <a:noFill/>
             <a:prstDash val="solid"/>
           </a:ln>
@@ -9608,31 +9517,31 @@
       <p:sp>
         <p:nvSpPr>
           <p:cNvPr id="7" name="status-pill">
-            <a:extLst xmlns:a="http://schemas.openxmlformats.org/drawingml/2006/main">
+            <a:extLst>
               <a:ext uri="{FF2B5EF4-FFF2-40B4-BE49-F238E27FC236}">
                 <a16:creationId xmlns:a16="http://schemas.microsoft.com/office/drawing/2014/main" id="{2E59AC86-4EAC-4C46-A0C2-9BD222F89861}"/>
               </a:ext>
             </a:extLst>
           </p:cNvPr>
           <p:cNvSpPr>
-            <a:spLocks xmlns:a="http://schemas.openxmlformats.org/drawingml/2006/main" noGrp="1"/>
-          </p:cNvSpPr>
-          <p:nvPr/>
-        </p:nvSpPr>
-        <p:spPr>
-          <a:xfrm xmlns:a="http://schemas.openxmlformats.org/drawingml/2006/main">
+            <a:spLocks noGrp="1"/>
+          </p:cNvSpPr>
+          <p:nvPr/>
+        </p:nvSpPr>
+        <p:spPr>
+          <a:xfrm>
             <a:off x="9525000" y="1381125"/>
             <a:ext cx="1952625" cy="381000"/>
           </a:xfrm>
-          <a:prstGeom xmlns:a="http://schemas.openxmlformats.org/drawingml/2006/main" prst="roundRect">
+          <a:prstGeom prst="roundRect">
             <a:avLst>
               <a:gd name="adj" fmla="val 30000"/>
             </a:avLst>
           </a:prstGeom>
-          <a:solidFill xmlns:a="http://schemas.openxmlformats.org/drawingml/2006/main">
+          <a:solidFill>
             <a:srgbClr val="D0EDFA"/>
           </a:solidFill>
-          <a:ln xmlns:a="http://schemas.openxmlformats.org/drawingml/2006/main" w="9525">
+          <a:ln w="9525">
             <a:solidFill>
               <a:srgbClr val="6DCBF4"/>
             </a:solidFill>
@@ -9640,9 +9549,9 @@
           </a:ln>
         </p:spPr>
         <p:txBody>
-          <a:bodyPr xmlns:a="http://schemas.openxmlformats.org/drawingml/2006/main" anchor="ctr"/>
-          <a:lstStyle xmlns:a="http://schemas.openxmlformats.org/drawingml/2006/main"/>
-          <a:p xmlns:a="http://schemas.openxmlformats.org/drawingml/2006/main">
+          <a:bodyPr anchor="ctr"/>
+          <a:lstStyle/>
+          <a:p>
             <a:pPr algn="ctr">
               <a:defRPr sz="1125" b="1">
                 <a:solidFill>
@@ -9668,6 +9577,9 @@
       </p:ext>
     </p:extLst>
   </p:cSld>
+  <p:clrMapOvr>
+    <a:masterClrMapping/>
+  </p:clrMapOvr>
 </p:sld>
 </file>
 
@@ -9913,5 +9825,254 @@
       </a:bgFillStyleLst>
     </a:fmtScheme>
   </a:themeElements>
+  <a:objectDefaults/>
+  <a:extraClrSchemeLst/>
+</a:theme>
+</file>
+
+<file path=ppt/theme/theme2.xml><?xml version="1.0" encoding="utf-8"?>
+<a:theme xmlns:a="http://schemas.openxmlformats.org/drawingml/2006/main" name="ChatGPT">
+  <a:themeElements>
+    <a:clrScheme name="ChatGPT">
+      <a:dk1>
+        <a:srgbClr val="000000"/>
+      </a:dk1>
+      <a:lt1>
+        <a:srgbClr val="FFFFFF"/>
+      </a:lt1>
+      <a:dk2>
+        <a:srgbClr val="0E2841"/>
+      </a:dk2>
+      <a:lt2>
+        <a:srgbClr val="E8E8E8"/>
+      </a:lt2>
+      <a:accent1>
+        <a:srgbClr val="156082"/>
+      </a:accent1>
+      <a:accent2>
+        <a:srgbClr val="E97132"/>
+      </a:accent2>
+      <a:accent3>
+        <a:srgbClr val="196B24"/>
+      </a:accent3>
+      <a:accent4>
+        <a:srgbClr val="0F9ED5"/>
+      </a:accent4>
+      <a:accent5>
+        <a:srgbClr val="A02B93"/>
+      </a:accent5>
+      <a:accent6>
+        <a:srgbClr val="4EA72E"/>
+      </a:accent6>
+      <a:hlink>
+        <a:srgbClr val="467886"/>
+      </a:hlink>
+      <a:folHlink>
+        <a:srgbClr val="96607D"/>
+      </a:folHlink>
+    </a:clrScheme>
+    <a:fontScheme name="Office">
+      <a:majorFont>
+        <a:latin typeface="Calibri Light"/>
+        <a:ea typeface="Calibri Light"/>
+        <a:cs typeface="Calibri Light"/>
+      </a:majorFont>
+      <a:minorFont>
+        <a:latin typeface="Calibri"/>
+        <a:ea typeface="Calibri"/>
+        <a:cs typeface="Calibri"/>
+      </a:minorFont>
+    </a:fontScheme>
+    <a:fmtScheme name="ChatGPT">
+      <a:fillStyleLst>
+        <a:solidFill>
+          <a:schemeClr val="phClr"/>
+        </a:solidFill>
+        <a:gradFill>
+          <a:gsLst>
+            <a:gs pos="0">
+              <a:schemeClr val="phClr">
+                <a:tint val="67000"/>
+                <a:lumMod val="110000"/>
+                <a:satMod val="105000"/>
+              </a:schemeClr>
+            </a:gs>
+            <a:gs pos="50000">
+              <a:schemeClr val="phClr">
+                <a:tint val="73000"/>
+                <a:lumMod val="105000"/>
+                <a:satMod val="103000"/>
+              </a:schemeClr>
+            </a:gs>
+            <a:gs pos="100000">
+              <a:schemeClr val="phClr">
+                <a:tint val="81000"/>
+                <a:lumMod val="105000"/>
+                <a:satMod val="109000"/>
+              </a:schemeClr>
+            </a:gs>
+          </a:gsLst>
+          <a:lin ang="5400000" scaled="0"/>
+        </a:gradFill>
+        <a:gradFill>
+          <a:gsLst>
+            <a:gs pos="0">
+              <a:schemeClr val="phClr">
+                <a:tint val="94000"/>
+                <a:lumMod val="102000"/>
+                <a:satMod val="103000"/>
+              </a:schemeClr>
+            </a:gs>
+            <a:gs pos="50000">
+              <a:schemeClr val="phClr">
+                <a:shade val="100000"/>
+                <a:lumMod val="100000"/>
+                <a:satMod val="110000"/>
+              </a:schemeClr>
+            </a:gs>
+            <a:gs pos="100000">
+              <a:schemeClr val="phClr">
+                <a:shade val="78000"/>
+                <a:lumMod val="99000"/>
+                <a:satMod val="120000"/>
+              </a:schemeClr>
+            </a:gs>
+          </a:gsLst>
+          <a:lin ang="5400000" scaled="0"/>
+        </a:gradFill>
+      </a:fillStyleLst>
+      <a:lnStyleLst>
+        <a:ln w="12700">
+          <a:solidFill>
+            <a:schemeClr val="phClr"/>
+          </a:solidFill>
+          <a:prstDash val="solid"/>
+        </a:ln>
+        <a:ln w="19050">
+          <a:solidFill>
+            <a:schemeClr val="phClr"/>
+          </a:solidFill>
+          <a:prstDash val="solid"/>
+        </a:ln>
+        <a:ln w="25400">
+          <a:solidFill>
+            <a:schemeClr val="phClr"/>
+          </a:solidFill>
+          <a:prstDash val="solid"/>
+        </a:ln>
+      </a:lnStyleLst>
+      <a:effectStyleLst>
+        <a:effectStyle>
+          <a:effectLst/>
+        </a:effectStyle>
+        <a:effectStyle>
+          <a:effectLst/>
+        </a:effectStyle>
+        <a:effectStyle>
+          <a:effectLst>
+            <a:outerShdw blurRad="57150" dist="19050" dir="5400000">
+              <a:srgbClr val="000000">
+                <a:alpha val="16000"/>
+              </a:srgbClr>
+            </a:outerShdw>
+          </a:effectLst>
+        </a:effectStyle>
+        <a:effectStyle>
+          <a:effectLst>
+            <a:outerShdw blurRad="19050" dist="9525" dir="5400000">
+              <a:srgbClr val="000000">
+                <a:alpha val="6000"/>
+              </a:srgbClr>
+            </a:outerShdw>
+          </a:effectLst>
+        </a:effectStyle>
+        <a:effectStyle>
+          <a:effectLst>
+            <a:outerShdw blurRad="28575" dist="9525" dir="5400000">
+              <a:srgbClr val="000000">
+                <a:alpha val="8000"/>
+              </a:srgbClr>
+            </a:outerShdw>
+          </a:effectLst>
+        </a:effectStyle>
+        <a:effectStyle>
+          <a:effectLst>
+            <a:outerShdw blurRad="57150" dist="19050" dir="5400000">
+              <a:srgbClr val="000000">
+                <a:alpha val="10000"/>
+              </a:srgbClr>
+            </a:outerShdw>
+          </a:effectLst>
+        </a:effectStyle>
+        <a:effectStyle>
+          <a:effectLst>
+            <a:outerShdw blurRad="114300" dist="38100" dir="5400000">
+              <a:srgbClr val="000000">
+                <a:alpha val="12000"/>
+              </a:srgbClr>
+            </a:outerShdw>
+          </a:effectLst>
+        </a:effectStyle>
+        <a:effectStyle>
+          <a:effectLst>
+            <a:outerShdw blurRad="171450" dist="57150" dir="5400000">
+              <a:srgbClr val="000000">
+                <a:alpha val="16000"/>
+              </a:srgbClr>
+            </a:outerShdw>
+          </a:effectLst>
+        </a:effectStyle>
+        <a:effectStyle>
+          <a:effectLst>
+            <a:outerShdw blurRad="266700" dist="95250" dir="5400000">
+              <a:srgbClr val="000000">
+                <a:alpha val="24000"/>
+              </a:srgbClr>
+            </a:outerShdw>
+          </a:effectLst>
+        </a:effectStyle>
+      </a:effectStyleLst>
+      <a:bgFillStyleLst>
+        <a:solidFill>
+          <a:schemeClr val="phClr"/>
+        </a:solidFill>
+        <a:solidFill>
+          <a:schemeClr val="phClr">
+            <a:tint val="95000"/>
+            <a:satMod val="170000"/>
+          </a:schemeClr>
+        </a:solidFill>
+        <a:gradFill>
+          <a:gsLst>
+            <a:gs pos="0">
+              <a:schemeClr val="phClr">
+                <a:tint val="93000"/>
+                <a:shade val="98000"/>
+                <a:lumMod val="102000"/>
+                <a:satMod val="150000"/>
+              </a:schemeClr>
+            </a:gs>
+            <a:gs pos="50000">
+              <a:schemeClr val="phClr">
+                <a:tint val="98000"/>
+                <a:shade val="90000"/>
+                <a:lumMod val="103000"/>
+                <a:satMod val="130000"/>
+              </a:schemeClr>
+            </a:gs>
+            <a:gs pos="100000">
+              <a:schemeClr val="phClr">
+                <a:shade val="63000"/>
+                <a:satMod val="120000"/>
+              </a:schemeClr>
+            </a:gs>
+          </a:gsLst>
+          <a:lin ang="5400000" scaled="0"/>
+        </a:gradFill>
+      </a:bgFillStyleLst>
+    </a:fmtScheme>
+  </a:themeElements>
+  <a:objectDefaults/>
+  <a:extraClrSchemeLst/>
 </a:theme>
 </file>